--- a/lectures/week-05/index.pptx
+++ b/lectures/week-05/index.pptx
@@ -9,6 +9,7 @@
     <p:sldId id="257" r:id="rId3"/>
     <p:sldId id="258" r:id="rId4"/>
     <p:sldId id="259" r:id="rId5"/>
+    <p:sldId id="260" r:id="rId6"/>
   </p:sldIdLst>
   <p:sldSz cx="9144000" cy="5143500" type="screen16x9"/>
   <p:notesSz cx="6858000" cy="9144000"/>
@@ -3208,12 +3209,12 @@
       </p:grpSpPr>
       <p:sp>
         <p:nvSpPr>
-          <p:cNvPr id="2" name="Title 1"/>
-          <p:cNvSpPr>
-            <a:spLocks noGrp="1"/>
-          </p:cNvSpPr>
-          <p:nvPr>
-            <p:ph type="title"/>
+          <p:cNvPr id="3" name="Content Placeholder 2"/>
+          <p:cNvSpPr>
+            <a:spLocks noGrp="1"/>
+          </p:cNvSpPr>
+          <p:nvPr>
+            <p:ph idx="1"/>
           </p:nvPr>
         </p:nvSpPr>
         <p:spPr/>
@@ -3225,33 +3226,12 @@
               <a:buNone/>
             </a:pPr>
             <a:r>
+              <a:rPr b="1"/>
+              <a:t>Draft Material:</a:t>
+            </a:r>
+            <a:r>
               <a:rPr/>
-              <a:t>Coming Soon</a:t>
-            </a:r>
-          </a:p>
-        </p:txBody>
-      </p:sp>
-      <p:sp>
-        <p:nvSpPr>
-          <p:cNvPr id="3" name="Content Placeholder 2"/>
-          <p:cNvSpPr>
-            <a:spLocks noGrp="1"/>
-          </p:cNvSpPr>
-          <p:nvPr>
-            <p:ph idx="1"/>
-          </p:nvPr>
-        </p:nvSpPr>
-        <p:spPr/>
-        <p:txBody>
-          <a:bodyPr/>
-          <a:lstStyle/>
-          <a:p>
-            <a:pPr lvl="0" indent="0" marL="0">
-              <a:buNone/>
-            </a:pPr>
-            <a:r>
-              <a:rPr/>
-              <a:t>This lecture is under development.</a:t>
+              <a:t> This content is under development and subject to change.</a:t>
             </a:r>
           </a:p>
         </p:txBody>
@@ -3298,7 +3278,7 @@
             </a:pPr>
             <a:r>
               <a:rPr/>
-              <a:t>Prepare</a:t>
+              <a:t>Coming Soon</a:t>
             </a:r>
           </a:p>
         </p:txBody>
@@ -3323,23 +3303,7 @@
             </a:pPr>
             <a:r>
               <a:rPr/>
-              <a:t>Read about </a:t>
-            </a:r>
-            <a:r>
-              <a:rPr>
-                <a:hlinkClick r:id="rId2"/>
-              </a:rPr>
-              <a:t>VaR</a:t>
-            </a:r>
-            <a:r>
-              <a:rPr/>
-              <a:t> and </a:t>
-            </a:r>
-            <a:r>
-              <a:rPr>
-                <a:hlinkClick r:id="rId3"/>
-              </a:rPr>
-              <a:t>CVaR</a:t>
+              <a:t>This lecture is under development.</a:t>
             </a:r>
           </a:p>
         </p:txBody>
@@ -3350,6 +3314,94 @@
 </file>
 
 <file path=ppt/slides/slide4.xml><?xml version="1.0" encoding="utf-8"?>
+<p:sld xmlns:a="http://schemas.openxmlformats.org/drawingml/2006/main" xmlns:r="http://schemas.openxmlformats.org/officeDocument/2006/relationships" xmlns:p="http://schemas.openxmlformats.org/presentationml/2006/main">
+  <p:cSld>
+    <p:spTree>
+      <p:nvGrpSpPr>
+        <p:cNvPr id="1" name=""/>
+        <p:cNvGrpSpPr/>
+        <p:nvPr/>
+      </p:nvGrpSpPr>
+      <p:grpSpPr>
+        <a:xfrm>
+          <a:off x="0" y="0"/>
+          <a:ext cx="0" cy="0"/>
+          <a:chOff x="0" y="0"/>
+          <a:chExt cx="0" cy="0"/>
+        </a:xfrm>
+      </p:grpSpPr>
+      <p:sp>
+        <p:nvSpPr>
+          <p:cNvPr id="2" name="Title 1"/>
+          <p:cNvSpPr>
+            <a:spLocks noGrp="1"/>
+          </p:cNvSpPr>
+          <p:nvPr>
+            <p:ph type="title"/>
+          </p:nvPr>
+        </p:nvSpPr>
+        <p:spPr/>
+        <p:txBody>
+          <a:bodyPr/>
+          <a:lstStyle/>
+          <a:p>
+            <a:pPr lvl="0" indent="0" marL="0">
+              <a:buNone/>
+            </a:pPr>
+            <a:r>
+              <a:rPr/>
+              <a:t>Prepare</a:t>
+            </a:r>
+          </a:p>
+        </p:txBody>
+      </p:sp>
+      <p:sp>
+        <p:nvSpPr>
+          <p:cNvPr id="3" name="Content Placeholder 2"/>
+          <p:cNvSpPr>
+            <a:spLocks noGrp="1"/>
+          </p:cNvSpPr>
+          <p:nvPr>
+            <p:ph idx="1"/>
+          </p:nvPr>
+        </p:nvSpPr>
+        <p:spPr/>
+        <p:txBody>
+          <a:bodyPr/>
+          <a:lstStyle/>
+          <a:p>
+            <a:pPr lvl="0" indent="0" marL="0">
+              <a:buNone/>
+            </a:pPr>
+            <a:r>
+              <a:rPr/>
+              <a:t>Read about </a:t>
+            </a:r>
+            <a:r>
+              <a:rPr>
+                <a:hlinkClick r:id="rId2"/>
+              </a:rPr>
+              <a:t>VaR</a:t>
+            </a:r>
+            <a:r>
+              <a:rPr/>
+              <a:t> and </a:t>
+            </a:r>
+            <a:r>
+              <a:rPr>
+                <a:hlinkClick r:id="rId3"/>
+              </a:rPr>
+              <a:t>CVaR</a:t>
+            </a:r>
+          </a:p>
+        </p:txBody>
+      </p:sp>
+    </p:spTree>
+  </p:cSld>
+</p:sld>
+</file>
+
+<file path=ppt/slides/slide5.xml><?xml version="1.0" encoding="utf-8"?>
 <p:sld xmlns:a="http://schemas.openxmlformats.org/drawingml/2006/main" xmlns:r="http://schemas.openxmlformats.org/officeDocument/2006/relationships" xmlns:p="http://schemas.openxmlformats.org/presentationml/2006/main">
   <p:cSld>
     <p:spTree>

--- a/lectures/week-05/index.pptx
+++ b/lectures/week-05/index.pptx
@@ -3119,7 +3119,7 @@
             </a:pPr>
             <a:r>
               <a:rPr/>
-              <a:t>Risk Metrics (EAD, VaR, CVaR)</a:t>
+              <a:t>Optimal Static Decisions</a:t>
             </a:r>
           </a:p>
         </p:txBody>
@@ -3278,7 +3278,7 @@
             </a:pPr>
             <a:r>
               <a:rPr/>
-              <a:t>Coming Soon</a:t>
+              <a:t>Preparation</a:t>
             </a:r>
           </a:p>
         </p:txBody>
@@ -3303,7 +3303,7 @@
             </a:pPr>
             <a:r>
               <a:rPr/>
-              <a:t>This lecture is under development.</a:t>
+              <a:t>Read a part of van Dantzig (1956) and then we will revisit it in the reading</a:t>
             </a:r>
           </a:p>
         </p:txBody>
@@ -3350,7 +3350,7 @@
             </a:pPr>
             <a:r>
               <a:rPr/>
-              <a:t>Prepare</a:t>
+              <a:t>Coming Soon</a:t>
             </a:r>
           </a:p>
         </p:txBody>
@@ -3375,23 +3375,7 @@
             </a:pPr>
             <a:r>
               <a:rPr/>
-              <a:t>Read about </a:t>
-            </a:r>
-            <a:r>
-              <a:rPr>
-                <a:hlinkClick r:id="rId2"/>
-              </a:rPr>
-              <a:t>VaR</a:t>
-            </a:r>
-            <a:r>
-              <a:rPr/>
-              <a:t> and </a:t>
-            </a:r>
-            <a:r>
-              <a:rPr>
-                <a:hlinkClick r:id="rId3"/>
-              </a:rPr>
-              <a:t>CVaR</a:t>
+              <a:t>This lecture is under development.</a:t>
             </a:r>
           </a:p>
         </p:txBody>
@@ -3439,6 +3423,49 @@
             <a:r>
               <a:rPr/>
               <a:t>References</a:t>
+            </a:r>
+          </a:p>
+        </p:txBody>
+      </p:sp>
+      <p:sp>
+        <p:nvSpPr>
+          <p:cNvPr id="3" name="Content Placeholder 2"/>
+          <p:cNvSpPr>
+            <a:spLocks noGrp="1"/>
+          </p:cNvSpPr>
+          <p:nvPr>
+            <p:ph idx="1"/>
+          </p:nvPr>
+        </p:nvSpPr>
+        <p:spPr/>
+        <p:txBody>
+          <a:bodyPr/>
+          <a:lstStyle/>
+          <a:p>
+            <a:pPr lvl="0" indent="0" marL="0">
+              <a:buNone/>
+            </a:pPr>
+            <a:r>
+              <a:rPr/>
+              <a:t>Dantzig, D. van. 1956. “Economic Decision Problems for Flood Prevention.” </a:t>
+            </a:r>
+            <a:r>
+              <a:rPr i="1"/>
+              <a:t>Econometrica</a:t>
+            </a:r>
+            <a:r>
+              <a:rPr/>
+              <a:t> 24 (3): 276–87. </a:t>
+            </a:r>
+            <a:r>
+              <a:rPr>
+                <a:hlinkClick r:id="rId2"/>
+              </a:rPr>
+              <a:t>https://doi.org/10.2307/1911632</a:t>
+            </a:r>
+            <a:r>
+              <a:rPr/>
+              <a:t>.</a:t>
             </a:r>
           </a:p>
         </p:txBody>

--- a/lectures/week-05/index.pptx
+++ b/lectures/week-05/index.pptx
@@ -4,12 +4,21 @@
   <p:sldMasterIdLst>
     <p:sldMasterId id="2147483648" r:id="rId1"/>
   </p:sldMasterIdLst>
+  <p:notesMasterIdLst>
+    <p:notesMasterId r:id="rId13"/>
+  </p:notesMasterIdLst>
   <p:sldIdLst>
     <p:sldId id="256" r:id="rId2"/>
     <p:sldId id="257" r:id="rId3"/>
     <p:sldId id="258" r:id="rId4"/>
     <p:sldId id="259" r:id="rId5"/>
     <p:sldId id="260" r:id="rId6"/>
+    <p:sldId id="261" r:id="rId7"/>
+    <p:sldId id="262" r:id="rId8"/>
+    <p:sldId id="263" r:id="rId9"/>
+    <p:sldId id="264" r:id="rId10"/>
+    <p:sldId id="265" r:id="rId11"/>
+    <p:sldId id="266" r:id="rId12"/>
   </p:sldIdLst>
   <p:sldSz cx="9144000" cy="5143500" type="screen16x9"/>
   <p:notesSz cx="6858000" cy="9144000"/>
@@ -125,6 +134,1371 @@
     </p:ext>
   </p:extLst>
 </p:presentation>
+</file>
+
+<file path=ppt/notesMasters/notesMaster1.xml><?xml version="1.0" encoding="utf-8"?>
+<p:notesMaster xmlns:a="http://schemas.openxmlformats.org/drawingml/2006/main" xmlns:r="http://schemas.openxmlformats.org/officeDocument/2006/relationships" xmlns:p="http://schemas.openxmlformats.org/presentationml/2006/main">
+  <p:cSld>
+    <p:bg>
+      <p:bgRef idx="1001">
+        <a:schemeClr val="bg1"/>
+      </p:bgRef>
+    </p:bg>
+    <p:spTree>
+      <p:nvGrpSpPr>
+        <p:cNvPr id="1" name=""/>
+        <p:cNvGrpSpPr/>
+        <p:nvPr/>
+      </p:nvGrpSpPr>
+      <p:grpSpPr>
+        <a:xfrm>
+          <a:off x="0" y="0"/>
+          <a:ext cx="0" cy="0"/>
+          <a:chOff x="0" y="0"/>
+          <a:chExt cx="0" cy="0"/>
+        </a:xfrm>
+      </p:grpSpPr>
+      <p:sp>
+        <p:nvSpPr>
+          <p:cNvPr id="2" name="Header Placeholder 1"/>
+          <p:cNvSpPr>
+            <a:spLocks noGrp="1"/>
+          </p:cNvSpPr>
+          <p:nvPr>
+            <p:ph type="hdr" sz="quarter"/>
+          </p:nvPr>
+        </p:nvSpPr>
+        <p:spPr>
+          <a:xfrm>
+            <a:off x="0" y="0"/>
+            <a:ext cx="2971800" cy="458788"/>
+          </a:xfrm>
+          <a:prstGeom prst="rect">
+            <a:avLst/>
+          </a:prstGeom>
+        </p:spPr>
+        <p:txBody>
+          <a:bodyPr vert="horz" lIns="91440" tIns="45720" rIns="91440" bIns="45720" rtlCol="0"/>
+          <a:lstStyle>
+            <a:lvl1pPr algn="l">
+              <a:defRPr sz="1200"/>
+            </a:lvl1pPr>
+          </a:lstStyle>
+          <a:p>
+            <a:endParaRPr lang="en-US"/>
+          </a:p>
+        </p:txBody>
+      </p:sp>
+      <p:sp>
+        <p:nvSpPr>
+          <p:cNvPr id="3" name="Date Placeholder 2"/>
+          <p:cNvSpPr>
+            <a:spLocks noGrp="1"/>
+          </p:cNvSpPr>
+          <p:nvPr>
+            <p:ph type="dt" idx="1"/>
+          </p:nvPr>
+        </p:nvSpPr>
+        <p:spPr>
+          <a:xfrm>
+            <a:off x="3884613" y="0"/>
+            <a:ext cx="2971800" cy="458788"/>
+          </a:xfrm>
+          <a:prstGeom prst="rect">
+            <a:avLst/>
+          </a:prstGeom>
+        </p:spPr>
+        <p:txBody>
+          <a:bodyPr vert="horz" lIns="91440" tIns="45720" rIns="91440" bIns="45720" rtlCol="0"/>
+          <a:lstStyle>
+            <a:lvl1pPr algn="r">
+              <a:defRPr sz="1200"/>
+            </a:lvl1pPr>
+          </a:lstStyle>
+          <a:p>
+            <a:fld id="{0F9C1CCF-B725-44A7-AA57-5E433BD85C9F}" type="datetimeFigureOut">
+              <a:rPr lang="en-US" smtClean="0"/>
+              <a:t>1/2/22</a:t>
+            </a:fld>
+            <a:endParaRPr lang="en-US"/>
+          </a:p>
+        </p:txBody>
+      </p:sp>
+      <p:sp>
+        <p:nvSpPr>
+          <p:cNvPr id="4" name="Slide Image Placeholder 3"/>
+          <p:cNvSpPr>
+            <a:spLocks noGrp="1" noRot="1" noChangeAspect="1"/>
+          </p:cNvSpPr>
+          <p:nvPr>
+            <p:ph type="sldImg" idx="2"/>
+          </p:nvPr>
+        </p:nvSpPr>
+        <p:spPr>
+          <a:xfrm>
+            <a:off x="685800" y="1143000"/>
+            <a:ext cx="5486400" cy="3086100"/>
+          </a:xfrm>
+          <a:prstGeom prst="rect">
+            <a:avLst/>
+          </a:prstGeom>
+          <a:noFill/>
+          <a:ln w="12700">
+            <a:solidFill>
+              <a:prstClr val="black"/>
+            </a:solidFill>
+          </a:ln>
+        </p:spPr>
+        <p:txBody>
+          <a:bodyPr vert="horz" lIns="91440" tIns="45720" rIns="91440" bIns="45720" rtlCol="0" anchor="ctr"/>
+          <a:lstStyle/>
+          <a:p>
+            <a:endParaRPr lang="en-US"/>
+          </a:p>
+        </p:txBody>
+      </p:sp>
+      <p:sp>
+        <p:nvSpPr>
+          <p:cNvPr id="5" name="Notes Placeholder 4"/>
+          <p:cNvSpPr>
+            <a:spLocks noGrp="1"/>
+          </p:cNvSpPr>
+          <p:nvPr>
+            <p:ph type="body" sz="quarter" idx="3"/>
+          </p:nvPr>
+        </p:nvSpPr>
+        <p:spPr>
+          <a:xfrm>
+            <a:off x="685800" y="4400550"/>
+            <a:ext cx="5486400" cy="3600450"/>
+          </a:xfrm>
+          <a:prstGeom prst="rect">
+            <a:avLst/>
+          </a:prstGeom>
+        </p:spPr>
+        <p:txBody>
+          <a:bodyPr vert="horz" lIns="91440" tIns="45720" rIns="91440" bIns="45720" rtlCol="0"/>
+          <a:lstStyle/>
+          <a:p>
+            <a:pPr lvl="0"/>
+            <a:r>
+              <a:rPr lang="en-US"/>
+              <a:t>Click to edit Master text styles</a:t>
+            </a:r>
+          </a:p>
+          <a:p>
+            <a:pPr lvl="1"/>
+            <a:r>
+              <a:rPr lang="en-US"/>
+              <a:t>Second level</a:t>
+            </a:r>
+          </a:p>
+          <a:p>
+            <a:pPr lvl="2"/>
+            <a:r>
+              <a:rPr lang="en-US"/>
+              <a:t>Third level</a:t>
+            </a:r>
+          </a:p>
+          <a:p>
+            <a:pPr lvl="3"/>
+            <a:r>
+              <a:rPr lang="en-US"/>
+              <a:t>Fourth level</a:t>
+            </a:r>
+          </a:p>
+          <a:p>
+            <a:pPr lvl="4"/>
+            <a:r>
+              <a:rPr lang="en-US"/>
+              <a:t>Fifth level</a:t>
+            </a:r>
+          </a:p>
+        </p:txBody>
+      </p:sp>
+      <p:sp>
+        <p:nvSpPr>
+          <p:cNvPr id="6" name="Footer Placeholder 5"/>
+          <p:cNvSpPr>
+            <a:spLocks noGrp="1"/>
+          </p:cNvSpPr>
+          <p:nvPr>
+            <p:ph type="ftr" sz="quarter" idx="4"/>
+          </p:nvPr>
+        </p:nvSpPr>
+        <p:spPr>
+          <a:xfrm>
+            <a:off x="0" y="8685213"/>
+            <a:ext cx="2971800" cy="458787"/>
+          </a:xfrm>
+          <a:prstGeom prst="rect">
+            <a:avLst/>
+          </a:prstGeom>
+        </p:spPr>
+        <p:txBody>
+          <a:bodyPr vert="horz" lIns="91440" tIns="45720" rIns="91440" bIns="45720" rtlCol="0" anchor="b"/>
+          <a:lstStyle>
+            <a:lvl1pPr algn="l">
+              <a:defRPr sz="1200"/>
+            </a:lvl1pPr>
+          </a:lstStyle>
+          <a:p>
+            <a:endParaRPr lang="en-US"/>
+          </a:p>
+        </p:txBody>
+      </p:sp>
+      <p:sp>
+        <p:nvSpPr>
+          <p:cNvPr id="7" name="Slide Number Placeholder 6"/>
+          <p:cNvSpPr>
+            <a:spLocks noGrp="1"/>
+          </p:cNvSpPr>
+          <p:nvPr>
+            <p:ph type="sldNum" sz="quarter" idx="5"/>
+          </p:nvPr>
+        </p:nvSpPr>
+        <p:spPr>
+          <a:xfrm>
+            <a:off x="3884613" y="8685213"/>
+            <a:ext cx="2971800" cy="458787"/>
+          </a:xfrm>
+          <a:prstGeom prst="rect">
+            <a:avLst/>
+          </a:prstGeom>
+        </p:spPr>
+        <p:txBody>
+          <a:bodyPr vert="horz" lIns="91440" tIns="45720" rIns="91440" bIns="45720" rtlCol="0" anchor="b"/>
+          <a:lstStyle>
+            <a:lvl1pPr algn="r">
+              <a:defRPr sz="1200"/>
+            </a:lvl1pPr>
+          </a:lstStyle>
+          <a:p>
+            <a:fld id="{18BDFEC3-8487-43E8-A154-7C12CBC1FFF2}" type="slidenum">
+              <a:rPr lang="en-US" smtClean="0"/>
+              <a:t>‹#›</a:t>
+            </a:fld>
+            <a:endParaRPr lang="en-US"/>
+          </a:p>
+        </p:txBody>
+      </p:sp>
+    </p:spTree>
+    <p:extLst>
+      <p:ext uri="{BB962C8B-B14F-4D97-AF65-F5344CB8AC3E}">
+        <p14:creationId xmlns:p14="http://schemas.microsoft.com/office/powerpoint/2010/main" val="3782709779"/>
+      </p:ext>
+    </p:extLst>
+  </p:cSld>
+  <p:clrMap bg1="lt1" tx1="dk1" bg2="lt2" tx2="dk2" accent1="accent1" accent2="accent2" accent3="accent3" accent4="accent4" accent5="accent5" accent6="accent6" hlink="hlink" folHlink="folHlink"/>
+  <p:notesStyle>
+    <a:lvl1pPr marL="0" algn="l" defTabSz="914400" rtl="0" eaLnBrk="1" latinLnBrk="0" hangingPunct="1">
+      <a:defRPr sz="1200" kern="1200">
+        <a:solidFill>
+          <a:schemeClr val="tx1"/>
+        </a:solidFill>
+        <a:latin typeface="+mn-lt"/>
+        <a:ea typeface="+mn-ea"/>
+        <a:cs typeface="+mn-cs"/>
+      </a:defRPr>
+    </a:lvl1pPr>
+    <a:lvl2pPr marL="457200" algn="l" defTabSz="914400" rtl="0" eaLnBrk="1" latinLnBrk="0" hangingPunct="1">
+      <a:defRPr sz="1200" kern="1200">
+        <a:solidFill>
+          <a:schemeClr val="tx1"/>
+        </a:solidFill>
+        <a:latin typeface="+mn-lt"/>
+        <a:ea typeface="+mn-ea"/>
+        <a:cs typeface="+mn-cs"/>
+      </a:defRPr>
+    </a:lvl2pPr>
+    <a:lvl3pPr marL="914400" algn="l" defTabSz="914400" rtl="0" eaLnBrk="1" latinLnBrk="0" hangingPunct="1">
+      <a:defRPr sz="1200" kern="1200">
+        <a:solidFill>
+          <a:schemeClr val="tx1"/>
+        </a:solidFill>
+        <a:latin typeface="+mn-lt"/>
+        <a:ea typeface="+mn-ea"/>
+        <a:cs typeface="+mn-cs"/>
+      </a:defRPr>
+    </a:lvl3pPr>
+    <a:lvl4pPr marL="1371600" algn="l" defTabSz="914400" rtl="0" eaLnBrk="1" latinLnBrk="0" hangingPunct="1">
+      <a:defRPr sz="1200" kern="1200">
+        <a:solidFill>
+          <a:schemeClr val="tx1"/>
+        </a:solidFill>
+        <a:latin typeface="+mn-lt"/>
+        <a:ea typeface="+mn-ea"/>
+        <a:cs typeface="+mn-cs"/>
+      </a:defRPr>
+    </a:lvl4pPr>
+    <a:lvl5pPr marL="1828800" algn="l" defTabSz="914400" rtl="0" eaLnBrk="1" latinLnBrk="0" hangingPunct="1">
+      <a:defRPr sz="1200" kern="1200">
+        <a:solidFill>
+          <a:schemeClr val="tx1"/>
+        </a:solidFill>
+        <a:latin typeface="+mn-lt"/>
+        <a:ea typeface="+mn-ea"/>
+        <a:cs typeface="+mn-cs"/>
+      </a:defRPr>
+    </a:lvl5pPr>
+    <a:lvl6pPr marL="2286000" algn="l" defTabSz="914400" rtl="0" eaLnBrk="1" latinLnBrk="0" hangingPunct="1">
+      <a:defRPr sz="1200" kern="1200">
+        <a:solidFill>
+          <a:schemeClr val="tx1"/>
+        </a:solidFill>
+        <a:latin typeface="+mn-lt"/>
+        <a:ea typeface="+mn-ea"/>
+        <a:cs typeface="+mn-cs"/>
+      </a:defRPr>
+    </a:lvl6pPr>
+    <a:lvl7pPr marL="2743200" algn="l" defTabSz="914400" rtl="0" eaLnBrk="1" latinLnBrk="0" hangingPunct="1">
+      <a:defRPr sz="1200" kern="1200">
+        <a:solidFill>
+          <a:schemeClr val="tx1"/>
+        </a:solidFill>
+        <a:latin typeface="+mn-lt"/>
+        <a:ea typeface="+mn-ea"/>
+        <a:cs typeface="+mn-cs"/>
+      </a:defRPr>
+    </a:lvl7pPr>
+    <a:lvl8pPr marL="3200400" algn="l" defTabSz="914400" rtl="0" eaLnBrk="1" latinLnBrk="0" hangingPunct="1">
+      <a:defRPr sz="1200" kern="1200">
+        <a:solidFill>
+          <a:schemeClr val="tx1"/>
+        </a:solidFill>
+        <a:latin typeface="+mn-lt"/>
+        <a:ea typeface="+mn-ea"/>
+        <a:cs typeface="+mn-cs"/>
+      </a:defRPr>
+    </a:lvl8pPr>
+    <a:lvl9pPr marL="3657600" algn="l" defTabSz="914400" rtl="0" eaLnBrk="1" latinLnBrk="0" hangingPunct="1">
+      <a:defRPr sz="1200" kern="1200">
+        <a:solidFill>
+          <a:schemeClr val="tx1"/>
+        </a:solidFill>
+        <a:latin typeface="+mn-lt"/>
+        <a:ea typeface="+mn-ea"/>
+        <a:cs typeface="+mn-cs"/>
+      </a:defRPr>
+    </a:lvl9pPr>
+  </p:notesStyle>
+</p:notesMaster>
+</file>
+
+<file path=ppt/notesSlides/notesSlide1.xml><?xml version="1.0" encoding="utf-8"?>
+<p:notes xmlns:a="http://schemas.openxmlformats.org/drawingml/2006/main" xmlns:r="http://schemas.openxmlformats.org/officeDocument/2006/relationships" xmlns:p="http://schemas.openxmlformats.org/presentationml/2006/main">
+  <p:cSld>
+    <p:spTree>
+      <p:nvGrpSpPr>
+        <p:cNvPr id="1" name=""/>
+        <p:cNvGrpSpPr/>
+        <p:nvPr/>
+      </p:nvGrpSpPr>
+      <p:grpSpPr>
+        <a:xfrm>
+          <a:off x="0" y="0"/>
+          <a:ext cx="0" cy="0"/>
+          <a:chOff x="0" y="0"/>
+          <a:chExt cx="0" cy="0"/>
+        </a:xfrm>
+      </p:grpSpPr>
+      <p:sp>
+        <p:nvSpPr>
+          <p:cNvPr id="2" name="Slide Image Placeholder 1"/>
+          <p:cNvSpPr>
+            <a:spLocks noGrp="1" noRot="1" noChangeAspect="1"/>
+          </p:cNvSpPr>
+          <p:nvPr>
+            <p:ph type="sldImg"/>
+          </p:nvPr>
+        </p:nvSpPr>
+        <p:spPr/>
+      </p:sp>
+      <p:sp>
+        <p:nvSpPr>
+          <p:cNvPr id="3" name="Notes Placeholder 2"/>
+          <p:cNvSpPr>
+            <a:spLocks noGrp="1"/>
+          </p:cNvSpPr>
+          <p:nvPr>
+            <p:ph type="body" idx="1"/>
+          </p:nvPr>
+        </p:nvSpPr>
+        <p:spPr/>
+        <p:txBody>
+          <a:bodyPr/>
+          <a:lstStyle/>
+          <a:p>
+            <a:pPr lvl="0" indent="0" marL="0">
+              <a:buNone/>
+            </a:pPr>
+            <a:r>
+              <a:rPr/>
+              <a:t>Target: 1:00. Open with the hook — get students thinking about a concrete decision before introducing formalism.</a:t>
+            </a:r>
+          </a:p>
+          <a:p>
+            <a:pPr lvl="0" indent="0" marL="0">
+              <a:buNone/>
+            </a:pPr>
+          </a:p>
+          <a:p>
+            <a:pPr lvl="0" indent="0" marL="0">
+              <a:buNone/>
+            </a:pPr>
+            <a:r>
+              <a:rPr/>
+              <a:t>Target: 1:02. Pause for a few hands. Cold call 1-2 students for their gut reaction. Key point: students will have intuitions, but we need a systematic framework.</a:t>
+            </a:r>
+          </a:p>
+          <a:p>
+            <a:pPr lvl="0" indent="0" marL="0">
+              <a:buNone/>
+            </a:pPr>
+          </a:p>
+          <a:p>
+            <a:pPr lvl="0" indent="0" marL="0">
+              <a:buNone/>
+            </a:pPr>
+            <a:r>
+              <a:rPr/>
+              <a:t>Target: 1:05. This list motivates each piece of the BCA framework we’ll develop.</a:t>
+            </a:r>
+          </a:p>
+        </p:txBody>
+      </p:sp>
+      <p:sp>
+        <p:nvSpPr>
+          <p:cNvPr id="4" name="Slide Number Placeholder 3"/>
+          <p:cNvSpPr>
+            <a:spLocks noGrp="1"/>
+          </p:cNvSpPr>
+          <p:nvPr>
+            <p:ph type="sldNum" sz="quarter" idx="10"/>
+          </p:nvPr>
+        </p:nvSpPr>
+        <p:spPr/>
+        <p:txBody>
+          <a:bodyPr/>
+          <a:lstStyle/>
+          <a:p>
+            <a:fld id="{18BDFEC3-8487-43E8-A154-7C12CBC1FFF2}" type="slidenum">
+              <a:rPr lang="en-US"/>
+              <a:t>3</a:t>
+            </a:fld>
+            <a:endParaRPr lang="en-US"/>
+          </a:p>
+        </p:txBody>
+      </p:sp>
+    </p:spTree>
+  </p:cSld>
+</p:notes>
+</file>
+
+<file path=ppt/notesSlides/notesSlide2.xml><?xml version="1.0" encoding="utf-8"?>
+<p:notes xmlns:a="http://schemas.openxmlformats.org/drawingml/2006/main" xmlns:r="http://schemas.openxmlformats.org/officeDocument/2006/relationships" xmlns:p="http://schemas.openxmlformats.org/presentationml/2006/main">
+  <p:cSld>
+    <p:spTree>
+      <p:nvGrpSpPr>
+        <p:cNvPr id="1" name=""/>
+        <p:cNvGrpSpPr/>
+        <p:nvPr/>
+      </p:nvGrpSpPr>
+      <p:grpSpPr>
+        <a:xfrm>
+          <a:off x="0" y="0"/>
+          <a:ext cx="0" cy="0"/>
+          <a:chOff x="0" y="0"/>
+          <a:chExt cx="0" cy="0"/>
+        </a:xfrm>
+      </p:grpSpPr>
+      <p:sp>
+        <p:nvSpPr>
+          <p:cNvPr id="2" name="Slide Image Placeholder 1"/>
+          <p:cNvSpPr>
+            <a:spLocks noGrp="1" noRot="1" noChangeAspect="1"/>
+          </p:cNvSpPr>
+          <p:nvPr>
+            <p:ph type="sldImg"/>
+          </p:nvPr>
+        </p:nvSpPr>
+        <p:spPr/>
+      </p:sp>
+      <p:sp>
+        <p:nvSpPr>
+          <p:cNvPr id="3" name="Notes Placeholder 2"/>
+          <p:cNvSpPr>
+            <a:spLocks noGrp="1"/>
+          </p:cNvSpPr>
+          <p:nvPr>
+            <p:ph type="body" idx="1"/>
+          </p:nvPr>
+        </p:nvSpPr>
+        <p:spPr/>
+        <p:txBody>
+          <a:bodyPr/>
+          <a:lstStyle/>
+          <a:p>
+            <a:pPr lvl="0" indent="0" marL="0">
+              <a:buNone/>
+            </a:pPr>
+            <a:r>
+              <a:rPr/>
+              <a:t>Target: 1:08. Emphasize that “utility” is just a general term — could be called objective function, loss function, etc. The key idea is a function that takes a decision and an uncertain state and returns a number.</a:t>
+            </a:r>
+          </a:p>
+          <a:p>
+            <a:pPr lvl="0" indent="0" marL="0">
+              <a:buNone/>
+            </a:pPr>
+          </a:p>
+          <a:p>
+            <a:pPr lvl="0" indent="0" marL="0">
+              <a:buNone/>
+            </a:pPr>
+            <a:r>
+              <a:rPr/>
+              <a:t>Target: 1:10. The freedom to choose metrics is powerful but also means BCA is never “objective.” Every choice of what to measure is a choice about what matters.</a:t>
+            </a:r>
+          </a:p>
+          <a:p>
+            <a:pPr lvl="0" indent="0" marL="0">
+              <a:buNone/>
+            </a:pPr>
+          </a:p>
+          <a:p>
+            <a:pPr lvl="0" indent="0" marL="0">
+              <a:buNone/>
+            </a:pPr>
+            <a:r>
+              <a:rPr/>
+              <a:t>Target: 1:12. Transition to the harder question: what about things that are hard to monetize?</a:t>
+            </a:r>
+          </a:p>
+          <a:p>
+            <a:pPr lvl="0" indent="0" marL="0">
+              <a:buNone/>
+            </a:pPr>
+          </a:p>
+          <a:p>
+            <a:pPr lvl="0" indent="0" marL="0">
+              <a:buNone/>
+            </a:pPr>
+            <a:r>
+              <a:rPr/>
+              <a:t>Target: 1:14. Opportunity cost is the economist’s main tool for monetizing non-market goods. It’s useful but imperfect — the “but are they really substitutes?” question is genuine and unresolved.</a:t>
+            </a:r>
+          </a:p>
+          <a:p>
+            <a:pPr lvl="0" indent="0" marL="0">
+              <a:buNone/>
+            </a:pPr>
+          </a:p>
+          <a:p>
+            <a:pPr lvl="0" indent="0" marL="0">
+              <a:buNone/>
+            </a:pPr>
+            <a:r>
+              <a:rPr/>
+              <a:t>Target: 1:16. Key example: $1,000 means a lot more to someone earning $30K/year than to someone earning $300K/year. This matters because BCA typically ignores </a:t>
+            </a:r>
+            <a:r>
+              <a:rPr i="1"/>
+              <a:t>who</a:t>
+            </a:r>
+            <a:r>
+              <a:rPr/>
+              <a:t> bears the costs and benefits.</a:t>
+            </a:r>
+          </a:p>
+          <a:p>
+            <a:pPr lvl="0" indent="0" marL="0">
+              <a:buNone/>
+            </a:pPr>
+          </a:p>
+          <a:p>
+            <a:pPr lvl="0" indent="0" marL="0">
+              <a:buNone/>
+            </a:pPr>
+            <a:r>
+              <a:rPr/>
+              <a:t>Target: 1:18. Don’t try to resolve this — just make sure students see that “total benefits &gt; total costs” is not the whole story. We’ll return to values and trade-offs in Week 9.</a:t>
+            </a:r>
+          </a:p>
+        </p:txBody>
+      </p:sp>
+      <p:sp>
+        <p:nvSpPr>
+          <p:cNvPr id="4" name="Slide Number Placeholder 3"/>
+          <p:cNvSpPr>
+            <a:spLocks noGrp="1"/>
+          </p:cNvSpPr>
+          <p:nvPr>
+            <p:ph type="sldNum" sz="quarter" idx="10"/>
+          </p:nvPr>
+        </p:nvSpPr>
+        <p:spPr/>
+        <p:txBody>
+          <a:bodyPr/>
+          <a:lstStyle/>
+          <a:p>
+            <a:fld id="{18BDFEC3-8487-43E8-A154-7C12CBC1FFF2}" type="slidenum">
+              <a:rPr lang="en-US"/>
+              <a:t>4</a:t>
+            </a:fld>
+            <a:endParaRPr lang="en-US"/>
+          </a:p>
+        </p:txBody>
+      </p:sp>
+    </p:spTree>
+  </p:cSld>
+</p:notes>
+</file>
+
+<file path=ppt/notesSlides/notesSlide3.xml><?xml version="1.0" encoding="utf-8"?>
+<p:notes xmlns:a="http://schemas.openxmlformats.org/drawingml/2006/main" xmlns:r="http://schemas.openxmlformats.org/officeDocument/2006/relationships" xmlns:p="http://schemas.openxmlformats.org/presentationml/2006/main">
+  <p:cSld>
+    <p:spTree>
+      <p:nvGrpSpPr>
+        <p:cNvPr id="1" name=""/>
+        <p:cNvGrpSpPr/>
+        <p:nvPr/>
+      </p:nvGrpSpPr>
+      <p:grpSpPr>
+        <a:xfrm>
+          <a:off x="0" y="0"/>
+          <a:ext cx="0" cy="0"/>
+          <a:chOff x="0" y="0"/>
+          <a:chExt cx="0" cy="0"/>
+        </a:xfrm>
+      </p:grpSpPr>
+      <p:sp>
+        <p:nvSpPr>
+          <p:cNvPr id="2" name="Slide Image Placeholder 1"/>
+          <p:cNvSpPr>
+            <a:spLocks noGrp="1" noRot="1" noChangeAspect="1"/>
+          </p:cNvSpPr>
+          <p:nvPr>
+            <p:ph type="sldImg"/>
+          </p:nvPr>
+        </p:nvSpPr>
+        <p:spPr/>
+      </p:sp>
+      <p:sp>
+        <p:nvSpPr>
+          <p:cNvPr id="3" name="Notes Placeholder 2"/>
+          <p:cNvSpPr>
+            <a:spLocks noGrp="1"/>
+          </p:cNvSpPr>
+          <p:nvPr>
+            <p:ph type="body" idx="1"/>
+          </p:nvPr>
+        </p:nvSpPr>
+        <p:spPr/>
+        <p:txBody>
+          <a:bodyPr/>
+          <a:lstStyle/>
+          <a:p>
+            <a:pPr lvl="0" indent="0" marL="0">
+              <a:buNone/>
+            </a:pPr>
+            <a:r>
+              <a:rPr/>
+              <a:t>Target: 1:21. Rhetorical question — transition to discounting.</a:t>
+            </a:r>
+          </a:p>
+          <a:p>
+            <a:pPr lvl="0" indent="0" marL="0">
+              <a:buNone/>
+            </a:pPr>
+          </a:p>
+          <a:p>
+            <a:pPr lvl="0" indent="0" marL="0">
+              <a:buNone/>
+            </a:pPr>
+            <a:r>
+              <a:rPr/>
+              <a:t>Target: 1:23. Write the formula on the board if possible. Emphasize that this is a </a:t>
+            </a:r>
+            <a:r>
+              <a:rPr i="1"/>
+              <a:t>choice</a:t>
+            </a:r>
+            <a:r>
+              <a:rPr/>
+              <a:t> — the discount rate is not a law of nature.</a:t>
+            </a:r>
+          </a:p>
+          <a:p>
+            <a:pPr lvl="0" indent="0" marL="0">
+              <a:buNone/>
+            </a:pPr>
+          </a:p>
+          <a:p>
+            <a:pPr lvl="0" indent="0" marL="0">
+              <a:buNone/>
+            </a:pPr>
+            <a:r>
+              <a:rPr/>
+              <a:t>Target: 1:25. Important to flag because students will encounter both conventions. Don’t spend too long here — just make sure they know to check.</a:t>
+            </a:r>
+          </a:p>
+          <a:p>
+            <a:pPr lvl="0" indent="0" marL="0">
+              <a:buNone/>
+            </a:pPr>
+          </a:p>
+          <a:p>
+            <a:pPr lvl="0" indent="0" marL="0">
+              <a:buNone/>
+            </a:pPr>
+            <a:r>
+              <a:rPr/>
+              <a:t>Target: 1:27. The jump from 2% to 7% is dramatic — this foreshadows why the discount rate debate matters so much. Ask: “Which discount rate should we use for climate policy?”</a:t>
+            </a:r>
+          </a:p>
+        </p:txBody>
+      </p:sp>
+      <p:sp>
+        <p:nvSpPr>
+          <p:cNvPr id="4" name="Slide Number Placeholder 3"/>
+          <p:cNvSpPr>
+            <a:spLocks noGrp="1"/>
+          </p:cNvSpPr>
+          <p:nvPr>
+            <p:ph type="sldNum" sz="quarter" idx="10"/>
+          </p:nvPr>
+        </p:nvSpPr>
+        <p:spPr/>
+        <p:txBody>
+          <a:bodyPr/>
+          <a:lstStyle/>
+          <a:p>
+            <a:fld id="{18BDFEC3-8487-43E8-A154-7C12CBC1FFF2}" type="slidenum">
+              <a:rPr lang="en-US"/>
+              <a:t>5</a:t>
+            </a:fld>
+            <a:endParaRPr lang="en-US"/>
+          </a:p>
+        </p:txBody>
+      </p:sp>
+    </p:spTree>
+  </p:cSld>
+</p:notes>
+</file>
+
+<file path=ppt/notesSlides/notesSlide4.xml><?xml version="1.0" encoding="utf-8"?>
+<p:notes xmlns:a="http://schemas.openxmlformats.org/drawingml/2006/main" xmlns:r="http://schemas.openxmlformats.org/officeDocument/2006/relationships" xmlns:p="http://schemas.openxmlformats.org/presentationml/2006/main">
+  <p:cSld>
+    <p:spTree>
+      <p:nvGrpSpPr>
+        <p:cNvPr id="1" name=""/>
+        <p:cNvGrpSpPr/>
+        <p:nvPr/>
+      </p:nvGrpSpPr>
+      <p:grpSpPr>
+        <a:xfrm>
+          <a:off x="0" y="0"/>
+          <a:ext cx="0" cy="0"/>
+          <a:chOff x="0" y="0"/>
+          <a:chExt cx="0" cy="0"/>
+        </a:xfrm>
+      </p:grpSpPr>
+      <p:sp>
+        <p:nvSpPr>
+          <p:cNvPr id="2" name="Slide Image Placeholder 1"/>
+          <p:cNvSpPr>
+            <a:spLocks noGrp="1" noRot="1" noChangeAspect="1"/>
+          </p:cNvSpPr>
+          <p:nvPr>
+            <p:ph type="sldImg"/>
+          </p:nvPr>
+        </p:nvSpPr>
+        <p:spPr/>
+      </p:sp>
+      <p:sp>
+        <p:nvSpPr>
+          <p:cNvPr id="3" name="Notes Placeholder 2"/>
+          <p:cNvSpPr>
+            <a:spLocks noGrp="1"/>
+          </p:cNvSpPr>
+          <p:nvPr>
+            <p:ph type="body" idx="1"/>
+          </p:nvPr>
+        </p:nvSpPr>
+        <p:spPr/>
+        <p:txBody>
+          <a:bodyPr/>
+          <a:lstStyle/>
+          <a:p>
+            <a:pPr lvl="0" indent="0" marL="0">
+              <a:buNone/>
+            </a:pPr>
+            <a:r>
+              <a:rPr/>
+              <a:t>Target: 1:29. This is how most BCA is actually done, especially outside of academic settings. Set up the critique.</a:t>
+            </a:r>
+          </a:p>
+          <a:p>
+            <a:pPr lvl="0" indent="0" marL="0">
+              <a:buNone/>
+            </a:pPr>
+          </a:p>
+          <a:p>
+            <a:pPr lvl="0" indent="0" marL="0">
+              <a:buNone/>
+            </a:pPr>
+            <a:r>
+              <a:rPr/>
+              <a:t>Target: 1:31. This connects to a core theme of the course: single-scenario analysis is brittle. Students will encounter this again in robustness and exploratory modeling.</a:t>
+            </a:r>
+          </a:p>
+          <a:p>
+            <a:pPr lvl="0" indent="0" marL="0">
+              <a:buNone/>
+            </a:pPr>
+          </a:p>
+          <a:p>
+            <a:pPr lvl="0" indent="0" marL="0">
+              <a:buNone/>
+            </a:pPr>
+            <a:r>
+              <a:rPr/>
+              <a:t>Target: 1:33. Connect to Monte Carlo from Week 4: “You already know how to compute expectations with samples!” NPV already sums over time; the expectation integrates over uncertainty.</a:t>
+            </a:r>
+          </a:p>
+          <a:p>
+            <a:pPr lvl="0" indent="0" marL="0">
+              <a:buNone/>
+            </a:pPr>
+          </a:p>
+          <a:p>
+            <a:pPr lvl="0" indent="0" marL="0">
+              <a:buNone/>
+            </a:pPr>
+            <a:r>
+              <a:rPr/>
+              <a:t>Target: 1:35. This makes the abstract formalism concrete. Students did exactly this in Lab 4. Emphasize: BCA + Monte Carlo = expected utility analysis.</a:t>
+            </a:r>
+          </a:p>
+          <a:p>
+            <a:pPr lvl="0" indent="0" marL="0">
+              <a:buNone/>
+            </a:pPr>
+          </a:p>
+          <a:p>
+            <a:pPr lvl="0" indent="0" marL="0">
+              <a:buNone/>
+            </a:pPr>
+            <a:r>
+              <a:rPr/>
+              <a:t>Target: 1:36. Pause here. Now let’s apply it.</a:t>
+            </a:r>
+          </a:p>
+        </p:txBody>
+      </p:sp>
+      <p:sp>
+        <p:nvSpPr>
+          <p:cNvPr id="4" name="Slide Number Placeholder 3"/>
+          <p:cNvSpPr>
+            <a:spLocks noGrp="1"/>
+          </p:cNvSpPr>
+          <p:nvPr>
+            <p:ph type="sldNum" sz="quarter" idx="10"/>
+          </p:nvPr>
+        </p:nvSpPr>
+        <p:spPr/>
+        <p:txBody>
+          <a:bodyPr/>
+          <a:lstStyle/>
+          <a:p>
+            <a:fld id="{18BDFEC3-8487-43E8-A154-7C12CBC1FFF2}" type="slidenum">
+              <a:rPr lang="en-US"/>
+              <a:t>6</a:t>
+            </a:fld>
+            <a:endParaRPr lang="en-US"/>
+          </a:p>
+        </p:txBody>
+      </p:sp>
+    </p:spTree>
+  </p:cSld>
+</p:notes>
+</file>
+
+<file path=ppt/notesSlides/notesSlide5.xml><?xml version="1.0" encoding="utf-8"?>
+<p:notes xmlns:a="http://schemas.openxmlformats.org/drawingml/2006/main" xmlns:r="http://schemas.openxmlformats.org/officeDocument/2006/relationships" xmlns:p="http://schemas.openxmlformats.org/presentationml/2006/main">
+  <p:cSld>
+    <p:spTree>
+      <p:nvGrpSpPr>
+        <p:cNvPr id="1" name=""/>
+        <p:cNvGrpSpPr/>
+        <p:nvPr/>
+      </p:nvGrpSpPr>
+      <p:grpSpPr>
+        <a:xfrm>
+          <a:off x="0" y="0"/>
+          <a:ext cx="0" cy="0"/>
+          <a:chOff x="0" y="0"/>
+          <a:chExt cx="0" cy="0"/>
+        </a:xfrm>
+      </p:grpSpPr>
+      <p:sp>
+        <p:nvSpPr>
+          <p:cNvPr id="2" name="Slide Image Placeholder 1"/>
+          <p:cNvSpPr>
+            <a:spLocks noGrp="1" noRot="1" noChangeAspect="1"/>
+          </p:cNvSpPr>
+          <p:nvPr>
+            <p:ph type="sldImg"/>
+          </p:nvPr>
+        </p:nvSpPr>
+        <p:spPr/>
+      </p:sp>
+      <p:sp>
+        <p:nvSpPr>
+          <p:cNvPr id="3" name="Notes Placeholder 2"/>
+          <p:cNvSpPr>
+            <a:spLocks noGrp="1"/>
+          </p:cNvSpPr>
+          <p:nvPr>
+            <p:ph type="body" idx="1"/>
+          </p:nvPr>
+        </p:nvSpPr>
+        <p:spPr/>
+        <p:txBody>
+          <a:bodyPr/>
+          <a:lstStyle/>
+          <a:p>
+            <a:pPr lvl="0" indent="0" marL="0">
+              <a:buNone/>
+            </a:pPr>
+            <a:r>
+              <a:rPr/>
+              <a:t>Target: 1:37. Walk through: EAD = probability </a:t>
+            </a:r>
+            <a:r>
+              <a:rPr/>
+              <a:t>\times</a:t>
+            </a:r>
+            <a:r>
+              <a:rPr/>
+              <a:t> damage. These are simplified numbers — real analysis would integrate over all flood depths. Ask students to compute the EAD values themselves before revealing.</a:t>
+            </a:r>
+          </a:p>
+        </p:txBody>
+      </p:sp>
+      <p:sp>
+        <p:nvSpPr>
+          <p:cNvPr id="4" name="Slide Number Placeholder 3"/>
+          <p:cNvSpPr>
+            <a:spLocks noGrp="1"/>
+          </p:cNvSpPr>
+          <p:nvPr>
+            <p:ph type="sldNum" sz="quarter" idx="10"/>
+          </p:nvPr>
+        </p:nvSpPr>
+        <p:spPr/>
+        <p:txBody>
+          <a:bodyPr/>
+          <a:lstStyle/>
+          <a:p>
+            <a:fld id="{18BDFEC3-8487-43E8-A154-7C12CBC1FFF2}" type="slidenum">
+              <a:rPr lang="en-US"/>
+              <a:t>7</a:t>
+            </a:fld>
+            <a:endParaRPr lang="en-US"/>
+          </a:p>
+        </p:txBody>
+      </p:sp>
+    </p:spTree>
+  </p:cSld>
+</p:notes>
+</file>
+
+<file path=ppt/notesSlides/notesSlide6.xml><?xml version="1.0" encoding="utf-8"?>
+<p:notes xmlns:a="http://schemas.openxmlformats.org/drawingml/2006/main" xmlns:r="http://schemas.openxmlformats.org/officeDocument/2006/relationships" xmlns:p="http://schemas.openxmlformats.org/presentationml/2006/main">
+  <p:cSld>
+    <p:spTree>
+      <p:nvGrpSpPr>
+        <p:cNvPr id="1" name=""/>
+        <p:cNvGrpSpPr/>
+        <p:nvPr/>
+      </p:nvGrpSpPr>
+      <p:grpSpPr>
+        <a:xfrm>
+          <a:off x="0" y="0"/>
+          <a:ext cx="0" cy="0"/>
+          <a:chOff x="0" y="0"/>
+          <a:chExt cx="0" cy="0"/>
+        </a:xfrm>
+      </p:grpSpPr>
+      <p:sp>
+        <p:nvSpPr>
+          <p:cNvPr id="2" name="Slide Image Placeholder 1"/>
+          <p:cNvSpPr>
+            <a:spLocks noGrp="1" noRot="1" noChangeAspect="1"/>
+          </p:cNvSpPr>
+          <p:nvPr>
+            <p:ph type="sldImg"/>
+          </p:nvPr>
+        </p:nvSpPr>
+        <p:spPr/>
+      </p:sp>
+      <p:sp>
+        <p:nvSpPr>
+          <p:cNvPr id="3" name="Notes Placeholder 2"/>
+          <p:cNvSpPr>
+            <a:spLocks noGrp="1"/>
+          </p:cNvSpPr>
+          <p:nvPr>
+            <p:ph type="body" idx="1"/>
+          </p:nvPr>
+        </p:nvSpPr>
+        <p:spPr/>
+        <p:txBody>
+          <a:bodyPr/>
+          <a:lstStyle/>
+          <a:p>
+            <a:pPr lvl="0" indent="0" marL="0">
+              <a:buNone/>
+            </a:pPr>
+            <a:r>
+              <a:rPr/>
+              <a:t>Target: 1:40. Pause and ask the class. Possible answers: higher flood probability, longer time horizon, include insurance savings, include non-monetary benefits. The point is that BCA forces you to articulate </a:t>
+            </a:r>
+            <a:r>
+              <a:rPr i="1"/>
+              <a:t>why</a:t>
+            </a:r>
+            <a:r>
+              <a:rPr/>
+              <a:t> you think a project is worthwhile.</a:t>
+            </a:r>
+          </a:p>
+        </p:txBody>
+      </p:sp>
+      <p:sp>
+        <p:nvSpPr>
+          <p:cNvPr id="4" name="Slide Number Placeholder 3"/>
+          <p:cNvSpPr>
+            <a:spLocks noGrp="1"/>
+          </p:cNvSpPr>
+          <p:nvPr>
+            <p:ph type="sldNum" sz="quarter" idx="10"/>
+          </p:nvPr>
+        </p:nvSpPr>
+        <p:spPr/>
+        <p:txBody>
+          <a:bodyPr/>
+          <a:lstStyle/>
+          <a:p>
+            <a:fld id="{18BDFEC3-8487-43E8-A154-7C12CBC1FFF2}" type="slidenum">
+              <a:rPr lang="en-US"/>
+              <a:t>8</a:t>
+            </a:fld>
+            <a:endParaRPr lang="en-US"/>
+          </a:p>
+        </p:txBody>
+      </p:sp>
+    </p:spTree>
+  </p:cSld>
+</p:notes>
+</file>
+
+<file path=ppt/notesSlides/notesSlide7.xml><?xml version="1.0" encoding="utf-8"?>
+<p:notes xmlns:a="http://schemas.openxmlformats.org/drawingml/2006/main" xmlns:r="http://schemas.openxmlformats.org/officeDocument/2006/relationships" xmlns:p="http://schemas.openxmlformats.org/presentationml/2006/main">
+  <p:cSld>
+    <p:spTree>
+      <p:nvGrpSpPr>
+        <p:cNvPr id="1" name=""/>
+        <p:cNvGrpSpPr/>
+        <p:nvPr/>
+      </p:nvGrpSpPr>
+      <p:grpSpPr>
+        <a:xfrm>
+          <a:off x="0" y="0"/>
+          <a:ext cx="0" cy="0"/>
+          <a:chOff x="0" y="0"/>
+          <a:chExt cx="0" cy="0"/>
+        </a:xfrm>
+      </p:grpSpPr>
+      <p:sp>
+        <p:nvSpPr>
+          <p:cNvPr id="2" name="Slide Image Placeholder 1"/>
+          <p:cNvSpPr>
+            <a:spLocks noGrp="1" noRot="1" noChangeAspect="1"/>
+          </p:cNvSpPr>
+          <p:nvPr>
+            <p:ph type="sldImg"/>
+          </p:nvPr>
+        </p:nvSpPr>
+        <p:spPr/>
+      </p:sp>
+      <p:sp>
+        <p:nvSpPr>
+          <p:cNvPr id="3" name="Notes Placeholder 2"/>
+          <p:cNvSpPr>
+            <a:spLocks noGrp="1"/>
+          </p:cNvSpPr>
+          <p:nvPr>
+            <p:ph type="body" idx="1"/>
+          </p:nvPr>
+        </p:nvSpPr>
+        <p:spPr/>
+        <p:txBody>
+          <a:bodyPr/>
+          <a:lstStyle/>
+          <a:p>
+            <a:pPr lvl="0" indent="0" marL="0">
+              <a:buNone/>
+            </a:pPr>
+            <a:r>
+              <a:rPr/>
+              <a:t>Target: 1:43. This is the key pedagogical moment. BCA is not giving us “the answer” — it’s showing us which assumptions drive the answer. This is why sensitivity analysis matters (Week 7).</a:t>
+            </a:r>
+          </a:p>
+        </p:txBody>
+      </p:sp>
+      <p:sp>
+        <p:nvSpPr>
+          <p:cNvPr id="4" name="Slide Number Placeholder 3"/>
+          <p:cNvSpPr>
+            <a:spLocks noGrp="1"/>
+          </p:cNvSpPr>
+          <p:nvPr>
+            <p:ph type="sldNum" sz="quarter" idx="10"/>
+          </p:nvPr>
+        </p:nvSpPr>
+        <p:spPr/>
+        <p:txBody>
+          <a:bodyPr/>
+          <a:lstStyle/>
+          <a:p>
+            <a:fld id="{18BDFEC3-8487-43E8-A154-7C12CBC1FFF2}" type="slidenum">
+              <a:rPr lang="en-US"/>
+              <a:t>9</a:t>
+            </a:fld>
+            <a:endParaRPr lang="en-US"/>
+          </a:p>
+        </p:txBody>
+      </p:sp>
+    </p:spTree>
+  </p:cSld>
+</p:notes>
+</file>
+
+<file path=ppt/notesSlides/notesSlide8.xml><?xml version="1.0" encoding="utf-8"?>
+<p:notes xmlns:a="http://schemas.openxmlformats.org/drawingml/2006/main" xmlns:r="http://schemas.openxmlformats.org/officeDocument/2006/relationships" xmlns:p="http://schemas.openxmlformats.org/presentationml/2006/main">
+  <p:cSld>
+    <p:spTree>
+      <p:nvGrpSpPr>
+        <p:cNvPr id="1" name=""/>
+        <p:cNvGrpSpPr/>
+        <p:nvPr/>
+      </p:nvGrpSpPr>
+      <p:grpSpPr>
+        <a:xfrm>
+          <a:off x="0" y="0"/>
+          <a:ext cx="0" cy="0"/>
+          <a:chOff x="0" y="0"/>
+          <a:chExt cx="0" cy="0"/>
+        </a:xfrm>
+      </p:grpSpPr>
+      <p:sp>
+        <p:nvSpPr>
+          <p:cNvPr id="2" name="Slide Image Placeholder 1"/>
+          <p:cNvSpPr>
+            <a:spLocks noGrp="1" noRot="1" noChangeAspect="1"/>
+          </p:cNvSpPr>
+          <p:nvPr>
+            <p:ph type="sldImg"/>
+          </p:nvPr>
+        </p:nvSpPr>
+        <p:spPr/>
+      </p:sp>
+      <p:sp>
+        <p:nvSpPr>
+          <p:cNvPr id="3" name="Notes Placeholder 2"/>
+          <p:cNvSpPr>
+            <a:spLocks noGrp="1"/>
+          </p:cNvSpPr>
+          <p:nvPr>
+            <p:ph type="body" idx="1"/>
+          </p:nvPr>
+        </p:nvSpPr>
+        <p:spPr/>
+        <p:txBody>
+          <a:bodyPr/>
+          <a:lstStyle/>
+          <a:p>
+            <a:pPr lvl="0" indent="0" marL="0">
+              <a:buNone/>
+            </a:pPr>
+            <a:r>
+              <a:rPr/>
+              <a:t>Target: 1:44. The 2023 update was a significant shift — reflects decades of academic argument (including Arrow et al.) finally reaching policy. A shift from 7% to 2% can flip a project from “fails” to “passes,” as we just saw in our worked example.</a:t>
+            </a:r>
+          </a:p>
+          <a:p>
+            <a:pPr lvl="0" indent="0" marL="0">
+              <a:buNone/>
+            </a:pPr>
+          </a:p>
+          <a:p>
+            <a:pPr lvl="0" indent="0" marL="0">
+              <a:buNone/>
+            </a:pPr>
+            <a:r>
+              <a:rPr/>
+              <a:t>Target: 1:46. Preview for Wednesday’s reading (Arrow et al.). Key insight from (</a:t>
+            </a:r>
+            <a:r>
+              <a:rPr b="1"/>
+              <a:t>weitzman_stern:2007?</a:t>
+            </a:r>
+            <a:r>
+              <a:rPr/>
+              <a:t>): “if you use a large discount rate, your model will always tell you to burn more fossil fuels.”</a:t>
+            </a:r>
+          </a:p>
+          <a:p>
+            <a:pPr lvl="0" indent="0" marL="0">
+              <a:buNone/>
+            </a:pPr>
+          </a:p>
+          <a:p>
+            <a:pPr lvl="0" indent="0" marL="0">
+              <a:buNone/>
+            </a:pPr>
+            <a:r>
+              <a:rPr/>
+              <a:t>Target: 1:48. This is why the A-94 update mattered so much. A shift from 7% to 2% can flip a project from “fails” to “passes.”</a:t>
+            </a:r>
+          </a:p>
+          <a:p>
+            <a:pPr lvl="0" indent="0" marL="0">
+              <a:buNone/>
+            </a:pPr>
+          </a:p>
+          <a:p>
+            <a:pPr lvl="0" indent="0" marL="0">
+              <a:buNone/>
+            </a:pPr>
+            <a:r>
+              <a:rPr/>
+              <a:t>Target: 1:50. This is the most important conceptual point of the lecture.</a:t>
+            </a:r>
+          </a:p>
+        </p:txBody>
+      </p:sp>
+      <p:sp>
+        <p:nvSpPr>
+          <p:cNvPr id="4" name="Slide Number Placeholder 3"/>
+          <p:cNvSpPr>
+            <a:spLocks noGrp="1"/>
+          </p:cNvSpPr>
+          <p:nvPr>
+            <p:ph type="sldNum" sz="quarter" idx="10"/>
+          </p:nvPr>
+        </p:nvSpPr>
+        <p:spPr/>
+        <p:txBody>
+          <a:bodyPr/>
+          <a:lstStyle/>
+          <a:p>
+            <a:fld id="{18BDFEC3-8487-43E8-A154-7C12CBC1FFF2}" type="slidenum">
+              <a:rPr lang="en-US"/>
+              <a:t>10</a:t>
+            </a:fld>
+            <a:endParaRPr lang="en-US"/>
+          </a:p>
+        </p:txBody>
+      </p:sp>
+    </p:spTree>
+  </p:cSld>
+</p:notes>
+</file>
+
+<file path=ppt/notesSlides/notesSlide9.xml><?xml version="1.0" encoding="utf-8"?>
+<p:notes xmlns:a="http://schemas.openxmlformats.org/drawingml/2006/main" xmlns:r="http://schemas.openxmlformats.org/officeDocument/2006/relationships" xmlns:p="http://schemas.openxmlformats.org/presentationml/2006/main">
+  <p:cSld>
+    <p:spTree>
+      <p:nvGrpSpPr>
+        <p:cNvPr id="1" name=""/>
+        <p:cNvGrpSpPr/>
+        <p:nvPr/>
+      </p:nvGrpSpPr>
+      <p:grpSpPr>
+        <a:xfrm>
+          <a:off x="0" y="0"/>
+          <a:ext cx="0" cy="0"/>
+          <a:chOff x="0" y="0"/>
+          <a:chExt cx="0" cy="0"/>
+        </a:xfrm>
+      </p:grpSpPr>
+      <p:sp>
+        <p:nvSpPr>
+          <p:cNvPr id="2" name="Slide Image Placeholder 1"/>
+          <p:cNvSpPr>
+            <a:spLocks noGrp="1" noRot="1" noChangeAspect="1"/>
+          </p:cNvSpPr>
+          <p:nvPr>
+            <p:ph type="sldImg"/>
+          </p:nvPr>
+        </p:nvSpPr>
+        <p:spPr/>
+      </p:sp>
+      <p:sp>
+        <p:nvSpPr>
+          <p:cNvPr id="3" name="Notes Placeholder 2"/>
+          <p:cNvSpPr>
+            <a:spLocks noGrp="1"/>
+          </p:cNvSpPr>
+          <p:nvPr>
+            <p:ph type="body" idx="1"/>
+          </p:nvPr>
+        </p:nvSpPr>
+        <p:spPr/>
+        <p:txBody>
+          <a:bodyPr/>
+          <a:lstStyle/>
+          <a:p>
+            <a:pPr lvl="0" indent="0" marL="0">
+              <a:buNone/>
+            </a:pPr>
+            <a:r>
+              <a:rPr/>
+              <a:t>Target: 1:53. Remind students of the reading assignment and discussion questions posted on the course website.</a:t>
+            </a:r>
+          </a:p>
+        </p:txBody>
+      </p:sp>
+      <p:sp>
+        <p:nvSpPr>
+          <p:cNvPr id="4" name="Slide Number Placeholder 3"/>
+          <p:cNvSpPr>
+            <a:spLocks noGrp="1"/>
+          </p:cNvSpPr>
+          <p:nvPr>
+            <p:ph type="sldNum" sz="quarter" idx="10"/>
+          </p:nvPr>
+        </p:nvSpPr>
+        <p:spPr/>
+        <p:txBody>
+          <a:bodyPr/>
+          <a:lstStyle/>
+          <a:p>
+            <a:fld id="{18BDFEC3-8487-43E8-A154-7C12CBC1FFF2}" type="slidenum">
+              <a:rPr lang="en-US"/>
+              <a:t>11</a:t>
+            </a:fld>
+            <a:endParaRPr lang="en-US"/>
+          </a:p>
+        </p:txBody>
+      </p:sp>
+    </p:spTree>
+  </p:cSld>
+</p:notes>
 </file>
 
 <file path=ppt/slideLayouts/slideLayout1.xml><?xml version="1.0" encoding="utf-8"?>
@@ -3119,7 +4493,7 @@
             </a:pPr>
             <a:r>
               <a:rPr/>
-              <a:t>Optimal Static Decisions</a:t>
+              <a:t>Valuation &amp; Benefit-Cost Analysis</a:t>
             </a:r>
           </a:p>
         </p:txBody>
@@ -3187,6 +4561,1574 @@
       </p:sp>
     </p:spTree>
   </p:cSld>
+</p:sld>
+</file>
+
+<file path=ppt/slides/slide10.xml><?xml version="1.0" encoding="utf-8"?>
+<p:sld xmlns:a="http://schemas.openxmlformats.org/drawingml/2006/main" xmlns:r="http://schemas.openxmlformats.org/officeDocument/2006/relationships" xmlns:p="http://schemas.openxmlformats.org/presentationml/2006/main">
+  <p:cSld>
+    <p:spTree>
+      <p:nvGrpSpPr>
+        <p:cNvPr id="1" name=""/>
+        <p:cNvGrpSpPr/>
+        <p:nvPr/>
+      </p:nvGrpSpPr>
+      <p:grpSpPr>
+        <a:xfrm>
+          <a:off x="0" y="0"/>
+          <a:ext cx="0" cy="0"/>
+          <a:chOff x="0" y="0"/>
+          <a:chExt cx="0" cy="0"/>
+        </a:xfrm>
+      </p:grpSpPr>
+      <p:sp>
+        <p:nvSpPr>
+          <p:cNvPr id="2" name="Title 1"/>
+          <p:cNvSpPr>
+            <a:spLocks noGrp="1"/>
+          </p:cNvSpPr>
+          <p:nvPr>
+            <p:ph type="title"/>
+          </p:nvPr>
+        </p:nvSpPr>
+        <p:spPr/>
+        <p:txBody>
+          <a:bodyPr/>
+          <a:lstStyle/>
+          <a:p>
+            <a:pPr lvl="0" indent="0" marL="0">
+              <a:buNone/>
+            </a:pPr>
+            <a:r>
+              <a:rPr/>
+              <a:t>Critiques &amp; Defense</a:t>
+            </a:r>
+          </a:p>
+        </p:txBody>
+      </p:sp>
+      <mc:AlternateContent xmlns:mc="http://schemas.openxmlformats.org/markup-compatibility/2006">
+        <mc:Choice xmlns:a14="http://schemas.microsoft.com/office/drawing/2010/main" Requires="a14">
+          <p:sp>
+            <p:nvSpPr>
+              <p:cNvPr id="3" name="Content Placeholder 2"/>
+              <p:cNvSpPr>
+                <a:spLocks noGrp="1"/>
+              </p:cNvSpPr>
+              <p:nvPr>
+                <p:ph idx="1"/>
+              </p:nvPr>
+            </p:nvSpPr>
+            <p:spPr/>
+            <p:txBody>
+              <a:bodyPr/>
+              <a:lstStyle/>
+              <a:p>
+                <a:pPr lvl="0" indent="0" marL="0">
+                  <a:spcBef>
+                    <a:spcPts val="3000"/>
+                  </a:spcBef>
+                  <a:buNone/>
+                </a:pPr>
+                <a:r>
+                  <a:rPr b="1"/>
+                  <a:t>White House Circular A-94</a:t>
+                </a:r>
+              </a:p>
+              <a:p>
+                <a:pPr lvl="0" indent="0" marL="0">
+                  <a:buNone/>
+                </a:pPr>
+                <a:r>
+                  <a:rPr/>
+                  <a:t>The overarching federal guidance on BCA (U.S. Office of Management and Budget 2023):</a:t>
+                </a:r>
+              </a:p>
+              <a:p>
+                <a:pPr lvl="0"/>
+                <a:r>
+                  <a:rPr/>
+                  <a:t>Governs how </a:t>
+                </a:r>
+                <a:r>
+                  <a:rPr b="1"/>
+                  <a:t>all</a:t>
+                </a:r>
+                <a:r>
+                  <a:rPr/>
+                  <a:t> federal agencies should conduct BCA</a:t>
+                </a:r>
+              </a:p>
+              <a:p>
+                <a:pPr lvl="0"/>
+                <a:r>
+                  <a:rPr/>
+                  <a:t>2023 update lowered the default discount rate from 7% to ~2%</a:t>
+                </a:r>
+              </a:p>
+              <a:p>
+                <a:pPr lvl="0"/>
+                <a:r>
+                  <a:rPr/>
+                  <a:t>Expanded guidance on equity and distributional effects</a:t>
+                </a:r>
+              </a:p>
+              <a:p>
+                <a:pPr lvl="0" indent="0" marL="0">
+                  <a:spcBef>
+                    <a:spcPts val="3000"/>
+                  </a:spcBef>
+                  <a:buNone/>
+                </a:pPr>
+                <a:r>
+                  <a:rPr b="1"/>
+                  <a:t>The Discount Rate Problem</a:t>
+                </a:r>
+              </a:p>
+              <a:p>
+                <a:pPr lvl="0" indent="0" marL="0">
+                  <a:buNone/>
+                </a:pPr>
+                <a:r>
+                  <a:rPr/>
+                  <a:t>Two rationales for discounting (Arrow et al. 2013):</a:t>
+                </a:r>
+              </a:p>
+              <a:p>
+                <a:pPr lvl="0" indent="-342900" marL="342900">
+                  <a:buAutoNum type="arabicPeriod"/>
+                </a:pPr>
+                <a:r>
+                  <a:rPr b="1"/>
+                  <a:t>Consumption-based</a:t>
+                </a:r>
+                <a:r>
+                  <a:rPr/>
+                  <a:t> (~3%): Future generations will be richer, so an extra dollar matters less to them</a:t>
+                </a:r>
+              </a:p>
+              <a:p>
+                <a:pPr lvl="0" indent="-342900" marL="342900">
+                  <a:buAutoNum type="arabicPeriod"/>
+                </a:pPr>
+                <a:r>
+                  <a:rPr b="1"/>
+                  <a:t>Investment-based</a:t>
+                </a:r>
+                <a:r>
+                  <a:rPr/>
+                  <a:t> (~7%): A dollar invested today yields more than a dollar in the future</a:t>
+                </a:r>
+              </a:p>
+              <a:p>
+                <a:pPr lvl="0" indent="0" marL="0">
+                  <a:buNone/>
+                </a:pPr>
+                <a:r>
+                  <a:rPr/>
+                  <a:t>Both assume future generations are better off — what if climate change makes them </a:t>
+                </a:r>
+                <a:r>
+                  <a:rPr i="1"/>
+                  <a:t>worse</a:t>
+                </a:r>
+                <a:r>
+                  <a:rPr/>
+                  <a:t> off?</a:t>
+                </a:r>
+              </a:p>
+              <a:p>
+                <a:pPr lvl="0" indent="0" marL="0">
+                  <a:spcBef>
+                    <a:spcPts val="3000"/>
+                  </a:spcBef>
+                  <a:buNone/>
+                </a:pPr>
+                <a:r>
+                  <a:rPr b="1"/>
+                  <a:t>High Discount Rates Favor Inaction</a:t>
+                </a:r>
+              </a:p>
+              <a:p>
+                <a:pPr lvl="0" indent="0" marL="0">
+                  <a:buNone/>
+                </a:pPr>
+                <a:r>
+                  <a:rPr/>
+                  <a:t>At </a:t>
+                </a:r>
+                <a14:m>
+                  <m:oMath xmlns:m="http://schemas.openxmlformats.org/officeDocument/2006/math">
+                    <m:r>
+                      <m:t>r</m:t>
+                    </m:r>
+                    <m:r>
+                      <m:rPr>
+                        <m:sty m:val="p"/>
+                      </m:rPr>
+                      <m:t>=</m:t>
+                    </m:r>
+                    <m:r>
+                      <m:t>7</m:t>
+                    </m:r>
+                    <m:r>
+                      <m:rPr>
+                        <m:sty m:val="p"/>
+                      </m:rPr>
+                      <m:t>%</m:t>
+                    </m:r>
+                  </m:oMath>
+                </a14:m>
+                <a:r>
+                  <a:rPr/>
+                  <a:t>, damages 50 years out are worth </a:t>
+                </a:r>
+                <a:r>
+                  <a:rPr b="1"/>
+                  <a:t>$0.03</a:t>
+                </a:r>
+                <a:r>
+                  <a:rPr/>
+                  <a:t> today.</a:t>
+                </a:r>
+              </a:p>
+              <a:p>
+                <a:pPr lvl="0"/>
+                <a:r>
+                  <a:rPr/>
+                  <a:t>Infrastructure with 50-100 year lifetimes</a:t>
+                </a:r>
+              </a:p>
+              <a:p>
+                <a:pPr lvl="0"/>
+                <a:r>
+                  <a:rPr/>
+                  <a:t>Sea-level rise over centuries</a:t>
+                </a:r>
+              </a:p>
+              <a:p>
+                <a:pPr lvl="0"/>
+                <a:r>
+                  <a:rPr/>
+                  <a:t>Species extinction is permanent</a:t>
+                </a:r>
+              </a:p>
+              <a:p>
+                <a:pPr lvl="0" indent="0" marL="0">
+                  <a:buNone/>
+                </a:pPr>
+                <a:r>
+                  <a:rPr/>
+                  <a:t>The discount rate can determine whether a project “passes” BCA — more than any other single parameter.</a:t>
+                </a:r>
+              </a:p>
+              <a:p>
+                <a:pPr lvl="0" indent="0" marL="0">
+                  <a:spcBef>
+                    <a:spcPts val="3000"/>
+                  </a:spcBef>
+                  <a:buNone/>
+                </a:pPr>
+                <a:r>
+                  <a:rPr b="1"/>
+                  <a:t>Decision-Support, Not Decision-Making</a:t>
+                </a:r>
+              </a:p>
+              <a:p>
+                <a:pPr lvl="0" indent="0" marL="1270000">
+                  <a:buNone/>
+                </a:pPr>
+                <a:r>
+                  <a:rPr sz="2000" b="1"/>
+                  <a:t>Important</a:t>
+                </a:r>
+              </a:p>
+              <a:p>
+                <a:pPr lvl="0" indent="0" marL="1270000">
+                  <a:buNone/>
+                </a:pPr>
+                <a:r>
+                  <a:rPr sz="2000"/>
+                  <a:t>BCA is a tool for </a:t>
+                </a:r>
+                <a:r>
+                  <a:rPr sz="2000" b="1"/>
+                  <a:t>informing</a:t>
+                </a:r>
+                <a:r>
+                  <a:rPr sz="2000"/>
+                  <a:t> decisions, not </a:t>
+                </a:r>
+                <a:r>
+                  <a:rPr sz="2000" b="1"/>
+                  <a:t>making</a:t>
+                </a:r>
+                <a:r>
+                  <a:rPr sz="2000"/>
+                  <a:t> them.</a:t>
+                </a:r>
+              </a:p>
+              <a:p>
+                <a:pPr lvl="0"/>
+                <a:r>
+                  <a:rPr/>
+                  <a:t>It forces us to be explicit about our assumptions</a:t>
+                </a:r>
+              </a:p>
+              <a:p>
+                <a:pPr lvl="0"/>
+                <a:r>
+                  <a:rPr/>
+                  <a:t>Applied well, it’s iterative refinement of understanding; applied poorly, it’s a black box that justifies a decision already made</a:t>
+                </a:r>
+              </a:p>
+              <a:p>
+                <a:pPr lvl="0"/>
+                <a:r>
+                  <a:rPr/>
+                  <a:t>The number matters less than what you learn by computing it</a:t>
+                </a:r>
+              </a:p>
+            </p:txBody>
+          </p:sp>
+        </mc:Choice>
+      </mc:AlternateContent>
+    </p:spTree>
+  </p:cSld>
+  <p:timing>
+    <p:tnLst>
+      <p:par>
+        <p:cTn id="1" dur="indefinite" restart="never" nodeType="tmRoot">
+          <p:childTnLst>
+            <p:seq concurrent="1" nextAc="seek">
+              <p:cTn id="2" dur="indefinite" nodeType="mainSeq">
+                <p:childTnLst>
+                  <p:par>
+                    <p:cTn id="3" fill="hold">
+                      <p:stCondLst>
+                        <p:cond delay="indefinite"/>
+                      </p:stCondLst>
+                      <p:childTnLst>
+                        <p:par>
+                          <p:cTn id="4" fill="hold">
+                            <p:stCondLst>
+                              <p:cond delay="0"/>
+                            </p:stCondLst>
+                            <p:childTnLst>
+                              <p:par>
+                                <p:cTn id="5" presetID="1" presetClass="entr" presetSubtype="0" fill="hold" grpId="0" nodeType="clickEffect">
+                                  <p:stCondLst>
+                                    <p:cond delay="0"/>
+                                  </p:stCondLst>
+                                  <p:childTnLst>
+                                    <p:set>
+                                      <p:cBhvr>
+                                        <p:cTn id="6" dur="1" fill="hold">
+                                          <p:stCondLst>
+                                            <p:cond delay="0"/>
+                                          </p:stCondLst>
+                                        </p:cTn>
+                                        <p:tgtEl>
+                                          <p:spTgt spid="3">
+                                            <p:txEl>
+                                              <p:pRg st="2" end="2"/>
+                                            </p:txEl>
+                                          </p:spTgt>
+                                        </p:tgtEl>
+                                        <p:attrNameLst>
+                                          <p:attrName>style.visibility</p:attrName>
+                                        </p:attrNameLst>
+                                      </p:cBhvr>
+                                      <p:to>
+                                        <p:strVal val="visible"/>
+                                      </p:to>
+                                    </p:set>
+                                  </p:childTnLst>
+                                </p:cTn>
+                              </p:par>
+                            </p:childTnLst>
+                          </p:cTn>
+                        </p:par>
+                      </p:childTnLst>
+                    </p:cTn>
+                  </p:par>
+                  <p:par>
+                    <p:cTn id="7" fill="hold">
+                      <p:stCondLst>
+                        <p:cond delay="indefinite"/>
+                      </p:stCondLst>
+                      <p:childTnLst>
+                        <p:par>
+                          <p:cTn id="8" fill="hold">
+                            <p:stCondLst>
+                              <p:cond delay="0"/>
+                            </p:stCondLst>
+                            <p:childTnLst>
+                              <p:par>
+                                <p:cTn id="9" presetID="1" presetClass="entr" presetSubtype="0" fill="hold" grpId="0" nodeType="clickEffect">
+                                  <p:stCondLst>
+                                    <p:cond delay="0"/>
+                                  </p:stCondLst>
+                                  <p:childTnLst>
+                                    <p:set>
+                                      <p:cBhvr>
+                                        <p:cTn id="10" dur="1" fill="hold">
+                                          <p:stCondLst>
+                                            <p:cond delay="0"/>
+                                          </p:stCondLst>
+                                        </p:cTn>
+                                        <p:tgtEl>
+                                          <p:spTgt spid="3">
+                                            <p:txEl>
+                                              <p:pRg st="3" end="3"/>
+                                            </p:txEl>
+                                          </p:spTgt>
+                                        </p:tgtEl>
+                                        <p:attrNameLst>
+                                          <p:attrName>style.visibility</p:attrName>
+                                        </p:attrNameLst>
+                                      </p:cBhvr>
+                                      <p:to>
+                                        <p:strVal val="visible"/>
+                                      </p:to>
+                                    </p:set>
+                                  </p:childTnLst>
+                                </p:cTn>
+                              </p:par>
+                            </p:childTnLst>
+                          </p:cTn>
+                        </p:par>
+                      </p:childTnLst>
+                    </p:cTn>
+                  </p:par>
+                  <p:par>
+                    <p:cTn id="11" fill="hold">
+                      <p:stCondLst>
+                        <p:cond delay="indefinite"/>
+                      </p:stCondLst>
+                      <p:childTnLst>
+                        <p:par>
+                          <p:cTn id="12" fill="hold">
+                            <p:stCondLst>
+                              <p:cond delay="0"/>
+                            </p:stCondLst>
+                            <p:childTnLst>
+                              <p:par>
+                                <p:cTn id="13" presetID="1" presetClass="entr" presetSubtype="0" fill="hold" grpId="0" nodeType="clickEffect">
+                                  <p:stCondLst>
+                                    <p:cond delay="0"/>
+                                  </p:stCondLst>
+                                  <p:childTnLst>
+                                    <p:set>
+                                      <p:cBhvr>
+                                        <p:cTn id="14" dur="1" fill="hold">
+                                          <p:stCondLst>
+                                            <p:cond delay="0"/>
+                                          </p:stCondLst>
+                                        </p:cTn>
+                                        <p:tgtEl>
+                                          <p:spTgt spid="3">
+                                            <p:txEl>
+                                              <p:pRg st="4" end="4"/>
+                                            </p:txEl>
+                                          </p:spTgt>
+                                        </p:tgtEl>
+                                        <p:attrNameLst>
+                                          <p:attrName>style.visibility</p:attrName>
+                                        </p:attrNameLst>
+                                      </p:cBhvr>
+                                      <p:to>
+                                        <p:strVal val="visible"/>
+                                      </p:to>
+                                    </p:set>
+                                  </p:childTnLst>
+                                </p:cTn>
+                              </p:par>
+                            </p:childTnLst>
+                          </p:cTn>
+                        </p:par>
+                      </p:childTnLst>
+                    </p:cTn>
+                  </p:par>
+                  <p:par>
+                    <p:cTn id="15" fill="hold">
+                      <p:stCondLst>
+                        <p:cond delay="indefinite"/>
+                      </p:stCondLst>
+                      <p:childTnLst>
+                        <p:par>
+                          <p:cTn id="16" fill="hold">
+                            <p:stCondLst>
+                              <p:cond delay="0"/>
+                            </p:stCondLst>
+                            <p:childTnLst>
+                              <p:par>
+                                <p:cTn id="17" presetID="1" presetClass="entr" presetSubtype="0" fill="hold" grpId="0" nodeType="clickEffect">
+                                  <p:stCondLst>
+                                    <p:cond delay="0"/>
+                                  </p:stCondLst>
+                                  <p:childTnLst>
+                                    <p:set>
+                                      <p:cBhvr>
+                                        <p:cTn id="18" dur="1" fill="hold">
+                                          <p:stCondLst>
+                                            <p:cond delay="0"/>
+                                          </p:stCondLst>
+                                        </p:cTn>
+                                        <p:tgtEl>
+                                          <p:spTgt spid="3">
+                                            <p:txEl>
+                                              <p:pRg st="7" end="7"/>
+                                            </p:txEl>
+                                          </p:spTgt>
+                                        </p:tgtEl>
+                                        <p:attrNameLst>
+                                          <p:attrName>style.visibility</p:attrName>
+                                        </p:attrNameLst>
+                                      </p:cBhvr>
+                                      <p:to>
+                                        <p:strVal val="visible"/>
+                                      </p:to>
+                                    </p:set>
+                                  </p:childTnLst>
+                                </p:cTn>
+                              </p:par>
+                            </p:childTnLst>
+                          </p:cTn>
+                        </p:par>
+                      </p:childTnLst>
+                    </p:cTn>
+                  </p:par>
+                  <p:par>
+                    <p:cTn id="19" fill="hold">
+                      <p:stCondLst>
+                        <p:cond delay="indefinite"/>
+                      </p:stCondLst>
+                      <p:childTnLst>
+                        <p:par>
+                          <p:cTn id="20" fill="hold">
+                            <p:stCondLst>
+                              <p:cond delay="0"/>
+                            </p:stCondLst>
+                            <p:childTnLst>
+                              <p:par>
+                                <p:cTn id="21" presetID="1" presetClass="entr" presetSubtype="0" fill="hold" grpId="0" nodeType="clickEffect">
+                                  <p:stCondLst>
+                                    <p:cond delay="0"/>
+                                  </p:stCondLst>
+                                  <p:childTnLst>
+                                    <p:set>
+                                      <p:cBhvr>
+                                        <p:cTn id="22" dur="1" fill="hold">
+                                          <p:stCondLst>
+                                            <p:cond delay="0"/>
+                                          </p:stCondLst>
+                                        </p:cTn>
+                                        <p:tgtEl>
+                                          <p:spTgt spid="3">
+                                            <p:txEl>
+                                              <p:pRg st="8" end="8"/>
+                                            </p:txEl>
+                                          </p:spTgt>
+                                        </p:tgtEl>
+                                        <p:attrNameLst>
+                                          <p:attrName>style.visibility</p:attrName>
+                                        </p:attrNameLst>
+                                      </p:cBhvr>
+                                      <p:to>
+                                        <p:strVal val="visible"/>
+                                      </p:to>
+                                    </p:set>
+                                  </p:childTnLst>
+                                </p:cTn>
+                              </p:par>
+                            </p:childTnLst>
+                          </p:cTn>
+                        </p:par>
+                      </p:childTnLst>
+                    </p:cTn>
+                  </p:par>
+                  <p:par>
+                    <p:cTn id="23" fill="hold">
+                      <p:stCondLst>
+                        <p:cond delay="indefinite"/>
+                      </p:stCondLst>
+                      <p:childTnLst>
+                        <p:par>
+                          <p:cTn id="24" fill="hold">
+                            <p:stCondLst>
+                              <p:cond delay="0"/>
+                            </p:stCondLst>
+                            <p:childTnLst>
+                              <p:par>
+                                <p:cTn id="25" presetID="1" presetClass="entr" presetSubtype="0" fill="hold" grpId="0" nodeType="clickEffect">
+                                  <p:stCondLst>
+                                    <p:cond delay="0"/>
+                                  </p:stCondLst>
+                                  <p:childTnLst>
+                                    <p:set>
+                                      <p:cBhvr>
+                                        <p:cTn id="26" dur="1" fill="hold">
+                                          <p:stCondLst>
+                                            <p:cond delay="0"/>
+                                          </p:stCondLst>
+                                        </p:cTn>
+                                        <p:tgtEl>
+                                          <p:spTgt spid="3">
+                                            <p:txEl>
+                                              <p:pRg st="12" end="12"/>
+                                            </p:txEl>
+                                          </p:spTgt>
+                                        </p:tgtEl>
+                                        <p:attrNameLst>
+                                          <p:attrName>style.visibility</p:attrName>
+                                        </p:attrNameLst>
+                                      </p:cBhvr>
+                                      <p:to>
+                                        <p:strVal val="visible"/>
+                                      </p:to>
+                                    </p:set>
+                                  </p:childTnLst>
+                                </p:cTn>
+                              </p:par>
+                            </p:childTnLst>
+                          </p:cTn>
+                        </p:par>
+                      </p:childTnLst>
+                    </p:cTn>
+                  </p:par>
+                  <p:par>
+                    <p:cTn id="27" fill="hold">
+                      <p:stCondLst>
+                        <p:cond delay="indefinite"/>
+                      </p:stCondLst>
+                      <p:childTnLst>
+                        <p:par>
+                          <p:cTn id="28" fill="hold">
+                            <p:stCondLst>
+                              <p:cond delay="0"/>
+                            </p:stCondLst>
+                            <p:childTnLst>
+                              <p:par>
+                                <p:cTn id="29" presetID="1" presetClass="entr" presetSubtype="0" fill="hold" grpId="0" nodeType="clickEffect">
+                                  <p:stCondLst>
+                                    <p:cond delay="0"/>
+                                  </p:stCondLst>
+                                  <p:childTnLst>
+                                    <p:set>
+                                      <p:cBhvr>
+                                        <p:cTn id="30" dur="1" fill="hold">
+                                          <p:stCondLst>
+                                            <p:cond delay="0"/>
+                                          </p:stCondLst>
+                                        </p:cTn>
+                                        <p:tgtEl>
+                                          <p:spTgt spid="3">
+                                            <p:txEl>
+                                              <p:pRg st="13" end="13"/>
+                                            </p:txEl>
+                                          </p:spTgt>
+                                        </p:tgtEl>
+                                        <p:attrNameLst>
+                                          <p:attrName>style.visibility</p:attrName>
+                                        </p:attrNameLst>
+                                      </p:cBhvr>
+                                      <p:to>
+                                        <p:strVal val="visible"/>
+                                      </p:to>
+                                    </p:set>
+                                  </p:childTnLst>
+                                </p:cTn>
+                              </p:par>
+                            </p:childTnLst>
+                          </p:cTn>
+                        </p:par>
+                      </p:childTnLst>
+                    </p:cTn>
+                  </p:par>
+                  <p:par>
+                    <p:cTn id="31" fill="hold">
+                      <p:stCondLst>
+                        <p:cond delay="indefinite"/>
+                      </p:stCondLst>
+                      <p:childTnLst>
+                        <p:par>
+                          <p:cTn id="32" fill="hold">
+                            <p:stCondLst>
+                              <p:cond delay="0"/>
+                            </p:stCondLst>
+                            <p:childTnLst>
+                              <p:par>
+                                <p:cTn id="33" presetID="1" presetClass="entr" presetSubtype="0" fill="hold" grpId="0" nodeType="clickEffect">
+                                  <p:stCondLst>
+                                    <p:cond delay="0"/>
+                                  </p:stCondLst>
+                                  <p:childTnLst>
+                                    <p:set>
+                                      <p:cBhvr>
+                                        <p:cTn id="34" dur="1" fill="hold">
+                                          <p:stCondLst>
+                                            <p:cond delay="0"/>
+                                          </p:stCondLst>
+                                        </p:cTn>
+                                        <p:tgtEl>
+                                          <p:spTgt spid="3">
+                                            <p:txEl>
+                                              <p:pRg st="14" end="14"/>
+                                            </p:txEl>
+                                          </p:spTgt>
+                                        </p:tgtEl>
+                                        <p:attrNameLst>
+                                          <p:attrName>style.visibility</p:attrName>
+                                        </p:attrNameLst>
+                                      </p:cBhvr>
+                                      <p:to>
+                                        <p:strVal val="visible"/>
+                                      </p:to>
+                                    </p:set>
+                                  </p:childTnLst>
+                                </p:cTn>
+                              </p:par>
+                            </p:childTnLst>
+                          </p:cTn>
+                        </p:par>
+                      </p:childTnLst>
+                    </p:cTn>
+                  </p:par>
+                  <p:par>
+                    <p:cTn id="35" fill="hold">
+                      <p:stCondLst>
+                        <p:cond delay="indefinite"/>
+                      </p:stCondLst>
+                      <p:childTnLst>
+                        <p:par>
+                          <p:cTn id="36" fill="hold">
+                            <p:stCondLst>
+                              <p:cond delay="0"/>
+                            </p:stCondLst>
+                            <p:childTnLst>
+                              <p:par>
+                                <p:cTn id="37" presetID="1" presetClass="entr" presetSubtype="0" fill="hold" grpId="0" nodeType="clickEffect">
+                                  <p:stCondLst>
+                                    <p:cond delay="0"/>
+                                  </p:stCondLst>
+                                  <p:childTnLst>
+                                    <p:set>
+                                      <p:cBhvr>
+                                        <p:cTn id="38" dur="1" fill="hold">
+                                          <p:stCondLst>
+                                            <p:cond delay="0"/>
+                                          </p:stCondLst>
+                                        </p:cTn>
+                                        <p:tgtEl>
+                                          <p:spTgt spid="3">
+                                            <p:txEl>
+                                              <p:pRg st="19" end="19"/>
+                                            </p:txEl>
+                                          </p:spTgt>
+                                        </p:tgtEl>
+                                        <p:attrNameLst>
+                                          <p:attrName>style.visibility</p:attrName>
+                                        </p:attrNameLst>
+                                      </p:cBhvr>
+                                      <p:to>
+                                        <p:strVal val="visible"/>
+                                      </p:to>
+                                    </p:set>
+                                  </p:childTnLst>
+                                </p:cTn>
+                              </p:par>
+                            </p:childTnLst>
+                          </p:cTn>
+                        </p:par>
+                      </p:childTnLst>
+                    </p:cTn>
+                  </p:par>
+                  <p:par>
+                    <p:cTn id="39" fill="hold">
+                      <p:stCondLst>
+                        <p:cond delay="indefinite"/>
+                      </p:stCondLst>
+                      <p:childTnLst>
+                        <p:par>
+                          <p:cTn id="40" fill="hold">
+                            <p:stCondLst>
+                              <p:cond delay="0"/>
+                            </p:stCondLst>
+                            <p:childTnLst>
+                              <p:par>
+                                <p:cTn id="41" presetID="1" presetClass="entr" presetSubtype="0" fill="hold" grpId="0" nodeType="clickEffect">
+                                  <p:stCondLst>
+                                    <p:cond delay="0"/>
+                                  </p:stCondLst>
+                                  <p:childTnLst>
+                                    <p:set>
+                                      <p:cBhvr>
+                                        <p:cTn id="42" dur="1" fill="hold">
+                                          <p:stCondLst>
+                                            <p:cond delay="0"/>
+                                          </p:stCondLst>
+                                        </p:cTn>
+                                        <p:tgtEl>
+                                          <p:spTgt spid="3">
+                                            <p:txEl>
+                                              <p:pRg st="20" end="20"/>
+                                            </p:txEl>
+                                          </p:spTgt>
+                                        </p:tgtEl>
+                                        <p:attrNameLst>
+                                          <p:attrName>style.visibility</p:attrName>
+                                        </p:attrNameLst>
+                                      </p:cBhvr>
+                                      <p:to>
+                                        <p:strVal val="visible"/>
+                                      </p:to>
+                                    </p:set>
+                                  </p:childTnLst>
+                                </p:cTn>
+                              </p:par>
+                            </p:childTnLst>
+                          </p:cTn>
+                        </p:par>
+                      </p:childTnLst>
+                    </p:cTn>
+                  </p:par>
+                  <p:par>
+                    <p:cTn id="43" fill="hold">
+                      <p:stCondLst>
+                        <p:cond delay="indefinite"/>
+                      </p:stCondLst>
+                      <p:childTnLst>
+                        <p:par>
+                          <p:cTn id="44" fill="hold">
+                            <p:stCondLst>
+                              <p:cond delay="0"/>
+                            </p:stCondLst>
+                            <p:childTnLst>
+                              <p:par>
+                                <p:cTn id="45" presetID="1" presetClass="entr" presetSubtype="0" fill="hold" grpId="0" nodeType="clickEffect">
+                                  <p:stCondLst>
+                                    <p:cond delay="0"/>
+                                  </p:stCondLst>
+                                  <p:childTnLst>
+                                    <p:set>
+                                      <p:cBhvr>
+                                        <p:cTn id="46" dur="1" fill="hold">
+                                          <p:stCondLst>
+                                            <p:cond delay="0"/>
+                                          </p:stCondLst>
+                                        </p:cTn>
+                                        <p:tgtEl>
+                                          <p:spTgt spid="3">
+                                            <p:txEl>
+                                              <p:pRg st="21" end="21"/>
+                                            </p:txEl>
+                                          </p:spTgt>
+                                        </p:tgtEl>
+                                        <p:attrNameLst>
+                                          <p:attrName>style.visibility</p:attrName>
+                                        </p:attrNameLst>
+                                      </p:cBhvr>
+                                      <p:to>
+                                        <p:strVal val="visible"/>
+                                      </p:to>
+                                    </p:set>
+                                  </p:childTnLst>
+                                </p:cTn>
+                              </p:par>
+                            </p:childTnLst>
+                          </p:cTn>
+                        </p:par>
+                      </p:childTnLst>
+                    </p:cTn>
+                  </p:par>
+                </p:childTnLst>
+              </p:cTn>
+              <p:prevCondLst>
+                <p:cond evt="onPrev" delay="0">
+                  <p:tgtEl>
+                    <p:sldTgt/>
+                  </p:tgtEl>
+                </p:cond>
+              </p:prevCondLst>
+              <p:nextCondLst>
+                <p:cond evt="onNext" delay="0">
+                  <p:tgtEl>
+                    <p:sldTgt/>
+                  </p:tgtEl>
+                </p:cond>
+              </p:nextCondLst>
+            </p:seq>
+          </p:childTnLst>
+        </p:cTn>
+      </p:par>
+    </p:tnLst>
+    <p:bldLst>
+      <p:bldP spid="3" grpId="0" uiExpand="1" build="p"/>
+    </p:bldLst>
+  </p:timing>
+</p:sld>
+</file>
+
+<file path=ppt/slides/slide11.xml><?xml version="1.0" encoding="utf-8"?>
+<p:sld xmlns:a="http://schemas.openxmlformats.org/drawingml/2006/main" xmlns:r="http://schemas.openxmlformats.org/officeDocument/2006/relationships" xmlns:p="http://schemas.openxmlformats.org/presentationml/2006/main">
+  <p:cSld>
+    <p:spTree>
+      <p:nvGrpSpPr>
+        <p:cNvPr id="1" name=""/>
+        <p:cNvGrpSpPr/>
+        <p:nvPr/>
+      </p:nvGrpSpPr>
+      <p:grpSpPr>
+        <a:xfrm>
+          <a:off x="0" y="0"/>
+          <a:ext cx="0" cy="0"/>
+          <a:chOff x="0" y="0"/>
+          <a:chExt cx="0" cy="0"/>
+        </a:xfrm>
+      </p:grpSpPr>
+      <p:sp>
+        <p:nvSpPr>
+          <p:cNvPr id="2" name="Title 1"/>
+          <p:cNvSpPr>
+            <a:spLocks noGrp="1"/>
+          </p:cNvSpPr>
+          <p:nvPr>
+            <p:ph type="title"/>
+          </p:nvPr>
+        </p:nvSpPr>
+        <p:spPr/>
+        <p:txBody>
+          <a:bodyPr/>
+          <a:lstStyle/>
+          <a:p>
+            <a:pPr lvl="0" indent="0" marL="0">
+              <a:buNone/>
+            </a:pPr>
+            <a:r>
+              <a:rPr/>
+              <a:t>Wrap-Up</a:t>
+            </a:r>
+          </a:p>
+        </p:txBody>
+      </p:sp>
+      <p:sp>
+        <p:nvSpPr>
+          <p:cNvPr id="3" name="Content Placeholder 2"/>
+          <p:cNvSpPr>
+            <a:spLocks noGrp="1"/>
+          </p:cNvSpPr>
+          <p:nvPr>
+            <p:ph idx="1"/>
+          </p:nvPr>
+        </p:nvSpPr>
+        <p:spPr/>
+        <p:txBody>
+          <a:bodyPr/>
+          <a:lstStyle/>
+          <a:p>
+            <a:pPr lvl="0" indent="0" marL="0">
+              <a:spcBef>
+                <a:spcPts val="3000"/>
+              </a:spcBef>
+              <a:buNone/>
+            </a:pPr>
+            <a:r>
+              <a:rPr b="1"/>
+              <a:t>Key Takeaways</a:t>
+            </a:r>
+          </a:p>
+          <a:p>
+            <a:pPr lvl="0" indent="-342900" marL="342900">
+              <a:buAutoNum type="arabicPeriod"/>
+            </a:pPr>
+            <a:r>
+              <a:rPr/>
+              <a:t>BCA provides a systematic framework for comparing decisions — but every analysis embeds value judgments</a:t>
+            </a:r>
+          </a:p>
+          <a:p>
+            <a:pPr lvl="0" indent="-342900" marL="342900">
+              <a:buAutoNum type="arabicPeriod"/>
+            </a:pPr>
+            <a:r>
+              <a:rPr/>
+              <a:t>Utility theory gives us the math; opportunity costs, discounting, and expected value give us the tools</a:t>
+            </a:r>
+          </a:p>
+          <a:p>
+            <a:pPr lvl="0" indent="-342900" marL="342900">
+              <a:buAutoNum type="arabicPeriod"/>
+            </a:pPr>
+            <a:r>
+              <a:rPr/>
+              <a:t>The discount rate is a choice, not a fact — and it can flip a project from “fails” to “passes”</a:t>
+            </a:r>
+          </a:p>
+          <a:p>
+            <a:pPr lvl="0" indent="-342900" marL="342900">
+              <a:buAutoNum type="arabicPeriod"/>
+            </a:pPr>
+            <a:r>
+              <a:rPr/>
+              <a:t>BCA is decision-</a:t>
+            </a:r>
+            <a:r>
+              <a:rPr i="1"/>
+              <a:t>support</a:t>
+            </a:r>
+            <a:r>
+              <a:rPr/>
+              <a:t>: the assumptions matter more than the final number</a:t>
+            </a:r>
+          </a:p>
+          <a:p>
+            <a:pPr lvl="0" indent="0" marL="0">
+              <a:spcBef>
+                <a:spcPts val="3000"/>
+              </a:spcBef>
+              <a:buNone/>
+            </a:pPr>
+            <a:r>
+              <a:rPr b="1"/>
+              <a:t>Wednesday Preview</a:t>
+            </a:r>
+          </a:p>
+          <a:p>
+            <a:pPr lvl="0" indent="0" marL="0">
+              <a:buNone/>
+            </a:pPr>
+            <a:r>
+              <a:rPr b="1"/>
+              <a:t>Paper Discussion:</a:t>
+            </a:r>
+            <a:r>
+              <a:rPr/>
+              <a:t> Discounting &amp; BCA</a:t>
+            </a:r>
+          </a:p>
+          <a:p>
+            <a:pPr lvl="0"/>
+            <a:r>
+              <a:rPr/>
+              <a:t>Read Arrow et al. (2013)</a:t>
+            </a:r>
+          </a:p>
+          <a:p>
+            <a:pPr lvl="0"/>
+            <a:r>
+              <a:rPr/>
+              <a:t>Optional: skim U.S. Office of Management and Budget (2023)</a:t>
+            </a:r>
+          </a:p>
+          <a:p>
+            <a:pPr lvl="0"/>
+            <a:r>
+              <a:rPr/>
+              <a:t>Before class: look up how </a:t>
+            </a:r>
+            <a:r>
+              <a:rPr b="1"/>
+              <a:t>one federal agency</a:t>
+            </a:r>
+            <a:r>
+              <a:rPr/>
+              <a:t> (USACE, EPA, FEMA, or TWDB) conducts BCA — what discount rate do they use? What counts as a benefit?</a:t>
+            </a:r>
+          </a:p>
+          <a:p>
+            <a:pPr lvl="0"/>
+            <a:r>
+              <a:rPr/>
+              <a:t>Come ready to discuss: which rationale for discounting do you find most convincing?</a:t>
+            </a:r>
+          </a:p>
+          <a:p>
+            <a:pPr lvl="0" indent="0" marL="0">
+              <a:spcBef>
+                <a:spcPts val="3000"/>
+              </a:spcBef>
+              <a:buNone/>
+            </a:pPr>
+            <a:r>
+              <a:rPr b="1"/>
+              <a:t>References</a:t>
+            </a:r>
+          </a:p>
+          <a:p>
+            <a:pPr lvl="0" indent="0" marL="0">
+              <a:buNone/>
+            </a:pPr>
+            <a:r>
+              <a:rPr/>
+              <a:t>Arrow, K., M. Cropper, C. Gollier, B. Groom, G. Heal, R. Newell, W. Nordhaus, et al. 2013. “Determining Benefits and Costs for Future Generations.” </a:t>
+            </a:r>
+            <a:r>
+              <a:rPr i="1"/>
+              <a:t>Science</a:t>
+            </a:r>
+            <a:r>
+              <a:rPr/>
+              <a:t> 341 (6144): 349–50. </a:t>
+            </a:r>
+            <a:r>
+              <a:rPr>
+                <a:hlinkClick r:id="rId3"/>
+              </a:rPr>
+              <a:t>https://doi.org/10.1126/science.1235665</a:t>
+            </a:r>
+            <a:r>
+              <a:rPr/>
+              <a:t>.</a:t>
+            </a:r>
+          </a:p>
+          <a:p>
+            <a:pPr lvl="0" indent="0" marL="0">
+              <a:buNone/>
+            </a:pPr>
+            <a:r>
+              <a:rPr/>
+              <a:t>U.S. Office of Management and Budget. 2023. “Circular No. A-94: Guidelines and Discount Rates for Benefit-Cost Analysis of Federal Programs.” Circular. Executive Office of the President. </a:t>
+            </a:r>
+            <a:r>
+              <a:rPr>
+                <a:hlinkClick r:id="rId4"/>
+              </a:rPr>
+              <a:t>https://www.whitehouse.gov/wp-content/uploads/2023/11/CircularA-94.pdf</a:t>
+            </a:r>
+            <a:r>
+              <a:rPr/>
+              <a:t>.</a:t>
+            </a:r>
+          </a:p>
+        </p:txBody>
+      </p:sp>
+    </p:spTree>
+  </p:cSld>
+  <p:timing>
+    <p:tnLst>
+      <p:par>
+        <p:cTn id="1" dur="indefinite" restart="never" nodeType="tmRoot">
+          <p:childTnLst>
+            <p:seq concurrent="1" nextAc="seek">
+              <p:cTn id="2" dur="indefinite" nodeType="mainSeq">
+                <p:childTnLst>
+                  <p:par>
+                    <p:cTn id="3" fill="hold">
+                      <p:stCondLst>
+                        <p:cond delay="indefinite"/>
+                      </p:stCondLst>
+                      <p:childTnLst>
+                        <p:par>
+                          <p:cTn id="4" fill="hold">
+                            <p:stCondLst>
+                              <p:cond delay="0"/>
+                            </p:stCondLst>
+                            <p:childTnLst>
+                              <p:par>
+                                <p:cTn id="5" presetID="1" presetClass="entr" presetSubtype="0" fill="hold" grpId="0" nodeType="clickEffect">
+                                  <p:stCondLst>
+                                    <p:cond delay="0"/>
+                                  </p:stCondLst>
+                                  <p:childTnLst>
+                                    <p:set>
+                                      <p:cBhvr>
+                                        <p:cTn id="6" dur="1" fill="hold">
+                                          <p:stCondLst>
+                                            <p:cond delay="0"/>
+                                          </p:stCondLst>
+                                        </p:cTn>
+                                        <p:tgtEl>
+                                          <p:spTgt spid="3">
+                                            <p:txEl>
+                                              <p:pRg st="1" end="1"/>
+                                            </p:txEl>
+                                          </p:spTgt>
+                                        </p:tgtEl>
+                                        <p:attrNameLst>
+                                          <p:attrName>style.visibility</p:attrName>
+                                        </p:attrNameLst>
+                                      </p:cBhvr>
+                                      <p:to>
+                                        <p:strVal val="visible"/>
+                                      </p:to>
+                                    </p:set>
+                                  </p:childTnLst>
+                                </p:cTn>
+                              </p:par>
+                            </p:childTnLst>
+                          </p:cTn>
+                        </p:par>
+                      </p:childTnLst>
+                    </p:cTn>
+                  </p:par>
+                  <p:par>
+                    <p:cTn id="7" fill="hold">
+                      <p:stCondLst>
+                        <p:cond delay="indefinite"/>
+                      </p:stCondLst>
+                      <p:childTnLst>
+                        <p:par>
+                          <p:cTn id="8" fill="hold">
+                            <p:stCondLst>
+                              <p:cond delay="0"/>
+                            </p:stCondLst>
+                            <p:childTnLst>
+                              <p:par>
+                                <p:cTn id="9" presetID="1" presetClass="entr" presetSubtype="0" fill="hold" grpId="0" nodeType="clickEffect">
+                                  <p:stCondLst>
+                                    <p:cond delay="0"/>
+                                  </p:stCondLst>
+                                  <p:childTnLst>
+                                    <p:set>
+                                      <p:cBhvr>
+                                        <p:cTn id="10" dur="1" fill="hold">
+                                          <p:stCondLst>
+                                            <p:cond delay="0"/>
+                                          </p:stCondLst>
+                                        </p:cTn>
+                                        <p:tgtEl>
+                                          <p:spTgt spid="3">
+                                            <p:txEl>
+                                              <p:pRg st="2" end="2"/>
+                                            </p:txEl>
+                                          </p:spTgt>
+                                        </p:tgtEl>
+                                        <p:attrNameLst>
+                                          <p:attrName>style.visibility</p:attrName>
+                                        </p:attrNameLst>
+                                      </p:cBhvr>
+                                      <p:to>
+                                        <p:strVal val="visible"/>
+                                      </p:to>
+                                    </p:set>
+                                  </p:childTnLst>
+                                </p:cTn>
+                              </p:par>
+                            </p:childTnLst>
+                          </p:cTn>
+                        </p:par>
+                      </p:childTnLst>
+                    </p:cTn>
+                  </p:par>
+                  <p:par>
+                    <p:cTn id="11" fill="hold">
+                      <p:stCondLst>
+                        <p:cond delay="indefinite"/>
+                      </p:stCondLst>
+                      <p:childTnLst>
+                        <p:par>
+                          <p:cTn id="12" fill="hold">
+                            <p:stCondLst>
+                              <p:cond delay="0"/>
+                            </p:stCondLst>
+                            <p:childTnLst>
+                              <p:par>
+                                <p:cTn id="13" presetID="1" presetClass="entr" presetSubtype="0" fill="hold" grpId="0" nodeType="clickEffect">
+                                  <p:stCondLst>
+                                    <p:cond delay="0"/>
+                                  </p:stCondLst>
+                                  <p:childTnLst>
+                                    <p:set>
+                                      <p:cBhvr>
+                                        <p:cTn id="14" dur="1" fill="hold">
+                                          <p:stCondLst>
+                                            <p:cond delay="0"/>
+                                          </p:stCondLst>
+                                        </p:cTn>
+                                        <p:tgtEl>
+                                          <p:spTgt spid="3">
+                                            <p:txEl>
+                                              <p:pRg st="3" end="3"/>
+                                            </p:txEl>
+                                          </p:spTgt>
+                                        </p:tgtEl>
+                                        <p:attrNameLst>
+                                          <p:attrName>style.visibility</p:attrName>
+                                        </p:attrNameLst>
+                                      </p:cBhvr>
+                                      <p:to>
+                                        <p:strVal val="visible"/>
+                                      </p:to>
+                                    </p:set>
+                                  </p:childTnLst>
+                                </p:cTn>
+                              </p:par>
+                            </p:childTnLst>
+                          </p:cTn>
+                        </p:par>
+                      </p:childTnLst>
+                    </p:cTn>
+                  </p:par>
+                  <p:par>
+                    <p:cTn id="15" fill="hold">
+                      <p:stCondLst>
+                        <p:cond delay="indefinite"/>
+                      </p:stCondLst>
+                      <p:childTnLst>
+                        <p:par>
+                          <p:cTn id="16" fill="hold">
+                            <p:stCondLst>
+                              <p:cond delay="0"/>
+                            </p:stCondLst>
+                            <p:childTnLst>
+                              <p:par>
+                                <p:cTn id="17" presetID="1" presetClass="entr" presetSubtype="0" fill="hold" grpId="0" nodeType="clickEffect">
+                                  <p:stCondLst>
+                                    <p:cond delay="0"/>
+                                  </p:stCondLst>
+                                  <p:childTnLst>
+                                    <p:set>
+                                      <p:cBhvr>
+                                        <p:cTn id="18" dur="1" fill="hold">
+                                          <p:stCondLst>
+                                            <p:cond delay="0"/>
+                                          </p:stCondLst>
+                                        </p:cTn>
+                                        <p:tgtEl>
+                                          <p:spTgt spid="3">
+                                            <p:txEl>
+                                              <p:pRg st="4" end="4"/>
+                                            </p:txEl>
+                                          </p:spTgt>
+                                        </p:tgtEl>
+                                        <p:attrNameLst>
+                                          <p:attrName>style.visibility</p:attrName>
+                                        </p:attrNameLst>
+                                      </p:cBhvr>
+                                      <p:to>
+                                        <p:strVal val="visible"/>
+                                      </p:to>
+                                    </p:set>
+                                  </p:childTnLst>
+                                </p:cTn>
+                              </p:par>
+                            </p:childTnLst>
+                          </p:cTn>
+                        </p:par>
+                      </p:childTnLst>
+                    </p:cTn>
+                  </p:par>
+                  <p:par>
+                    <p:cTn id="19" fill="hold">
+                      <p:stCondLst>
+                        <p:cond delay="indefinite"/>
+                      </p:stCondLst>
+                      <p:childTnLst>
+                        <p:par>
+                          <p:cTn id="20" fill="hold">
+                            <p:stCondLst>
+                              <p:cond delay="0"/>
+                            </p:stCondLst>
+                            <p:childTnLst>
+                              <p:par>
+                                <p:cTn id="21" presetID="1" presetClass="entr" presetSubtype="0" fill="hold" grpId="0" nodeType="clickEffect">
+                                  <p:stCondLst>
+                                    <p:cond delay="0"/>
+                                  </p:stCondLst>
+                                  <p:childTnLst>
+                                    <p:set>
+                                      <p:cBhvr>
+                                        <p:cTn id="22" dur="1" fill="hold">
+                                          <p:stCondLst>
+                                            <p:cond delay="0"/>
+                                          </p:stCondLst>
+                                        </p:cTn>
+                                        <p:tgtEl>
+                                          <p:spTgt spid="3">
+                                            <p:txEl>
+                                              <p:pRg st="7" end="7"/>
+                                            </p:txEl>
+                                          </p:spTgt>
+                                        </p:tgtEl>
+                                        <p:attrNameLst>
+                                          <p:attrName>style.visibility</p:attrName>
+                                        </p:attrNameLst>
+                                      </p:cBhvr>
+                                      <p:to>
+                                        <p:strVal val="visible"/>
+                                      </p:to>
+                                    </p:set>
+                                  </p:childTnLst>
+                                </p:cTn>
+                              </p:par>
+                            </p:childTnLst>
+                          </p:cTn>
+                        </p:par>
+                      </p:childTnLst>
+                    </p:cTn>
+                  </p:par>
+                  <p:par>
+                    <p:cTn id="23" fill="hold">
+                      <p:stCondLst>
+                        <p:cond delay="indefinite"/>
+                      </p:stCondLst>
+                      <p:childTnLst>
+                        <p:par>
+                          <p:cTn id="24" fill="hold">
+                            <p:stCondLst>
+                              <p:cond delay="0"/>
+                            </p:stCondLst>
+                            <p:childTnLst>
+                              <p:par>
+                                <p:cTn id="25" presetID="1" presetClass="entr" presetSubtype="0" fill="hold" grpId="0" nodeType="clickEffect">
+                                  <p:stCondLst>
+                                    <p:cond delay="0"/>
+                                  </p:stCondLst>
+                                  <p:childTnLst>
+                                    <p:set>
+                                      <p:cBhvr>
+                                        <p:cTn id="26" dur="1" fill="hold">
+                                          <p:stCondLst>
+                                            <p:cond delay="0"/>
+                                          </p:stCondLst>
+                                        </p:cTn>
+                                        <p:tgtEl>
+                                          <p:spTgt spid="3">
+                                            <p:txEl>
+                                              <p:pRg st="8" end="8"/>
+                                            </p:txEl>
+                                          </p:spTgt>
+                                        </p:tgtEl>
+                                        <p:attrNameLst>
+                                          <p:attrName>style.visibility</p:attrName>
+                                        </p:attrNameLst>
+                                      </p:cBhvr>
+                                      <p:to>
+                                        <p:strVal val="visible"/>
+                                      </p:to>
+                                    </p:set>
+                                  </p:childTnLst>
+                                </p:cTn>
+                              </p:par>
+                            </p:childTnLst>
+                          </p:cTn>
+                        </p:par>
+                      </p:childTnLst>
+                    </p:cTn>
+                  </p:par>
+                  <p:par>
+                    <p:cTn id="27" fill="hold">
+                      <p:stCondLst>
+                        <p:cond delay="indefinite"/>
+                      </p:stCondLst>
+                      <p:childTnLst>
+                        <p:par>
+                          <p:cTn id="28" fill="hold">
+                            <p:stCondLst>
+                              <p:cond delay="0"/>
+                            </p:stCondLst>
+                            <p:childTnLst>
+                              <p:par>
+                                <p:cTn id="29" presetID="1" presetClass="entr" presetSubtype="0" fill="hold" grpId="0" nodeType="clickEffect">
+                                  <p:stCondLst>
+                                    <p:cond delay="0"/>
+                                  </p:stCondLst>
+                                  <p:childTnLst>
+                                    <p:set>
+                                      <p:cBhvr>
+                                        <p:cTn id="30" dur="1" fill="hold">
+                                          <p:stCondLst>
+                                            <p:cond delay="0"/>
+                                          </p:stCondLst>
+                                        </p:cTn>
+                                        <p:tgtEl>
+                                          <p:spTgt spid="3">
+                                            <p:txEl>
+                                              <p:pRg st="9" end="9"/>
+                                            </p:txEl>
+                                          </p:spTgt>
+                                        </p:tgtEl>
+                                        <p:attrNameLst>
+                                          <p:attrName>style.visibility</p:attrName>
+                                        </p:attrNameLst>
+                                      </p:cBhvr>
+                                      <p:to>
+                                        <p:strVal val="visible"/>
+                                      </p:to>
+                                    </p:set>
+                                  </p:childTnLst>
+                                </p:cTn>
+                              </p:par>
+                            </p:childTnLst>
+                          </p:cTn>
+                        </p:par>
+                      </p:childTnLst>
+                    </p:cTn>
+                  </p:par>
+                  <p:par>
+                    <p:cTn id="31" fill="hold">
+                      <p:stCondLst>
+                        <p:cond delay="indefinite"/>
+                      </p:stCondLst>
+                      <p:childTnLst>
+                        <p:par>
+                          <p:cTn id="32" fill="hold">
+                            <p:stCondLst>
+                              <p:cond delay="0"/>
+                            </p:stCondLst>
+                            <p:childTnLst>
+                              <p:par>
+                                <p:cTn id="33" presetID="1" presetClass="entr" presetSubtype="0" fill="hold" grpId="0" nodeType="clickEffect">
+                                  <p:stCondLst>
+                                    <p:cond delay="0"/>
+                                  </p:stCondLst>
+                                  <p:childTnLst>
+                                    <p:set>
+                                      <p:cBhvr>
+                                        <p:cTn id="34" dur="1" fill="hold">
+                                          <p:stCondLst>
+                                            <p:cond delay="0"/>
+                                          </p:stCondLst>
+                                        </p:cTn>
+                                        <p:tgtEl>
+                                          <p:spTgt spid="3">
+                                            <p:txEl>
+                                              <p:pRg st="10" end="10"/>
+                                            </p:txEl>
+                                          </p:spTgt>
+                                        </p:tgtEl>
+                                        <p:attrNameLst>
+                                          <p:attrName>style.visibility</p:attrName>
+                                        </p:attrNameLst>
+                                      </p:cBhvr>
+                                      <p:to>
+                                        <p:strVal val="visible"/>
+                                      </p:to>
+                                    </p:set>
+                                  </p:childTnLst>
+                                </p:cTn>
+                              </p:par>
+                            </p:childTnLst>
+                          </p:cTn>
+                        </p:par>
+                      </p:childTnLst>
+                    </p:cTn>
+                  </p:par>
+                </p:childTnLst>
+              </p:cTn>
+              <p:prevCondLst>
+                <p:cond evt="onPrev" delay="0">
+                  <p:tgtEl>
+                    <p:sldTgt/>
+                  </p:tgtEl>
+                </p:cond>
+              </p:prevCondLst>
+              <p:nextCondLst>
+                <p:cond evt="onNext" delay="0">
+                  <p:tgtEl>
+                    <p:sldTgt/>
+                  </p:tgtEl>
+                </p:cond>
+              </p:nextCondLst>
+            </p:seq>
+          </p:childTnLst>
+        </p:cTn>
+      </p:par>
+    </p:tnLst>
+    <p:bldLst>
+      <p:bldP spid="3" grpId="0" uiExpand="1" build="p"/>
+    </p:bldLst>
+  </p:timing>
 </p:sld>
 </file>
 
@@ -3278,7 +6220,7 @@
             </a:pPr>
             <a:r>
               <a:rPr/>
-              <a:t>Preparation</a:t>
+              <a:t>A Decision Problem</a:t>
             </a:r>
           </a:p>
         </p:txBody>
@@ -3299,17 +6241,550 @@
           <a:lstStyle/>
           <a:p>
             <a:pPr lvl="0" indent="0" marL="0">
+              <a:spcBef>
+                <a:spcPts val="3000"/>
+              </a:spcBef>
               <a:buNone/>
             </a:pPr>
             <a:r>
+              <a:rPr b="1"/>
+              <a:t>How Much Would You Pay?</a:t>
+            </a:r>
+          </a:p>
+          <a:p>
+            <a:pPr lvl="0" indent="0" marL="0">
+              <a:buNone/>
+            </a:pPr>
+            <a:r>
               <a:rPr/>
-              <a:t>Read a part of van Dantzig (1956) and then we will revisit it in the reading</a:t>
+              <a:t>Imagine you own a home in Houston’s Meyerland neighborhood.</a:t>
+            </a:r>
+          </a:p>
+          <a:p>
+            <a:pPr lvl="0"/>
+            <a:r>
+              <a:rPr/>
+              <a:t>Your house flooded in 2015, 2016, </a:t>
+            </a:r>
+            <a:r>
+              <a:rPr i="1"/>
+              <a:t>and</a:t>
+            </a:r>
+            <a:r>
+              <a:rPr/>
+              <a:t> 2017</a:t>
+            </a:r>
+          </a:p>
+          <a:p>
+            <a:pPr lvl="0"/>
+            <a:r>
+              <a:rPr/>
+              <a:t>A contractor offers to elevate your house by 5 feet for </a:t>
+            </a:r>
+            <a:r>
+              <a:rPr b="1"/>
+              <a:t>$80,000</a:t>
+            </a:r>
+          </a:p>
+          <a:p>
+            <a:pPr lvl="0"/>
+            <a:r>
+              <a:rPr/>
+              <a:t>Should you do it?</a:t>
+            </a:r>
+          </a:p>
+          <a:p>
+            <a:pPr lvl="0" indent="0" marL="0">
+              <a:spcBef>
+                <a:spcPts val="3000"/>
+              </a:spcBef>
+              <a:buNone/>
+            </a:pPr>
+            <a:r>
+              <a:rPr b="1"/>
+              <a:t>What Do We Need to Know?</a:t>
+            </a:r>
+          </a:p>
+          <a:p>
+            <a:pPr lvl="0"/>
+            <a:r>
+              <a:rPr/>
+              <a:t>What does elevation cost? (up-front + disruption)</a:t>
+            </a:r>
+          </a:p>
+          <a:p>
+            <a:pPr lvl="0"/>
+            <a:r>
+              <a:rPr/>
+              <a:t>What are the benefits? (avoided flood damage, insurance savings, peace of mind)</a:t>
+            </a:r>
+          </a:p>
+          <a:p>
+            <a:pPr lvl="0"/>
+            <a:r>
+              <a:rPr/>
+              <a:t>How likely is future flooding?</a:t>
+            </a:r>
+          </a:p>
+          <a:p>
+            <a:pPr lvl="0"/>
+            <a:r>
+              <a:rPr/>
+              <a:t>How long do we plan to live there?</a:t>
+            </a:r>
+          </a:p>
+          <a:p>
+            <a:pPr lvl="0"/>
+            <a:r>
+              <a:rPr/>
+              <a:t>How do we compare costs </a:t>
+            </a:r>
+            <a:r>
+              <a:rPr i="1"/>
+              <a:t>now</a:t>
+            </a:r>
+            <a:r>
+              <a:rPr/>
+              <a:t> vs. benefits </a:t>
+            </a:r>
+            <a:r>
+              <a:rPr i="1"/>
+              <a:t>later</a:t>
+            </a:r>
+            <a:r>
+              <a:rPr/>
+              <a:t>?</a:t>
             </a:r>
           </a:p>
         </p:txBody>
       </p:sp>
     </p:spTree>
   </p:cSld>
+  <p:timing>
+    <p:tnLst>
+      <p:par>
+        <p:cTn id="1" dur="indefinite" restart="never" nodeType="tmRoot">
+          <p:childTnLst>
+            <p:seq concurrent="1" nextAc="seek">
+              <p:cTn id="2" dur="indefinite" nodeType="mainSeq">
+                <p:childTnLst>
+                  <p:par>
+                    <p:cTn id="3" fill="hold">
+                      <p:stCondLst>
+                        <p:cond delay="indefinite"/>
+                      </p:stCondLst>
+                      <p:childTnLst>
+                        <p:par>
+                          <p:cTn id="4" fill="hold">
+                            <p:stCondLst>
+                              <p:cond delay="0"/>
+                            </p:stCondLst>
+                            <p:childTnLst>
+                              <p:par>
+                                <p:cTn id="5" presetID="1" presetClass="entr" presetSubtype="0" fill="hold" grpId="0" nodeType="clickEffect">
+                                  <p:stCondLst>
+                                    <p:cond delay="0"/>
+                                  </p:stCondLst>
+                                  <p:childTnLst>
+                                    <p:set>
+                                      <p:cBhvr>
+                                        <p:cTn id="6" dur="1" fill="hold">
+                                          <p:stCondLst>
+                                            <p:cond delay="0"/>
+                                          </p:stCondLst>
+                                        </p:cTn>
+                                        <p:tgtEl>
+                                          <p:spTgt spid="3">
+                                            <p:txEl>
+                                              <p:pRg st="2" end="2"/>
+                                            </p:txEl>
+                                          </p:spTgt>
+                                        </p:tgtEl>
+                                        <p:attrNameLst>
+                                          <p:attrName>style.visibility</p:attrName>
+                                        </p:attrNameLst>
+                                      </p:cBhvr>
+                                      <p:to>
+                                        <p:strVal val="visible"/>
+                                      </p:to>
+                                    </p:set>
+                                  </p:childTnLst>
+                                </p:cTn>
+                              </p:par>
+                            </p:childTnLst>
+                          </p:cTn>
+                        </p:par>
+                      </p:childTnLst>
+                    </p:cTn>
+                  </p:par>
+                  <p:par>
+                    <p:cTn id="7" fill="hold">
+                      <p:stCondLst>
+                        <p:cond delay="indefinite"/>
+                      </p:stCondLst>
+                      <p:childTnLst>
+                        <p:par>
+                          <p:cTn id="8" fill="hold">
+                            <p:stCondLst>
+                              <p:cond delay="0"/>
+                            </p:stCondLst>
+                            <p:childTnLst>
+                              <p:par>
+                                <p:cTn id="9" presetID="1" presetClass="entr" presetSubtype="0" fill="hold" grpId="0" nodeType="clickEffect">
+                                  <p:stCondLst>
+                                    <p:cond delay="0"/>
+                                  </p:stCondLst>
+                                  <p:childTnLst>
+                                    <p:set>
+                                      <p:cBhvr>
+                                        <p:cTn id="10" dur="1" fill="hold">
+                                          <p:stCondLst>
+                                            <p:cond delay="0"/>
+                                          </p:stCondLst>
+                                        </p:cTn>
+                                        <p:tgtEl>
+                                          <p:spTgt spid="3">
+                                            <p:txEl>
+                                              <p:pRg st="3" end="3"/>
+                                            </p:txEl>
+                                          </p:spTgt>
+                                        </p:tgtEl>
+                                        <p:attrNameLst>
+                                          <p:attrName>style.visibility</p:attrName>
+                                        </p:attrNameLst>
+                                      </p:cBhvr>
+                                      <p:to>
+                                        <p:strVal val="visible"/>
+                                      </p:to>
+                                    </p:set>
+                                  </p:childTnLst>
+                                </p:cTn>
+                              </p:par>
+                            </p:childTnLst>
+                          </p:cTn>
+                        </p:par>
+                      </p:childTnLst>
+                    </p:cTn>
+                  </p:par>
+                  <p:par>
+                    <p:cTn id="11" fill="hold">
+                      <p:stCondLst>
+                        <p:cond delay="indefinite"/>
+                      </p:stCondLst>
+                      <p:childTnLst>
+                        <p:par>
+                          <p:cTn id="12" fill="hold">
+                            <p:stCondLst>
+                              <p:cond delay="0"/>
+                            </p:stCondLst>
+                            <p:childTnLst>
+                              <p:par>
+                                <p:cTn id="13" presetID="1" presetClass="entr" presetSubtype="0" fill="hold" grpId="0" nodeType="clickEffect">
+                                  <p:stCondLst>
+                                    <p:cond delay="0"/>
+                                  </p:stCondLst>
+                                  <p:childTnLst>
+                                    <p:set>
+                                      <p:cBhvr>
+                                        <p:cTn id="14" dur="1" fill="hold">
+                                          <p:stCondLst>
+                                            <p:cond delay="0"/>
+                                          </p:stCondLst>
+                                        </p:cTn>
+                                        <p:tgtEl>
+                                          <p:spTgt spid="3">
+                                            <p:txEl>
+                                              <p:pRg st="4" end="4"/>
+                                            </p:txEl>
+                                          </p:spTgt>
+                                        </p:tgtEl>
+                                        <p:attrNameLst>
+                                          <p:attrName>style.visibility</p:attrName>
+                                        </p:attrNameLst>
+                                      </p:cBhvr>
+                                      <p:to>
+                                        <p:strVal val="visible"/>
+                                      </p:to>
+                                    </p:set>
+                                  </p:childTnLst>
+                                </p:cTn>
+                              </p:par>
+                            </p:childTnLst>
+                          </p:cTn>
+                        </p:par>
+                      </p:childTnLst>
+                    </p:cTn>
+                  </p:par>
+                  <p:par>
+                    <p:cTn id="15" fill="hold">
+                      <p:stCondLst>
+                        <p:cond delay="indefinite"/>
+                      </p:stCondLst>
+                      <p:childTnLst>
+                        <p:par>
+                          <p:cTn id="16" fill="hold">
+                            <p:stCondLst>
+                              <p:cond delay="0"/>
+                            </p:stCondLst>
+                            <p:childTnLst>
+                              <p:par>
+                                <p:cTn id="17" presetID="1" presetClass="entr" presetSubtype="0" fill="hold" grpId="0" nodeType="clickEffect">
+                                  <p:stCondLst>
+                                    <p:cond delay="0"/>
+                                  </p:stCondLst>
+                                  <p:childTnLst>
+                                    <p:set>
+                                      <p:cBhvr>
+                                        <p:cTn id="18" dur="1" fill="hold">
+                                          <p:stCondLst>
+                                            <p:cond delay="0"/>
+                                          </p:stCondLst>
+                                        </p:cTn>
+                                        <p:tgtEl>
+                                          <p:spTgt spid="3">
+                                            <p:txEl>
+                                              <p:pRg st="6" end="6"/>
+                                            </p:txEl>
+                                          </p:spTgt>
+                                        </p:tgtEl>
+                                        <p:attrNameLst>
+                                          <p:attrName>style.visibility</p:attrName>
+                                        </p:attrNameLst>
+                                      </p:cBhvr>
+                                      <p:to>
+                                        <p:strVal val="visible"/>
+                                      </p:to>
+                                    </p:set>
+                                  </p:childTnLst>
+                                </p:cTn>
+                              </p:par>
+                            </p:childTnLst>
+                          </p:cTn>
+                        </p:par>
+                      </p:childTnLst>
+                    </p:cTn>
+                  </p:par>
+                  <p:par>
+                    <p:cTn id="19" fill="hold">
+                      <p:stCondLst>
+                        <p:cond delay="indefinite"/>
+                      </p:stCondLst>
+                      <p:childTnLst>
+                        <p:par>
+                          <p:cTn id="20" fill="hold">
+                            <p:stCondLst>
+                              <p:cond delay="0"/>
+                            </p:stCondLst>
+                            <p:childTnLst>
+                              <p:par>
+                                <p:cTn id="21" presetID="1" presetClass="entr" presetSubtype="0" fill="hold" grpId="0" nodeType="clickEffect">
+                                  <p:stCondLst>
+                                    <p:cond delay="0"/>
+                                  </p:stCondLst>
+                                  <p:childTnLst>
+                                    <p:set>
+                                      <p:cBhvr>
+                                        <p:cTn id="22" dur="1" fill="hold">
+                                          <p:stCondLst>
+                                            <p:cond delay="0"/>
+                                          </p:stCondLst>
+                                        </p:cTn>
+                                        <p:tgtEl>
+                                          <p:spTgt spid="3">
+                                            <p:txEl>
+                                              <p:pRg st="7" end="7"/>
+                                            </p:txEl>
+                                          </p:spTgt>
+                                        </p:tgtEl>
+                                        <p:attrNameLst>
+                                          <p:attrName>style.visibility</p:attrName>
+                                        </p:attrNameLst>
+                                      </p:cBhvr>
+                                      <p:to>
+                                        <p:strVal val="visible"/>
+                                      </p:to>
+                                    </p:set>
+                                  </p:childTnLst>
+                                </p:cTn>
+                              </p:par>
+                            </p:childTnLst>
+                          </p:cTn>
+                        </p:par>
+                      </p:childTnLst>
+                    </p:cTn>
+                  </p:par>
+                  <p:par>
+                    <p:cTn id="23" fill="hold">
+                      <p:stCondLst>
+                        <p:cond delay="indefinite"/>
+                      </p:stCondLst>
+                      <p:childTnLst>
+                        <p:par>
+                          <p:cTn id="24" fill="hold">
+                            <p:stCondLst>
+                              <p:cond delay="0"/>
+                            </p:stCondLst>
+                            <p:childTnLst>
+                              <p:par>
+                                <p:cTn id="25" presetID="1" presetClass="entr" presetSubtype="0" fill="hold" grpId="0" nodeType="clickEffect">
+                                  <p:stCondLst>
+                                    <p:cond delay="0"/>
+                                  </p:stCondLst>
+                                  <p:childTnLst>
+                                    <p:set>
+                                      <p:cBhvr>
+                                        <p:cTn id="26" dur="1" fill="hold">
+                                          <p:stCondLst>
+                                            <p:cond delay="0"/>
+                                          </p:stCondLst>
+                                        </p:cTn>
+                                        <p:tgtEl>
+                                          <p:spTgt spid="3">
+                                            <p:txEl>
+                                              <p:pRg st="8" end="8"/>
+                                            </p:txEl>
+                                          </p:spTgt>
+                                        </p:tgtEl>
+                                        <p:attrNameLst>
+                                          <p:attrName>style.visibility</p:attrName>
+                                        </p:attrNameLst>
+                                      </p:cBhvr>
+                                      <p:to>
+                                        <p:strVal val="visible"/>
+                                      </p:to>
+                                    </p:set>
+                                  </p:childTnLst>
+                                </p:cTn>
+                              </p:par>
+                            </p:childTnLst>
+                          </p:cTn>
+                        </p:par>
+                      </p:childTnLst>
+                    </p:cTn>
+                  </p:par>
+                  <p:par>
+                    <p:cTn id="27" fill="hold">
+                      <p:stCondLst>
+                        <p:cond delay="indefinite"/>
+                      </p:stCondLst>
+                      <p:childTnLst>
+                        <p:par>
+                          <p:cTn id="28" fill="hold">
+                            <p:stCondLst>
+                              <p:cond delay="0"/>
+                            </p:stCondLst>
+                            <p:childTnLst>
+                              <p:par>
+                                <p:cTn id="29" presetID="1" presetClass="entr" presetSubtype="0" fill="hold" grpId="0" nodeType="clickEffect">
+                                  <p:stCondLst>
+                                    <p:cond delay="0"/>
+                                  </p:stCondLst>
+                                  <p:childTnLst>
+                                    <p:set>
+                                      <p:cBhvr>
+                                        <p:cTn id="30" dur="1" fill="hold">
+                                          <p:stCondLst>
+                                            <p:cond delay="0"/>
+                                          </p:stCondLst>
+                                        </p:cTn>
+                                        <p:tgtEl>
+                                          <p:spTgt spid="3">
+                                            <p:txEl>
+                                              <p:pRg st="9" end="9"/>
+                                            </p:txEl>
+                                          </p:spTgt>
+                                        </p:tgtEl>
+                                        <p:attrNameLst>
+                                          <p:attrName>style.visibility</p:attrName>
+                                        </p:attrNameLst>
+                                      </p:cBhvr>
+                                      <p:to>
+                                        <p:strVal val="visible"/>
+                                      </p:to>
+                                    </p:set>
+                                  </p:childTnLst>
+                                </p:cTn>
+                              </p:par>
+                            </p:childTnLst>
+                          </p:cTn>
+                        </p:par>
+                      </p:childTnLst>
+                    </p:cTn>
+                  </p:par>
+                  <p:par>
+                    <p:cTn id="31" fill="hold">
+                      <p:stCondLst>
+                        <p:cond delay="indefinite"/>
+                      </p:stCondLst>
+                      <p:childTnLst>
+                        <p:par>
+                          <p:cTn id="32" fill="hold">
+                            <p:stCondLst>
+                              <p:cond delay="0"/>
+                            </p:stCondLst>
+                            <p:childTnLst>
+                              <p:par>
+                                <p:cTn id="33" presetID="1" presetClass="entr" presetSubtype="0" fill="hold" grpId="0" nodeType="clickEffect">
+                                  <p:stCondLst>
+                                    <p:cond delay="0"/>
+                                  </p:stCondLst>
+                                  <p:childTnLst>
+                                    <p:set>
+                                      <p:cBhvr>
+                                        <p:cTn id="34" dur="1" fill="hold">
+                                          <p:stCondLst>
+                                            <p:cond delay="0"/>
+                                          </p:stCondLst>
+                                        </p:cTn>
+                                        <p:tgtEl>
+                                          <p:spTgt spid="3">
+                                            <p:txEl>
+                                              <p:pRg st="10" end="10"/>
+                                            </p:txEl>
+                                          </p:spTgt>
+                                        </p:tgtEl>
+                                        <p:attrNameLst>
+                                          <p:attrName>style.visibility</p:attrName>
+                                        </p:attrNameLst>
+                                      </p:cBhvr>
+                                      <p:to>
+                                        <p:strVal val="visible"/>
+                                      </p:to>
+                                    </p:set>
+                                  </p:childTnLst>
+                                </p:cTn>
+                              </p:par>
+                            </p:childTnLst>
+                          </p:cTn>
+                        </p:par>
+                      </p:childTnLst>
+                    </p:cTn>
+                  </p:par>
+                </p:childTnLst>
+              </p:cTn>
+              <p:prevCondLst>
+                <p:cond evt="onPrev" delay="0">
+                  <p:tgtEl>
+                    <p:sldTgt/>
+                  </p:tgtEl>
+                </p:cond>
+              </p:prevCondLst>
+              <p:nextCondLst>
+                <p:cond evt="onNext" delay="0">
+                  <p:tgtEl>
+                    <p:sldTgt/>
+                  </p:tgtEl>
+                </p:cond>
+              </p:nextCondLst>
+            </p:seq>
+          </p:childTnLst>
+        </p:cTn>
+      </p:par>
+    </p:tnLst>
+    <p:bldLst>
+      <p:bldP spid="3" grpId="0" uiExpand="1" build="p"/>
+    </p:bldLst>
+  </p:timing>
 </p:sld>
 </file>
 
@@ -3340,7 +6815,12 @@
             <p:ph type="title"/>
           </p:nvPr>
         </p:nvSpPr>
-        <p:spPr/>
+        <p:spPr>
+          <a:xfrm>
+            <a:off x="457201" y="204787"/>
+            <a:ext cx="3008313" cy="871538"/>
+          </a:xfrm>
+        </p:spPr>
         <p:txBody>
           <a:bodyPr/>
           <a:lstStyle/>
@@ -3350,7 +6830,1218 @@
             </a:pPr>
             <a:r>
               <a:rPr/>
-              <a:t>Coming Soon</a:t>
+              <a:t>Utility Theory</a:t>
+            </a:r>
+          </a:p>
+        </p:txBody>
+      </p:sp>
+      <mc:AlternateContent xmlns:mc="http://schemas.openxmlformats.org/markup-compatibility/2006">
+        <mc:Choice xmlns:a14="http://schemas.microsoft.com/office/drawing/2010/main" Requires="a14">
+          <p:sp>
+            <p:nvSpPr>
+              <p:cNvPr id="4" name="Text Placeholder 3"/>
+              <p:cNvSpPr>
+                <a:spLocks noGrp="1"/>
+              </p:cNvSpPr>
+              <p:nvPr>
+                <p:ph idx="2" sz="half" type="body"/>
+              </p:nvPr>
+            </p:nvSpPr>
+            <p:spPr/>
+            <p:txBody>
+              <a:bodyPr/>
+              <a:lstStyle/>
+              <a:p>
+                <a:pPr lvl="0" indent="0" marL="0">
+                  <a:spcBef>
+                    <a:spcPts val="3000"/>
+                  </a:spcBef>
+                  <a:buNone/>
+                </a:pPr>
+                <a:r>
+                  <a:rPr b="1"/>
+                  <a:t>Utility Functions</a:t>
+                </a:r>
+              </a:p>
+              <a:p>
+                <a:pPr lvl="0" indent="0" marL="0">
+                  <a:buNone/>
+                </a:pPr>
+                <a:r>
+                  <a:rPr/>
+                  <a:t>We need a way to score how “good” a decision is. Define a </a:t>
+                </a:r>
+                <a:r>
+                  <a:rPr b="1"/>
+                  <a:t>utility function</a:t>
+                </a:r>
+                <a:r>
+                  <a:rPr/>
+                  <a:t>:</a:t>
+                </a:r>
+              </a:p>
+              <a:p>
+                <a:pPr lvl="0" indent="0" marL="0">
+                  <a:buNone/>
+                </a:pPr>
+                <a14:m>
+                  <m:oMathPara xmlns:m="http://schemas.openxmlformats.org/officeDocument/2006/math">
+                    <m:oMathParaPr>
+                      <m:jc m:val="center"/>
+                    </m:oMathParaPr>
+                    <m:oMath>
+                      <m:r>
+                        <m:t>u</m:t>
+                      </m:r>
+                      <m:d>
+                        <m:dPr>
+                          <m:begChr m:val="("/>
+                          <m:sepChr m:val=""/>
+                          <m:endChr m:val=")"/>
+                          <m:grow/>
+                        </m:dPr>
+                        <m:e>
+                          <m:r>
+                            <m:t>a</m:t>
+                          </m:r>
+                          <m:r>
+                            <m:rPr>
+                              <m:sty m:val="p"/>
+                            </m:rPr>
+                            <m:t>,</m:t>
+                          </m:r>
+                          <m:r>
+                            <m:rPr>
+                              <m:sty m:val="b"/>
+                            </m:rPr>
+                            <m:t>s</m:t>
+                          </m:r>
+                        </m:e>
+                      </m:d>
+                      <m:r>
+                        <m:rPr>
+                          <m:sty m:val="p"/>
+                        </m:rPr>
+                        <m:t>:</m:t>
+                      </m:r>
+                      <m:r>
+                        <m:rPr>
+                          <m:sty m:val="p"/>
+                          <m:scr m:val="script"/>
+                        </m:rPr>
+                        <m:t>A</m:t>
+                      </m:r>
+                      <m:r>
+                        <m:rPr>
+                          <m:sty m:val="p"/>
+                        </m:rPr>
+                        <m:t>×</m:t>
+                      </m:r>
+                      <m:r>
+                        <m:rPr>
+                          <m:sty m:val="p"/>
+                          <m:scr m:val="script"/>
+                        </m:rPr>
+                        <m:t>S</m:t>
+                      </m:r>
+                      <m:r>
+                        <m:rPr>
+                          <m:sty m:val="p"/>
+                        </m:rPr>
+                        <m:t>→</m:t>
+                      </m:r>
+                      <m:r>
+                        <m:rPr>
+                          <m:sty m:val="p"/>
+                          <m:scr m:val="double-struck"/>
+                        </m:rPr>
+                        <m:t>R</m:t>
+                      </m:r>
+                    </m:oMath>
+                  </m:oMathPara>
+                </a14:m>
+              </a:p>
+              <a:p>
+                <a:pPr lvl="0"/>
+                <a14:m>
+                  <m:oMath xmlns:m="http://schemas.openxmlformats.org/officeDocument/2006/math">
+                    <m:r>
+                      <m:t>a</m:t>
+                    </m:r>
+                    <m:r>
+                      <m:rPr>
+                        <m:sty m:val="p"/>
+                      </m:rPr>
+                      <m:t>∈</m:t>
+                    </m:r>
+                    <m:r>
+                      <m:rPr>
+                        <m:sty m:val="p"/>
+                        <m:scr m:val="script"/>
+                      </m:rPr>
+                      <m:t>A</m:t>
+                    </m:r>
+                  </m:oMath>
+                </a14:m>
+                <a:r>
+                  <a:rPr/>
+                  <a:t>: a decision (or </a:t>
+                </a:r>
+                <a:r>
+                  <a:rPr b="1"/>
+                  <a:t>a</a:t>
+                </a:r>
+                <a:r>
+                  <a:rPr/>
+                  <a:t>ction)</a:t>
+                </a:r>
+              </a:p>
+              <a:p>
+                <a:pPr lvl="0"/>
+                <a14:m>
+                  <m:oMath xmlns:m="http://schemas.openxmlformats.org/officeDocument/2006/math">
+                    <m:r>
+                      <m:rPr>
+                        <m:sty m:val="b"/>
+                      </m:rPr>
+                      <m:t>s</m:t>
+                    </m:r>
+                    <m:r>
+                      <m:rPr>
+                        <m:sty m:val="p"/>
+                      </m:rPr>
+                      <m:t>∈</m:t>
+                    </m:r>
+                    <m:r>
+                      <m:rPr>
+                        <m:sty m:val="p"/>
+                        <m:scr m:val="script"/>
+                      </m:rPr>
+                      <m:t>S</m:t>
+                    </m:r>
+                  </m:oMath>
+                </a14:m>
+                <a:r>
+                  <a:rPr/>
+                  <a:t>: the </a:t>
+                </a:r>
+                <a:r>
+                  <a:rPr b="1"/>
+                  <a:t>s</a:t>
+                </a:r>
+                <a:r>
+                  <a:rPr/>
+                  <a:t>tate of the world (everything uncertain)</a:t>
+                </a:r>
+              </a:p>
+              <a:p>
+                <a:pPr lvl="0"/>
+                <a14:m>
+                  <m:oMath xmlns:m="http://schemas.openxmlformats.org/officeDocument/2006/math">
+                    <m:r>
+                      <m:t>u</m:t>
+                    </m:r>
+                  </m:oMath>
+                </a14:m>
+                <a:r>
+                  <a:rPr/>
+                  <a:t>: maps (decision, state) to a real number</a:t>
+                </a:r>
+              </a:p>
+              <a:p>
+                <a:pPr lvl="0" indent="0" marL="0">
+                  <a:spcBef>
+                    <a:spcPts val="3000"/>
+                  </a:spcBef>
+                  <a:buNone/>
+                </a:pPr>
+                <a:r>
+                  <a:rPr b="1"/>
+                  <a:t>Choosing Your Metric</a:t>
+                </a:r>
+              </a:p>
+              <a:p>
+                <a:pPr lvl="0" indent="0" marL="0">
+                  <a:buNone/>
+                </a:pPr>
+                <a:r>
+                  <a:rPr/>
+                  <a:t>You are </a:t>
+                </a:r>
+                <a:r>
+                  <a:rPr b="1"/>
+                  <a:t>free</a:t>
+                </a:r>
+                <a:r>
+                  <a:rPr/>
+                  <a:t> to define “goodness” however you want.</a:t>
+                </a:r>
+              </a:p>
+              <a:p>
+                <a:pPr lvl="0"/>
+                <a:r>
+                  <a:rPr/>
+                  <a:t>Monetary cost</a:t>
+                </a:r>
+              </a:p>
+              <a:p>
+                <a:pPr lvl="0"/>
+                <a:r>
+                  <a:rPr/>
+                  <a:t>Lives saved</a:t>
+                </a:r>
+              </a:p>
+              <a:p>
+                <a:pPr lvl="0"/>
+                <a:r>
+                  <a:rPr/>
+                  <a:t>Acres of wetland preserved</a:t>
+                </a:r>
+              </a:p>
+              <a:p>
+                <a:pPr lvl="0"/>
+                <a:r>
+                  <a:rPr/>
+                  <a:t>Some weighted combination</a:t>
+                </a:r>
+              </a:p>
+              <a:p>
+                <a:pPr lvl="0" indent="0" marL="0">
+                  <a:buNone/>
+                </a:pPr>
+                <a:r>
+                  <a:rPr/>
+                  <a:t>This is a feature, not a bug — but it means every BCA embeds </a:t>
+                </a:r>
+                <a:r>
+                  <a:rPr b="1"/>
+                  <a:t>value judgments</a:t>
+                </a:r>
+                <a:r>
+                  <a:rPr/>
+                  <a:t>.</a:t>
+                </a:r>
+              </a:p>
+              <a:p>
+                <a:pPr lvl="0" indent="0" marL="0">
+                  <a:spcBef>
+                    <a:spcPts val="3000"/>
+                  </a:spcBef>
+                  <a:buNone/>
+                </a:pPr>
+                <a:r>
+                  <a:rPr b="1"/>
+                  <a:t>Money as a Common Unit</a:t>
+                </a:r>
+              </a:p>
+              <a:p>
+                <a:pPr lvl="0" indent="0" marL="0">
+                  <a:buNone/>
+                </a:pPr>
+                <a:r>
+                  <a:rPr/>
+                  <a:t>Utility is often measured in </a:t>
+                </a:r>
+                <a:r>
+                  <a:rPr b="1"/>
+                  <a:t>dollars</a:t>
+                </a:r>
+                <a:r>
+                  <a:rPr/>
+                  <a:t>.</a:t>
+                </a:r>
+              </a:p>
+              <a:p>
+                <a:pPr lvl="0" indent="0" marL="0">
+                  <a:buNone/>
+                </a:pPr>
+                <a:r>
+                  <a:rPr/>
+                  <a:t>Not because money is all that matters, but because it provides a common unit for comparing different things.</a:t>
+                </a:r>
+              </a:p>
+              <a:p>
+                <a:pPr lvl="0" indent="0" marL="1270000">
+                  <a:buNone/>
+                </a:pPr>
+                <a:r>
+                  <a:rPr sz="2000" b="1"/>
+                  <a:t>Tip</a:t>
+                </a:r>
+              </a:p>
+              <a:p>
+                <a:pPr lvl="0" indent="0" marL="1270000">
+                  <a:buNone/>
+                </a:pPr>
+                <a:r>
+                  <a:rPr sz="2000"/>
+                  <a:t>For house elevation, monetary costs and benefits include:</a:t>
+                </a:r>
+              </a:p>
+              <a:p>
+                <a:pPr lvl="0"/>
+                <a:r>
+                  <a:rPr sz="2000"/>
+                  <a:t>Up-front construction cost</a:t>
+                </a:r>
+              </a:p>
+              <a:p>
+                <a:pPr lvl="0"/>
+                <a:r>
+                  <a:rPr sz="2000"/>
+                  <a:t>Change in flood insurance premiums</a:t>
+                </a:r>
+              </a:p>
+              <a:p>
+                <a:pPr lvl="0"/>
+                <a:r>
+                  <a:rPr sz="2000"/>
+                  <a:t>Change in property value</a:t>
+                </a:r>
+              </a:p>
+              <a:p>
+                <a:pPr lvl="0"/>
+                <a:r>
+                  <a:rPr sz="2000"/>
+                  <a:t>Expected future flood damages avoided</a:t>
+                </a:r>
+              </a:p>
+              <a:p>
+                <a:pPr lvl="0" indent="0" marL="0">
+                  <a:spcBef>
+                    <a:spcPts val="3000"/>
+                  </a:spcBef>
+                  <a:buNone/>
+                </a:pPr>
+                <a:r>
+                  <a:rPr b="1"/>
+                  <a:t>Opportunity Costs</a:t>
+                </a:r>
+              </a:p>
+              <a:p>
+                <a:pPr lvl="0" indent="0" marL="0">
+                  <a:buNone/>
+                </a:pPr>
+                <a:r>
+                  <a:rPr/>
+                  <a:t>How do we put a dollar value on something that isn’t traded in a market?</a:t>
+                </a:r>
+              </a:p>
+              <a:p>
+                <a:pPr lvl="0" indent="0" marL="0">
+                  <a:buNone/>
+                </a:pPr>
+                <a:r>
+                  <a:rPr b="1"/>
+                  <a:t>Opportunity cost</a:t>
+                </a:r>
+                <a:r>
+                  <a:rPr/>
+                  <a:t>: the value of the next best alternative.</a:t>
+                </a:r>
+              </a:p>
+              <a:p>
+                <a:pPr lvl="0"/>
+                <a:r>
+                  <a:rPr/>
+                  <a:t>If we can protect one square mile of pristine wetland for $1 million, that’s the cost of </a:t>
+                </a:r>
+                <a:r>
+                  <a:rPr i="1"/>
+                  <a:t>not</a:t>
+                </a:r>
+                <a:r>
+                  <a:rPr/>
+                  <a:t> protecting a comparable square mile elsewhere</a:t>
+                </a:r>
+              </a:p>
+              <a:p>
+                <a:pPr lvl="0"/>
+                <a:r>
+                  <a:rPr/>
+                  <a:t>If a household spends 10 hours per flood event cleaning up, the value of their time is an opportunity cost</a:t>
+                </a:r>
+              </a:p>
+              <a:p>
+                <a:pPr lvl="0"/>
+                <a:r>
+                  <a:rPr/>
+                  <a:t>But: are these really substitutes?</a:t>
+                </a:r>
+              </a:p>
+              <a:p>
+                <a:pPr lvl="0" indent="0" marL="0">
+                  <a:spcBef>
+                    <a:spcPts val="3000"/>
+                  </a:spcBef>
+                  <a:buNone/>
+                </a:pPr>
+                <a:r>
+                  <a:rPr b="1"/>
+                  <a:t>Decreasing Marginal Utility</a:t>
+                </a:r>
+              </a:p>
+              <a:p>
+                <a:pPr lvl="0" indent="0" marL="0">
+                  <a:buNone/>
+                </a:pPr>
+                <a:r>
+                  <a:rPr/>
+                  <a:t>A key insight from economics: the </a:t>
+                </a:r>
+                <a:r>
+                  <a:rPr b="1"/>
+                  <a:t>more</a:t>
+                </a:r>
+                <a:r>
+                  <a:rPr/>
+                  <a:t> you have of something, the </a:t>
+                </a:r>
+                <a:r>
+                  <a:rPr b="1"/>
+                  <a:t>less</a:t>
+                </a:r>
+                <a:r>
+                  <a:rPr/>
+                  <a:t> each additional unit is worth.</a:t>
+                </a:r>
+              </a:p>
+              <a:p>
+                <a:pPr lvl="0" indent="0">
+                  <a:buNone/>
+                </a:pPr>
+                <a:r>
+                  <a:rPr>
+                    <a:solidFill>
+                      <a:srgbClr val="00769E"/>
+                    </a:solidFill>
+                    <a:latin typeface="Courier"/>
+                  </a:rPr>
+                  <a:t>using</a:t>
+                </a:r>
+                <a:r>
+                  <a:rPr>
+                    <a:solidFill>
+                      <a:srgbClr val="003B4F"/>
+                    </a:solidFill>
+                    <a:latin typeface="Courier"/>
+                  </a:rPr>
+                  <a:t> CairoMakie</a:t>
+                </a:r>
+                <a:br/>
+                <a:br/>
+                <a:r>
+                  <a:rPr b="1">
+                    <a:solidFill>
+                      <a:srgbClr val="003B4F"/>
+                    </a:solidFill>
+                    <a:latin typeface="Courier"/>
+                  </a:rPr>
+                  <a:t>let</a:t>
+                </a:r>
+                <a:br/>
+                <a:r>
+                  <a:rPr>
+                    <a:solidFill>
+                      <a:srgbClr val="003B4F"/>
+                    </a:solidFill>
+                    <a:latin typeface="Courier"/>
+                  </a:rPr>
+                  <a:t>    fig </a:t>
+                </a:r>
+                <a:r>
+                  <a:rPr>
+                    <a:solidFill>
+                      <a:srgbClr val="5E5E5E"/>
+                    </a:solidFill>
+                    <a:latin typeface="Courier"/>
+                  </a:rPr>
+                  <a:t>=</a:t>
+                </a:r>
+                <a:r>
+                  <a:rPr>
+                    <a:solidFill>
+                      <a:srgbClr val="003B4F"/>
+                    </a:solidFill>
+                    <a:latin typeface="Courier"/>
+                  </a:rPr>
+                  <a:t> </a:t>
+                </a:r>
+                <a:r>
+                  <a:rPr>
+                    <a:solidFill>
+                      <a:srgbClr val="4758AB"/>
+                    </a:solidFill>
+                    <a:latin typeface="Courier"/>
+                  </a:rPr>
+                  <a:t>Figure</a:t>
+                </a:r>
+                <a:r>
+                  <a:rPr>
+                    <a:solidFill>
+                      <a:srgbClr val="003B4F"/>
+                    </a:solidFill>
+                    <a:latin typeface="Courier"/>
+                  </a:rPr>
+                  <a:t>(; size</a:t>
+                </a:r>
+                <a:r>
+                  <a:rPr>
+                    <a:solidFill>
+                      <a:srgbClr val="5E5E5E"/>
+                    </a:solidFill>
+                    <a:latin typeface="Courier"/>
+                  </a:rPr>
+                  <a:t>=</a:t>
+                </a:r>
+                <a:r>
+                  <a:rPr>
+                    <a:solidFill>
+                      <a:srgbClr val="003B4F"/>
+                    </a:solidFill>
+                    <a:latin typeface="Courier"/>
+                  </a:rPr>
+                  <a:t>(</a:t>
+                </a:r>
+                <a:r>
+                  <a:rPr>
+                    <a:solidFill>
+                      <a:srgbClr val="AD0000"/>
+                    </a:solidFill>
+                    <a:latin typeface="Courier"/>
+                  </a:rPr>
+                  <a:t>600</a:t>
+                </a:r>
+                <a:r>
+                  <a:rPr>
+                    <a:solidFill>
+                      <a:srgbClr val="003B4F"/>
+                    </a:solidFill>
+                    <a:latin typeface="Courier"/>
+                  </a:rPr>
+                  <a:t>, </a:t>
+                </a:r>
+                <a:r>
+                  <a:rPr>
+                    <a:solidFill>
+                      <a:srgbClr val="AD0000"/>
+                    </a:solidFill>
+                    <a:latin typeface="Courier"/>
+                  </a:rPr>
+                  <a:t>350</a:t>
+                </a:r>
+                <a:r>
+                  <a:rPr>
+                    <a:solidFill>
+                      <a:srgbClr val="003B4F"/>
+                    </a:solidFill>
+                    <a:latin typeface="Courier"/>
+                  </a:rPr>
+                  <a:t>))</a:t>
+                </a:r>
+                <a:br/>
+                <a:r>
+                  <a:rPr>
+                    <a:solidFill>
+                      <a:srgbClr val="003B4F"/>
+                    </a:solidFill>
+                    <a:latin typeface="Courier"/>
+                  </a:rPr>
+                  <a:t>    ax </a:t>
+                </a:r>
+                <a:r>
+                  <a:rPr>
+                    <a:solidFill>
+                      <a:srgbClr val="5E5E5E"/>
+                    </a:solidFill>
+                    <a:latin typeface="Courier"/>
+                  </a:rPr>
+                  <a:t>=</a:t>
+                </a:r>
+                <a:r>
+                  <a:rPr>
+                    <a:solidFill>
+                      <a:srgbClr val="003B4F"/>
+                    </a:solidFill>
+                    <a:latin typeface="Courier"/>
+                  </a:rPr>
+                  <a:t> </a:t>
+                </a:r>
+                <a:r>
+                  <a:rPr>
+                    <a:solidFill>
+                      <a:srgbClr val="4758AB"/>
+                    </a:solidFill>
+                    <a:latin typeface="Courier"/>
+                  </a:rPr>
+                  <a:t>Axis</a:t>
+                </a:r>
+                <a:r>
+                  <a:rPr>
+                    <a:solidFill>
+                      <a:srgbClr val="003B4F"/>
+                    </a:solidFill>
+                    <a:latin typeface="Courier"/>
+                  </a:rPr>
+                  <a:t>(</a:t>
+                </a:r>
+                <a:br/>
+                <a:r>
+                  <a:rPr>
+                    <a:solidFill>
+                      <a:srgbClr val="003B4F"/>
+                    </a:solidFill>
+                    <a:latin typeface="Courier"/>
+                  </a:rPr>
+                  <a:t>        fig[</a:t>
+                </a:r>
+                <a:r>
+                  <a:rPr>
+                    <a:solidFill>
+                      <a:srgbClr val="AD0000"/>
+                    </a:solidFill>
+                    <a:latin typeface="Courier"/>
+                  </a:rPr>
+                  <a:t>1</a:t>
+                </a:r>
+                <a:r>
+                  <a:rPr>
+                    <a:solidFill>
+                      <a:srgbClr val="003B4F"/>
+                    </a:solidFill>
+                    <a:latin typeface="Courier"/>
+                  </a:rPr>
+                  <a:t>, </a:t>
+                </a:r>
+                <a:r>
+                  <a:rPr>
+                    <a:solidFill>
+                      <a:srgbClr val="AD0000"/>
+                    </a:solidFill>
+                    <a:latin typeface="Courier"/>
+                  </a:rPr>
+                  <a:t>1</a:t>
+                </a:r>
+                <a:r>
+                  <a:rPr>
+                    <a:solidFill>
+                      <a:srgbClr val="003B4F"/>
+                    </a:solidFill>
+                    <a:latin typeface="Courier"/>
+                  </a:rPr>
+                  <a:t>];</a:t>
+                </a:r>
+                <a:br/>
+                <a:r>
+                  <a:rPr>
+                    <a:solidFill>
+                      <a:srgbClr val="003B4F"/>
+                    </a:solidFill>
+                    <a:latin typeface="Courier"/>
+                  </a:rPr>
+                  <a:t>        xlabel</a:t>
+                </a:r>
+                <a:r>
+                  <a:rPr>
+                    <a:solidFill>
+                      <a:srgbClr val="5E5E5E"/>
+                    </a:solidFill>
+                    <a:latin typeface="Courier"/>
+                  </a:rPr>
+                  <a:t>=</a:t>
+                </a:r>
+                <a:r>
+                  <a:rPr>
+                    <a:solidFill>
+                      <a:srgbClr val="20794D"/>
+                    </a:solidFill>
+                    <a:latin typeface="Courier"/>
+                  </a:rPr>
+                  <a:t>"Consumption (\$)"</a:t>
+                </a:r>
+                <a:r>
+                  <a:rPr>
+                    <a:solidFill>
+                      <a:srgbClr val="003B4F"/>
+                    </a:solidFill>
+                    <a:latin typeface="Courier"/>
+                  </a:rPr>
+                  <a:t>,</a:t>
+                </a:r>
+                <a:br/>
+                <a:r>
+                  <a:rPr>
+                    <a:solidFill>
+                      <a:srgbClr val="003B4F"/>
+                    </a:solidFill>
+                    <a:latin typeface="Courier"/>
+                  </a:rPr>
+                  <a:t>        ylabel</a:t>
+                </a:r>
+                <a:r>
+                  <a:rPr>
+                    <a:solidFill>
+                      <a:srgbClr val="5E5E5E"/>
+                    </a:solidFill>
+                    <a:latin typeface="Courier"/>
+                  </a:rPr>
+                  <a:t>=</a:t>
+                </a:r>
+                <a:r>
+                  <a:rPr>
+                    <a:solidFill>
+                      <a:srgbClr val="20794D"/>
+                    </a:solidFill>
+                    <a:latin typeface="Courier"/>
+                  </a:rPr>
+                  <a:t>"Utility"</a:t>
+                </a:r>
+                <a:r>
+                  <a:rPr>
+                    <a:solidFill>
+                      <a:srgbClr val="003B4F"/>
+                    </a:solidFill>
+                    <a:latin typeface="Courier"/>
+                  </a:rPr>
+                  <a:t>,</a:t>
+                </a:r>
+                <a:br/>
+                <a:r>
+                  <a:rPr>
+                    <a:solidFill>
+                      <a:srgbClr val="003B4F"/>
+                    </a:solidFill>
+                    <a:latin typeface="Courier"/>
+                  </a:rPr>
+                  <a:t>        xticklabelsvisible</a:t>
+                </a:r>
+                <a:r>
+                  <a:rPr>
+                    <a:solidFill>
+                      <a:srgbClr val="5E5E5E"/>
+                    </a:solidFill>
+                    <a:latin typeface="Courier"/>
+                  </a:rPr>
+                  <a:t>=</a:t>
+                </a:r>
+                <a:r>
+                  <a:rPr>
+                    <a:solidFill>
+                      <a:srgbClr val="8F5902"/>
+                    </a:solidFill>
+                    <a:latin typeface="Courier"/>
+                  </a:rPr>
+                  <a:t>false</a:t>
+                </a:r>
+                <a:r>
+                  <a:rPr>
+                    <a:solidFill>
+                      <a:srgbClr val="003B4F"/>
+                    </a:solidFill>
+                    <a:latin typeface="Courier"/>
+                  </a:rPr>
+                  <a:t>,</a:t>
+                </a:r>
+                <a:br/>
+                <a:r>
+                  <a:rPr>
+                    <a:solidFill>
+                      <a:srgbClr val="003B4F"/>
+                    </a:solidFill>
+                    <a:latin typeface="Courier"/>
+                  </a:rPr>
+                  <a:t>        yticklabelsvisible</a:t>
+                </a:r>
+                <a:r>
+                  <a:rPr>
+                    <a:solidFill>
+                      <a:srgbClr val="5E5E5E"/>
+                    </a:solidFill>
+                    <a:latin typeface="Courier"/>
+                  </a:rPr>
+                  <a:t>=</a:t>
+                </a:r>
+                <a:r>
+                  <a:rPr>
+                    <a:solidFill>
+                      <a:srgbClr val="8F5902"/>
+                    </a:solidFill>
+                    <a:latin typeface="Courier"/>
+                  </a:rPr>
+                  <a:t>false</a:t>
+                </a:r>
+                <a:r>
+                  <a:rPr>
+                    <a:solidFill>
+                      <a:srgbClr val="003B4F"/>
+                    </a:solidFill>
+                    <a:latin typeface="Courier"/>
+                  </a:rPr>
+                  <a:t>,</a:t>
+                </a:r>
+                <a:br/>
+                <a:r>
+                  <a:rPr>
+                    <a:solidFill>
+                      <a:srgbClr val="003B4F"/>
+                    </a:solidFill>
+                    <a:latin typeface="Courier"/>
+                  </a:rPr>
+                  <a:t>        xgridvisible</a:t>
+                </a:r>
+                <a:r>
+                  <a:rPr>
+                    <a:solidFill>
+                      <a:srgbClr val="5E5E5E"/>
+                    </a:solidFill>
+                    <a:latin typeface="Courier"/>
+                  </a:rPr>
+                  <a:t>=</a:t>
+                </a:r>
+                <a:r>
+                  <a:rPr>
+                    <a:solidFill>
+                      <a:srgbClr val="8F5902"/>
+                    </a:solidFill>
+                    <a:latin typeface="Courier"/>
+                  </a:rPr>
+                  <a:t>false</a:t>
+                </a:r>
+                <a:r>
+                  <a:rPr>
+                    <a:solidFill>
+                      <a:srgbClr val="003B4F"/>
+                    </a:solidFill>
+                    <a:latin typeface="Courier"/>
+                  </a:rPr>
+                  <a:t>,</a:t>
+                </a:r>
+                <a:br/>
+                <a:r>
+                  <a:rPr>
+                    <a:solidFill>
+                      <a:srgbClr val="003B4F"/>
+                    </a:solidFill>
+                    <a:latin typeface="Courier"/>
+                  </a:rPr>
+                  <a:t>        ygridvisible</a:t>
+                </a:r>
+                <a:r>
+                  <a:rPr>
+                    <a:solidFill>
+                      <a:srgbClr val="5E5E5E"/>
+                    </a:solidFill>
+                    <a:latin typeface="Courier"/>
+                  </a:rPr>
+                  <a:t>=</a:t>
+                </a:r>
+                <a:r>
+                  <a:rPr>
+                    <a:solidFill>
+                      <a:srgbClr val="8F5902"/>
+                    </a:solidFill>
+                    <a:latin typeface="Courier"/>
+                  </a:rPr>
+                  <a:t>false</a:t>
+                </a:r>
+                <a:r>
+                  <a:rPr>
+                    <a:solidFill>
+                      <a:srgbClr val="003B4F"/>
+                    </a:solidFill>
+                    <a:latin typeface="Courier"/>
+                  </a:rPr>
+                  <a:t>,</a:t>
+                </a:r>
+                <a:br/>
+                <a:r>
+                  <a:rPr>
+                    <a:solidFill>
+                      <a:srgbClr val="003B4F"/>
+                    </a:solidFill>
+                    <a:latin typeface="Courier"/>
+                  </a:rPr>
+                  <a:t>    )</a:t>
+                </a:r>
+                <a:br/>
+                <a:r>
+                  <a:rPr>
+                    <a:solidFill>
+                      <a:srgbClr val="003B4F"/>
+                    </a:solidFill>
+                    <a:latin typeface="Courier"/>
+                  </a:rPr>
+                  <a:t>    x </a:t>
+                </a:r>
+                <a:r>
+                  <a:rPr>
+                    <a:solidFill>
+                      <a:srgbClr val="5E5E5E"/>
+                    </a:solidFill>
+                    <a:latin typeface="Courier"/>
+                  </a:rPr>
+                  <a:t>=</a:t>
+                </a:r>
+                <a:r>
+                  <a:rPr>
+                    <a:solidFill>
+                      <a:srgbClr val="003B4F"/>
+                    </a:solidFill>
+                    <a:latin typeface="Courier"/>
+                  </a:rPr>
+                  <a:t> </a:t>
+                </a:r>
+                <a:r>
+                  <a:rPr>
+                    <a:solidFill>
+                      <a:srgbClr val="4758AB"/>
+                    </a:solidFill>
+                    <a:latin typeface="Courier"/>
+                  </a:rPr>
+                  <a:t>range</a:t>
+                </a:r>
+                <a:r>
+                  <a:rPr>
+                    <a:solidFill>
+                      <a:srgbClr val="003B4F"/>
+                    </a:solidFill>
+                    <a:latin typeface="Courier"/>
+                  </a:rPr>
+                  <a:t>(</a:t>
+                </a:r>
+                <a:r>
+                  <a:rPr>
+                    <a:solidFill>
+                      <a:srgbClr val="AD0000"/>
+                    </a:solidFill>
+                    <a:latin typeface="Courier"/>
+                  </a:rPr>
+                  <a:t>0.1</a:t>
+                </a:r>
+                <a:r>
+                  <a:rPr>
+                    <a:solidFill>
+                      <a:srgbClr val="003B4F"/>
+                    </a:solidFill>
+                    <a:latin typeface="Courier"/>
+                  </a:rPr>
+                  <a:t>, </a:t>
+                </a:r>
+                <a:r>
+                  <a:rPr>
+                    <a:solidFill>
+                      <a:srgbClr val="AD0000"/>
+                    </a:solidFill>
+                    <a:latin typeface="Courier"/>
+                  </a:rPr>
+                  <a:t>10</a:t>
+                </a:r>
+                <a:r>
+                  <a:rPr>
+                    <a:solidFill>
+                      <a:srgbClr val="003B4F"/>
+                    </a:solidFill>
+                    <a:latin typeface="Courier"/>
+                  </a:rPr>
+                  <a:t>; length</a:t>
+                </a:r>
+                <a:r>
+                  <a:rPr>
+                    <a:solidFill>
+                      <a:srgbClr val="5E5E5E"/>
+                    </a:solidFill>
+                    <a:latin typeface="Courier"/>
+                  </a:rPr>
+                  <a:t>=</a:t>
+                </a:r>
+                <a:r>
+                  <a:rPr>
+                    <a:solidFill>
+                      <a:srgbClr val="AD0000"/>
+                    </a:solidFill>
+                    <a:latin typeface="Courier"/>
+                  </a:rPr>
+                  <a:t>200</a:t>
+                </a:r>
+                <a:r>
+                  <a:rPr>
+                    <a:solidFill>
+                      <a:srgbClr val="003B4F"/>
+                    </a:solidFill>
+                    <a:latin typeface="Courier"/>
+                  </a:rPr>
+                  <a:t>)</a:t>
+                </a:r>
+                <a:br/>
+                <a:r>
+                  <a:rPr>
+                    <a:solidFill>
+                      <a:srgbClr val="003B4F"/>
+                    </a:solidFill>
+                    <a:latin typeface="Courier"/>
+                  </a:rPr>
+                  <a:t>    </a:t>
+                </a:r>
+                <a:r>
+                  <a:rPr>
+                    <a:solidFill>
+                      <a:srgbClr val="4758AB"/>
+                    </a:solidFill>
+                    <a:latin typeface="Courier"/>
+                  </a:rPr>
+                  <a:t>lines!</a:t>
+                </a:r>
+                <a:r>
+                  <a:rPr>
+                    <a:solidFill>
+                      <a:srgbClr val="003B4F"/>
+                    </a:solidFill>
+                    <a:latin typeface="Courier"/>
+                  </a:rPr>
+                  <a:t>(ax, x, </a:t>
+                </a:r>
+                <a:r>
+                  <a:rPr>
+                    <a:solidFill>
+                      <a:srgbClr val="4758AB"/>
+                    </a:solidFill>
+                    <a:latin typeface="Courier"/>
+                  </a:rPr>
+                  <a:t>log</a:t>
+                </a:r>
+                <a:r>
+                  <a:rPr>
+                    <a:solidFill>
+                      <a:srgbClr val="003B4F"/>
+                    </a:solidFill>
+                    <a:latin typeface="Courier"/>
+                  </a:rPr>
+                  <a:t>.(x); linewidth</a:t>
+                </a:r>
+                <a:r>
+                  <a:rPr>
+                    <a:solidFill>
+                      <a:srgbClr val="5E5E5E"/>
+                    </a:solidFill>
+                    <a:latin typeface="Courier"/>
+                  </a:rPr>
+                  <a:t>=</a:t>
+                </a:r>
+                <a:r>
+                  <a:rPr>
+                    <a:solidFill>
+                      <a:srgbClr val="AD0000"/>
+                    </a:solidFill>
+                    <a:latin typeface="Courier"/>
+                  </a:rPr>
+                  <a:t>3</a:t>
+                </a:r>
+                <a:r>
+                  <a:rPr>
+                    <a:solidFill>
+                      <a:srgbClr val="003B4F"/>
+                    </a:solidFill>
+                    <a:latin typeface="Courier"/>
+                  </a:rPr>
+                  <a:t>)</a:t>
+                </a:r>
+                <a:br/>
+                <a:r>
+                  <a:rPr>
+                    <a:solidFill>
+                      <a:srgbClr val="003B4F"/>
+                    </a:solidFill>
+                    <a:latin typeface="Courier"/>
+                  </a:rPr>
+                  <a:t>    fig</a:t>
+                </a:r>
+                <a:br/>
+                <a:r>
+                  <a:rPr b="1">
+                    <a:solidFill>
+                      <a:srgbClr val="003B4F"/>
+                    </a:solidFill>
+                    <a:latin typeface="Courier"/>
+                  </a:rPr>
+                  <a:t>end</a:t>
+                </a:r>
+              </a:p>
+              <a:p>
+                <a:pPr lvl="0" indent="0">
+                  <a:buNone/>
+                </a:pPr>
+                <a:r>
+                  <a:rPr>
+                    <a:latin typeface="Courier"/>
+                  </a:rPr>
+                  <a:t>Precompiling packages...
+   6365.2 ms  ✓ QuartoNotebookWorkerMakieExt (serial)
+  1 dependency successfully precompiled in 6 seconds
+Precompiling packages...
+   4772.1 ms  ✓ QuartoNotebookWorkerCairoMakieExt (serial)
+  1 dependency successfully precompiled in 5 seconds</a:t>
+                </a:r>
+              </a:p>
+            </p:txBody>
+          </p:sp>
+        </mc:Choice>
+      </mc:AlternateContent>
+      <p:pic>
+        <p:nvPicPr>
+          <p:cNvPr descr="index_files/figure-pptx/cell-2-output-2.png" id="0" name="Picture 1"/>
+          <p:cNvPicPr>
+            <a:picLocks noGrp="1" noChangeAspect="1"/>
+          </p:cNvPicPr>
+          <p:nvPr/>
+        </p:nvPicPr>
+        <p:blipFill>
+          <a:blip r:embed="rId3"/>
+          <a:stretch>
+            <a:fillRect/>
+          </a:stretch>
+        </p:blipFill>
+        <p:spPr bwMode="auto">
+          <a:xfrm>
+            <a:off x="3568700" y="647700"/>
+            <a:ext cx="5105400" cy="2971800"/>
+          </a:xfrm>
+          <a:prstGeom prst="rect">
+            <a:avLst/>
+          </a:prstGeom>
+          <a:noFill/>
+          <a:ln w="9525">
+            <a:noFill/>
+            <a:headEnd/>
+            <a:tailEnd/>
+          </a:ln>
+        </p:spPr>
+      </p:pic>
+      <p:sp>
+        <p:nvSpPr>
+          <p:cNvPr id="1" name="TextBox 3"/>
+          <p:cNvSpPr txBox="1"/>
+          <p:nvPr/>
+        </p:nvSpPr>
+        <p:spPr>
+          <a:xfrm>
+            <a:off x="3568700" y="4076700"/>
+            <a:ext cx="5105400" cy="508000"/>
+          </a:xfrm>
+          <a:prstGeom prst="rect">
+            <a:avLst/>
+          </a:prstGeom>
+          <a:noFill/>
+        </p:spPr>
+        <p:txBody>
+          <a:bodyPr/>
+          <a:lstStyle/>
+          <a:p>
+            <a:pPr lvl="0" indent="0" marL="0" algn="ctr">
+              <a:buNone/>
+            </a:pPr>
+            <a:r>
+              <a:rPr/>
+              <a:t>Each additional dollar of consumption provides less additional utility.</a:t>
             </a:r>
           </a:p>
         </p:txBody>
@@ -3371,17 +8062,746 @@
           <a:lstStyle/>
           <a:p>
             <a:pPr lvl="0" indent="0" marL="0">
+              <a:spcBef>
+                <a:spcPts val="3000"/>
+              </a:spcBef>
               <a:buNone/>
             </a:pPr>
             <a:r>
+              <a:rPr b="1"/>
+              <a:t>Implication: Distribution and Social Welfare</a:t>
+            </a:r>
+          </a:p>
+          <a:p>
+            <a:pPr lvl="0" indent="0" marL="0">
+              <a:buNone/>
+            </a:pPr>
+            <a:r>
               <a:rPr/>
-              <a:t>This lecture is under development.</a:t>
+              <a:t>If marginal utility decreases with wealth:</a:t>
+            </a:r>
+          </a:p>
+          <a:p>
+            <a:pPr lvl="0"/>
+            <a:r>
+              <a:rPr/>
+              <a:t>A dollar of damage hurts a low-income household </a:t>
+            </a:r>
+            <a:r>
+              <a:rPr b="1"/>
+              <a:t>more</a:t>
+            </a:r>
+            <a:r>
+              <a:rPr/>
+              <a:t> than a wealthy one</a:t>
+            </a:r>
+          </a:p>
+          <a:p>
+            <a:pPr lvl="0"/>
+            <a:r>
+              <a:rPr/>
+              <a:t>Standard BCA treats a dollar the same regardless of who receives it</a:t>
+            </a:r>
+          </a:p>
+          <a:p>
+            <a:pPr lvl="0"/>
+            <a:r>
+              <a:rPr/>
+              <a:t>And there is </a:t>
+            </a:r>
+            <a:r>
+              <a:rPr b="1"/>
+              <a:t>no single “right” way</a:t>
+            </a:r>
+            <a:r>
+              <a:rPr/>
+              <a:t> to aggregate individual welfare into social welfare</a:t>
+            </a:r>
+          </a:p>
+          <a:p>
+            <a:pPr lvl="0" indent="0" marL="0">
+              <a:buNone/>
+            </a:pPr>
+            <a:r>
+              <a:rPr/>
+              <a:t>We will revisit equity and values later in the semester.</a:t>
             </a:r>
           </a:p>
         </p:txBody>
       </p:sp>
     </p:spTree>
   </p:cSld>
+  <p:timing>
+    <p:tnLst>
+      <p:par>
+        <p:cTn id="1" dur="indefinite" restart="never" nodeType="tmRoot">
+          <p:childTnLst>
+            <p:seq concurrent="1" nextAc="seek">
+              <p:cTn id="2" dur="indefinite" nodeType="mainSeq">
+                <p:childTnLst>
+                  <p:par>
+                    <p:cTn id="3" fill="hold">
+                      <p:stCondLst>
+                        <p:cond delay="indefinite"/>
+                      </p:stCondLst>
+                      <p:childTnLst>
+                        <p:par>
+                          <p:cTn id="4" fill="hold">
+                            <p:stCondLst>
+                              <p:cond delay="0"/>
+                            </p:stCondLst>
+                            <p:childTnLst>
+                              <p:par>
+                                <p:cTn id="5" presetID="1" presetClass="entr" presetSubtype="0" fill="hold" grpId="0" nodeType="clickEffect">
+                                  <p:stCondLst>
+                                    <p:cond delay="0"/>
+                                  </p:stCondLst>
+                                  <p:childTnLst>
+                                    <p:set>
+                                      <p:cBhvr>
+                                        <p:cTn id="6" dur="1" fill="hold">
+                                          <p:stCondLst>
+                                            <p:cond delay="0"/>
+                                          </p:stCondLst>
+                                        </p:cTn>
+                                        <p:tgtEl>
+                                          <p:spTgt spid="4">
+                                            <p:txEl>
+                                              <p:pRg st="3" end="3"/>
+                                            </p:txEl>
+                                          </p:spTgt>
+                                        </p:tgtEl>
+                                        <p:attrNameLst>
+                                          <p:attrName>style.visibility</p:attrName>
+                                        </p:attrNameLst>
+                                      </p:cBhvr>
+                                      <p:to>
+                                        <p:strVal val="visible"/>
+                                      </p:to>
+                                    </p:set>
+                                  </p:childTnLst>
+                                </p:cTn>
+                              </p:par>
+                            </p:childTnLst>
+                          </p:cTn>
+                        </p:par>
+                      </p:childTnLst>
+                    </p:cTn>
+                  </p:par>
+                  <p:par>
+                    <p:cTn id="7" fill="hold">
+                      <p:stCondLst>
+                        <p:cond delay="indefinite"/>
+                      </p:stCondLst>
+                      <p:childTnLst>
+                        <p:par>
+                          <p:cTn id="8" fill="hold">
+                            <p:stCondLst>
+                              <p:cond delay="0"/>
+                            </p:stCondLst>
+                            <p:childTnLst>
+                              <p:par>
+                                <p:cTn id="9" presetID="1" presetClass="entr" presetSubtype="0" fill="hold" grpId="0" nodeType="clickEffect">
+                                  <p:stCondLst>
+                                    <p:cond delay="0"/>
+                                  </p:stCondLst>
+                                  <p:childTnLst>
+                                    <p:set>
+                                      <p:cBhvr>
+                                        <p:cTn id="10" dur="1" fill="hold">
+                                          <p:stCondLst>
+                                            <p:cond delay="0"/>
+                                          </p:stCondLst>
+                                        </p:cTn>
+                                        <p:tgtEl>
+                                          <p:spTgt spid="4">
+                                            <p:txEl>
+                                              <p:pRg st="4" end="4"/>
+                                            </p:txEl>
+                                          </p:spTgt>
+                                        </p:tgtEl>
+                                        <p:attrNameLst>
+                                          <p:attrName>style.visibility</p:attrName>
+                                        </p:attrNameLst>
+                                      </p:cBhvr>
+                                      <p:to>
+                                        <p:strVal val="visible"/>
+                                      </p:to>
+                                    </p:set>
+                                  </p:childTnLst>
+                                </p:cTn>
+                              </p:par>
+                            </p:childTnLst>
+                          </p:cTn>
+                        </p:par>
+                      </p:childTnLst>
+                    </p:cTn>
+                  </p:par>
+                  <p:par>
+                    <p:cTn id="11" fill="hold">
+                      <p:stCondLst>
+                        <p:cond delay="indefinite"/>
+                      </p:stCondLst>
+                      <p:childTnLst>
+                        <p:par>
+                          <p:cTn id="12" fill="hold">
+                            <p:stCondLst>
+                              <p:cond delay="0"/>
+                            </p:stCondLst>
+                            <p:childTnLst>
+                              <p:par>
+                                <p:cTn id="13" presetID="1" presetClass="entr" presetSubtype="0" fill="hold" grpId="0" nodeType="clickEffect">
+                                  <p:stCondLst>
+                                    <p:cond delay="0"/>
+                                  </p:stCondLst>
+                                  <p:childTnLst>
+                                    <p:set>
+                                      <p:cBhvr>
+                                        <p:cTn id="14" dur="1" fill="hold">
+                                          <p:stCondLst>
+                                            <p:cond delay="0"/>
+                                          </p:stCondLst>
+                                        </p:cTn>
+                                        <p:tgtEl>
+                                          <p:spTgt spid="4">
+                                            <p:txEl>
+                                              <p:pRg st="5" end="5"/>
+                                            </p:txEl>
+                                          </p:spTgt>
+                                        </p:tgtEl>
+                                        <p:attrNameLst>
+                                          <p:attrName>style.visibility</p:attrName>
+                                        </p:attrNameLst>
+                                      </p:cBhvr>
+                                      <p:to>
+                                        <p:strVal val="visible"/>
+                                      </p:to>
+                                    </p:set>
+                                  </p:childTnLst>
+                                </p:cTn>
+                              </p:par>
+                            </p:childTnLst>
+                          </p:cTn>
+                        </p:par>
+                      </p:childTnLst>
+                    </p:cTn>
+                  </p:par>
+                  <p:par>
+                    <p:cTn id="15" fill="hold">
+                      <p:stCondLst>
+                        <p:cond delay="indefinite"/>
+                      </p:stCondLst>
+                      <p:childTnLst>
+                        <p:par>
+                          <p:cTn id="16" fill="hold">
+                            <p:stCondLst>
+                              <p:cond delay="0"/>
+                            </p:stCondLst>
+                            <p:childTnLst>
+                              <p:par>
+                                <p:cTn id="17" presetID="1" presetClass="entr" presetSubtype="0" fill="hold" grpId="0" nodeType="clickEffect">
+                                  <p:stCondLst>
+                                    <p:cond delay="0"/>
+                                  </p:stCondLst>
+                                  <p:childTnLst>
+                                    <p:set>
+                                      <p:cBhvr>
+                                        <p:cTn id="18" dur="1" fill="hold">
+                                          <p:stCondLst>
+                                            <p:cond delay="0"/>
+                                          </p:stCondLst>
+                                        </p:cTn>
+                                        <p:tgtEl>
+                                          <p:spTgt spid="4">
+                                            <p:txEl>
+                                              <p:pRg st="8" end="8"/>
+                                            </p:txEl>
+                                          </p:spTgt>
+                                        </p:tgtEl>
+                                        <p:attrNameLst>
+                                          <p:attrName>style.visibility</p:attrName>
+                                        </p:attrNameLst>
+                                      </p:cBhvr>
+                                      <p:to>
+                                        <p:strVal val="visible"/>
+                                      </p:to>
+                                    </p:set>
+                                  </p:childTnLst>
+                                </p:cTn>
+                              </p:par>
+                            </p:childTnLst>
+                          </p:cTn>
+                        </p:par>
+                      </p:childTnLst>
+                    </p:cTn>
+                  </p:par>
+                  <p:par>
+                    <p:cTn id="19" fill="hold">
+                      <p:stCondLst>
+                        <p:cond delay="indefinite"/>
+                      </p:stCondLst>
+                      <p:childTnLst>
+                        <p:par>
+                          <p:cTn id="20" fill="hold">
+                            <p:stCondLst>
+                              <p:cond delay="0"/>
+                            </p:stCondLst>
+                            <p:childTnLst>
+                              <p:par>
+                                <p:cTn id="21" presetID="1" presetClass="entr" presetSubtype="0" fill="hold" grpId="0" nodeType="clickEffect">
+                                  <p:stCondLst>
+                                    <p:cond delay="0"/>
+                                  </p:stCondLst>
+                                  <p:childTnLst>
+                                    <p:set>
+                                      <p:cBhvr>
+                                        <p:cTn id="22" dur="1" fill="hold">
+                                          <p:stCondLst>
+                                            <p:cond delay="0"/>
+                                          </p:stCondLst>
+                                        </p:cTn>
+                                        <p:tgtEl>
+                                          <p:spTgt spid="4">
+                                            <p:txEl>
+                                              <p:pRg st="9" end="9"/>
+                                            </p:txEl>
+                                          </p:spTgt>
+                                        </p:tgtEl>
+                                        <p:attrNameLst>
+                                          <p:attrName>style.visibility</p:attrName>
+                                        </p:attrNameLst>
+                                      </p:cBhvr>
+                                      <p:to>
+                                        <p:strVal val="visible"/>
+                                      </p:to>
+                                    </p:set>
+                                  </p:childTnLst>
+                                </p:cTn>
+                              </p:par>
+                            </p:childTnLst>
+                          </p:cTn>
+                        </p:par>
+                      </p:childTnLst>
+                    </p:cTn>
+                  </p:par>
+                  <p:par>
+                    <p:cTn id="23" fill="hold">
+                      <p:stCondLst>
+                        <p:cond delay="indefinite"/>
+                      </p:stCondLst>
+                      <p:childTnLst>
+                        <p:par>
+                          <p:cTn id="24" fill="hold">
+                            <p:stCondLst>
+                              <p:cond delay="0"/>
+                            </p:stCondLst>
+                            <p:childTnLst>
+                              <p:par>
+                                <p:cTn id="25" presetID="1" presetClass="entr" presetSubtype="0" fill="hold" grpId="0" nodeType="clickEffect">
+                                  <p:stCondLst>
+                                    <p:cond delay="0"/>
+                                  </p:stCondLst>
+                                  <p:childTnLst>
+                                    <p:set>
+                                      <p:cBhvr>
+                                        <p:cTn id="26" dur="1" fill="hold">
+                                          <p:stCondLst>
+                                            <p:cond delay="0"/>
+                                          </p:stCondLst>
+                                        </p:cTn>
+                                        <p:tgtEl>
+                                          <p:spTgt spid="4">
+                                            <p:txEl>
+                                              <p:pRg st="10" end="10"/>
+                                            </p:txEl>
+                                          </p:spTgt>
+                                        </p:tgtEl>
+                                        <p:attrNameLst>
+                                          <p:attrName>style.visibility</p:attrName>
+                                        </p:attrNameLst>
+                                      </p:cBhvr>
+                                      <p:to>
+                                        <p:strVal val="visible"/>
+                                      </p:to>
+                                    </p:set>
+                                  </p:childTnLst>
+                                </p:cTn>
+                              </p:par>
+                            </p:childTnLst>
+                          </p:cTn>
+                        </p:par>
+                      </p:childTnLst>
+                    </p:cTn>
+                  </p:par>
+                  <p:par>
+                    <p:cTn id="27" fill="hold">
+                      <p:stCondLst>
+                        <p:cond delay="indefinite"/>
+                      </p:stCondLst>
+                      <p:childTnLst>
+                        <p:par>
+                          <p:cTn id="28" fill="hold">
+                            <p:stCondLst>
+                              <p:cond delay="0"/>
+                            </p:stCondLst>
+                            <p:childTnLst>
+                              <p:par>
+                                <p:cTn id="29" presetID="1" presetClass="entr" presetSubtype="0" fill="hold" grpId="0" nodeType="clickEffect">
+                                  <p:stCondLst>
+                                    <p:cond delay="0"/>
+                                  </p:stCondLst>
+                                  <p:childTnLst>
+                                    <p:set>
+                                      <p:cBhvr>
+                                        <p:cTn id="30" dur="1" fill="hold">
+                                          <p:stCondLst>
+                                            <p:cond delay="0"/>
+                                          </p:stCondLst>
+                                        </p:cTn>
+                                        <p:tgtEl>
+                                          <p:spTgt spid="4">
+                                            <p:txEl>
+                                              <p:pRg st="11" end="11"/>
+                                            </p:txEl>
+                                          </p:spTgt>
+                                        </p:tgtEl>
+                                        <p:attrNameLst>
+                                          <p:attrName>style.visibility</p:attrName>
+                                        </p:attrNameLst>
+                                      </p:cBhvr>
+                                      <p:to>
+                                        <p:strVal val="visible"/>
+                                      </p:to>
+                                    </p:set>
+                                  </p:childTnLst>
+                                </p:cTn>
+                              </p:par>
+                            </p:childTnLst>
+                          </p:cTn>
+                        </p:par>
+                      </p:childTnLst>
+                    </p:cTn>
+                  </p:par>
+                  <p:par>
+                    <p:cTn id="31" fill="hold">
+                      <p:stCondLst>
+                        <p:cond delay="indefinite"/>
+                      </p:stCondLst>
+                      <p:childTnLst>
+                        <p:par>
+                          <p:cTn id="32" fill="hold">
+                            <p:stCondLst>
+                              <p:cond delay="0"/>
+                            </p:stCondLst>
+                            <p:childTnLst>
+                              <p:par>
+                                <p:cTn id="33" presetID="1" presetClass="entr" presetSubtype="0" fill="hold" grpId="0" nodeType="clickEffect">
+                                  <p:stCondLst>
+                                    <p:cond delay="0"/>
+                                  </p:stCondLst>
+                                  <p:childTnLst>
+                                    <p:set>
+                                      <p:cBhvr>
+                                        <p:cTn id="34" dur="1" fill="hold">
+                                          <p:stCondLst>
+                                            <p:cond delay="0"/>
+                                          </p:stCondLst>
+                                        </p:cTn>
+                                        <p:tgtEl>
+                                          <p:spTgt spid="4">
+                                            <p:txEl>
+                                              <p:pRg st="25" end="25"/>
+                                            </p:txEl>
+                                          </p:spTgt>
+                                        </p:tgtEl>
+                                        <p:attrNameLst>
+                                          <p:attrName>style.visibility</p:attrName>
+                                        </p:attrNameLst>
+                                      </p:cBhvr>
+                                      <p:to>
+                                        <p:strVal val="visible"/>
+                                      </p:to>
+                                    </p:set>
+                                  </p:childTnLst>
+                                </p:cTn>
+                              </p:par>
+                            </p:childTnLst>
+                          </p:cTn>
+                        </p:par>
+                      </p:childTnLst>
+                    </p:cTn>
+                  </p:par>
+                  <p:par>
+                    <p:cTn id="35" fill="hold">
+                      <p:stCondLst>
+                        <p:cond delay="indefinite"/>
+                      </p:stCondLst>
+                      <p:childTnLst>
+                        <p:par>
+                          <p:cTn id="36" fill="hold">
+                            <p:stCondLst>
+                              <p:cond delay="0"/>
+                            </p:stCondLst>
+                            <p:childTnLst>
+                              <p:par>
+                                <p:cTn id="37" presetID="1" presetClass="entr" presetSubtype="0" fill="hold" grpId="0" nodeType="clickEffect">
+                                  <p:stCondLst>
+                                    <p:cond delay="0"/>
+                                  </p:stCondLst>
+                                  <p:childTnLst>
+                                    <p:set>
+                                      <p:cBhvr>
+                                        <p:cTn id="38" dur="1" fill="hold">
+                                          <p:stCondLst>
+                                            <p:cond delay="0"/>
+                                          </p:stCondLst>
+                                        </p:cTn>
+                                        <p:tgtEl>
+                                          <p:spTgt spid="4">
+                                            <p:txEl>
+                                              <p:pRg st="26" end="26"/>
+                                            </p:txEl>
+                                          </p:spTgt>
+                                        </p:tgtEl>
+                                        <p:attrNameLst>
+                                          <p:attrName>style.visibility</p:attrName>
+                                        </p:attrNameLst>
+                                      </p:cBhvr>
+                                      <p:to>
+                                        <p:strVal val="visible"/>
+                                      </p:to>
+                                    </p:set>
+                                  </p:childTnLst>
+                                </p:cTn>
+                              </p:par>
+                            </p:childTnLst>
+                          </p:cTn>
+                        </p:par>
+                      </p:childTnLst>
+                    </p:cTn>
+                  </p:par>
+                  <p:par>
+                    <p:cTn id="39" fill="hold">
+                      <p:stCondLst>
+                        <p:cond delay="indefinite"/>
+                      </p:stCondLst>
+                      <p:childTnLst>
+                        <p:par>
+                          <p:cTn id="40" fill="hold">
+                            <p:stCondLst>
+                              <p:cond delay="0"/>
+                            </p:stCondLst>
+                            <p:childTnLst>
+                              <p:par>
+                                <p:cTn id="41" presetID="1" presetClass="entr" presetSubtype="0" fill="hold" grpId="0" nodeType="clickEffect">
+                                  <p:stCondLst>
+                                    <p:cond delay="0"/>
+                                  </p:stCondLst>
+                                  <p:childTnLst>
+                                    <p:set>
+                                      <p:cBhvr>
+                                        <p:cTn id="42" dur="1" fill="hold">
+                                          <p:stCondLst>
+                                            <p:cond delay="0"/>
+                                          </p:stCondLst>
+                                        </p:cTn>
+                                        <p:tgtEl>
+                                          <p:spTgt spid="4">
+                                            <p:txEl>
+                                              <p:pRg st="27" end="27"/>
+                                            </p:txEl>
+                                          </p:spTgt>
+                                        </p:tgtEl>
+                                        <p:attrNameLst>
+                                          <p:attrName>style.visibility</p:attrName>
+                                        </p:attrNameLst>
+                                      </p:cBhvr>
+                                      <p:to>
+                                        <p:strVal val="visible"/>
+                                      </p:to>
+                                    </p:set>
+                                  </p:childTnLst>
+                                </p:cTn>
+                              </p:par>
+                            </p:childTnLst>
+                          </p:cTn>
+                        </p:par>
+                      </p:childTnLst>
+                    </p:cTn>
+                  </p:par>
+                  <p:par>
+                    <p:cTn id="43" fill="hold">
+                      <p:stCondLst>
+                        <p:cond delay="indefinite"/>
+                      </p:stCondLst>
+                      <p:childTnLst>
+                        <p:par>
+                          <p:cTn id="44" fill="hold">
+                            <p:stCondLst>
+                              <p:cond delay="0"/>
+                            </p:stCondLst>
+                            <p:childTnLst>
+                              <p:par>
+                                <p:cTn id="45" presetID="1" presetClass="entr" presetSubtype="0" fill="hold" grpId="0" nodeType="clickEffect">
+                                  <p:stCondLst>
+                                    <p:cond delay="0"/>
+                                  </p:stCondLst>
+                                  <p:childTnLst>
+                                    <p:set>
+                                      <p:cBhvr>
+                                        <p:cTn id="46" dur="1" fill="hold">
+                                          <p:stCondLst>
+                                            <p:cond delay="0"/>
+                                          </p:stCondLst>
+                                        </p:cTn>
+                                        <p:tgtEl>
+                                          <p:spTgt spid="1">
+                                            <p:txEl>
+                                              <p:pRg st="2" end="2"/>
+                                            </p:txEl>
+                                          </p:spTgt>
+                                        </p:tgtEl>
+                                        <p:attrNameLst>
+                                          <p:attrName>style.visibility</p:attrName>
+                                        </p:attrNameLst>
+                                      </p:cBhvr>
+                                      <p:to>
+                                        <p:strVal val="visible"/>
+                                      </p:to>
+                                    </p:set>
+                                  </p:childTnLst>
+                                </p:cTn>
+                              </p:par>
+                            </p:childTnLst>
+                          </p:cTn>
+                        </p:par>
+                      </p:childTnLst>
+                    </p:cTn>
+                  </p:par>
+                  <p:par>
+                    <p:cTn id="47" fill="hold">
+                      <p:stCondLst>
+                        <p:cond delay="indefinite"/>
+                      </p:stCondLst>
+                      <p:childTnLst>
+                        <p:par>
+                          <p:cTn id="48" fill="hold">
+                            <p:stCondLst>
+                              <p:cond delay="0"/>
+                            </p:stCondLst>
+                            <p:childTnLst>
+                              <p:par>
+                                <p:cTn id="49" presetID="1" presetClass="entr" presetSubtype="0" fill="hold" grpId="0" nodeType="clickEffect">
+                                  <p:stCondLst>
+                                    <p:cond delay="0"/>
+                                  </p:stCondLst>
+                                  <p:childTnLst>
+                                    <p:set>
+                                      <p:cBhvr>
+                                        <p:cTn id="50" dur="1" fill="hold">
+                                          <p:stCondLst>
+                                            <p:cond delay="0"/>
+                                          </p:stCondLst>
+                                        </p:cTn>
+                                        <p:tgtEl>
+                                          <p:spTgt spid="1">
+                                            <p:txEl>
+                                              <p:pRg st="3" end="3"/>
+                                            </p:txEl>
+                                          </p:spTgt>
+                                        </p:tgtEl>
+                                        <p:attrNameLst>
+                                          <p:attrName>style.visibility</p:attrName>
+                                        </p:attrNameLst>
+                                      </p:cBhvr>
+                                      <p:to>
+                                        <p:strVal val="visible"/>
+                                      </p:to>
+                                    </p:set>
+                                  </p:childTnLst>
+                                </p:cTn>
+                              </p:par>
+                            </p:childTnLst>
+                          </p:cTn>
+                        </p:par>
+                      </p:childTnLst>
+                    </p:cTn>
+                  </p:par>
+                  <p:par>
+                    <p:cTn id="51" fill="hold">
+                      <p:stCondLst>
+                        <p:cond delay="indefinite"/>
+                      </p:stCondLst>
+                      <p:childTnLst>
+                        <p:par>
+                          <p:cTn id="52" fill="hold">
+                            <p:stCondLst>
+                              <p:cond delay="0"/>
+                            </p:stCondLst>
+                            <p:childTnLst>
+                              <p:par>
+                                <p:cTn id="53" presetID="1" presetClass="entr" presetSubtype="0" fill="hold" grpId="0" nodeType="clickEffect">
+                                  <p:stCondLst>
+                                    <p:cond delay="0"/>
+                                  </p:stCondLst>
+                                  <p:childTnLst>
+                                    <p:set>
+                                      <p:cBhvr>
+                                        <p:cTn id="54" dur="1" fill="hold">
+                                          <p:stCondLst>
+                                            <p:cond delay="0"/>
+                                          </p:stCondLst>
+                                        </p:cTn>
+                                        <p:tgtEl>
+                                          <p:spTgt spid="1">
+                                            <p:txEl>
+                                              <p:pRg st="4" end="4"/>
+                                            </p:txEl>
+                                          </p:spTgt>
+                                        </p:tgtEl>
+                                        <p:attrNameLst>
+                                          <p:attrName>style.visibility</p:attrName>
+                                        </p:attrNameLst>
+                                      </p:cBhvr>
+                                      <p:to>
+                                        <p:strVal val="visible"/>
+                                      </p:to>
+                                    </p:set>
+                                  </p:childTnLst>
+                                </p:cTn>
+                              </p:par>
+                            </p:childTnLst>
+                          </p:cTn>
+                        </p:par>
+                      </p:childTnLst>
+                    </p:cTn>
+                  </p:par>
+                </p:childTnLst>
+              </p:cTn>
+              <p:prevCondLst>
+                <p:cond evt="onPrev" delay="0">
+                  <p:tgtEl>
+                    <p:sldTgt/>
+                  </p:tgtEl>
+                </p:cond>
+              </p:prevCondLst>
+              <p:nextCondLst>
+                <p:cond evt="onNext" delay="0">
+                  <p:tgtEl>
+                    <p:sldTgt/>
+                  </p:tgtEl>
+                </p:cond>
+              </p:nextCondLst>
+            </p:seq>
+          </p:childTnLst>
+        </p:cTn>
+      </p:par>
+    </p:tnLst>
+    <p:bldLst>
+      <p:bldP spid="4" grpId="0" uiExpand="1" build="p"/>
+      <p:bldP spid="1" grpId="0" uiExpand="1" build="p"/>
+    </p:bldLst>
+  </p:timing>
 </p:sld>
 </file>
 
@@ -3422,11 +8842,3634 @@
             </a:pPr>
             <a:r>
               <a:rPr/>
-              <a:t>References</a:t>
+              <a:t>Dealing with Time</a:t>
             </a:r>
           </a:p>
         </p:txBody>
       </p:sp>
+      <mc:AlternateContent xmlns:mc="http://schemas.openxmlformats.org/markup-compatibility/2006">
+        <mc:Choice xmlns:a14="http://schemas.microsoft.com/office/drawing/2010/main" Requires="a14">
+          <p:sp>
+            <p:nvSpPr>
+              <p:cNvPr id="3" name="Content Placeholder 2"/>
+              <p:cNvSpPr>
+                <a:spLocks noGrp="1"/>
+              </p:cNvSpPr>
+              <p:nvPr>
+                <p:ph idx="1"/>
+              </p:nvPr>
+            </p:nvSpPr>
+            <p:spPr/>
+            <p:txBody>
+              <a:bodyPr/>
+              <a:lstStyle/>
+              <a:p>
+                <a:pPr lvl="0" indent="0" marL="0">
+                  <a:spcBef>
+                    <a:spcPts val="3000"/>
+                  </a:spcBef>
+                  <a:buNone/>
+                </a:pPr>
+                <a:r>
+                  <a:rPr b="1"/>
+                  <a:t>Costs Now, Benefits Later</a:t>
+                </a:r>
+              </a:p>
+              <a:p>
+                <a:pPr lvl="0" indent="0" marL="0">
+                  <a:buNone/>
+                </a:pPr>
+                <a:r>
+                  <a:rPr/>
+                  <a:t>Climate adaptation costs and benefits are spread over </a:t>
+                </a:r>
+                <a:r>
+                  <a:rPr b="1"/>
+                  <a:t>decades</a:t>
+                </a:r>
+                <a:r>
+                  <a:rPr/>
+                  <a:t>.</a:t>
+                </a:r>
+              </a:p>
+              <a:p>
+                <a:pPr lvl="0" indent="0" marL="0">
+                  <a:buNone/>
+                </a:pPr>
+                <a:r>
+                  <a:rPr/>
+                  <a:t>How should we weigh a dollar of benefit 30 years from now against a dollar of cost today?</a:t>
+                </a:r>
+              </a:p>
+              <a:p>
+                <a:pPr lvl="0" indent="0" marL="0">
+                  <a:spcBef>
+                    <a:spcPts val="3000"/>
+                  </a:spcBef>
+                  <a:buNone/>
+                </a:pPr>
+                <a:r>
+                  <a:rPr b="1"/>
+                  <a:t>Net Present Value</a:t>
+                </a:r>
+              </a:p>
+              <a:p>
+                <a:pPr lvl="0" indent="0" marL="0">
+                  <a:buNone/>
+                </a:pPr>
+                <a:r>
+                  <a:rPr b="1"/>
+                  <a:t>Discount</a:t>
+                </a:r>
+                <a:r>
+                  <a:rPr/>
+                  <a:t> future values to the present using discount rate </a:t>
+                </a:r>
+                <a14:m>
+                  <m:oMath xmlns:m="http://schemas.openxmlformats.org/officeDocument/2006/math">
+                    <m:r>
+                      <m:t>r</m:t>
+                    </m:r>
+                  </m:oMath>
+                </a14:m>
+                <a:r>
+                  <a:rPr/>
+                  <a:t>:</a:t>
+                </a:r>
+              </a:p>
+              <a:p>
+                <a:pPr lvl="0" indent="0" marL="0">
+                  <a:buNone/>
+                </a:pPr>
+                <a14:m>
+                  <m:oMathPara xmlns:m="http://schemas.openxmlformats.org/officeDocument/2006/math">
+                    <m:oMathParaPr>
+                      <m:jc m:val="center"/>
+                    </m:oMathParaPr>
+                    <m:oMath>
+                      <m:r>
+                        <m:t>N</m:t>
+                      </m:r>
+                      <m:r>
+                        <m:t>P</m:t>
+                      </m:r>
+                      <m:r>
+                        <m:t>V</m:t>
+                      </m:r>
+                      <m:d>
+                        <m:dPr>
+                          <m:begChr m:val="("/>
+                          <m:sepChr m:val=""/>
+                          <m:endChr m:val=")"/>
+                          <m:grow/>
+                        </m:dPr>
+                        <m:e>
+                          <m:r>
+                            <m:t>a</m:t>
+                          </m:r>
+                          <m:r>
+                            <m:rPr>
+                              <m:sty m:val="p"/>
+                            </m:rPr>
+                            <m:t>,</m:t>
+                          </m:r>
+                          <m:r>
+                            <m:rPr>
+                              <m:sty m:val="b"/>
+                            </m:rPr>
+                            <m:t>s</m:t>
+                          </m:r>
+                        </m:e>
+                      </m:d>
+                      <m:r>
+                        <m:rPr>
+                          <m:sty m:val="p"/>
+                        </m:rPr>
+                        <m:t>=</m:t>
+                      </m:r>
+                      <m:nary>
+                        <m:naryPr>
+                          <m:chr m:val="∑"/>
+                          <m:limLoc m:val="undOvr"/>
+                          <m:subHide m:val="off"/>
+                          <m:supHide m:val="off"/>
+                        </m:naryPr>
+                        <m:sub>
+                          <m:r>
+                            <m:t>t</m:t>
+                          </m:r>
+                          <m:r>
+                            <m:rPr>
+                              <m:sty m:val="p"/>
+                            </m:rPr>
+                            <m:t>=</m:t>
+                          </m:r>
+                          <m:r>
+                            <m:t>0</m:t>
+                          </m:r>
+                        </m:sub>
+                        <m:sup>
+                          <m:r>
+                            <m:t>T</m:t>
+                          </m:r>
+                        </m:sup>
+                        <m:e>
+                          <m:f>
+                            <m:fPr>
+                              <m:type m:val="bar"/>
+                            </m:fPr>
+                            <m:num>
+                              <m:sSub>
+                                <m:e>
+                                  <m:r>
+                                    <m:t>B</m:t>
+                                  </m:r>
+                                </m:e>
+                                <m:sub>
+                                  <m:r>
+                                    <m:t>t</m:t>
+                                  </m:r>
+                                </m:sub>
+                              </m:sSub>
+                              <m:d>
+                                <m:dPr>
+                                  <m:begChr m:val="("/>
+                                  <m:sepChr m:val=""/>
+                                  <m:endChr m:val=")"/>
+                                  <m:grow/>
+                                </m:dPr>
+                                <m:e>
+                                  <m:r>
+                                    <m:t>a</m:t>
+                                  </m:r>
+                                  <m:r>
+                                    <m:rPr>
+                                      <m:sty m:val="p"/>
+                                    </m:rPr>
+                                    <m:t>,</m:t>
+                                  </m:r>
+                                  <m:r>
+                                    <m:rPr>
+                                      <m:sty m:val="b"/>
+                                    </m:rPr>
+                                    <m:t>s</m:t>
+                                  </m:r>
+                                </m:e>
+                              </m:d>
+                              <m:r>
+                                <m:rPr>
+                                  <m:sty m:val="p"/>
+                                </m:rPr>
+                                <m:t>−</m:t>
+                              </m:r>
+                              <m:sSub>
+                                <m:e>
+                                  <m:r>
+                                    <m:t>C</m:t>
+                                  </m:r>
+                                </m:e>
+                                <m:sub>
+                                  <m:r>
+                                    <m:t>t</m:t>
+                                  </m:r>
+                                </m:sub>
+                              </m:sSub>
+                              <m:d>
+                                <m:dPr>
+                                  <m:begChr m:val="("/>
+                                  <m:sepChr m:val=""/>
+                                  <m:endChr m:val=")"/>
+                                  <m:grow/>
+                                </m:dPr>
+                                <m:e>
+                                  <m:r>
+                                    <m:t>a</m:t>
+                                  </m:r>
+                                  <m:r>
+                                    <m:rPr>
+                                      <m:sty m:val="p"/>
+                                    </m:rPr>
+                                    <m:t>,</m:t>
+                                  </m:r>
+                                  <m:r>
+                                    <m:rPr>
+                                      <m:sty m:val="b"/>
+                                    </m:rPr>
+                                    <m:t>s</m:t>
+                                  </m:r>
+                                </m:e>
+                              </m:d>
+                            </m:num>
+                            <m:den>
+                              <m:sSup>
+                                <m:e>
+                                  <m:d>
+                                    <m:dPr>
+                                      <m:begChr m:val="("/>
+                                      <m:sepChr m:val=""/>
+                                      <m:endChr m:val=")"/>
+                                      <m:grow/>
+                                    </m:dPr>
+                                    <m:e>
+                                      <m:r>
+                                        <m:t>1</m:t>
+                                      </m:r>
+                                      <m:r>
+                                        <m:rPr>
+                                          <m:sty m:val="p"/>
+                                        </m:rPr>
+                                        <m:t>+</m:t>
+                                      </m:r>
+                                      <m:r>
+                                        <m:t>r</m:t>
+                                      </m:r>
+                                    </m:e>
+                                  </m:d>
+                                </m:e>
+                                <m:sup>
+                                  <m:r>
+                                    <m:t>t</m:t>
+                                  </m:r>
+                                </m:sup>
+                              </m:sSup>
+                            </m:den>
+                          </m:f>
+                        </m:e>
+                      </m:nary>
+                    </m:oMath>
+                  </m:oMathPara>
+                </a14:m>
+              </a:p>
+              <a:p>
+                <a:pPr lvl="0"/>
+                <a14:m>
+                  <m:oMath xmlns:m="http://schemas.openxmlformats.org/officeDocument/2006/math">
+                    <m:sSub>
+                      <m:e>
+                        <m:r>
+                          <m:t>B</m:t>
+                        </m:r>
+                      </m:e>
+                      <m:sub>
+                        <m:r>
+                          <m:t>t</m:t>
+                        </m:r>
+                      </m:sub>
+                    </m:sSub>
+                    <m:r>
+                      <m:rPr>
+                        <m:sty m:val="p"/>
+                      </m:rPr>
+                      <m:t>−</m:t>
+                    </m:r>
+                    <m:sSub>
+                      <m:e>
+                        <m:r>
+                          <m:t>C</m:t>
+                        </m:r>
+                      </m:e>
+                      <m:sub>
+                        <m:r>
+                          <m:t>t</m:t>
+                        </m:r>
+                      </m:sub>
+                    </m:sSub>
+                  </m:oMath>
+                </a14:m>
+                <a:r>
+                  <a:rPr/>
+                  <a:t>: net benefits (benefits minus costs) in year </a:t>
+                </a:r>
+                <a14:m>
+                  <m:oMath xmlns:m="http://schemas.openxmlformats.org/officeDocument/2006/math">
+                    <m:r>
+                      <m:t>t</m:t>
+                    </m:r>
+                  </m:oMath>
+                </a14:m>
+              </a:p>
+              <a:p>
+                <a:pPr lvl="0"/>
+                <a14:m>
+                  <m:oMath xmlns:m="http://schemas.openxmlformats.org/officeDocument/2006/math">
+                    <m:r>
+                      <m:t>r</m:t>
+                    </m:r>
+                  </m:oMath>
+                </a14:m>
+                <a:r>
+                  <a:rPr/>
+                  <a:t>: discount rate (e.g., 2% per year)</a:t>
+                </a:r>
+              </a:p>
+              <a:p>
+                <a:pPr lvl="0"/>
+                <a14:m>
+                  <m:oMath xmlns:m="http://schemas.openxmlformats.org/officeDocument/2006/math">
+                    <m:f>
+                      <m:fPr>
+                        <m:type m:val="bar"/>
+                      </m:fPr>
+                      <m:num>
+                        <m:r>
+                          <m:t>1</m:t>
+                        </m:r>
+                      </m:num>
+                      <m:den>
+                        <m:sSup>
+                          <m:e>
+                            <m:d>
+                              <m:dPr>
+                                <m:begChr m:val="("/>
+                                <m:sepChr m:val=""/>
+                                <m:endChr m:val=")"/>
+                                <m:grow/>
+                              </m:dPr>
+                              <m:e>
+                                <m:r>
+                                  <m:t>1</m:t>
+                                </m:r>
+                                <m:r>
+                                  <m:rPr>
+                                    <m:sty m:val="p"/>
+                                  </m:rPr>
+                                  <m:t>+</m:t>
+                                </m:r>
+                                <m:r>
+                                  <m:t>r</m:t>
+                                </m:r>
+                              </m:e>
+                            </m:d>
+                          </m:e>
+                          <m:sup>
+                            <m:r>
+                              <m:t>t</m:t>
+                            </m:r>
+                          </m:sup>
+                        </m:sSup>
+                      </m:den>
+                    </m:f>
+                  </m:oMath>
+                </a14:m>
+                <a:r>
+                  <a:rPr/>
+                  <a:t>: how much we value a dollar </a:t>
+                </a:r>
+                <a14:m>
+                  <m:oMath xmlns:m="http://schemas.openxmlformats.org/officeDocument/2006/math">
+                    <m:r>
+                      <m:t>t</m:t>
+                    </m:r>
+                  </m:oMath>
+                </a14:m>
+                <a:r>
+                  <a:rPr/>
+                  <a:t> years from now</a:t>
+                </a:r>
+              </a:p>
+              <a:p>
+                <a:pPr lvl="0"/>
+                <a14:m>
+                  <m:oMath xmlns:m="http://schemas.openxmlformats.org/officeDocument/2006/math">
+                    <m:r>
+                      <m:t>T</m:t>
+                    </m:r>
+                  </m:oMath>
+                </a14:m>
+                <a:r>
+                  <a:rPr/>
+                  <a:t>: time horizon</a:t>
+                </a:r>
+              </a:p>
+              <a:p>
+                <a:pPr lvl="0" indent="0" marL="0">
+                  <a:spcBef>
+                    <a:spcPts val="3000"/>
+                  </a:spcBef>
+                  <a:buNone/>
+                </a:pPr>
+                <a:r>
+                  <a:rPr b="1"/>
+                  <a:t>Alternative Notation</a:t>
+                </a:r>
+              </a:p>
+              <a:p>
+                <a:pPr lvl="0" indent="0" marL="0">
+                  <a:buNone/>
+                </a:pPr>
+                <a:r>
+                  <a:rPr/>
+                  <a:t>You will also see NPV written as:</a:t>
+                </a:r>
+              </a:p>
+              <a:p>
+                <a:pPr lvl="0" indent="0" marL="0">
+                  <a:buNone/>
+                </a:pPr>
+                <a14:m>
+                  <m:oMathPara xmlns:m="http://schemas.openxmlformats.org/officeDocument/2006/math">
+                    <m:oMathParaPr>
+                      <m:jc m:val="center"/>
+                    </m:oMathParaPr>
+                    <m:oMath>
+                      <m:r>
+                        <m:t>N</m:t>
+                      </m:r>
+                      <m:r>
+                        <m:t>P</m:t>
+                      </m:r>
+                      <m:r>
+                        <m:t>V</m:t>
+                      </m:r>
+                      <m:d>
+                        <m:dPr>
+                          <m:begChr m:val="("/>
+                          <m:sepChr m:val=""/>
+                          <m:endChr m:val=")"/>
+                          <m:grow/>
+                        </m:dPr>
+                        <m:e>
+                          <m:r>
+                            <m:t>a</m:t>
+                          </m:r>
+                          <m:r>
+                            <m:rPr>
+                              <m:sty m:val="p"/>
+                            </m:rPr>
+                            <m:t>,</m:t>
+                          </m:r>
+                          <m:r>
+                            <m:rPr>
+                              <m:sty m:val="b"/>
+                            </m:rPr>
+                            <m:t>s</m:t>
+                          </m:r>
+                        </m:e>
+                      </m:d>
+                      <m:r>
+                        <m:rPr>
+                          <m:sty m:val="p"/>
+                        </m:rPr>
+                        <m:t>=</m:t>
+                      </m:r>
+                      <m:nary>
+                        <m:naryPr>
+                          <m:chr m:val="∑"/>
+                          <m:limLoc m:val="undOvr"/>
+                          <m:subHide m:val="off"/>
+                          <m:supHide m:val="off"/>
+                        </m:naryPr>
+                        <m:sub>
+                          <m:r>
+                            <m:t>t</m:t>
+                          </m:r>
+                          <m:r>
+                            <m:rPr>
+                              <m:sty m:val="p"/>
+                            </m:rPr>
+                            <m:t>=</m:t>
+                          </m:r>
+                          <m:r>
+                            <m:t>0</m:t>
+                          </m:r>
+                        </m:sub>
+                        <m:sup>
+                          <m:r>
+                            <m:t>T</m:t>
+                          </m:r>
+                        </m:sup>
+                        <m:e>
+                          <m:sSup>
+                            <m:e>
+                              <m:d>
+                                <m:dPr>
+                                  <m:begChr m:val="("/>
+                                  <m:sepChr m:val=""/>
+                                  <m:endChr m:val=")"/>
+                                  <m:grow/>
+                                </m:dPr>
+                                <m:e>
+                                  <m:r>
+                                    <m:t>1</m:t>
+                                  </m:r>
+                                  <m:r>
+                                    <m:rPr>
+                                      <m:sty m:val="p"/>
+                                    </m:rPr>
+                                    <m:t>−</m:t>
+                                  </m:r>
+                                  <m:r>
+                                    <m:t>γ</m:t>
+                                  </m:r>
+                                </m:e>
+                              </m:d>
+                            </m:e>
+                            <m:sup>
+                              <m:r>
+                                <m:t>t</m:t>
+                              </m:r>
+                            </m:sup>
+                          </m:sSup>
+                        </m:e>
+                      </m:nary>
+                      <m:d>
+                        <m:dPr>
+                          <m:begChr m:val="["/>
+                          <m:sepChr m:val=""/>
+                          <m:endChr m:val="]"/>
+                          <m:grow/>
+                        </m:dPr>
+                        <m:e>
+                          <m:sSub>
+                            <m:e>
+                              <m:r>
+                                <m:t>B</m:t>
+                              </m:r>
+                            </m:e>
+                            <m:sub>
+                              <m:r>
+                                <m:t>t</m:t>
+                              </m:r>
+                            </m:sub>
+                          </m:sSub>
+                          <m:d>
+                            <m:dPr>
+                              <m:begChr m:val="("/>
+                              <m:sepChr m:val=""/>
+                              <m:endChr m:val=")"/>
+                              <m:grow/>
+                            </m:dPr>
+                            <m:e>
+                              <m:r>
+                                <m:t>a</m:t>
+                              </m:r>
+                              <m:r>
+                                <m:rPr>
+                                  <m:sty m:val="p"/>
+                                </m:rPr>
+                                <m:t>,</m:t>
+                              </m:r>
+                              <m:r>
+                                <m:rPr>
+                                  <m:sty m:val="b"/>
+                                </m:rPr>
+                                <m:t>s</m:t>
+                              </m:r>
+                            </m:e>
+                          </m:d>
+                          <m:r>
+                            <m:rPr>
+                              <m:sty m:val="p"/>
+                            </m:rPr>
+                            <m:t>−</m:t>
+                          </m:r>
+                          <m:sSub>
+                            <m:e>
+                              <m:r>
+                                <m:t>C</m:t>
+                              </m:r>
+                            </m:e>
+                            <m:sub>
+                              <m:r>
+                                <m:t>t</m:t>
+                              </m:r>
+                            </m:sub>
+                          </m:sSub>
+                          <m:d>
+                            <m:dPr>
+                              <m:begChr m:val="("/>
+                              <m:sepChr m:val=""/>
+                              <m:endChr m:val=")"/>
+                              <m:grow/>
+                            </m:dPr>
+                            <m:e>
+                              <m:r>
+                                <m:t>a</m:t>
+                              </m:r>
+                              <m:r>
+                                <m:rPr>
+                                  <m:sty m:val="p"/>
+                                </m:rPr>
+                                <m:t>,</m:t>
+                              </m:r>
+                              <m:r>
+                                <m:rPr>
+                                  <m:sty m:val="b"/>
+                                </m:rPr>
+                                <m:t>s</m:t>
+                              </m:r>
+                            </m:e>
+                          </m:d>
+                        </m:e>
+                      </m:d>
+                    </m:oMath>
+                  </m:oMathPara>
+                </a14:m>
+              </a:p>
+              <a:p>
+                <a:pPr lvl="0"/>
+                <a:r>
+                  <a:rPr/>
+                  <a:t>These are </a:t>
+                </a:r>
+                <a:r>
+                  <a:rPr b="1"/>
+                  <a:t>mathematically equivalent</a:t>
+                </a:r>
+                <a:r>
+                  <a:rPr/>
+                  <a:t> — just different parameterizations</a:t>
+                </a:r>
+              </a:p>
+              <a:p>
+                <a:pPr lvl="0"/>
+                <a:r>
+                  <a:rPr/>
+                  <a:t>Our formula: discount rate </a:t>
+                </a:r>
+                <a14:m>
+                  <m:oMath xmlns:m="http://schemas.openxmlformats.org/officeDocument/2006/math">
+                    <m:r>
+                      <m:t>r</m:t>
+                    </m:r>
+                  </m:oMath>
+                </a14:m>
+                <a:r>
+                  <a:rPr/>
+                  <a:t>, discount factor </a:t>
+                </a:r>
+                <a14:m>
+                  <m:oMath xmlns:m="http://schemas.openxmlformats.org/officeDocument/2006/math">
+                    <m:f>
+                      <m:fPr>
+                        <m:type m:val="bar"/>
+                      </m:fPr>
+                      <m:num>
+                        <m:r>
+                          <m:t>1</m:t>
+                        </m:r>
+                      </m:num>
+                      <m:den>
+                        <m:sSup>
+                          <m:e>
+                            <m:d>
+                              <m:dPr>
+                                <m:begChr m:val="("/>
+                                <m:sepChr m:val=""/>
+                                <m:endChr m:val=")"/>
+                                <m:grow/>
+                              </m:dPr>
+                              <m:e>
+                                <m:r>
+                                  <m:t>1</m:t>
+                                </m:r>
+                                <m:r>
+                                  <m:rPr>
+                                    <m:sty m:val="p"/>
+                                  </m:rPr>
+                                  <m:t>+</m:t>
+                                </m:r>
+                                <m:r>
+                                  <m:t>r</m:t>
+                                </m:r>
+                              </m:e>
+                            </m:d>
+                          </m:e>
+                          <m:sup>
+                            <m:r>
+                              <m:t>t</m:t>
+                            </m:r>
+                          </m:sup>
+                        </m:sSup>
+                      </m:den>
+                    </m:f>
+                  </m:oMath>
+                </a14:m>
+              </a:p>
+              <a:p>
+                <a:pPr lvl="0"/>
+                <a:r>
+                  <a:rPr/>
+                  <a:t>Alternative: discount rate </a:t>
+                </a:r>
+                <a14:m>
+                  <m:oMath xmlns:m="http://schemas.openxmlformats.org/officeDocument/2006/math">
+                    <m:r>
+                      <m:t>γ</m:t>
+                    </m:r>
+                  </m:oMath>
+                </a14:m>
+                <a:r>
+                  <a:rPr/>
+                  <a:t>, discount factor </a:t>
+                </a:r>
+                <a14:m>
+                  <m:oMath xmlns:m="http://schemas.openxmlformats.org/officeDocument/2006/math">
+                    <m:sSup>
+                      <m:e>
+                        <m:d>
+                          <m:dPr>
+                            <m:begChr m:val="("/>
+                            <m:sepChr m:val=""/>
+                            <m:endChr m:val=")"/>
+                            <m:grow/>
+                          </m:dPr>
+                          <m:e>
+                            <m:r>
+                              <m:t>1</m:t>
+                            </m:r>
+                            <m:r>
+                              <m:rPr>
+                                <m:sty m:val="p"/>
+                              </m:rPr>
+                              <m:t>−</m:t>
+                            </m:r>
+                            <m:r>
+                              <m:t>γ</m:t>
+                            </m:r>
+                          </m:e>
+                        </m:d>
+                      </m:e>
+                      <m:sup>
+                        <m:r>
+                          <m:t>t</m:t>
+                        </m:r>
+                      </m:sup>
+                    </m:sSup>
+                  </m:oMath>
+                </a14:m>
+              </a:p>
+              <a:p>
+                <a:pPr lvl="0"/>
+                <a:r>
+                  <a:rPr/>
+                  <a:t>Relationship: </a:t>
+                </a:r>
+                <a14:m>
+                  <m:oMath xmlns:m="http://schemas.openxmlformats.org/officeDocument/2006/math">
+                    <m:d>
+                      <m:dPr>
+                        <m:begChr m:val="("/>
+                        <m:sepChr m:val=""/>
+                        <m:endChr m:val=")"/>
+                        <m:grow/>
+                      </m:dPr>
+                      <m:e>
+                        <m:r>
+                          <m:t>1</m:t>
+                        </m:r>
+                        <m:r>
+                          <m:rPr>
+                            <m:sty m:val="p"/>
+                          </m:rPr>
+                          <m:t>−</m:t>
+                        </m:r>
+                        <m:r>
+                          <m:t>γ</m:t>
+                        </m:r>
+                      </m:e>
+                    </m:d>
+                    <m:r>
+                      <m:rPr>
+                        <m:sty m:val="p"/>
+                      </m:rPr>
+                      <m:t>=</m:t>
+                    </m:r>
+                    <m:f>
+                      <m:fPr>
+                        <m:type m:val="bar"/>
+                      </m:fPr>
+                      <m:num>
+                        <m:r>
+                          <m:t>1</m:t>
+                        </m:r>
+                      </m:num>
+                      <m:den>
+                        <m:r>
+                          <m:t>1</m:t>
+                        </m:r>
+                        <m:r>
+                          <m:rPr>
+                            <m:sty m:val="p"/>
+                          </m:rPr>
+                          <m:t>+</m:t>
+                        </m:r>
+                        <m:r>
+                          <m:t>r</m:t>
+                        </m:r>
+                      </m:den>
+                    </m:f>
+                  </m:oMath>
+                </a14:m>
+                <a:r>
+                  <a:rPr/>
+                  <a:t>, so </a:t>
+                </a:r>
+                <a14:m>
+                  <m:oMath xmlns:m="http://schemas.openxmlformats.org/officeDocument/2006/math">
+                    <m:r>
+                      <m:t>γ</m:t>
+                    </m:r>
+                    <m:r>
+                      <m:rPr>
+                        <m:sty m:val="p"/>
+                      </m:rPr>
+                      <m:t>=</m:t>
+                    </m:r>
+                    <m:f>
+                      <m:fPr>
+                        <m:type m:val="bar"/>
+                      </m:fPr>
+                      <m:num>
+                        <m:r>
+                          <m:t>r</m:t>
+                        </m:r>
+                      </m:num>
+                      <m:den>
+                        <m:r>
+                          <m:t>1</m:t>
+                        </m:r>
+                        <m:r>
+                          <m:rPr>
+                            <m:sty m:val="p"/>
+                          </m:rPr>
+                          <m:t>+</m:t>
+                        </m:r>
+                        <m:r>
+                          <m:t>r</m:t>
+                        </m:r>
+                      </m:den>
+                    </m:f>
+                  </m:oMath>
+                </a14:m>
+              </a:p>
+              <a:p>
+                <a:pPr lvl="0" indent="0" marL="1270000">
+                  <a:buNone/>
+                </a:pPr>
+                <a:r>
+                  <a:rPr sz="2000" b="1"/>
+                  <a:t>Important</a:t>
+                </a:r>
+              </a:p>
+              <a:p>
+                <a:pPr lvl="0" indent="0" marL="1270000">
+                  <a:buNone/>
+                </a:pPr>
+                <a:r>
+                  <a:rPr sz="2000"/>
+                  <a:t>Always check which convention a paper or report uses — a “2% discount rate” gives different numbers depending on the formula!</a:t>
+                </a:r>
+              </a:p>
+              <a:p>
+                <a:pPr lvl="0" indent="0" marL="0">
+                  <a:spcBef>
+                    <a:spcPts val="3000"/>
+                  </a:spcBef>
+                  <a:buNone/>
+                </a:pPr>
+                <a:r>
+                  <a:rPr b="1"/>
+                  <a:t>Worked Example</a:t>
+                </a:r>
+              </a:p>
+              <a:p>
+                <a:pPr lvl="0" indent="0" marL="0">
+                  <a:buNone/>
+                </a:pPr>
+                <a:r>
+                  <a:rPr/>
+                  <a:t>At </a:t>
+                </a:r>
+                <a14:m>
+                  <m:oMath xmlns:m="http://schemas.openxmlformats.org/officeDocument/2006/math">
+                    <m:r>
+                      <m:t>r</m:t>
+                    </m:r>
+                    <m:r>
+                      <m:rPr>
+                        <m:sty m:val="p"/>
+                      </m:rPr>
+                      <m:t>=</m:t>
+                    </m:r>
+                    <m:r>
+                      <m:t>2</m:t>
+                    </m:r>
+                    <m:r>
+                      <m:rPr>
+                        <m:sty m:val="p"/>
+                      </m:rPr>
+                      <m:t>%</m:t>
+                    </m:r>
+                  </m:oMath>
+                </a14:m>
+                <a:r>
+                  <a:rPr/>
+                  <a:t>, what is </a:t>
+                </a:r>
+                <a:r>
+                  <a:rPr b="1"/>
+                  <a:t>$1</a:t>
+                </a:r>
+                <a:r>
+                  <a:rPr/>
+                  <a:t> in 10 years worth today?</a:t>
+                </a:r>
+              </a:p>
+              <a:p>
+                <a:pPr lvl="0" indent="0" marL="0">
+                  <a:buNone/>
+                </a:pPr>
+                <a14:m>
+                  <m:oMathPara xmlns:m="http://schemas.openxmlformats.org/officeDocument/2006/math">
+                    <m:oMathParaPr>
+                      <m:jc m:val="center"/>
+                    </m:oMathParaPr>
+                    <m:oMath>
+                      <m:f>
+                        <m:fPr>
+                          <m:type m:val="bar"/>
+                        </m:fPr>
+                        <m:num>
+                          <m:r>
+                            <m:t>1</m:t>
+                          </m:r>
+                        </m:num>
+                        <m:den>
+                          <m:sSup>
+                            <m:e>
+                              <m:d>
+                                <m:dPr>
+                                  <m:begChr m:val="("/>
+                                  <m:sepChr m:val=""/>
+                                  <m:endChr m:val=")"/>
+                                  <m:grow/>
+                                </m:dPr>
+                                <m:e>
+                                  <m:r>
+                                    <m:t>1.02</m:t>
+                                  </m:r>
+                                </m:e>
+                              </m:d>
+                            </m:e>
+                            <m:sup>
+                              <m:r>
+                                <m:t>10</m:t>
+                              </m:r>
+                            </m:sup>
+                          </m:sSup>
+                        </m:den>
+                      </m:f>
+                      <m:r>
+                        <m:rPr>
+                          <m:sty m:val="p"/>
+                        </m:rPr>
+                        <m:t>≈</m:t>
+                      </m:r>
+                      <m:r>
+                        <m:rPr>
+                          <m:sty m:val="p"/>
+                        </m:rPr>
+                        <m:t>$</m:t>
+                      </m:r>
+                      <m:r>
+                        <m:t>0.82</m:t>
+                      </m:r>
+                    </m:oMath>
+                  </m:oMathPara>
+                </a14:m>
+              </a:p>
+              <a:p>
+                <a:pPr lvl="0" indent="0" marL="0">
+                  <a:buNone/>
+                </a:pPr>
+                <a:r>
+                  <a:rPr/>
+                  <a:t>What about </a:t>
+                </a:r>
+                <a:r>
+                  <a:rPr b="1"/>
+                  <a:t>$1</a:t>
+                </a:r>
+                <a:r>
+                  <a:rPr/>
+                  <a:t> in 50 years?</a:t>
+                </a:r>
+              </a:p>
+              <a:p>
+                <a:pPr lvl="0" indent="0" marL="0">
+                  <a:buNone/>
+                </a:pPr>
+                <a14:m>
+                  <m:oMathPara xmlns:m="http://schemas.openxmlformats.org/officeDocument/2006/math">
+                    <m:oMathParaPr>
+                      <m:jc m:val="center"/>
+                    </m:oMathParaPr>
+                    <m:oMath>
+                      <m:f>
+                        <m:fPr>
+                          <m:type m:val="bar"/>
+                        </m:fPr>
+                        <m:num>
+                          <m:r>
+                            <m:t>1</m:t>
+                          </m:r>
+                        </m:num>
+                        <m:den>
+                          <m:sSup>
+                            <m:e>
+                              <m:d>
+                                <m:dPr>
+                                  <m:begChr m:val="("/>
+                                  <m:sepChr m:val=""/>
+                                  <m:endChr m:val=")"/>
+                                  <m:grow/>
+                                </m:dPr>
+                                <m:e>
+                                  <m:r>
+                                    <m:t>1.02</m:t>
+                                  </m:r>
+                                </m:e>
+                              </m:d>
+                            </m:e>
+                            <m:sup>
+                              <m:r>
+                                <m:t>50</m:t>
+                              </m:r>
+                            </m:sup>
+                          </m:sSup>
+                        </m:den>
+                      </m:f>
+                      <m:r>
+                        <m:rPr>
+                          <m:sty m:val="p"/>
+                        </m:rPr>
+                        <m:t>≈</m:t>
+                      </m:r>
+                      <m:r>
+                        <m:rPr>
+                          <m:sty m:val="p"/>
+                        </m:rPr>
+                        <m:t>$</m:t>
+                      </m:r>
+                      <m:r>
+                        <m:t>0.37</m:t>
+                      </m:r>
+                    </m:oMath>
+                  </m:oMathPara>
+                </a14:m>
+              </a:p>
+              <a:p>
+                <a:pPr lvl="0" indent="0" marL="0">
+                  <a:buNone/>
+                </a:pPr>
+                <a:r>
+                  <a:rPr/>
+                  <a:t>At </a:t>
+                </a:r>
+                <a14:m>
+                  <m:oMath xmlns:m="http://schemas.openxmlformats.org/officeDocument/2006/math">
+                    <m:r>
+                      <m:t>r</m:t>
+                    </m:r>
+                    <m:r>
+                      <m:rPr>
+                        <m:sty m:val="p"/>
+                      </m:rPr>
+                      <m:t>=</m:t>
+                    </m:r>
+                    <m:r>
+                      <m:t>7</m:t>
+                    </m:r>
+                    <m:r>
+                      <m:rPr>
+                        <m:sty m:val="p"/>
+                      </m:rPr>
+                      <m:t>%</m:t>
+                    </m:r>
+                  </m:oMath>
+                </a14:m>
+                <a:r>
+                  <a:rPr/>
+                  <a:t>: $1 in 50 years </a:t>
+                </a:r>
+                <a14:m>
+                  <m:oMath xmlns:m="http://schemas.openxmlformats.org/officeDocument/2006/math">
+                    <m:r>
+                      <m:rPr>
+                        <m:sty m:val="p"/>
+                      </m:rPr>
+                      <m:t>=</m:t>
+                    </m:r>
+                    <m:f>
+                      <m:fPr>
+                        <m:type m:val="bar"/>
+                      </m:fPr>
+                      <m:num>
+                        <m:r>
+                          <m:t>1</m:t>
+                        </m:r>
+                      </m:num>
+                      <m:den>
+                        <m:sSup>
+                          <m:e>
+                            <m:d>
+                              <m:dPr>
+                                <m:begChr m:val="("/>
+                                <m:sepChr m:val=""/>
+                                <m:endChr m:val=")"/>
+                                <m:grow/>
+                              </m:dPr>
+                              <m:e>
+                                <m:r>
+                                  <m:t>1.07</m:t>
+                                </m:r>
+                              </m:e>
+                            </m:d>
+                          </m:e>
+                          <m:sup>
+                            <m:r>
+                              <m:t>50</m:t>
+                            </m:r>
+                          </m:sup>
+                        </m:sSup>
+                      </m:den>
+                    </m:f>
+                    <m:r>
+                      <m:rPr>
+                        <m:sty m:val="p"/>
+                      </m:rPr>
+                      <m:t>≈</m:t>
+                    </m:r>
+                    <m:r>
+                      <m:rPr>
+                        <m:sty m:val="p"/>
+                      </m:rPr>
+                      <m:t>$</m:t>
+                    </m:r>
+                    <m:r>
+                      <m:t>0.03</m:t>
+                    </m:r>
+                  </m:oMath>
+                </a14:m>
+              </a:p>
+            </p:txBody>
+          </p:sp>
+        </mc:Choice>
+      </mc:AlternateContent>
+    </p:spTree>
+  </p:cSld>
+  <p:timing>
+    <p:tnLst>
+      <p:par>
+        <p:cTn id="1" dur="indefinite" restart="never" nodeType="tmRoot">
+          <p:childTnLst>
+            <p:seq concurrent="1" nextAc="seek">
+              <p:cTn id="2" dur="indefinite" nodeType="mainSeq">
+                <p:childTnLst>
+                  <p:par>
+                    <p:cTn id="3" fill="hold">
+                      <p:stCondLst>
+                        <p:cond delay="indefinite"/>
+                      </p:stCondLst>
+                      <p:childTnLst>
+                        <p:par>
+                          <p:cTn id="4" fill="hold">
+                            <p:stCondLst>
+                              <p:cond delay="0"/>
+                            </p:stCondLst>
+                            <p:childTnLst>
+                              <p:par>
+                                <p:cTn id="5" presetID="1" presetClass="entr" presetSubtype="0" fill="hold" grpId="0" nodeType="clickEffect">
+                                  <p:stCondLst>
+                                    <p:cond delay="0"/>
+                                  </p:stCondLst>
+                                  <p:childTnLst>
+                                    <p:set>
+                                      <p:cBhvr>
+                                        <p:cTn id="6" dur="1" fill="hold">
+                                          <p:stCondLst>
+                                            <p:cond delay="0"/>
+                                          </p:stCondLst>
+                                        </p:cTn>
+                                        <p:tgtEl>
+                                          <p:spTgt spid="3">
+                                            <p:txEl>
+                                              <p:pRg st="6" end="6"/>
+                                            </p:txEl>
+                                          </p:spTgt>
+                                        </p:tgtEl>
+                                        <p:attrNameLst>
+                                          <p:attrName>style.visibility</p:attrName>
+                                        </p:attrNameLst>
+                                      </p:cBhvr>
+                                      <p:to>
+                                        <p:strVal val="visible"/>
+                                      </p:to>
+                                    </p:set>
+                                  </p:childTnLst>
+                                </p:cTn>
+                              </p:par>
+                            </p:childTnLst>
+                          </p:cTn>
+                        </p:par>
+                      </p:childTnLst>
+                    </p:cTn>
+                  </p:par>
+                  <p:par>
+                    <p:cTn id="7" fill="hold">
+                      <p:stCondLst>
+                        <p:cond delay="indefinite"/>
+                      </p:stCondLst>
+                      <p:childTnLst>
+                        <p:par>
+                          <p:cTn id="8" fill="hold">
+                            <p:stCondLst>
+                              <p:cond delay="0"/>
+                            </p:stCondLst>
+                            <p:childTnLst>
+                              <p:par>
+                                <p:cTn id="9" presetID="1" presetClass="entr" presetSubtype="0" fill="hold" grpId="0" nodeType="clickEffect">
+                                  <p:stCondLst>
+                                    <p:cond delay="0"/>
+                                  </p:stCondLst>
+                                  <p:childTnLst>
+                                    <p:set>
+                                      <p:cBhvr>
+                                        <p:cTn id="10" dur="1" fill="hold">
+                                          <p:stCondLst>
+                                            <p:cond delay="0"/>
+                                          </p:stCondLst>
+                                        </p:cTn>
+                                        <p:tgtEl>
+                                          <p:spTgt spid="3">
+                                            <p:txEl>
+                                              <p:pRg st="7" end="7"/>
+                                            </p:txEl>
+                                          </p:spTgt>
+                                        </p:tgtEl>
+                                        <p:attrNameLst>
+                                          <p:attrName>style.visibility</p:attrName>
+                                        </p:attrNameLst>
+                                      </p:cBhvr>
+                                      <p:to>
+                                        <p:strVal val="visible"/>
+                                      </p:to>
+                                    </p:set>
+                                  </p:childTnLst>
+                                </p:cTn>
+                              </p:par>
+                            </p:childTnLst>
+                          </p:cTn>
+                        </p:par>
+                      </p:childTnLst>
+                    </p:cTn>
+                  </p:par>
+                  <p:par>
+                    <p:cTn id="11" fill="hold">
+                      <p:stCondLst>
+                        <p:cond delay="indefinite"/>
+                      </p:stCondLst>
+                      <p:childTnLst>
+                        <p:par>
+                          <p:cTn id="12" fill="hold">
+                            <p:stCondLst>
+                              <p:cond delay="0"/>
+                            </p:stCondLst>
+                            <p:childTnLst>
+                              <p:par>
+                                <p:cTn id="13" presetID="1" presetClass="entr" presetSubtype="0" fill="hold" grpId="0" nodeType="clickEffect">
+                                  <p:stCondLst>
+                                    <p:cond delay="0"/>
+                                  </p:stCondLst>
+                                  <p:childTnLst>
+                                    <p:set>
+                                      <p:cBhvr>
+                                        <p:cTn id="14" dur="1" fill="hold">
+                                          <p:stCondLst>
+                                            <p:cond delay="0"/>
+                                          </p:stCondLst>
+                                        </p:cTn>
+                                        <p:tgtEl>
+                                          <p:spTgt spid="3">
+                                            <p:txEl>
+                                              <p:pRg st="8" end="8"/>
+                                            </p:txEl>
+                                          </p:spTgt>
+                                        </p:tgtEl>
+                                        <p:attrNameLst>
+                                          <p:attrName>style.visibility</p:attrName>
+                                        </p:attrNameLst>
+                                      </p:cBhvr>
+                                      <p:to>
+                                        <p:strVal val="visible"/>
+                                      </p:to>
+                                    </p:set>
+                                  </p:childTnLst>
+                                </p:cTn>
+                              </p:par>
+                            </p:childTnLst>
+                          </p:cTn>
+                        </p:par>
+                      </p:childTnLst>
+                    </p:cTn>
+                  </p:par>
+                  <p:par>
+                    <p:cTn id="15" fill="hold">
+                      <p:stCondLst>
+                        <p:cond delay="indefinite"/>
+                      </p:stCondLst>
+                      <p:childTnLst>
+                        <p:par>
+                          <p:cTn id="16" fill="hold">
+                            <p:stCondLst>
+                              <p:cond delay="0"/>
+                            </p:stCondLst>
+                            <p:childTnLst>
+                              <p:par>
+                                <p:cTn id="17" presetID="1" presetClass="entr" presetSubtype="0" fill="hold" grpId="0" nodeType="clickEffect">
+                                  <p:stCondLst>
+                                    <p:cond delay="0"/>
+                                  </p:stCondLst>
+                                  <p:childTnLst>
+                                    <p:set>
+                                      <p:cBhvr>
+                                        <p:cTn id="18" dur="1" fill="hold">
+                                          <p:stCondLst>
+                                            <p:cond delay="0"/>
+                                          </p:stCondLst>
+                                        </p:cTn>
+                                        <p:tgtEl>
+                                          <p:spTgt spid="3">
+                                            <p:txEl>
+                                              <p:pRg st="9" end="9"/>
+                                            </p:txEl>
+                                          </p:spTgt>
+                                        </p:tgtEl>
+                                        <p:attrNameLst>
+                                          <p:attrName>style.visibility</p:attrName>
+                                        </p:attrNameLst>
+                                      </p:cBhvr>
+                                      <p:to>
+                                        <p:strVal val="visible"/>
+                                      </p:to>
+                                    </p:set>
+                                  </p:childTnLst>
+                                </p:cTn>
+                              </p:par>
+                            </p:childTnLst>
+                          </p:cTn>
+                        </p:par>
+                      </p:childTnLst>
+                    </p:cTn>
+                  </p:par>
+                  <p:par>
+                    <p:cTn id="19" fill="hold">
+                      <p:stCondLst>
+                        <p:cond delay="indefinite"/>
+                      </p:stCondLst>
+                      <p:childTnLst>
+                        <p:par>
+                          <p:cTn id="20" fill="hold">
+                            <p:stCondLst>
+                              <p:cond delay="0"/>
+                            </p:stCondLst>
+                            <p:childTnLst>
+                              <p:par>
+                                <p:cTn id="21" presetID="1" presetClass="entr" presetSubtype="0" fill="hold" grpId="0" nodeType="clickEffect">
+                                  <p:stCondLst>
+                                    <p:cond delay="0"/>
+                                  </p:stCondLst>
+                                  <p:childTnLst>
+                                    <p:set>
+                                      <p:cBhvr>
+                                        <p:cTn id="22" dur="1" fill="hold">
+                                          <p:stCondLst>
+                                            <p:cond delay="0"/>
+                                          </p:stCondLst>
+                                        </p:cTn>
+                                        <p:tgtEl>
+                                          <p:spTgt spid="3">
+                                            <p:txEl>
+                                              <p:pRg st="13" end="13"/>
+                                            </p:txEl>
+                                          </p:spTgt>
+                                        </p:tgtEl>
+                                        <p:attrNameLst>
+                                          <p:attrName>style.visibility</p:attrName>
+                                        </p:attrNameLst>
+                                      </p:cBhvr>
+                                      <p:to>
+                                        <p:strVal val="visible"/>
+                                      </p:to>
+                                    </p:set>
+                                  </p:childTnLst>
+                                </p:cTn>
+                              </p:par>
+                            </p:childTnLst>
+                          </p:cTn>
+                        </p:par>
+                      </p:childTnLst>
+                    </p:cTn>
+                  </p:par>
+                  <p:par>
+                    <p:cTn id="23" fill="hold">
+                      <p:stCondLst>
+                        <p:cond delay="indefinite"/>
+                      </p:stCondLst>
+                      <p:childTnLst>
+                        <p:par>
+                          <p:cTn id="24" fill="hold">
+                            <p:stCondLst>
+                              <p:cond delay="0"/>
+                            </p:stCondLst>
+                            <p:childTnLst>
+                              <p:par>
+                                <p:cTn id="25" presetID="1" presetClass="entr" presetSubtype="0" fill="hold" grpId="0" nodeType="clickEffect">
+                                  <p:stCondLst>
+                                    <p:cond delay="0"/>
+                                  </p:stCondLst>
+                                  <p:childTnLst>
+                                    <p:set>
+                                      <p:cBhvr>
+                                        <p:cTn id="26" dur="1" fill="hold">
+                                          <p:stCondLst>
+                                            <p:cond delay="0"/>
+                                          </p:stCondLst>
+                                        </p:cTn>
+                                        <p:tgtEl>
+                                          <p:spTgt spid="3">
+                                            <p:txEl>
+                                              <p:pRg st="14" end="14"/>
+                                            </p:txEl>
+                                          </p:spTgt>
+                                        </p:tgtEl>
+                                        <p:attrNameLst>
+                                          <p:attrName>style.visibility</p:attrName>
+                                        </p:attrNameLst>
+                                      </p:cBhvr>
+                                      <p:to>
+                                        <p:strVal val="visible"/>
+                                      </p:to>
+                                    </p:set>
+                                  </p:childTnLst>
+                                </p:cTn>
+                              </p:par>
+                            </p:childTnLst>
+                          </p:cTn>
+                        </p:par>
+                      </p:childTnLst>
+                    </p:cTn>
+                  </p:par>
+                  <p:par>
+                    <p:cTn id="27" fill="hold">
+                      <p:stCondLst>
+                        <p:cond delay="indefinite"/>
+                      </p:stCondLst>
+                      <p:childTnLst>
+                        <p:par>
+                          <p:cTn id="28" fill="hold">
+                            <p:stCondLst>
+                              <p:cond delay="0"/>
+                            </p:stCondLst>
+                            <p:childTnLst>
+                              <p:par>
+                                <p:cTn id="29" presetID="1" presetClass="entr" presetSubtype="0" fill="hold" grpId="0" nodeType="clickEffect">
+                                  <p:stCondLst>
+                                    <p:cond delay="0"/>
+                                  </p:stCondLst>
+                                  <p:childTnLst>
+                                    <p:set>
+                                      <p:cBhvr>
+                                        <p:cTn id="30" dur="1" fill="hold">
+                                          <p:stCondLst>
+                                            <p:cond delay="0"/>
+                                          </p:stCondLst>
+                                        </p:cTn>
+                                        <p:tgtEl>
+                                          <p:spTgt spid="3">
+                                            <p:txEl>
+                                              <p:pRg st="15" end="15"/>
+                                            </p:txEl>
+                                          </p:spTgt>
+                                        </p:tgtEl>
+                                        <p:attrNameLst>
+                                          <p:attrName>style.visibility</p:attrName>
+                                        </p:attrNameLst>
+                                      </p:cBhvr>
+                                      <p:to>
+                                        <p:strVal val="visible"/>
+                                      </p:to>
+                                    </p:set>
+                                  </p:childTnLst>
+                                </p:cTn>
+                              </p:par>
+                            </p:childTnLst>
+                          </p:cTn>
+                        </p:par>
+                      </p:childTnLst>
+                    </p:cTn>
+                  </p:par>
+                  <p:par>
+                    <p:cTn id="31" fill="hold">
+                      <p:stCondLst>
+                        <p:cond delay="indefinite"/>
+                      </p:stCondLst>
+                      <p:childTnLst>
+                        <p:par>
+                          <p:cTn id="32" fill="hold">
+                            <p:stCondLst>
+                              <p:cond delay="0"/>
+                            </p:stCondLst>
+                            <p:childTnLst>
+                              <p:par>
+                                <p:cTn id="33" presetID="1" presetClass="entr" presetSubtype="0" fill="hold" grpId="0" nodeType="clickEffect">
+                                  <p:stCondLst>
+                                    <p:cond delay="0"/>
+                                  </p:stCondLst>
+                                  <p:childTnLst>
+                                    <p:set>
+                                      <p:cBhvr>
+                                        <p:cTn id="34" dur="1" fill="hold">
+                                          <p:stCondLst>
+                                            <p:cond delay="0"/>
+                                          </p:stCondLst>
+                                        </p:cTn>
+                                        <p:tgtEl>
+                                          <p:spTgt spid="3">
+                                            <p:txEl>
+                                              <p:pRg st="16" end="16"/>
+                                            </p:txEl>
+                                          </p:spTgt>
+                                        </p:tgtEl>
+                                        <p:attrNameLst>
+                                          <p:attrName>style.visibility</p:attrName>
+                                        </p:attrNameLst>
+                                      </p:cBhvr>
+                                      <p:to>
+                                        <p:strVal val="visible"/>
+                                      </p:to>
+                                    </p:set>
+                                  </p:childTnLst>
+                                </p:cTn>
+                              </p:par>
+                            </p:childTnLst>
+                          </p:cTn>
+                        </p:par>
+                      </p:childTnLst>
+                    </p:cTn>
+                  </p:par>
+                </p:childTnLst>
+              </p:cTn>
+              <p:prevCondLst>
+                <p:cond evt="onPrev" delay="0">
+                  <p:tgtEl>
+                    <p:sldTgt/>
+                  </p:tgtEl>
+                </p:cond>
+              </p:prevCondLst>
+              <p:nextCondLst>
+                <p:cond evt="onNext" delay="0">
+                  <p:tgtEl>
+                    <p:sldTgt/>
+                  </p:tgtEl>
+                </p:cond>
+              </p:nextCondLst>
+            </p:seq>
+          </p:childTnLst>
+        </p:cTn>
+      </p:par>
+    </p:tnLst>
+    <p:bldLst>
+      <p:bldP spid="3" grpId="0" uiExpand="1" build="p"/>
+    </p:bldLst>
+  </p:timing>
+</p:sld>
+</file>
+
+<file path=ppt/slides/slide6.xml><?xml version="1.0" encoding="utf-8"?>
+<p:sld xmlns:a="http://schemas.openxmlformats.org/drawingml/2006/main" xmlns:r="http://schemas.openxmlformats.org/officeDocument/2006/relationships" xmlns:p="http://schemas.openxmlformats.org/presentationml/2006/main">
+  <p:cSld>
+    <p:spTree>
+      <p:nvGrpSpPr>
+        <p:cNvPr id="1" name=""/>
+        <p:cNvGrpSpPr/>
+        <p:nvPr/>
+      </p:nvGrpSpPr>
+      <p:grpSpPr>
+        <a:xfrm>
+          <a:off x="0" y="0"/>
+          <a:ext cx="0" cy="0"/>
+          <a:chOff x="0" y="0"/>
+          <a:chExt cx="0" cy="0"/>
+        </a:xfrm>
+      </p:grpSpPr>
+      <p:sp>
+        <p:nvSpPr>
+          <p:cNvPr id="2" name="Title 1"/>
+          <p:cNvSpPr>
+            <a:spLocks noGrp="1"/>
+          </p:cNvSpPr>
+          <p:nvPr>
+            <p:ph type="title"/>
+          </p:nvPr>
+        </p:nvSpPr>
+        <p:spPr/>
+        <p:txBody>
+          <a:bodyPr/>
+          <a:lstStyle/>
+          <a:p>
+            <a:pPr lvl="0" indent="0" marL="0">
+              <a:buNone/>
+            </a:pPr>
+            <a:r>
+              <a:rPr/>
+              <a:t>Handling Uncertainty</a:t>
+            </a:r>
+          </a:p>
+        </p:txBody>
+      </p:sp>
+      <mc:AlternateContent xmlns:mc="http://schemas.openxmlformats.org/markup-compatibility/2006">
+        <mc:Choice xmlns:a14="http://schemas.microsoft.com/office/drawing/2010/main" Requires="a14">
+          <p:sp>
+            <p:nvSpPr>
+              <p:cNvPr id="3" name="Content Placeholder 2"/>
+              <p:cNvSpPr>
+                <a:spLocks noGrp="1"/>
+              </p:cNvSpPr>
+              <p:nvPr>
+                <p:ph idx="1"/>
+              </p:nvPr>
+            </p:nvSpPr>
+            <p:spPr/>
+            <p:txBody>
+              <a:bodyPr/>
+              <a:lstStyle/>
+              <a:p>
+                <a:pPr lvl="0" indent="0" marL="0">
+                  <a:spcBef>
+                    <a:spcPts val="3000"/>
+                  </a:spcBef>
+                  <a:buNone/>
+                </a:pPr>
+                <a:r>
+                  <a:rPr b="1"/>
+                  <a:t>How BCA Is Commonly Practiced</a:t>
+                </a:r>
+              </a:p>
+              <a:p>
+                <a:pPr lvl="0" indent="0" marL="0">
+                  <a:buNone/>
+                </a:pPr>
+                <a:r>
+                  <a:rPr/>
+                  <a:t>Most real-world analyses pick a </a:t>
+                </a:r>
+                <a:r>
+                  <a:rPr b="1"/>
+                  <a:t>single “best guess”</a:t>
+                </a:r>
+                <a:r>
+                  <a:rPr/>
+                  <a:t> scenario.</a:t>
+                </a:r>
+              </a:p>
+              <a:p>
+                <a:pPr lvl="0"/>
+                <a:r>
+                  <a:rPr/>
+                  <a:t>A Houston water utility picks </a:t>
+                </a:r>
+                <a:r>
+                  <a:rPr b="1"/>
+                  <a:t>one assumption</a:t>
+                </a:r>
+                <a:r>
+                  <a:rPr/>
+                  <a:t> for each uncertain input (population, climate, regulations, costs)</a:t>
+                </a:r>
+              </a:p>
+              <a:p>
+                <a:pPr lvl="0"/>
+                <a:r>
+                  <a:rPr/>
+                  <a:t>Calculate NPV under this single scenario</a:t>
+                </a:r>
+              </a:p>
+              <a:p>
+                <a:pPr lvl="0"/>
+                <a:r>
+                  <a:rPr/>
+                  <a:t>If NPV &gt; 0, the project “passes”</a:t>
+                </a:r>
+              </a:p>
+              <a:p>
+                <a:pPr lvl="0" indent="0" marL="0">
+                  <a:spcBef>
+                    <a:spcPts val="3000"/>
+                  </a:spcBef>
+                  <a:buNone/>
+                </a:pPr>
+                <a:r>
+                  <a:rPr b="1"/>
+                  <a:t>Why Single-Scenario BCA Is Fragile</a:t>
+                </a:r>
+              </a:p>
+              <a:p>
+                <a:pPr lvl="0" indent="0" marL="0">
+                  <a:buNone/>
+                </a:pPr>
+                <a:r>
+                  <a:rPr/>
+                  <a:t>Decisions that look great under one scenario can fail badly under another.</a:t>
+                </a:r>
+              </a:p>
+              <a:p>
+                <a:pPr lvl="0"/>
+                <a:r>
+                  <a:rPr/>
+                  <a:t>Build a reservoir for future demand → but what if future is </a:t>
+                </a:r>
+                <a:r>
+                  <a:rPr b="1"/>
+                  <a:t>drier</a:t>
+                </a:r>
+                <a:r>
+                  <a:rPr/>
+                  <a:t> than expected? (Reservoir doesn’t fill)</a:t>
+                </a:r>
+              </a:p>
+              <a:p>
+                <a:pPr lvl="0"/>
+                <a:r>
+                  <a:rPr/>
+                  <a:t>Build a reservoir for future demand → but what if future is </a:t>
+                </a:r>
+                <a:r>
+                  <a:rPr b="1"/>
+                  <a:t>wetter</a:t>
+                </a:r>
+                <a:r>
+                  <a:rPr/>
+                  <a:t> than expected? (Reservoir was unnecessary — funds should have gone to flood protection)</a:t>
+                </a:r>
+              </a:p>
+              <a:p>
+                <a:pPr lvl="0"/>
+                <a:r>
+                  <a:rPr/>
+                  <a:t>The “best guess” is almost certainly wrong in some dimension</a:t>
+                </a:r>
+              </a:p>
+              <a:p>
+                <a:pPr lvl="0" indent="0" marL="0">
+                  <a:spcBef>
+                    <a:spcPts val="3000"/>
+                  </a:spcBef>
+                  <a:buNone/>
+                </a:pPr>
+                <a:r>
+                  <a:rPr b="1"/>
+                  <a:t>Expected Utility</a:t>
+                </a:r>
+              </a:p>
+              <a:p>
+                <a:pPr lvl="0" indent="0" marL="0">
+                  <a:buNone/>
+                </a:pPr>
+                <a:r>
+                  <a:rPr/>
+                  <a:t>A better approach: pick the decision with the best </a:t>
+                </a:r>
+                <a:r>
+                  <a:rPr b="1"/>
+                  <a:t>expected</a:t>
+                </a:r>
+                <a:r>
+                  <a:rPr/>
+                  <a:t> NPV:</a:t>
+                </a:r>
+              </a:p>
+              <a:p>
+                <a:pPr lvl="0" indent="0" marL="0">
+                  <a:buNone/>
+                </a:pPr>
+                <a14:m>
+                  <m:oMathPara xmlns:m="http://schemas.openxmlformats.org/officeDocument/2006/math">
+                    <m:oMathParaPr>
+                      <m:jc m:val="center"/>
+                    </m:oMathParaPr>
+                    <m:oMath>
+                      <m:sSup>
+                        <m:e>
+                          <m:r>
+                            <m:t>a</m:t>
+                          </m:r>
+                        </m:e>
+                        <m:sup>
+                          <m:r>
+                            <m:rPr>
+                              <m:sty m:val="p"/>
+                            </m:rPr>
+                            <m:t>*</m:t>
+                          </m:r>
+                        </m:sup>
+                      </m:sSup>
+                      <m:r>
+                        <m:rPr>
+                          <m:sty m:val="p"/>
+                        </m:rPr>
+                        <m:t>=</m:t>
+                      </m:r>
+                      <m:r>
+                        <m:rPr>
+                          <m:sty m:val="p"/>
+                        </m:rPr>
+                        <m:t>arg</m:t>
+                      </m:r>
+                      <m:limLow>
+                        <m:e>
+                          <m:r>
+                            <m:rPr>
+                              <m:sty m:val="p"/>
+                            </m:rPr>
+                            <m:t>max</m:t>
+                          </m:r>
+                        </m:e>
+                        <m:lim>
+                          <m:r>
+                            <m:t>a</m:t>
+                          </m:r>
+                        </m:lim>
+                      </m:limLow>
+                      <m:r>
+                        <m:t> </m:t>
+                      </m:r>
+                      <m:sSub>
+                        <m:e>
+                          <m:r>
+                            <m:rPr>
+                              <m:sty m:val="p"/>
+                              <m:scr m:val="double-struck"/>
+                            </m:rPr>
+                            <m:t>E</m:t>
+                          </m:r>
+                        </m:e>
+                        <m:sub>
+                          <m:r>
+                            <m:rPr>
+                              <m:sty m:val="b"/>
+                            </m:rPr>
+                            <m:t>s</m:t>
+                          </m:r>
+                        </m:sub>
+                      </m:sSub>
+                      <m:d>
+                        <m:dPr>
+                          <m:begChr m:val="["/>
+                          <m:sepChr m:val=""/>
+                          <m:endChr m:val="]"/>
+                          <m:grow/>
+                        </m:dPr>
+                        <m:e>
+                          <m:r>
+                            <m:t>N</m:t>
+                          </m:r>
+                          <m:r>
+                            <m:t>P</m:t>
+                          </m:r>
+                          <m:r>
+                            <m:t>V</m:t>
+                          </m:r>
+                          <m:d>
+                            <m:dPr>
+                              <m:begChr m:val="("/>
+                              <m:sepChr m:val=""/>
+                              <m:endChr m:val=")"/>
+                              <m:grow/>
+                            </m:dPr>
+                            <m:e>
+                              <m:r>
+                                <m:t>a</m:t>
+                              </m:r>
+                              <m:r>
+                                <m:rPr>
+                                  <m:sty m:val="p"/>
+                                </m:rPr>
+                                <m:t>,</m:t>
+                              </m:r>
+                              <m:r>
+                                <m:rPr>
+                                  <m:sty m:val="b"/>
+                                </m:rPr>
+                                <m:t>s</m:t>
+                              </m:r>
+                            </m:e>
+                          </m:d>
+                        </m:e>
+                      </m:d>
+                    </m:oMath>
+                  </m:oMathPara>
+                </a14:m>
+              </a:p>
+              <a:p>
+                <a:pPr lvl="0" indent="0" marL="0">
+                  <a:buNone/>
+                </a:pPr>
+                <a:r>
+                  <a:rPr/>
+                  <a:t>Recall:</a:t>
+                </a:r>
+              </a:p>
+              <a:p>
+                <a:pPr lvl="0" indent="0" marL="0">
+                  <a:buNone/>
+                </a:pPr>
+                <a14:m>
+                  <m:oMathPara xmlns:m="http://schemas.openxmlformats.org/officeDocument/2006/math">
+                    <m:oMathParaPr>
+                      <m:jc m:val="center"/>
+                    </m:oMathParaPr>
+                    <m:oMath>
+                      <m:sSub>
+                        <m:e>
+                          <m:r>
+                            <m:rPr>
+                              <m:sty m:val="p"/>
+                              <m:scr m:val="double-struck"/>
+                            </m:rPr>
+                            <m:t>E</m:t>
+                          </m:r>
+                        </m:e>
+                        <m:sub>
+                          <m:r>
+                            <m:rPr>
+                              <m:sty m:val="b"/>
+                            </m:rPr>
+                            <m:t>s</m:t>
+                          </m:r>
+                        </m:sub>
+                      </m:sSub>
+                      <m:d>
+                        <m:dPr>
+                          <m:begChr m:val="["/>
+                          <m:sepChr m:val=""/>
+                          <m:endChr m:val="]"/>
+                          <m:grow/>
+                        </m:dPr>
+                        <m:e>
+                          <m:r>
+                            <m:t>N</m:t>
+                          </m:r>
+                          <m:r>
+                            <m:t>P</m:t>
+                          </m:r>
+                          <m:r>
+                            <m:t>V</m:t>
+                          </m:r>
+                          <m:d>
+                            <m:dPr>
+                              <m:begChr m:val="("/>
+                              <m:sepChr m:val=""/>
+                              <m:endChr m:val=")"/>
+                              <m:grow/>
+                            </m:dPr>
+                            <m:e>
+                              <m:r>
+                                <m:t>a</m:t>
+                              </m:r>
+                              <m:r>
+                                <m:rPr>
+                                  <m:sty m:val="p"/>
+                                </m:rPr>
+                                <m:t>,</m:t>
+                              </m:r>
+                              <m:r>
+                                <m:rPr>
+                                  <m:sty m:val="b"/>
+                                </m:rPr>
+                                <m:t>s</m:t>
+                              </m:r>
+                            </m:e>
+                          </m:d>
+                        </m:e>
+                      </m:d>
+                      <m:r>
+                        <m:rPr>
+                          <m:sty m:val="p"/>
+                        </m:rPr>
+                        <m:t>=</m:t>
+                      </m:r>
+                      <m:r>
+                        <m:rPr>
+                          <m:sty m:val="p"/>
+                        </m:rPr>
+                        <m:t>∫</m:t>
+                      </m:r>
+                      <m:r>
+                        <m:t>p</m:t>
+                      </m:r>
+                      <m:d>
+                        <m:dPr>
+                          <m:begChr m:val="("/>
+                          <m:sepChr m:val=""/>
+                          <m:endChr m:val=")"/>
+                          <m:grow/>
+                        </m:dPr>
+                        <m:e>
+                          <m:r>
+                            <m:rPr>
+                              <m:sty m:val="b"/>
+                            </m:rPr>
+                            <m:t>s</m:t>
+                          </m:r>
+                        </m:e>
+                      </m:d>
+                      <m:r>
+                        <m:t> </m:t>
+                      </m:r>
+                      <m:r>
+                        <m:t>N</m:t>
+                      </m:r>
+                      <m:r>
+                        <m:t>P</m:t>
+                      </m:r>
+                      <m:r>
+                        <m:t>V</m:t>
+                      </m:r>
+                      <m:d>
+                        <m:dPr>
+                          <m:begChr m:val="("/>
+                          <m:sepChr m:val=""/>
+                          <m:endChr m:val=")"/>
+                          <m:grow/>
+                        </m:dPr>
+                        <m:e>
+                          <m:r>
+                            <m:t>a</m:t>
+                          </m:r>
+                          <m:r>
+                            <m:rPr>
+                              <m:sty m:val="p"/>
+                            </m:rPr>
+                            <m:t>,</m:t>
+                          </m:r>
+                          <m:r>
+                            <m:rPr>
+                              <m:sty m:val="b"/>
+                            </m:rPr>
+                            <m:t>s</m:t>
+                          </m:r>
+                        </m:e>
+                      </m:d>
+                      <m:r>
+                        <m:t> </m:t>
+                      </m:r>
+                      <m:r>
+                        <m:t>d</m:t>
+                      </m:r>
+                      <m:r>
+                        <m:rPr>
+                          <m:sty m:val="b"/>
+                        </m:rPr>
+                        <m:t>s</m:t>
+                      </m:r>
+                    </m:oMath>
+                  </m:oMathPara>
+                </a14:m>
+              </a:p>
+              <a:p>
+                <a:pPr lvl="0" indent="0" marL="0">
+                  <a:buNone/>
+                </a:pPr>
+                <a:r>
+                  <a:rPr/>
+                  <a:t>This requires a </a:t>
+                </a:r>
+                <a:r>
+                  <a:rPr b="1"/>
+                  <a:t>probability distribution</a:t>
+                </a:r>
+                <a:r>
+                  <a:rPr/>
+                  <a:t> over states of the world.</a:t>
+                </a:r>
+              </a:p>
+              <a:p>
+                <a:pPr lvl="0" indent="0" marL="0">
+                  <a:spcBef>
+                    <a:spcPts val="3000"/>
+                  </a:spcBef>
+                  <a:buNone/>
+                </a:pPr>
+                <a:r>
+                  <a:rPr b="1"/>
+                  <a:t>Connecting to Monte Carlo</a:t>
+                </a:r>
+              </a:p>
+              <a:p>
+                <a:pPr lvl="0" indent="0" marL="0">
+                  <a:buNone/>
+                </a:pPr>
+                <a:r>
+                  <a:rPr/>
+                  <a:t>You already know how to do this!</a:t>
+                </a:r>
+              </a:p>
+              <a:p>
+                <a:pPr lvl="0" indent="-342900" marL="342900">
+                  <a:buAutoNum type="arabicPeriod"/>
+                </a:pPr>
+                <a:r>
+                  <a:rPr/>
+                  <a:t>Sample many states of the world </a:t>
+                </a:r>
+                <a14:m>
+                  <m:oMath xmlns:m="http://schemas.openxmlformats.org/officeDocument/2006/math">
+                    <m:sSub>
+                      <m:e>
+                        <m:r>
+                          <m:rPr>
+                            <m:sty m:val="b"/>
+                          </m:rPr>
+                          <m:t>s</m:t>
+                        </m:r>
+                      </m:e>
+                      <m:sub>
+                        <m:r>
+                          <m:t>1</m:t>
+                        </m:r>
+                      </m:sub>
+                    </m:sSub>
+                    <m:r>
+                      <m:rPr>
+                        <m:sty m:val="p"/>
+                      </m:rPr>
+                      <m:t>,</m:t>
+                    </m:r>
+                    <m:sSub>
+                      <m:e>
+                        <m:r>
+                          <m:rPr>
+                            <m:sty m:val="b"/>
+                          </m:rPr>
+                          <m:t>s</m:t>
+                        </m:r>
+                      </m:e>
+                      <m:sub>
+                        <m:r>
+                          <m:t>2</m:t>
+                        </m:r>
+                      </m:sub>
+                    </m:sSub>
+                    <m:r>
+                      <m:rPr>
+                        <m:sty m:val="p"/>
+                      </m:rPr>
+                      <m:t>,</m:t>
+                    </m:r>
+                    <m:r>
+                      <m:rPr>
+                        <m:sty m:val="p"/>
+                      </m:rPr>
+                      <m:t>…</m:t>
+                    </m:r>
+                    <m:r>
+                      <m:rPr>
+                        <m:sty m:val="p"/>
+                      </m:rPr>
+                      <m:t>,</m:t>
+                    </m:r>
+                    <m:sSub>
+                      <m:e>
+                        <m:r>
+                          <m:rPr>
+                            <m:sty m:val="b"/>
+                          </m:rPr>
+                          <m:t>s</m:t>
+                        </m:r>
+                      </m:e>
+                      <m:sub>
+                        <m:r>
+                          <m:t>N</m:t>
+                        </m:r>
+                      </m:sub>
+                    </m:sSub>
+                  </m:oMath>
+                </a14:m>
+                <a:r>
+                  <a:rPr/>
+                  <a:t> from </a:t>
+                </a:r>
+                <a14:m>
+                  <m:oMath xmlns:m="http://schemas.openxmlformats.org/officeDocument/2006/math">
+                    <m:r>
+                      <m:t>p</m:t>
+                    </m:r>
+                    <m:d>
+                      <m:dPr>
+                        <m:begChr m:val="("/>
+                        <m:sepChr m:val=""/>
+                        <m:endChr m:val=")"/>
+                        <m:grow/>
+                      </m:dPr>
+                      <m:e>
+                        <m:r>
+                          <m:rPr>
+                            <m:sty m:val="b"/>
+                          </m:rPr>
+                          <m:t>s</m:t>
+                        </m:r>
+                      </m:e>
+                    </m:d>
+                  </m:oMath>
+                </a14:m>
+              </a:p>
+              <a:p>
+                <a:pPr lvl="0" indent="-342900" marL="342900">
+                  <a:buAutoNum type="arabicPeriod"/>
+                </a:pPr>
+                <a:r>
+                  <a:rPr/>
+                  <a:t>Compute </a:t>
+                </a:r>
+                <a14:m>
+                  <m:oMath xmlns:m="http://schemas.openxmlformats.org/officeDocument/2006/math">
+                    <m:r>
+                      <m:t>N</m:t>
+                    </m:r>
+                    <m:r>
+                      <m:t>P</m:t>
+                    </m:r>
+                    <m:r>
+                      <m:t>V</m:t>
+                    </m:r>
+                    <m:d>
+                      <m:dPr>
+                        <m:begChr m:val="("/>
+                        <m:sepChr m:val=""/>
+                        <m:endChr m:val=")"/>
+                        <m:grow/>
+                      </m:dPr>
+                      <m:e>
+                        <m:r>
+                          <m:t>a</m:t>
+                        </m:r>
+                        <m:r>
+                          <m:rPr>
+                            <m:sty m:val="p"/>
+                          </m:rPr>
+                          <m:t>,</m:t>
+                        </m:r>
+                        <m:sSub>
+                          <m:e>
+                            <m:r>
+                              <m:rPr>
+                                <m:sty m:val="b"/>
+                              </m:rPr>
+                              <m:t>s</m:t>
+                            </m:r>
+                          </m:e>
+                          <m:sub>
+                            <m:r>
+                              <m:t>i</m:t>
+                            </m:r>
+                          </m:sub>
+                        </m:sSub>
+                      </m:e>
+                    </m:d>
+                  </m:oMath>
+                </a14:m>
+                <a:r>
+                  <a:rPr/>
+                  <a:t> for each sample</a:t>
+                </a:r>
+              </a:p>
+              <a:p>
+                <a:pPr lvl="0" indent="-342900" marL="342900">
+                  <a:buAutoNum type="arabicPeriod"/>
+                </a:pPr>
+                <a:r>
+                  <a:rPr/>
+                  <a:t>Average: </a:t>
+                </a:r>
+                <a14:m>
+                  <m:oMath xmlns:m="http://schemas.openxmlformats.org/officeDocument/2006/math">
+                    <m:acc>
+                      <m:accPr>
+                        <m:chr m:val="̂"/>
+                      </m:accPr>
+                      <m:e>
+                        <m:r>
+                          <m:rPr>
+                            <m:sty m:val="p"/>
+                            <m:scr m:val="double-struck"/>
+                          </m:rPr>
+                          <m:t>E</m:t>
+                        </m:r>
+                      </m:e>
+                    </m:acc>
+                    <m:d>
+                      <m:dPr>
+                        <m:begChr m:val="["/>
+                        <m:sepChr m:val=""/>
+                        <m:endChr m:val="]"/>
+                        <m:grow/>
+                      </m:dPr>
+                      <m:e>
+                        <m:r>
+                          <m:t>N</m:t>
+                        </m:r>
+                        <m:r>
+                          <m:t>P</m:t>
+                        </m:r>
+                        <m:r>
+                          <m:t>V</m:t>
+                        </m:r>
+                        <m:d>
+                          <m:dPr>
+                            <m:begChr m:val="("/>
+                            <m:sepChr m:val=""/>
+                            <m:endChr m:val=")"/>
+                            <m:grow/>
+                          </m:dPr>
+                          <m:e>
+                            <m:r>
+                              <m:t>a</m:t>
+                            </m:r>
+                            <m:r>
+                              <m:rPr>
+                                <m:sty m:val="p"/>
+                              </m:rPr>
+                              <m:t>,</m:t>
+                            </m:r>
+                            <m:r>
+                              <m:rPr>
+                                <m:sty m:val="b"/>
+                              </m:rPr>
+                              <m:t>s</m:t>
+                            </m:r>
+                          </m:e>
+                        </m:d>
+                      </m:e>
+                    </m:d>
+                    <m:r>
+                      <m:rPr>
+                        <m:sty m:val="p"/>
+                      </m:rPr>
+                      <m:t>≈</m:t>
+                    </m:r>
+                    <m:f>
+                      <m:fPr>
+                        <m:type m:val="bar"/>
+                      </m:fPr>
+                      <m:num>
+                        <m:r>
+                          <m:t>1</m:t>
+                        </m:r>
+                      </m:num>
+                      <m:den>
+                        <m:r>
+                          <m:t>N</m:t>
+                        </m:r>
+                      </m:den>
+                    </m:f>
+                    <m:nary>
+                      <m:naryPr>
+                        <m:chr m:val="∑"/>
+                        <m:limLoc m:val="undOvr"/>
+                        <m:subHide m:val="off"/>
+                        <m:supHide m:val="off"/>
+                      </m:naryPr>
+                      <m:sub>
+                        <m:r>
+                          <m:t>i</m:t>
+                        </m:r>
+                        <m:r>
+                          <m:rPr>
+                            <m:sty m:val="p"/>
+                          </m:rPr>
+                          <m:t>=</m:t>
+                        </m:r>
+                        <m:r>
+                          <m:t>1</m:t>
+                        </m:r>
+                      </m:sub>
+                      <m:sup>
+                        <m:r>
+                          <m:t>N</m:t>
+                        </m:r>
+                      </m:sup>
+                      <m:e>
+                        <m:r>
+                          <m:t>N</m:t>
+                        </m:r>
+                      </m:e>
+                    </m:nary>
+                    <m:r>
+                      <m:t>P</m:t>
+                    </m:r>
+                    <m:r>
+                      <m:t>V</m:t>
+                    </m:r>
+                    <m:d>
+                      <m:dPr>
+                        <m:begChr m:val="("/>
+                        <m:sepChr m:val=""/>
+                        <m:endChr m:val=")"/>
+                        <m:grow/>
+                      </m:dPr>
+                      <m:e>
+                        <m:r>
+                          <m:t>a</m:t>
+                        </m:r>
+                        <m:r>
+                          <m:rPr>
+                            <m:sty m:val="p"/>
+                          </m:rPr>
+                          <m:t>,</m:t>
+                        </m:r>
+                        <m:sSub>
+                          <m:e>
+                            <m:r>
+                              <m:rPr>
+                                <m:sty m:val="b"/>
+                              </m:rPr>
+                              <m:t>s</m:t>
+                            </m:r>
+                          </m:e>
+                          <m:sub>
+                            <m:r>
+                              <m:t>i</m:t>
+                            </m:r>
+                          </m:sub>
+                        </m:sSub>
+                      </m:e>
+                    </m:d>
+                  </m:oMath>
+                </a14:m>
+              </a:p>
+              <a:p>
+                <a:pPr lvl="0" indent="-342900" marL="342900">
+                  <a:buAutoNum type="arabicPeriod"/>
+                </a:pPr>
+                <a:r>
+                  <a:rPr/>
+                  <a:t>Compare across actions </a:t>
+                </a:r>
+                <a14:m>
+                  <m:oMath xmlns:m="http://schemas.openxmlformats.org/officeDocument/2006/math">
+                    <m:r>
+                      <m:t>a</m:t>
+                    </m:r>
+                    <m:r>
+                      <m:rPr>
+                        <m:sty m:val="p"/>
+                      </m:rPr>
+                      <m:t>∈</m:t>
+                    </m:r>
+                    <m:r>
+                      <m:rPr>
+                        <m:sty m:val="p"/>
+                        <m:scr m:val="script"/>
+                      </m:rPr>
+                      <m:t>A</m:t>
+                    </m:r>
+                  </m:oMath>
+                </a14:m>
+              </a:p>
+              <a:p>
+                <a:pPr lvl="0" indent="0" marL="0">
+                  <a:spcBef>
+                    <a:spcPts val="3000"/>
+                  </a:spcBef>
+                  <a:buNone/>
+                </a:pPr>
+                <a:r>
+                  <a:rPr b="1"/>
+                  <a:t>The Standard BCA Recipe</a:t>
+                </a:r>
+              </a:p>
+              <a:p>
+                <a:pPr lvl="0" indent="-342900" marL="342900">
+                  <a:buAutoNum type="arabicPeriod"/>
+                </a:pPr>
+                <a:r>
+                  <a:rPr/>
+                  <a:t>Define the set of actions </a:t>
+                </a:r>
+                <a14:m>
+                  <m:oMath xmlns:m="http://schemas.openxmlformats.org/officeDocument/2006/math">
+                    <m:r>
+                      <m:rPr>
+                        <m:sty m:val="p"/>
+                        <m:scr m:val="script"/>
+                      </m:rPr>
+                      <m:t>A</m:t>
+                    </m:r>
+                  </m:oMath>
+                </a14:m>
+                <a:r>
+                  <a:rPr/>
+                  <a:t> (e.g., elevate by 0, 3, 5, or 8 feet)</a:t>
+                </a:r>
+              </a:p>
+              <a:p>
+                <a:pPr lvl="0" indent="-342900" marL="342900">
+                  <a:buAutoNum type="arabicPeriod"/>
+                </a:pPr>
+                <a:r>
+                  <a:rPr/>
+                  <a:t>Define costs and benefits </a:t>
+                </a:r>
+                <a14:m>
+                  <m:oMath xmlns:m="http://schemas.openxmlformats.org/officeDocument/2006/math">
+                    <m:sSub>
+                      <m:e>
+                        <m:r>
+                          <m:t>B</m:t>
+                        </m:r>
+                      </m:e>
+                      <m:sub>
+                        <m:r>
+                          <m:t>t</m:t>
+                        </m:r>
+                      </m:sub>
+                    </m:sSub>
+                    <m:d>
+                      <m:dPr>
+                        <m:begChr m:val="("/>
+                        <m:sepChr m:val=""/>
+                        <m:endChr m:val=")"/>
+                        <m:grow/>
+                      </m:dPr>
+                      <m:e>
+                        <m:r>
+                          <m:t>a</m:t>
+                        </m:r>
+                        <m:r>
+                          <m:rPr>
+                            <m:sty m:val="p"/>
+                          </m:rPr>
+                          <m:t>,</m:t>
+                        </m:r>
+                        <m:r>
+                          <m:rPr>
+                            <m:sty m:val="b"/>
+                          </m:rPr>
+                          <m:t>s</m:t>
+                        </m:r>
+                      </m:e>
+                    </m:d>
+                  </m:oMath>
+                </a14:m>
+                <a:r>
+                  <a:rPr/>
+                  <a:t>, </a:t>
+                </a:r>
+                <a14:m>
+                  <m:oMath xmlns:m="http://schemas.openxmlformats.org/officeDocument/2006/math">
+                    <m:sSub>
+                      <m:e>
+                        <m:r>
+                          <m:t>C</m:t>
+                        </m:r>
+                      </m:e>
+                      <m:sub>
+                        <m:r>
+                          <m:t>t</m:t>
+                        </m:r>
+                      </m:sub>
+                    </m:sSub>
+                    <m:d>
+                      <m:dPr>
+                        <m:begChr m:val="("/>
+                        <m:sepChr m:val=""/>
+                        <m:endChr m:val=")"/>
+                        <m:grow/>
+                      </m:dPr>
+                      <m:e>
+                        <m:r>
+                          <m:t>a</m:t>
+                        </m:r>
+                        <m:r>
+                          <m:rPr>
+                            <m:sty m:val="p"/>
+                          </m:rPr>
+                          <m:t>,</m:t>
+                        </m:r>
+                        <m:r>
+                          <m:rPr>
+                            <m:sty m:val="b"/>
+                          </m:rPr>
+                          <m:t>s</m:t>
+                        </m:r>
+                      </m:e>
+                    </m:d>
+                  </m:oMath>
+                </a14:m>
+              </a:p>
+              <a:p>
+                <a:pPr lvl="0" indent="-342900" marL="342900">
+                  <a:buAutoNum type="arabicPeriod"/>
+                </a:pPr>
+                <a:r>
+                  <a:rPr/>
+                  <a:t>Choose a discount rate </a:t>
+                </a:r>
+                <a14:m>
+                  <m:oMath xmlns:m="http://schemas.openxmlformats.org/officeDocument/2006/math">
+                    <m:r>
+                      <m:t>r</m:t>
+                    </m:r>
+                  </m:oMath>
+                </a14:m>
+              </a:p>
+              <a:p>
+                <a:pPr lvl="0" indent="-342900" marL="342900">
+                  <a:buAutoNum type="arabicPeriod"/>
+                </a:pPr>
+                <a:r>
+                  <a:rPr/>
+                  <a:t>Estimate </a:t>
+                </a:r>
+                <a14:m>
+                  <m:oMath xmlns:m="http://schemas.openxmlformats.org/officeDocument/2006/math">
+                    <m:r>
+                      <m:t>p</m:t>
+                    </m:r>
+                    <m:d>
+                      <m:dPr>
+                        <m:begChr m:val="("/>
+                        <m:sepChr m:val=""/>
+                        <m:endChr m:val=")"/>
+                        <m:grow/>
+                      </m:dPr>
+                      <m:e>
+                        <m:r>
+                          <m:rPr>
+                            <m:sty m:val="b"/>
+                          </m:rPr>
+                          <m:t>s</m:t>
+                        </m:r>
+                      </m:e>
+                    </m:d>
+                  </m:oMath>
+                </a14:m>
+                <a:r>
+                  <a:rPr/>
+                  <a:t> — probability distribution over states of the world</a:t>
+                </a:r>
+              </a:p>
+              <a:p>
+                <a:pPr lvl="0" indent="-342900" marL="342900">
+                  <a:buAutoNum type="arabicPeriod"/>
+                </a:pPr>
+                <a:r>
+                  <a:rPr/>
+                  <a:t>Pick </a:t>
+                </a:r>
+                <a14:m>
+                  <m:oMath xmlns:m="http://schemas.openxmlformats.org/officeDocument/2006/math">
+                    <m:sSup>
+                      <m:e>
+                        <m:r>
+                          <m:t>a</m:t>
+                        </m:r>
+                      </m:e>
+                      <m:sup>
+                        <m:r>
+                          <m:rPr>
+                            <m:sty m:val="p"/>
+                          </m:rPr>
+                          <m:t>*</m:t>
+                        </m:r>
+                      </m:sup>
+                    </m:sSup>
+                    <m:r>
+                      <m:rPr>
+                        <m:sty m:val="p"/>
+                      </m:rPr>
+                      <m:t>=</m:t>
+                    </m:r>
+                    <m:r>
+                      <m:rPr>
+                        <m:sty m:val="p"/>
+                      </m:rPr>
+                      <m:t>arg</m:t>
+                    </m:r>
+                    <m:sSub>
+                      <m:e>
+                        <m:r>
+                          <m:rPr>
+                            <m:sty m:val="p"/>
+                          </m:rPr>
+                          <m:t>max</m:t>
+                        </m:r>
+                      </m:e>
+                      <m:sub>
+                        <m:r>
+                          <m:t>a</m:t>
+                        </m:r>
+                      </m:sub>
+                    </m:sSub>
+                    <m:r>
+                      <m:t> </m:t>
+                    </m:r>
+                    <m:r>
+                      <m:rPr>
+                        <m:sty m:val="p"/>
+                        <m:scr m:val="double-struck"/>
+                      </m:rPr>
+                      <m:t>E</m:t>
+                    </m:r>
+                    <m:d>
+                      <m:dPr>
+                        <m:begChr m:val="["/>
+                        <m:sepChr m:val=""/>
+                        <m:endChr m:val="]"/>
+                        <m:grow/>
+                      </m:dPr>
+                      <m:e>
+                        <m:r>
+                          <m:t>N</m:t>
+                        </m:r>
+                        <m:r>
+                          <m:t>P</m:t>
+                        </m:r>
+                        <m:r>
+                          <m:t>V</m:t>
+                        </m:r>
+                        <m:d>
+                          <m:dPr>
+                            <m:begChr m:val="("/>
+                            <m:sepChr m:val=""/>
+                            <m:endChr m:val=")"/>
+                            <m:grow/>
+                          </m:dPr>
+                          <m:e>
+                            <m:r>
+                              <m:t>a</m:t>
+                            </m:r>
+                            <m:r>
+                              <m:rPr>
+                                <m:sty m:val="p"/>
+                              </m:rPr>
+                              <m:t>,</m:t>
+                            </m:r>
+                            <m:r>
+                              <m:rPr>
+                                <m:sty m:val="b"/>
+                              </m:rPr>
+                              <m:t>s</m:t>
+                            </m:r>
+                          </m:e>
+                        </m:d>
+                      </m:e>
+                    </m:d>
+                  </m:oMath>
+                </a14:m>
+              </a:p>
+            </p:txBody>
+          </p:sp>
+        </mc:Choice>
+      </mc:AlternateContent>
+    </p:spTree>
+  </p:cSld>
+  <p:timing>
+    <p:tnLst>
+      <p:par>
+        <p:cTn id="1" dur="indefinite" restart="never" nodeType="tmRoot">
+          <p:childTnLst>
+            <p:seq concurrent="1" nextAc="seek">
+              <p:cTn id="2" dur="indefinite" nodeType="mainSeq">
+                <p:childTnLst>
+                  <p:par>
+                    <p:cTn id="3" fill="hold">
+                      <p:stCondLst>
+                        <p:cond delay="indefinite"/>
+                      </p:stCondLst>
+                      <p:childTnLst>
+                        <p:par>
+                          <p:cTn id="4" fill="hold">
+                            <p:stCondLst>
+                              <p:cond delay="0"/>
+                            </p:stCondLst>
+                            <p:childTnLst>
+                              <p:par>
+                                <p:cTn id="5" presetID="1" presetClass="entr" presetSubtype="0" fill="hold" grpId="0" nodeType="clickEffect">
+                                  <p:stCondLst>
+                                    <p:cond delay="0"/>
+                                  </p:stCondLst>
+                                  <p:childTnLst>
+                                    <p:set>
+                                      <p:cBhvr>
+                                        <p:cTn id="6" dur="1" fill="hold">
+                                          <p:stCondLst>
+                                            <p:cond delay="0"/>
+                                          </p:stCondLst>
+                                        </p:cTn>
+                                        <p:tgtEl>
+                                          <p:spTgt spid="3">
+                                            <p:txEl>
+                                              <p:pRg st="2" end="2"/>
+                                            </p:txEl>
+                                          </p:spTgt>
+                                        </p:tgtEl>
+                                        <p:attrNameLst>
+                                          <p:attrName>style.visibility</p:attrName>
+                                        </p:attrNameLst>
+                                      </p:cBhvr>
+                                      <p:to>
+                                        <p:strVal val="visible"/>
+                                      </p:to>
+                                    </p:set>
+                                  </p:childTnLst>
+                                </p:cTn>
+                              </p:par>
+                            </p:childTnLst>
+                          </p:cTn>
+                        </p:par>
+                      </p:childTnLst>
+                    </p:cTn>
+                  </p:par>
+                  <p:par>
+                    <p:cTn id="7" fill="hold">
+                      <p:stCondLst>
+                        <p:cond delay="indefinite"/>
+                      </p:stCondLst>
+                      <p:childTnLst>
+                        <p:par>
+                          <p:cTn id="8" fill="hold">
+                            <p:stCondLst>
+                              <p:cond delay="0"/>
+                            </p:stCondLst>
+                            <p:childTnLst>
+                              <p:par>
+                                <p:cTn id="9" presetID="1" presetClass="entr" presetSubtype="0" fill="hold" grpId="0" nodeType="clickEffect">
+                                  <p:stCondLst>
+                                    <p:cond delay="0"/>
+                                  </p:stCondLst>
+                                  <p:childTnLst>
+                                    <p:set>
+                                      <p:cBhvr>
+                                        <p:cTn id="10" dur="1" fill="hold">
+                                          <p:stCondLst>
+                                            <p:cond delay="0"/>
+                                          </p:stCondLst>
+                                        </p:cTn>
+                                        <p:tgtEl>
+                                          <p:spTgt spid="3">
+                                            <p:txEl>
+                                              <p:pRg st="3" end="3"/>
+                                            </p:txEl>
+                                          </p:spTgt>
+                                        </p:tgtEl>
+                                        <p:attrNameLst>
+                                          <p:attrName>style.visibility</p:attrName>
+                                        </p:attrNameLst>
+                                      </p:cBhvr>
+                                      <p:to>
+                                        <p:strVal val="visible"/>
+                                      </p:to>
+                                    </p:set>
+                                  </p:childTnLst>
+                                </p:cTn>
+                              </p:par>
+                            </p:childTnLst>
+                          </p:cTn>
+                        </p:par>
+                      </p:childTnLst>
+                    </p:cTn>
+                  </p:par>
+                  <p:par>
+                    <p:cTn id="11" fill="hold">
+                      <p:stCondLst>
+                        <p:cond delay="indefinite"/>
+                      </p:stCondLst>
+                      <p:childTnLst>
+                        <p:par>
+                          <p:cTn id="12" fill="hold">
+                            <p:stCondLst>
+                              <p:cond delay="0"/>
+                            </p:stCondLst>
+                            <p:childTnLst>
+                              <p:par>
+                                <p:cTn id="13" presetID="1" presetClass="entr" presetSubtype="0" fill="hold" grpId="0" nodeType="clickEffect">
+                                  <p:stCondLst>
+                                    <p:cond delay="0"/>
+                                  </p:stCondLst>
+                                  <p:childTnLst>
+                                    <p:set>
+                                      <p:cBhvr>
+                                        <p:cTn id="14" dur="1" fill="hold">
+                                          <p:stCondLst>
+                                            <p:cond delay="0"/>
+                                          </p:stCondLst>
+                                        </p:cTn>
+                                        <p:tgtEl>
+                                          <p:spTgt spid="3">
+                                            <p:txEl>
+                                              <p:pRg st="4" end="4"/>
+                                            </p:txEl>
+                                          </p:spTgt>
+                                        </p:tgtEl>
+                                        <p:attrNameLst>
+                                          <p:attrName>style.visibility</p:attrName>
+                                        </p:attrNameLst>
+                                      </p:cBhvr>
+                                      <p:to>
+                                        <p:strVal val="visible"/>
+                                      </p:to>
+                                    </p:set>
+                                  </p:childTnLst>
+                                </p:cTn>
+                              </p:par>
+                            </p:childTnLst>
+                          </p:cTn>
+                        </p:par>
+                      </p:childTnLst>
+                    </p:cTn>
+                  </p:par>
+                  <p:par>
+                    <p:cTn id="15" fill="hold">
+                      <p:stCondLst>
+                        <p:cond delay="indefinite"/>
+                      </p:stCondLst>
+                      <p:childTnLst>
+                        <p:par>
+                          <p:cTn id="16" fill="hold">
+                            <p:stCondLst>
+                              <p:cond delay="0"/>
+                            </p:stCondLst>
+                            <p:childTnLst>
+                              <p:par>
+                                <p:cTn id="17" presetID="1" presetClass="entr" presetSubtype="0" fill="hold" grpId="0" nodeType="clickEffect">
+                                  <p:stCondLst>
+                                    <p:cond delay="0"/>
+                                  </p:stCondLst>
+                                  <p:childTnLst>
+                                    <p:set>
+                                      <p:cBhvr>
+                                        <p:cTn id="18" dur="1" fill="hold">
+                                          <p:stCondLst>
+                                            <p:cond delay="0"/>
+                                          </p:stCondLst>
+                                        </p:cTn>
+                                        <p:tgtEl>
+                                          <p:spTgt spid="3">
+                                            <p:txEl>
+                                              <p:pRg st="7" end="7"/>
+                                            </p:txEl>
+                                          </p:spTgt>
+                                        </p:tgtEl>
+                                        <p:attrNameLst>
+                                          <p:attrName>style.visibility</p:attrName>
+                                        </p:attrNameLst>
+                                      </p:cBhvr>
+                                      <p:to>
+                                        <p:strVal val="visible"/>
+                                      </p:to>
+                                    </p:set>
+                                  </p:childTnLst>
+                                </p:cTn>
+                              </p:par>
+                            </p:childTnLst>
+                          </p:cTn>
+                        </p:par>
+                      </p:childTnLst>
+                    </p:cTn>
+                  </p:par>
+                  <p:par>
+                    <p:cTn id="19" fill="hold">
+                      <p:stCondLst>
+                        <p:cond delay="indefinite"/>
+                      </p:stCondLst>
+                      <p:childTnLst>
+                        <p:par>
+                          <p:cTn id="20" fill="hold">
+                            <p:stCondLst>
+                              <p:cond delay="0"/>
+                            </p:stCondLst>
+                            <p:childTnLst>
+                              <p:par>
+                                <p:cTn id="21" presetID="1" presetClass="entr" presetSubtype="0" fill="hold" grpId="0" nodeType="clickEffect">
+                                  <p:stCondLst>
+                                    <p:cond delay="0"/>
+                                  </p:stCondLst>
+                                  <p:childTnLst>
+                                    <p:set>
+                                      <p:cBhvr>
+                                        <p:cTn id="22" dur="1" fill="hold">
+                                          <p:stCondLst>
+                                            <p:cond delay="0"/>
+                                          </p:stCondLst>
+                                        </p:cTn>
+                                        <p:tgtEl>
+                                          <p:spTgt spid="3">
+                                            <p:txEl>
+                                              <p:pRg st="8" end="8"/>
+                                            </p:txEl>
+                                          </p:spTgt>
+                                        </p:tgtEl>
+                                        <p:attrNameLst>
+                                          <p:attrName>style.visibility</p:attrName>
+                                        </p:attrNameLst>
+                                      </p:cBhvr>
+                                      <p:to>
+                                        <p:strVal val="visible"/>
+                                      </p:to>
+                                    </p:set>
+                                  </p:childTnLst>
+                                </p:cTn>
+                              </p:par>
+                            </p:childTnLst>
+                          </p:cTn>
+                        </p:par>
+                      </p:childTnLst>
+                    </p:cTn>
+                  </p:par>
+                  <p:par>
+                    <p:cTn id="23" fill="hold">
+                      <p:stCondLst>
+                        <p:cond delay="indefinite"/>
+                      </p:stCondLst>
+                      <p:childTnLst>
+                        <p:par>
+                          <p:cTn id="24" fill="hold">
+                            <p:stCondLst>
+                              <p:cond delay="0"/>
+                            </p:stCondLst>
+                            <p:childTnLst>
+                              <p:par>
+                                <p:cTn id="25" presetID="1" presetClass="entr" presetSubtype="0" fill="hold" grpId="0" nodeType="clickEffect">
+                                  <p:stCondLst>
+                                    <p:cond delay="0"/>
+                                  </p:stCondLst>
+                                  <p:childTnLst>
+                                    <p:set>
+                                      <p:cBhvr>
+                                        <p:cTn id="26" dur="1" fill="hold">
+                                          <p:stCondLst>
+                                            <p:cond delay="0"/>
+                                          </p:stCondLst>
+                                        </p:cTn>
+                                        <p:tgtEl>
+                                          <p:spTgt spid="3">
+                                            <p:txEl>
+                                              <p:pRg st="9" end="9"/>
+                                            </p:txEl>
+                                          </p:spTgt>
+                                        </p:tgtEl>
+                                        <p:attrNameLst>
+                                          <p:attrName>style.visibility</p:attrName>
+                                        </p:attrNameLst>
+                                      </p:cBhvr>
+                                      <p:to>
+                                        <p:strVal val="visible"/>
+                                      </p:to>
+                                    </p:set>
+                                  </p:childTnLst>
+                                </p:cTn>
+                              </p:par>
+                            </p:childTnLst>
+                          </p:cTn>
+                        </p:par>
+                      </p:childTnLst>
+                    </p:cTn>
+                  </p:par>
+                  <p:par>
+                    <p:cTn id="27" fill="hold">
+                      <p:stCondLst>
+                        <p:cond delay="indefinite"/>
+                      </p:stCondLst>
+                      <p:childTnLst>
+                        <p:par>
+                          <p:cTn id="28" fill="hold">
+                            <p:stCondLst>
+                              <p:cond delay="0"/>
+                            </p:stCondLst>
+                            <p:childTnLst>
+                              <p:par>
+                                <p:cTn id="29" presetID="1" presetClass="entr" presetSubtype="0" fill="hold" grpId="0" nodeType="clickEffect">
+                                  <p:stCondLst>
+                                    <p:cond delay="0"/>
+                                  </p:stCondLst>
+                                  <p:childTnLst>
+                                    <p:set>
+                                      <p:cBhvr>
+                                        <p:cTn id="30" dur="1" fill="hold">
+                                          <p:stCondLst>
+                                            <p:cond delay="0"/>
+                                          </p:stCondLst>
+                                        </p:cTn>
+                                        <p:tgtEl>
+                                          <p:spTgt spid="3">
+                                            <p:txEl>
+                                              <p:pRg st="18" end="18"/>
+                                            </p:txEl>
+                                          </p:spTgt>
+                                        </p:tgtEl>
+                                        <p:attrNameLst>
+                                          <p:attrName>style.visibility</p:attrName>
+                                        </p:attrNameLst>
+                                      </p:cBhvr>
+                                      <p:to>
+                                        <p:strVal val="visible"/>
+                                      </p:to>
+                                    </p:set>
+                                  </p:childTnLst>
+                                </p:cTn>
+                              </p:par>
+                            </p:childTnLst>
+                          </p:cTn>
+                        </p:par>
+                      </p:childTnLst>
+                    </p:cTn>
+                  </p:par>
+                  <p:par>
+                    <p:cTn id="31" fill="hold">
+                      <p:stCondLst>
+                        <p:cond delay="indefinite"/>
+                      </p:stCondLst>
+                      <p:childTnLst>
+                        <p:par>
+                          <p:cTn id="32" fill="hold">
+                            <p:stCondLst>
+                              <p:cond delay="0"/>
+                            </p:stCondLst>
+                            <p:childTnLst>
+                              <p:par>
+                                <p:cTn id="33" presetID="1" presetClass="entr" presetSubtype="0" fill="hold" grpId="0" nodeType="clickEffect">
+                                  <p:stCondLst>
+                                    <p:cond delay="0"/>
+                                  </p:stCondLst>
+                                  <p:childTnLst>
+                                    <p:set>
+                                      <p:cBhvr>
+                                        <p:cTn id="34" dur="1" fill="hold">
+                                          <p:stCondLst>
+                                            <p:cond delay="0"/>
+                                          </p:stCondLst>
+                                        </p:cTn>
+                                        <p:tgtEl>
+                                          <p:spTgt spid="3">
+                                            <p:txEl>
+                                              <p:pRg st="19" end="19"/>
+                                            </p:txEl>
+                                          </p:spTgt>
+                                        </p:tgtEl>
+                                        <p:attrNameLst>
+                                          <p:attrName>style.visibility</p:attrName>
+                                        </p:attrNameLst>
+                                      </p:cBhvr>
+                                      <p:to>
+                                        <p:strVal val="visible"/>
+                                      </p:to>
+                                    </p:set>
+                                  </p:childTnLst>
+                                </p:cTn>
+                              </p:par>
+                            </p:childTnLst>
+                          </p:cTn>
+                        </p:par>
+                      </p:childTnLst>
+                    </p:cTn>
+                  </p:par>
+                  <p:par>
+                    <p:cTn id="35" fill="hold">
+                      <p:stCondLst>
+                        <p:cond delay="indefinite"/>
+                      </p:stCondLst>
+                      <p:childTnLst>
+                        <p:par>
+                          <p:cTn id="36" fill="hold">
+                            <p:stCondLst>
+                              <p:cond delay="0"/>
+                            </p:stCondLst>
+                            <p:childTnLst>
+                              <p:par>
+                                <p:cTn id="37" presetID="1" presetClass="entr" presetSubtype="0" fill="hold" grpId="0" nodeType="clickEffect">
+                                  <p:stCondLst>
+                                    <p:cond delay="0"/>
+                                  </p:stCondLst>
+                                  <p:childTnLst>
+                                    <p:set>
+                                      <p:cBhvr>
+                                        <p:cTn id="38" dur="1" fill="hold">
+                                          <p:stCondLst>
+                                            <p:cond delay="0"/>
+                                          </p:stCondLst>
+                                        </p:cTn>
+                                        <p:tgtEl>
+                                          <p:spTgt spid="3">
+                                            <p:txEl>
+                                              <p:pRg st="20" end="20"/>
+                                            </p:txEl>
+                                          </p:spTgt>
+                                        </p:tgtEl>
+                                        <p:attrNameLst>
+                                          <p:attrName>style.visibility</p:attrName>
+                                        </p:attrNameLst>
+                                      </p:cBhvr>
+                                      <p:to>
+                                        <p:strVal val="visible"/>
+                                      </p:to>
+                                    </p:set>
+                                  </p:childTnLst>
+                                </p:cTn>
+                              </p:par>
+                            </p:childTnLst>
+                          </p:cTn>
+                        </p:par>
+                      </p:childTnLst>
+                    </p:cTn>
+                  </p:par>
+                  <p:par>
+                    <p:cTn id="39" fill="hold">
+                      <p:stCondLst>
+                        <p:cond delay="indefinite"/>
+                      </p:stCondLst>
+                      <p:childTnLst>
+                        <p:par>
+                          <p:cTn id="40" fill="hold">
+                            <p:stCondLst>
+                              <p:cond delay="0"/>
+                            </p:stCondLst>
+                            <p:childTnLst>
+                              <p:par>
+                                <p:cTn id="41" presetID="1" presetClass="entr" presetSubtype="0" fill="hold" grpId="0" nodeType="clickEffect">
+                                  <p:stCondLst>
+                                    <p:cond delay="0"/>
+                                  </p:stCondLst>
+                                  <p:childTnLst>
+                                    <p:set>
+                                      <p:cBhvr>
+                                        <p:cTn id="42" dur="1" fill="hold">
+                                          <p:stCondLst>
+                                            <p:cond delay="0"/>
+                                          </p:stCondLst>
+                                        </p:cTn>
+                                        <p:tgtEl>
+                                          <p:spTgt spid="3">
+                                            <p:txEl>
+                                              <p:pRg st="21" end="21"/>
+                                            </p:txEl>
+                                          </p:spTgt>
+                                        </p:tgtEl>
+                                        <p:attrNameLst>
+                                          <p:attrName>style.visibility</p:attrName>
+                                        </p:attrNameLst>
+                                      </p:cBhvr>
+                                      <p:to>
+                                        <p:strVal val="visible"/>
+                                      </p:to>
+                                    </p:set>
+                                  </p:childTnLst>
+                                </p:cTn>
+                              </p:par>
+                            </p:childTnLst>
+                          </p:cTn>
+                        </p:par>
+                      </p:childTnLst>
+                    </p:cTn>
+                  </p:par>
+                  <p:par>
+                    <p:cTn id="43" fill="hold">
+                      <p:stCondLst>
+                        <p:cond delay="indefinite"/>
+                      </p:stCondLst>
+                      <p:childTnLst>
+                        <p:par>
+                          <p:cTn id="44" fill="hold">
+                            <p:stCondLst>
+                              <p:cond delay="0"/>
+                            </p:stCondLst>
+                            <p:childTnLst>
+                              <p:par>
+                                <p:cTn id="45" presetID="1" presetClass="entr" presetSubtype="0" fill="hold" grpId="0" nodeType="clickEffect">
+                                  <p:stCondLst>
+                                    <p:cond delay="0"/>
+                                  </p:stCondLst>
+                                  <p:childTnLst>
+                                    <p:set>
+                                      <p:cBhvr>
+                                        <p:cTn id="46" dur="1" fill="hold">
+                                          <p:stCondLst>
+                                            <p:cond delay="0"/>
+                                          </p:stCondLst>
+                                        </p:cTn>
+                                        <p:tgtEl>
+                                          <p:spTgt spid="3">
+                                            <p:txEl>
+                                              <p:pRg st="23" end="23"/>
+                                            </p:txEl>
+                                          </p:spTgt>
+                                        </p:tgtEl>
+                                        <p:attrNameLst>
+                                          <p:attrName>style.visibility</p:attrName>
+                                        </p:attrNameLst>
+                                      </p:cBhvr>
+                                      <p:to>
+                                        <p:strVal val="visible"/>
+                                      </p:to>
+                                    </p:set>
+                                  </p:childTnLst>
+                                </p:cTn>
+                              </p:par>
+                            </p:childTnLst>
+                          </p:cTn>
+                        </p:par>
+                      </p:childTnLst>
+                    </p:cTn>
+                  </p:par>
+                  <p:par>
+                    <p:cTn id="47" fill="hold">
+                      <p:stCondLst>
+                        <p:cond delay="indefinite"/>
+                      </p:stCondLst>
+                      <p:childTnLst>
+                        <p:par>
+                          <p:cTn id="48" fill="hold">
+                            <p:stCondLst>
+                              <p:cond delay="0"/>
+                            </p:stCondLst>
+                            <p:childTnLst>
+                              <p:par>
+                                <p:cTn id="49" presetID="1" presetClass="entr" presetSubtype="0" fill="hold" grpId="0" nodeType="clickEffect">
+                                  <p:stCondLst>
+                                    <p:cond delay="0"/>
+                                  </p:stCondLst>
+                                  <p:childTnLst>
+                                    <p:set>
+                                      <p:cBhvr>
+                                        <p:cTn id="50" dur="1" fill="hold">
+                                          <p:stCondLst>
+                                            <p:cond delay="0"/>
+                                          </p:stCondLst>
+                                        </p:cTn>
+                                        <p:tgtEl>
+                                          <p:spTgt spid="3">
+                                            <p:txEl>
+                                              <p:pRg st="24" end="24"/>
+                                            </p:txEl>
+                                          </p:spTgt>
+                                        </p:tgtEl>
+                                        <p:attrNameLst>
+                                          <p:attrName>style.visibility</p:attrName>
+                                        </p:attrNameLst>
+                                      </p:cBhvr>
+                                      <p:to>
+                                        <p:strVal val="visible"/>
+                                      </p:to>
+                                    </p:set>
+                                  </p:childTnLst>
+                                </p:cTn>
+                              </p:par>
+                            </p:childTnLst>
+                          </p:cTn>
+                        </p:par>
+                      </p:childTnLst>
+                    </p:cTn>
+                  </p:par>
+                  <p:par>
+                    <p:cTn id="51" fill="hold">
+                      <p:stCondLst>
+                        <p:cond delay="indefinite"/>
+                      </p:stCondLst>
+                      <p:childTnLst>
+                        <p:par>
+                          <p:cTn id="52" fill="hold">
+                            <p:stCondLst>
+                              <p:cond delay="0"/>
+                            </p:stCondLst>
+                            <p:childTnLst>
+                              <p:par>
+                                <p:cTn id="53" presetID="1" presetClass="entr" presetSubtype="0" fill="hold" grpId="0" nodeType="clickEffect">
+                                  <p:stCondLst>
+                                    <p:cond delay="0"/>
+                                  </p:stCondLst>
+                                  <p:childTnLst>
+                                    <p:set>
+                                      <p:cBhvr>
+                                        <p:cTn id="54" dur="1" fill="hold">
+                                          <p:stCondLst>
+                                            <p:cond delay="0"/>
+                                          </p:stCondLst>
+                                        </p:cTn>
+                                        <p:tgtEl>
+                                          <p:spTgt spid="3">
+                                            <p:txEl>
+                                              <p:pRg st="25" end="25"/>
+                                            </p:txEl>
+                                          </p:spTgt>
+                                        </p:tgtEl>
+                                        <p:attrNameLst>
+                                          <p:attrName>style.visibility</p:attrName>
+                                        </p:attrNameLst>
+                                      </p:cBhvr>
+                                      <p:to>
+                                        <p:strVal val="visible"/>
+                                      </p:to>
+                                    </p:set>
+                                  </p:childTnLst>
+                                </p:cTn>
+                              </p:par>
+                            </p:childTnLst>
+                          </p:cTn>
+                        </p:par>
+                      </p:childTnLst>
+                    </p:cTn>
+                  </p:par>
+                  <p:par>
+                    <p:cTn id="55" fill="hold">
+                      <p:stCondLst>
+                        <p:cond delay="indefinite"/>
+                      </p:stCondLst>
+                      <p:childTnLst>
+                        <p:par>
+                          <p:cTn id="56" fill="hold">
+                            <p:stCondLst>
+                              <p:cond delay="0"/>
+                            </p:stCondLst>
+                            <p:childTnLst>
+                              <p:par>
+                                <p:cTn id="57" presetID="1" presetClass="entr" presetSubtype="0" fill="hold" grpId="0" nodeType="clickEffect">
+                                  <p:stCondLst>
+                                    <p:cond delay="0"/>
+                                  </p:stCondLst>
+                                  <p:childTnLst>
+                                    <p:set>
+                                      <p:cBhvr>
+                                        <p:cTn id="58" dur="1" fill="hold">
+                                          <p:stCondLst>
+                                            <p:cond delay="0"/>
+                                          </p:stCondLst>
+                                        </p:cTn>
+                                        <p:tgtEl>
+                                          <p:spTgt spid="3">
+                                            <p:txEl>
+                                              <p:pRg st="26" end="26"/>
+                                            </p:txEl>
+                                          </p:spTgt>
+                                        </p:tgtEl>
+                                        <p:attrNameLst>
+                                          <p:attrName>style.visibility</p:attrName>
+                                        </p:attrNameLst>
+                                      </p:cBhvr>
+                                      <p:to>
+                                        <p:strVal val="visible"/>
+                                      </p:to>
+                                    </p:set>
+                                  </p:childTnLst>
+                                </p:cTn>
+                              </p:par>
+                            </p:childTnLst>
+                          </p:cTn>
+                        </p:par>
+                      </p:childTnLst>
+                    </p:cTn>
+                  </p:par>
+                  <p:par>
+                    <p:cTn id="59" fill="hold">
+                      <p:stCondLst>
+                        <p:cond delay="indefinite"/>
+                      </p:stCondLst>
+                      <p:childTnLst>
+                        <p:par>
+                          <p:cTn id="60" fill="hold">
+                            <p:stCondLst>
+                              <p:cond delay="0"/>
+                            </p:stCondLst>
+                            <p:childTnLst>
+                              <p:par>
+                                <p:cTn id="61" presetID="1" presetClass="entr" presetSubtype="0" fill="hold" grpId="0" nodeType="clickEffect">
+                                  <p:stCondLst>
+                                    <p:cond delay="0"/>
+                                  </p:stCondLst>
+                                  <p:childTnLst>
+                                    <p:set>
+                                      <p:cBhvr>
+                                        <p:cTn id="62" dur="1" fill="hold">
+                                          <p:stCondLst>
+                                            <p:cond delay="0"/>
+                                          </p:stCondLst>
+                                        </p:cTn>
+                                        <p:tgtEl>
+                                          <p:spTgt spid="3">
+                                            <p:txEl>
+                                              <p:pRg st="27" end="27"/>
+                                            </p:txEl>
+                                          </p:spTgt>
+                                        </p:tgtEl>
+                                        <p:attrNameLst>
+                                          <p:attrName>style.visibility</p:attrName>
+                                        </p:attrNameLst>
+                                      </p:cBhvr>
+                                      <p:to>
+                                        <p:strVal val="visible"/>
+                                      </p:to>
+                                    </p:set>
+                                  </p:childTnLst>
+                                </p:cTn>
+                              </p:par>
+                            </p:childTnLst>
+                          </p:cTn>
+                        </p:par>
+                      </p:childTnLst>
+                    </p:cTn>
+                  </p:par>
+                </p:childTnLst>
+              </p:cTn>
+              <p:prevCondLst>
+                <p:cond evt="onPrev" delay="0">
+                  <p:tgtEl>
+                    <p:sldTgt/>
+                  </p:tgtEl>
+                </p:cond>
+              </p:prevCondLst>
+              <p:nextCondLst>
+                <p:cond evt="onNext" delay="0">
+                  <p:tgtEl>
+                    <p:sldTgt/>
+                  </p:tgtEl>
+                </p:cond>
+              </p:nextCondLst>
+            </p:seq>
+          </p:childTnLst>
+        </p:cTn>
+      </p:par>
+    </p:tnLst>
+    <p:bldLst>
+      <p:bldP spid="3" grpId="0" uiExpand="1" build="p"/>
+    </p:bldLst>
+  </p:timing>
+</p:sld>
+</file>
+
+<file path=ppt/slides/slide7.xml><?xml version="1.0" encoding="UTF-8"?><p:sld xmlns:a="http://schemas.openxmlformats.org/drawingml/2006/main" xmlns:r="http://schemas.openxmlformats.org/officeDocument/2006/relationships" xmlns:p="http://schemas.openxmlformats.org/presentationml/2006/main"><p:cSld><p:spTree><p:nvGrpSpPr><p:cNvPr id="1" name="" /><p:cNvGrpSpPr /><p:nvPr /></p:nvGrpSpPr><p:grpSpPr><a:xfrm><a:off x="0" y="0" /><a:ext cx="0" cy="0" /><a:chOff x="0" y="0" /><a:chExt cx="0" cy="0" /></a:xfrm></p:grpSpPr><p:sp><p:nvSpPr><p:cNvPr id="2" name="Title 1" /><p:cNvSpPr><a:spLocks noGrp="1" /></p:cNvSpPr><p:nvPr><p:ph type="title" /></p:nvPr></p:nvSpPr><p:spPr><a:xfrm><a:off x="457201" y="204787" /><a:ext cx="3008313" cy="871538" /></a:xfrm></p:spPr><p:txBody><a:bodyPr /><a:lstStyle /><a:p><a:pPr lvl="0" indent="0" marL="0"><a:buNone /></a:pPr><a:r><a:rPr /><a:t>Worked Example: House Elevation</a:t></a:r></a:p></p:txBody></p:sp><mc:AlternateContent xmlns:mc="http://schemas.openxmlformats.org/markup-compatibility/2006"><mc:Choice xmlns:a14="http://schemas.microsoft.com/office/drawing/2010/main" Requires="a14"><p:sp><p:nvSpPr><p:cNvPr id="4" name="Text Placeholder 3" /><p:cNvSpPr><a:spLocks noGrp="1" /></p:cNvSpPr><p:nvPr><p:ph idx="2" sz="half" type="body" /></p:nvPr></p:nvSpPr><p:spPr /><p:txBody><a:bodyPr /><a:lstStyle /><a:p><a:pPr lvl="0" indent="0" marL="0"><a:spcBef><a:spcPts val="3000" /></a:spcBef><a:buNone /></a:pPr><a:r><a:rPr b="1" /><a:t>Setting Up the Problem</a:t></a:r></a:p><a:p><a:pPr lvl="0" indent="0" marL="0"><a:buNone /></a:pPr><a:r><a:rPr /><a:t>Return to our Meyerland homeowner. Two actions: </a:t></a:r><a:r><a:rPr b="1" /><a:t>do nothing</a:t></a:r><a:r><a:rPr /><a:t> (</a:t></a:r><a14:m><m:oMath xmlns:m="http://schemas.openxmlformats.org/officeDocument/2006/math"><m:sSub><m:e><m:r><m:t>a</m:t></m:r></m:e><m:sub><m:r><m:t>0</m:t></m:r></m:sub></m:sSub></m:oMath></a14:m><a:r><a:rPr /><a:t>) or </a:t></a:r><a:r><a:rPr b="1" /><a:t>elevate 5 ft</a:t></a:r><a:r><a:rPr /><a:t> (</a:t></a:r><a14:m><m:oMath xmlns:m="http://schemas.openxmlformats.org/officeDocument/2006/math"><m:sSub><m:e><m:r><m:t>a</m:t></m:r></m:e><m:sub><m:r><m:t>1</m:t></m:r></m:sub></m:sSub></m:oMath></a14:m><a:r><a:rPr /><a:t>).</a:t></a:r></a:p></p:txBody></p:sp></mc:Choice></mc:AlternateContent><p:graphicFrame><p:nvGraphicFramePr><p:cNvPr id="6" name="Content Placeholder 5" /><p:cNvGraphicFramePr><a:graphicFrameLocks noGrp="1" /></p:cNvGraphicFramePr><p:nvPr><p:ph idx="1" /></p:nvPr></p:nvGraphicFramePr><p:xfrm><a:off x="3568700" y="203200" /><a:ext cx="5105400" cy="4381500" /></p:xfrm><a:graphic><a:graphicData uri="http://schemas.openxmlformats.org/drawingml/2006/table"><a:tbl><a:tblPr firstRow="1" bandRow="1"><a:tableStyleId>{5C22544A-7EE6-4342-B048-85BDC9FD1C3A}</a:tableStyleId></a:tblPr><a:tblGrid><a:gridCol w="1701800" /><a:gridCol w="1701800" /><a:gridCol w="1701800" /></a:tblGrid><a:tr h="0"><a:tc><a:txBody><a:bodyPr /><a:lstStyle /><a:p><a:endParaRPr /></a:p></a:txBody><a:tcPr /></a:tc><a:tc><a:txBody><a:bodyPr /><a:lstStyle /><a:p><a:pPr lvl="0" indent="0" marL="0" algn="ctr"><a:buNone /></a:pPr><a:r><a:rPr /><a:t>Do Nothing (</a:t></a:r><a14:m><m:oMath xmlns:m="http://schemas.openxmlformats.org/officeDocument/2006/math"><m:sSub><m:e><m:r><m:t>a</m:t></m:r></m:e><m:sub><m:r><m:t>0</m:t></m:r></m:sub></m:sSub></m:oMath></a14:m><a:r><a:rPr /><a:t>)</a:t></a:r></a:p></a:txBody><a:tcPr /></a:tc><a:tc><a:txBody><a:bodyPr /><a:lstStyle /><a:p><a:pPr lvl="0" indent="0" marL="0" algn="ctr"><a:buNone /></a:pPr><a:r><a:rPr /><a:t>Elevate 5 ft (</a:t></a:r><a14:m><m:oMath xmlns:m="http://schemas.openxmlformats.org/officeDocument/2006/math"><m:sSub><m:e><m:r><m:t>a</m:t></m:r></m:e><m:sub><m:r><m:t>1</m:t></m:r></m:sub></m:sSub></m:oMath></a14:m><a:r><a:rPr /><a:t>)</a:t></a:r></a:p></a:txBody><a:tcPr /></a:tc></a:tr><a:tr h="0"><a:tc><a:txBody><a:bodyPr /><a:lstStyle /><a:p><a:pPr lvl="0" indent="0" marL="0" algn="l"><a:buNone /></a:pPr><a:r><a:rPr /><a:t>Up-front cost</a:t></a:r></a:p></a:txBody></a:tc><a:tc><a:txBody><a:bodyPr /><a:lstStyle /><a:p><a:pPr lvl="0" indent="0" marL="0" algn="ctr"><a:buNone /></a:pPr><a:r><a:rPr /><a:t>$0</a:t></a:r></a:p></a:txBody></a:tc><a:tc><a:txBody><a:bodyPr /><a:lstStyle /><a:p><a:pPr lvl="0" indent="0" marL="0" algn="ctr"><a:buNone /></a:pPr><a:r><a:rPr /><a:t>$80,000</a:t></a:r></a:p></a:txBody></a:tc></a:tr><a:tr h="0"><a:tc><a:txBody><a:bodyPr /><a:lstStyle /><a:p><a:pPr lvl="0" indent="0" marL="0" algn="l"><a:buNone /></a:pPr><a:r><a:rPr /><a:t>Annual flood probability</a:t></a:r></a:p></a:txBody></a:tc><a:tc><a:txBody><a:bodyPr /><a:lstStyle /><a:p><a:pPr lvl="0" indent="0" marL="0" algn="ctr"><a:buNone /></a:pPr><a:r><a:rPr /><a:t>5%</a:t></a:r></a:p></a:txBody></a:tc><a:tc><a:txBody><a:bodyPr /><a:lstStyle /><a:p><a:pPr lvl="0" indent="0" marL="0" algn="ctr"><a:buNone /></a:pPr><a:r><a:rPr /><a:t>0.5%</a:t></a:r></a:p></a:txBody></a:tc></a:tr><a:tr h="0"><a:tc><a:txBody><a:bodyPr /><a:lstStyle /><a:p><a:pPr lvl="0" indent="0" marL="0" algn="l"><a:buNone /></a:pPr><a:r><a:rPr /><a:t>Expected damage per flood</a:t></a:r></a:p></a:txBody></a:tc><a:tc><a:txBody><a:bodyPr /><a:lstStyle /><a:p><a:pPr lvl="0" indent="0" marL="0" algn="ctr"><a:buNone /></a:pPr><a:r><a:rPr /><a:t>$50,000</a:t></a:r></a:p></a:txBody></a:tc><a:tc><a:txBody><a:bodyPr /><a:lstStyle /><a:p><a:pPr lvl="0" indent="0" marL="0" algn="ctr"><a:buNone /></a:pPr><a:r><a:rPr /><a:t>$5,000</a:t></a:r></a:p></a:txBody></a:tc></a:tr><a:tr h="0"><a:tc><a:txBody><a:bodyPr /><a:lstStyle /><a:p><a:pPr lvl="0" indent="0" marL="0" algn="l"><a:buNone /></a:pPr><a:r><a:rPr b="1" /><a:t>Expected annual damage</a:t></a:r></a:p></a:txBody></a:tc><a:tc><a:txBody><a:bodyPr /><a:lstStyle /><a:p><a:pPr lvl="0" indent="0" marL="0" algn="ctr"><a:buNone /></a:pPr><a:r><a:rPr b="1" /><a:t>$2,500</a:t></a:r></a:p></a:txBody></a:tc><a:tc><a:txBody><a:bodyPr /><a:lstStyle /><a:p><a:pPr lvl="0" indent="0" marL="0" algn="ctr"><a:buNone /></a:pPr><a:r><a:rPr b="1" /><a:t>$25</a:t></a:r></a:p></a:txBody></a:tc></a:tr></a:tbl></a:graphicData></a:graphic></p:graphicFrame></p:spTree></p:cSld></p:sld>
+</file>
+
+<file path=ppt/slides/slide8.xml><?xml version="1.0" encoding="UTF-8"?><p:sld xmlns:a="http://schemas.openxmlformats.org/drawingml/2006/main" xmlns:r="http://schemas.openxmlformats.org/officeDocument/2006/relationships" xmlns:p="http://schemas.openxmlformats.org/presentationml/2006/main"><p:cSld><p:spTree><p:nvGrpSpPr><p:cNvPr id="1" name="" /><p:cNvGrpSpPr /><p:nvPr /></p:nvGrpSpPr><p:grpSpPr><a:xfrm><a:off x="0" y="0" /><a:ext cx="0" cy="0" /><a:chOff x="0" y="0" /><a:chExt cx="0" cy="0" /></a:xfrm></p:grpSpPr><mc:AlternateContent xmlns:mc="http://schemas.openxmlformats.org/markup-compatibility/2006"><mc:Choice xmlns:a14="http://schemas.microsoft.com/office/drawing/2010/main" Requires="a14"><p:sp><p:nvSpPr><p:cNvPr id="4" name="Text Placeholder 3" /><p:cNvSpPr><a:spLocks noGrp="1" /></p:cNvSpPr><p:nvPr><p:ph idx="2" sz="half" type="body" /></p:nvPr></p:nvSpPr><p:spPr /><p:txBody><a:bodyPr /><a:lstStyle /><a:p><a:pPr lvl="0" indent="0" marL="0"><a:spcBef><a:spcPts val="3000" /></a:spcBef><a:buNone /></a:pPr><a:r><a:rPr b="1" /><a:t>Computing NPV</a:t></a:r></a:p><a:p><a:pPr lvl="0" indent="0" marL="0"><a:buNone /></a:pPr><a:r><a:rPr /><a:t>Annual benefit of elevation: </a:t></a:r><a14:m><m:oMath xmlns:m="http://schemas.openxmlformats.org/officeDocument/2006/math"><m:r><m:rPr><m:sty m:val="p" /></m:rPr><m:t>$</m:t></m:r><m:r><m:t>2</m:t></m:r><m:r><m:rPr><m:sty m:val="p" /></m:rPr><m:t>,</m:t></m:r><m:r><m:t>500</m:t></m:r><m:r><m:rPr><m:sty m:val="p" /></m:rPr><m:t>−</m:t></m:r><m:r><m:rPr><m:sty m:val="p" /></m:rPr><m:t>$</m:t></m:r><m:r><m:t>25</m:t></m:r><m:r><m:rPr><m:sty m:val="p" /></m:rPr><m:t>=</m:t></m:r><m:r><m:rPr><m:sty m:val="p" /></m:rPr><m:t>$</m:t></m:r><m:r><m:t>2</m:t></m:r><m:r><m:rPr><m:sty m:val="p" /></m:rPr><m:t>,</m:t></m:r><m:r><m:t>475</m:t></m:r></m:oMath></a14:m><a:r><a:rPr /><a:t> per year in avoided damages.</a:t></a:r></a:p><a:p><a:pPr lvl="0" indent="0" marL="0"><a:buNone /></a:pPr><a:r><a:rPr /><a:t>Over </a:t></a:r><a14:m><m:oMath xmlns:m="http://schemas.openxmlformats.org/officeDocument/2006/math"><m:r><m:t>T</m:t></m:r><m:r><m:rPr><m:sty m:val="p" /></m:rPr><m:t>=</m:t></m:r><m:r><m:t>30</m:t></m:r></m:oMath></a14:m><a:r><a:rPr /><a:t> years at discount rate </a:t></a:r><a14:m><m:oMath xmlns:m="http://schemas.openxmlformats.org/officeDocument/2006/math"><m:r><m:t>r</m:t></m:r></m:oMath></a14:m><a:r><a:rPr /><a:t>:</a:t></a:r></a:p><a:p><a:pPr lvl="0" indent="0" marL="0"><a:buNone /></a:pPr><a14:m><m:oMathPara xmlns:m="http://schemas.openxmlformats.org/officeDocument/2006/math"><m:oMathParaPr><m:jc m:val="center" /></m:oMathParaPr><m:oMath><m:r><m:t>N</m:t></m:r><m:r><m:t>P</m:t></m:r><m:r><m:t>V</m:t></m:r><m:r><m:rPr><m:sty m:val="p" /></m:rPr><m:t>=</m:t></m:r><m:r><m:rPr><m:sty m:val="p" /></m:rPr><m:t>−</m:t></m:r><m:r><m:rPr><m:sty m:val="p" /></m:rPr><m:t>$</m:t></m:r><m:r><m:t>80</m:t></m:r><m:r><m:rPr><m:sty m:val="p" /></m:rPr><m:t>,</m:t></m:r><m:r><m:t>000</m:t></m:r><m:r><m:rPr><m:sty m:val="p" /></m:rPr><m:t>+</m:t></m:r><m:nary><m:naryPr><m:chr m:val="∑" /><m:limLoc m:val="undOvr" /><m:subHide m:val="off" /><m:supHide m:val="off" /></m:naryPr><m:sub><m:r><m:t>t</m:t></m:r><m:r><m:rPr><m:sty m:val="p" /></m:rPr><m:t>=</m:t></m:r><m:r><m:t>1</m:t></m:r></m:sub><m:sup><m:r><m:t>30</m:t></m:r></m:sup><m:e><m:f><m:fPr><m:type m:val="bar" /></m:fPr><m:num><m:r><m:rPr><m:sty m:val="p" /></m:rPr><m:t>$</m:t></m:r><m:r><m:t>2</m:t></m:r><m:r><m:rPr><m:sty m:val="p" /></m:rPr><m:t>,</m:t></m:r><m:r><m:t>475</m:t></m:r></m:num><m:den><m:sSup><m:e><m:d><m:dPr><m:begChr m:val="(" /><m:sepChr m:val="" /><m:endChr m:val=")" /><m:grow /></m:dPr><m:e><m:r><m:t>1</m:t></m:r><m:r><m:rPr><m:sty m:val="p" /></m:rPr><m:t>+</m:t></m:r><m:r><m:t>r</m:t></m:r></m:e></m:d></m:e><m:sup><m:r><m:t>t</m:t></m:r></m:sup></m:sSup></m:den></m:f></m:e></m:nary></m:oMath></m:oMathPara></a14:m></a:p><a:p><a:pPr lvl="0" indent="0" marL="0"><a:buNone /></a:pPr><a:r><a:rPr /><a:t>At these numbers, elevation doesn’t pass BCA at </a:t></a:r><a:r><a:rPr i="1" /><a:t>any</a:t></a:r><a:r><a:rPr /><a:t> discount rate. What would need to change?</a:t></a:r></a:p><a:p><a:pPr lvl="0" indent="0" marL="0"><a:spcBef><a:spcPts val="3000" /></a:spcBef><a:buNone /></a:pPr><a:r><a:rPr b="1" /><a:t>Sensitivity: What If Flood Risk Is Higher?</a:t></a:r></a:p><a:p><a:pPr lvl="0" indent="0" marL="0"><a:buNone /></a:pPr><a:r><a:rPr /><a:t>Suppose climate change increases annual flood probability to </a:t></a:r><a:r><a:rPr b="1" /><a:t>10%</a:t></a:r><a:r><a:rPr /><a:t> (EAD: $5,000/yr, benefit: $4,975/yr):</a:t></a:r></a:p></p:txBody></p:sp></mc:Choice></mc:AlternateContent><p:graphicFrame><p:nvGraphicFramePr><p:cNvPr id="6" name="Content Placeholder 5" /><p:cNvGraphicFramePr><a:graphicFrameLocks noGrp="1" /></p:cNvGraphicFramePr><p:nvPr><p:ph idx="1" /></p:nvPr></p:nvGraphicFramePr><p:xfrm><a:off x="3568700" y="203200" /><a:ext cx="5105400" cy="4381500" /></p:xfrm><a:graphic><a:graphicData uri="http://schemas.openxmlformats.org/drawingml/2006/table"><a:tbl><a:tblPr firstRow="1" bandRow="1"><a:tableStyleId>{5C22544A-7EE6-4342-B048-85BDC9FD1C3A}</a:tableStyleId></a:tblPr><a:tblGrid><a:gridCol w="1270000" /><a:gridCol w="1270000" /><a:gridCol w="1270000" /><a:gridCol w="1270000" /></a:tblGrid><a:tr h="0"><a:tc><a:txBody><a:bodyPr /><a:lstStyle /><a:p><a:pPr lvl="0" indent="0" marL="0" algn="ctr"><a:buNone /></a:pPr><a:r><a:rPr /><a:t>Discount rate </a:t></a:r><a14:m><m:oMath xmlns:m="http://schemas.openxmlformats.org/officeDocument/2006/math"><m:r><m:t>r</m:t></m:r></m:oMath></a14:m></a:p></a:txBody><a:tcPr /></a:tc><a:tc><a:txBody><a:bodyPr /><a:lstStyle /><a:p><a:pPr lvl="0" indent="0" marL="0" algn="ctr"><a:buNone /></a:pPr><a:r><a:rPr /><a:t>PV of benefits</a:t></a:r></a:p></a:txBody><a:tcPr /></a:tc><a:tc><a:txBody><a:bodyPr /><a:lstStyle /><a:p><a:pPr lvl="0" indent="0" marL="0" algn="ctr"><a:buNone /></a:pPr><a:r><a:rPr /><a:t>NPV</a:t></a:r></a:p></a:txBody><a:tcPr /></a:tc><a:tc><a:txBody><a:bodyPr /><a:lstStyle /><a:p><a:pPr lvl="0" indent="0" marL="0" algn="ctr"><a:buNone /></a:pPr><a:r><a:rPr /><a:t>Pass?</a:t></a:r></a:p></a:txBody><a:tcPr /></a:tc></a:tr><a:tr h="0"><a:tc><a:txBody><a:bodyPr /><a:lstStyle /><a:p><a:pPr lvl="0" indent="0" marL="0" algn="ctr"><a:buNone /></a:pPr><a:r><a:rPr /><a:t>2%</a:t></a:r></a:p></a:txBody></a:tc><a:tc><a:txBody><a:bodyPr /><a:lstStyle /><a:p><a:pPr lvl="0" indent="0" marL="0" algn="ctr"><a:buNone /></a:pPr><a:r><a:rPr /><a:t>$111,500</a:t></a:r></a:p></a:txBody></a:tc><a:tc><a:txBody><a:bodyPr /><a:lstStyle /><a:p><a:pPr lvl="0" indent="0" marL="0" algn="ctr"><a:buNone /></a:pPr><a:r><a:rPr b="1" /><a:t>+$31,500</a:t></a:r></a:p></a:txBody></a:tc><a:tc><a:txBody><a:bodyPr /><a:lstStyle /><a:p><a:pPr lvl="0" indent="0" marL="0" algn="ctr"><a:buNone /></a:pPr><a:r><a:rPr /><a:t>Yes</a:t></a:r></a:p></a:txBody></a:tc></a:tr><a:tr h="0"><a:tc><a:txBody><a:bodyPr /><a:lstStyle /><a:p><a:pPr lvl="0" indent="0" marL="0" algn="ctr"><a:buNone /></a:pPr><a:r><a:rPr /><a:t>5%</a:t></a:r></a:p></a:txBody></a:tc><a:tc><a:txBody><a:bodyPr /><a:lstStyle /><a:p><a:pPr lvl="0" indent="0" marL="0" algn="ctr"><a:buNone /></a:pPr><a:r><a:rPr /><a:t>$76,500</a:t></a:r></a:p></a:txBody></a:tc><a:tc><a:txBody><a:bodyPr /><a:lstStyle /><a:p><a:pPr lvl="0" indent="0" marL="0" algn="ctr"><a:buNone /></a:pPr><a:r><a:rPr b="1" /><a:t>-$3,500</a:t></a:r></a:p></a:txBody></a:tc><a:tc><a:txBody><a:bodyPr /><a:lstStyle /><a:p><a:pPr lvl="0" indent="0" marL="0" algn="ctr"><a:buNone /></a:pPr><a:r><a:rPr /><a:t>Barely no</a:t></a:r></a:p></a:txBody></a:tc></a:tr><a:tr h="0"><a:tc><a:txBody><a:bodyPr /><a:lstStyle /><a:p><a:pPr lvl="0" indent="0" marL="0" algn="ctr"><a:buNone /></a:pPr><a:r><a:rPr /><a:t>7%</a:t></a:r></a:p></a:txBody></a:tc><a:tc><a:txBody><a:bodyPr /><a:lstStyle /><a:p><a:pPr lvl="0" indent="0" marL="0" algn="ctr"><a:buNone /></a:pPr><a:r><a:rPr /><a:t>$61,700</a:t></a:r></a:p></a:txBody></a:tc><a:tc><a:txBody><a:bodyPr /><a:lstStyle /><a:p><a:pPr lvl="0" indent="0" marL="0" algn="ctr"><a:buNone /></a:pPr><a:r><a:rPr b="1" /><a:t>-$18,300</a:t></a:r></a:p></a:txBody></a:tc><a:tc><a:txBody><a:bodyPr /><a:lstStyle /><a:p><a:pPr lvl="0" indent="0" marL="0" algn="ctr"><a:buNone /></a:pPr><a:r><a:rPr /><a:t>No</a:t></a:r></a:p></a:txBody></a:tc></a:tr></a:tbl></a:graphicData></a:graphic></p:graphicFrame></p:spTree></p:cSld></p:sld>
+</file>
+
+<file path=ppt/slides/slide9.xml><?xml version="1.0" encoding="utf-8"?>
+<p:sld xmlns:a="http://schemas.openxmlformats.org/drawingml/2006/main" xmlns:r="http://schemas.openxmlformats.org/officeDocument/2006/relationships" xmlns:p="http://schemas.openxmlformats.org/presentationml/2006/main">
+  <p:cSld>
+    <p:spTree>
+      <p:nvGrpSpPr>
+        <p:cNvPr id="1" name=""/>
+        <p:cNvGrpSpPr/>
+        <p:nvPr/>
+      </p:nvGrpSpPr>
+      <p:grpSpPr>
+        <a:xfrm>
+          <a:off x="0" y="0"/>
+          <a:ext cx="0" cy="0"/>
+          <a:chOff x="0" y="0"/>
+          <a:chExt cx="0" cy="0"/>
+        </a:xfrm>
+      </p:grpSpPr>
       <p:sp>
         <p:nvSpPr>
           <p:cNvPr id="3" name="Content Placeholder 2"/>
@@ -3447,25 +12490,15 @@
             </a:pPr>
             <a:r>
               <a:rPr/>
-              <a:t>Dantzig, D. van. 1956. “Economic Decision Problems for Flood Prevention.” </a:t>
-            </a:r>
-            <a:r>
-              <a:rPr i="1"/>
-              <a:t>Econometrica</a:t>
+              <a:t>The </a:t>
+            </a:r>
+            <a:r>
+              <a:rPr b="1"/>
+              <a:t>same project</a:t>
             </a:r>
             <a:r>
               <a:rPr/>
-              <a:t> 24 (3): 276–87. </a:t>
-            </a:r>
-            <a:r>
-              <a:rPr>
-                <a:hlinkClick r:id="rId2"/>
-              </a:rPr>
-              <a:t>https://doi.org/10.2307/1911632</a:t>
-            </a:r>
-            <a:r>
-              <a:rPr/>
-              <a:t>.</a:t>
+              <a:t> passes or fails depending on two assumptions: flood probability and discount rate.</a:t>
             </a:r>
           </a:p>
         </p:txBody>

--- a/lectures/week-05/index.pptx
+++ b/lectures/week-05/index.pptx
@@ -5,7 +5,7 @@
     <p:sldMasterId id="2147483648" r:id="rId1"/>
   </p:sldMasterIdLst>
   <p:notesMasterIdLst>
-    <p:notesMasterId r:id="rId13"/>
+    <p:notesMasterId r:id="rId12"/>
   </p:notesMasterIdLst>
   <p:sldIdLst>
     <p:sldId id="256" r:id="rId2"/>
@@ -18,7 +18,6 @@
     <p:sldId id="263" r:id="rId9"/>
     <p:sldId id="264" r:id="rId10"/>
     <p:sldId id="265" r:id="rId11"/>
-    <p:sldId id="266" r:id="rId12"/>
   </p:sldIdLst>
   <p:sldSz cx="9144000" cy="5143500" type="screen16x9"/>
   <p:notesSz cx="6858000" cy="9144000"/>
@@ -584,7 +583,7 @@
           <a:p>
             <a:fld id="{18BDFEC3-8487-43E8-A154-7C12CBC1FFF2}" type="slidenum">
               <a:rPr lang="en-US"/>
-              <a:t>3</a:t>
+              <a:t>2</a:t>
             </a:fld>
             <a:endParaRPr lang="en-US"/>
           </a:p>
@@ -744,7 +743,7 @@
           <a:p>
             <a:fld id="{18BDFEC3-8487-43E8-A154-7C12CBC1FFF2}" type="slidenum">
               <a:rPr lang="en-US"/>
-              <a:t>4</a:t>
+              <a:t>3</a:t>
             </a:fld>
             <a:endParaRPr lang="en-US"/>
           </a:p>
@@ -876,7 +875,7 @@
           <a:p>
             <a:fld id="{18BDFEC3-8487-43E8-A154-7C12CBC1FFF2}" type="slidenum">
               <a:rPr lang="en-US"/>
-              <a:t>5</a:t>
+              <a:t>4</a:t>
             </a:fld>
             <a:endParaRPr lang="en-US"/>
           </a:p>
@@ -1014,7 +1013,7 @@
           <a:p>
             <a:fld id="{18BDFEC3-8487-43E8-A154-7C12CBC1FFF2}" type="slidenum">
               <a:rPr lang="en-US"/>
-              <a:t>6</a:t>
+              <a:t>5</a:t>
             </a:fld>
             <a:endParaRPr lang="en-US"/>
           </a:p>
@@ -1104,7 +1103,7 @@
           <a:p>
             <a:fld id="{18BDFEC3-8487-43E8-A154-7C12CBC1FFF2}" type="slidenum">
               <a:rPr lang="en-US"/>
-              <a:t>7</a:t>
+              <a:t>6</a:t>
             </a:fld>
             <a:endParaRPr lang="en-US"/>
           </a:p>
@@ -1194,7 +1193,7 @@
           <a:p>
             <a:fld id="{18BDFEC3-8487-43E8-A154-7C12CBC1FFF2}" type="slidenum">
               <a:rPr lang="en-US"/>
-              <a:t>8</a:t>
+              <a:t>7</a:t>
             </a:fld>
             <a:endParaRPr lang="en-US"/>
           </a:p>
@@ -1276,7 +1275,7 @@
           <a:p>
             <a:fld id="{18BDFEC3-8487-43E8-A154-7C12CBC1FFF2}" type="slidenum">
               <a:rPr lang="en-US"/>
-              <a:t>9</a:t>
+              <a:t>8</a:t>
             </a:fld>
             <a:endParaRPr lang="en-US"/>
           </a:p>
@@ -1350,15 +1349,7 @@
             </a:pPr>
             <a:r>
               <a:rPr/>
-              <a:t>Target: 1:46. Preview for Wednesday’s reading (Arrow et al.). Key insight from (</a:t>
-            </a:r>
-            <a:r>
-              <a:rPr b="1"/>
-              <a:t>weitzman_stern:2007?</a:t>
-            </a:r>
-            <a:r>
-              <a:rPr/>
-              <a:t>): “if you use a large discount rate, your model will always tell you to burn more fossil fuels.”</a:t>
+              <a:t>Target: 1:46. Preview for Wednesday’s reading (Arrow et al.).</a:t>
             </a:r>
           </a:p>
           <a:p>
@@ -1408,7 +1399,7 @@
           <a:p>
             <a:fld id="{18BDFEC3-8487-43E8-A154-7C12CBC1FFF2}" type="slidenum">
               <a:rPr lang="en-US"/>
-              <a:t>10</a:t>
+              <a:t>9</a:t>
             </a:fld>
             <a:endParaRPr lang="en-US"/>
           </a:p>
@@ -1490,7 +1481,7 @@
           <a:p>
             <a:fld id="{18BDFEC3-8487-43E8-A154-7C12CBC1FFF2}" type="slidenum">
               <a:rPr lang="en-US"/>
-              <a:t>11</a:t>
+              <a:t>10</a:t>
             </a:fld>
             <a:endParaRPr lang="en-US"/>
           </a:p>
@@ -4565,911 +4556,6 @@
 </file>
 
 <file path=ppt/slides/slide10.xml><?xml version="1.0" encoding="utf-8"?>
-<p:sld xmlns:a="http://schemas.openxmlformats.org/drawingml/2006/main" xmlns:r="http://schemas.openxmlformats.org/officeDocument/2006/relationships" xmlns:p="http://schemas.openxmlformats.org/presentationml/2006/main">
-  <p:cSld>
-    <p:spTree>
-      <p:nvGrpSpPr>
-        <p:cNvPr id="1" name=""/>
-        <p:cNvGrpSpPr/>
-        <p:nvPr/>
-      </p:nvGrpSpPr>
-      <p:grpSpPr>
-        <a:xfrm>
-          <a:off x="0" y="0"/>
-          <a:ext cx="0" cy="0"/>
-          <a:chOff x="0" y="0"/>
-          <a:chExt cx="0" cy="0"/>
-        </a:xfrm>
-      </p:grpSpPr>
-      <p:sp>
-        <p:nvSpPr>
-          <p:cNvPr id="2" name="Title 1"/>
-          <p:cNvSpPr>
-            <a:spLocks noGrp="1"/>
-          </p:cNvSpPr>
-          <p:nvPr>
-            <p:ph type="title"/>
-          </p:nvPr>
-        </p:nvSpPr>
-        <p:spPr/>
-        <p:txBody>
-          <a:bodyPr/>
-          <a:lstStyle/>
-          <a:p>
-            <a:pPr lvl="0" indent="0" marL="0">
-              <a:buNone/>
-            </a:pPr>
-            <a:r>
-              <a:rPr/>
-              <a:t>Critiques &amp; Defense</a:t>
-            </a:r>
-          </a:p>
-        </p:txBody>
-      </p:sp>
-      <mc:AlternateContent xmlns:mc="http://schemas.openxmlformats.org/markup-compatibility/2006">
-        <mc:Choice xmlns:a14="http://schemas.microsoft.com/office/drawing/2010/main" Requires="a14">
-          <p:sp>
-            <p:nvSpPr>
-              <p:cNvPr id="3" name="Content Placeholder 2"/>
-              <p:cNvSpPr>
-                <a:spLocks noGrp="1"/>
-              </p:cNvSpPr>
-              <p:nvPr>
-                <p:ph idx="1"/>
-              </p:nvPr>
-            </p:nvSpPr>
-            <p:spPr/>
-            <p:txBody>
-              <a:bodyPr/>
-              <a:lstStyle/>
-              <a:p>
-                <a:pPr lvl="0" indent="0" marL="0">
-                  <a:spcBef>
-                    <a:spcPts val="3000"/>
-                  </a:spcBef>
-                  <a:buNone/>
-                </a:pPr>
-                <a:r>
-                  <a:rPr b="1"/>
-                  <a:t>White House Circular A-94</a:t>
-                </a:r>
-              </a:p>
-              <a:p>
-                <a:pPr lvl="0" indent="0" marL="0">
-                  <a:buNone/>
-                </a:pPr>
-                <a:r>
-                  <a:rPr/>
-                  <a:t>The overarching federal guidance on BCA (U.S. Office of Management and Budget 2023):</a:t>
-                </a:r>
-              </a:p>
-              <a:p>
-                <a:pPr lvl="0"/>
-                <a:r>
-                  <a:rPr/>
-                  <a:t>Governs how </a:t>
-                </a:r>
-                <a:r>
-                  <a:rPr b="1"/>
-                  <a:t>all</a:t>
-                </a:r>
-                <a:r>
-                  <a:rPr/>
-                  <a:t> federal agencies should conduct BCA</a:t>
-                </a:r>
-              </a:p>
-              <a:p>
-                <a:pPr lvl="0"/>
-                <a:r>
-                  <a:rPr/>
-                  <a:t>2023 update lowered the default discount rate from 7% to ~2%</a:t>
-                </a:r>
-              </a:p>
-              <a:p>
-                <a:pPr lvl="0"/>
-                <a:r>
-                  <a:rPr/>
-                  <a:t>Expanded guidance on equity and distributional effects</a:t>
-                </a:r>
-              </a:p>
-              <a:p>
-                <a:pPr lvl="0" indent="0" marL="0">
-                  <a:spcBef>
-                    <a:spcPts val="3000"/>
-                  </a:spcBef>
-                  <a:buNone/>
-                </a:pPr>
-                <a:r>
-                  <a:rPr b="1"/>
-                  <a:t>The Discount Rate Problem</a:t>
-                </a:r>
-              </a:p>
-              <a:p>
-                <a:pPr lvl="0" indent="0" marL="0">
-                  <a:buNone/>
-                </a:pPr>
-                <a:r>
-                  <a:rPr/>
-                  <a:t>Two rationales for discounting (Arrow et al. 2013):</a:t>
-                </a:r>
-              </a:p>
-              <a:p>
-                <a:pPr lvl="0" indent="-342900" marL="342900">
-                  <a:buAutoNum type="arabicPeriod"/>
-                </a:pPr>
-                <a:r>
-                  <a:rPr b="1"/>
-                  <a:t>Consumption-based</a:t>
-                </a:r>
-                <a:r>
-                  <a:rPr/>
-                  <a:t> (~3%): Future generations will be richer, so an extra dollar matters less to them</a:t>
-                </a:r>
-              </a:p>
-              <a:p>
-                <a:pPr lvl="0" indent="-342900" marL="342900">
-                  <a:buAutoNum type="arabicPeriod"/>
-                </a:pPr>
-                <a:r>
-                  <a:rPr b="1"/>
-                  <a:t>Investment-based</a:t>
-                </a:r>
-                <a:r>
-                  <a:rPr/>
-                  <a:t> (~7%): A dollar invested today yields more than a dollar in the future</a:t>
-                </a:r>
-              </a:p>
-              <a:p>
-                <a:pPr lvl="0" indent="0" marL="0">
-                  <a:buNone/>
-                </a:pPr>
-                <a:r>
-                  <a:rPr/>
-                  <a:t>Both assume future generations are better off — what if climate change makes them </a:t>
-                </a:r>
-                <a:r>
-                  <a:rPr i="1"/>
-                  <a:t>worse</a:t>
-                </a:r>
-                <a:r>
-                  <a:rPr/>
-                  <a:t> off?</a:t>
-                </a:r>
-              </a:p>
-              <a:p>
-                <a:pPr lvl="0" indent="0" marL="0">
-                  <a:spcBef>
-                    <a:spcPts val="3000"/>
-                  </a:spcBef>
-                  <a:buNone/>
-                </a:pPr>
-                <a:r>
-                  <a:rPr b="1"/>
-                  <a:t>High Discount Rates Favor Inaction</a:t>
-                </a:r>
-              </a:p>
-              <a:p>
-                <a:pPr lvl="0" indent="0" marL="0">
-                  <a:buNone/>
-                </a:pPr>
-                <a:r>
-                  <a:rPr/>
-                  <a:t>At </a:t>
-                </a:r>
-                <a14:m>
-                  <m:oMath xmlns:m="http://schemas.openxmlformats.org/officeDocument/2006/math">
-                    <m:r>
-                      <m:t>r</m:t>
-                    </m:r>
-                    <m:r>
-                      <m:rPr>
-                        <m:sty m:val="p"/>
-                      </m:rPr>
-                      <m:t>=</m:t>
-                    </m:r>
-                    <m:r>
-                      <m:t>7</m:t>
-                    </m:r>
-                    <m:r>
-                      <m:rPr>
-                        <m:sty m:val="p"/>
-                      </m:rPr>
-                      <m:t>%</m:t>
-                    </m:r>
-                  </m:oMath>
-                </a14:m>
-                <a:r>
-                  <a:rPr/>
-                  <a:t>, damages 50 years out are worth </a:t>
-                </a:r>
-                <a:r>
-                  <a:rPr b="1"/>
-                  <a:t>$0.03</a:t>
-                </a:r>
-                <a:r>
-                  <a:rPr/>
-                  <a:t> today.</a:t>
-                </a:r>
-              </a:p>
-              <a:p>
-                <a:pPr lvl="0"/>
-                <a:r>
-                  <a:rPr/>
-                  <a:t>Infrastructure with 50-100 year lifetimes</a:t>
-                </a:r>
-              </a:p>
-              <a:p>
-                <a:pPr lvl="0"/>
-                <a:r>
-                  <a:rPr/>
-                  <a:t>Sea-level rise over centuries</a:t>
-                </a:r>
-              </a:p>
-              <a:p>
-                <a:pPr lvl="0"/>
-                <a:r>
-                  <a:rPr/>
-                  <a:t>Species extinction is permanent</a:t>
-                </a:r>
-              </a:p>
-              <a:p>
-                <a:pPr lvl="0" indent="0" marL="0">
-                  <a:buNone/>
-                </a:pPr>
-                <a:r>
-                  <a:rPr/>
-                  <a:t>The discount rate can determine whether a project “passes” BCA — more than any other single parameter.</a:t>
-                </a:r>
-              </a:p>
-              <a:p>
-                <a:pPr lvl="0" indent="0" marL="0">
-                  <a:spcBef>
-                    <a:spcPts val="3000"/>
-                  </a:spcBef>
-                  <a:buNone/>
-                </a:pPr>
-                <a:r>
-                  <a:rPr b="1"/>
-                  <a:t>Decision-Support, Not Decision-Making</a:t>
-                </a:r>
-              </a:p>
-              <a:p>
-                <a:pPr lvl="0" indent="0" marL="1270000">
-                  <a:buNone/>
-                </a:pPr>
-                <a:r>
-                  <a:rPr sz="2000" b="1"/>
-                  <a:t>Important</a:t>
-                </a:r>
-              </a:p>
-              <a:p>
-                <a:pPr lvl="0" indent="0" marL="1270000">
-                  <a:buNone/>
-                </a:pPr>
-                <a:r>
-                  <a:rPr sz="2000"/>
-                  <a:t>BCA is a tool for </a:t>
-                </a:r>
-                <a:r>
-                  <a:rPr sz="2000" b="1"/>
-                  <a:t>informing</a:t>
-                </a:r>
-                <a:r>
-                  <a:rPr sz="2000"/>
-                  <a:t> decisions, not </a:t>
-                </a:r>
-                <a:r>
-                  <a:rPr sz="2000" b="1"/>
-                  <a:t>making</a:t>
-                </a:r>
-                <a:r>
-                  <a:rPr sz="2000"/>
-                  <a:t> them.</a:t>
-                </a:r>
-              </a:p>
-              <a:p>
-                <a:pPr lvl="0"/>
-                <a:r>
-                  <a:rPr/>
-                  <a:t>It forces us to be explicit about our assumptions</a:t>
-                </a:r>
-              </a:p>
-              <a:p>
-                <a:pPr lvl="0"/>
-                <a:r>
-                  <a:rPr/>
-                  <a:t>Applied well, it’s iterative refinement of understanding; applied poorly, it’s a black box that justifies a decision already made</a:t>
-                </a:r>
-              </a:p>
-              <a:p>
-                <a:pPr lvl="0"/>
-                <a:r>
-                  <a:rPr/>
-                  <a:t>The number matters less than what you learn by computing it</a:t>
-                </a:r>
-              </a:p>
-            </p:txBody>
-          </p:sp>
-        </mc:Choice>
-      </mc:AlternateContent>
-    </p:spTree>
-  </p:cSld>
-  <p:timing>
-    <p:tnLst>
-      <p:par>
-        <p:cTn id="1" dur="indefinite" restart="never" nodeType="tmRoot">
-          <p:childTnLst>
-            <p:seq concurrent="1" nextAc="seek">
-              <p:cTn id="2" dur="indefinite" nodeType="mainSeq">
-                <p:childTnLst>
-                  <p:par>
-                    <p:cTn id="3" fill="hold">
-                      <p:stCondLst>
-                        <p:cond delay="indefinite"/>
-                      </p:stCondLst>
-                      <p:childTnLst>
-                        <p:par>
-                          <p:cTn id="4" fill="hold">
-                            <p:stCondLst>
-                              <p:cond delay="0"/>
-                            </p:stCondLst>
-                            <p:childTnLst>
-                              <p:par>
-                                <p:cTn id="5" presetID="1" presetClass="entr" presetSubtype="0" fill="hold" grpId="0" nodeType="clickEffect">
-                                  <p:stCondLst>
-                                    <p:cond delay="0"/>
-                                  </p:stCondLst>
-                                  <p:childTnLst>
-                                    <p:set>
-                                      <p:cBhvr>
-                                        <p:cTn id="6" dur="1" fill="hold">
-                                          <p:stCondLst>
-                                            <p:cond delay="0"/>
-                                          </p:stCondLst>
-                                        </p:cTn>
-                                        <p:tgtEl>
-                                          <p:spTgt spid="3">
-                                            <p:txEl>
-                                              <p:pRg st="2" end="2"/>
-                                            </p:txEl>
-                                          </p:spTgt>
-                                        </p:tgtEl>
-                                        <p:attrNameLst>
-                                          <p:attrName>style.visibility</p:attrName>
-                                        </p:attrNameLst>
-                                      </p:cBhvr>
-                                      <p:to>
-                                        <p:strVal val="visible"/>
-                                      </p:to>
-                                    </p:set>
-                                  </p:childTnLst>
-                                </p:cTn>
-                              </p:par>
-                            </p:childTnLst>
-                          </p:cTn>
-                        </p:par>
-                      </p:childTnLst>
-                    </p:cTn>
-                  </p:par>
-                  <p:par>
-                    <p:cTn id="7" fill="hold">
-                      <p:stCondLst>
-                        <p:cond delay="indefinite"/>
-                      </p:stCondLst>
-                      <p:childTnLst>
-                        <p:par>
-                          <p:cTn id="8" fill="hold">
-                            <p:stCondLst>
-                              <p:cond delay="0"/>
-                            </p:stCondLst>
-                            <p:childTnLst>
-                              <p:par>
-                                <p:cTn id="9" presetID="1" presetClass="entr" presetSubtype="0" fill="hold" grpId="0" nodeType="clickEffect">
-                                  <p:stCondLst>
-                                    <p:cond delay="0"/>
-                                  </p:stCondLst>
-                                  <p:childTnLst>
-                                    <p:set>
-                                      <p:cBhvr>
-                                        <p:cTn id="10" dur="1" fill="hold">
-                                          <p:stCondLst>
-                                            <p:cond delay="0"/>
-                                          </p:stCondLst>
-                                        </p:cTn>
-                                        <p:tgtEl>
-                                          <p:spTgt spid="3">
-                                            <p:txEl>
-                                              <p:pRg st="3" end="3"/>
-                                            </p:txEl>
-                                          </p:spTgt>
-                                        </p:tgtEl>
-                                        <p:attrNameLst>
-                                          <p:attrName>style.visibility</p:attrName>
-                                        </p:attrNameLst>
-                                      </p:cBhvr>
-                                      <p:to>
-                                        <p:strVal val="visible"/>
-                                      </p:to>
-                                    </p:set>
-                                  </p:childTnLst>
-                                </p:cTn>
-                              </p:par>
-                            </p:childTnLst>
-                          </p:cTn>
-                        </p:par>
-                      </p:childTnLst>
-                    </p:cTn>
-                  </p:par>
-                  <p:par>
-                    <p:cTn id="11" fill="hold">
-                      <p:stCondLst>
-                        <p:cond delay="indefinite"/>
-                      </p:stCondLst>
-                      <p:childTnLst>
-                        <p:par>
-                          <p:cTn id="12" fill="hold">
-                            <p:stCondLst>
-                              <p:cond delay="0"/>
-                            </p:stCondLst>
-                            <p:childTnLst>
-                              <p:par>
-                                <p:cTn id="13" presetID="1" presetClass="entr" presetSubtype="0" fill="hold" grpId="0" nodeType="clickEffect">
-                                  <p:stCondLst>
-                                    <p:cond delay="0"/>
-                                  </p:stCondLst>
-                                  <p:childTnLst>
-                                    <p:set>
-                                      <p:cBhvr>
-                                        <p:cTn id="14" dur="1" fill="hold">
-                                          <p:stCondLst>
-                                            <p:cond delay="0"/>
-                                          </p:stCondLst>
-                                        </p:cTn>
-                                        <p:tgtEl>
-                                          <p:spTgt spid="3">
-                                            <p:txEl>
-                                              <p:pRg st="4" end="4"/>
-                                            </p:txEl>
-                                          </p:spTgt>
-                                        </p:tgtEl>
-                                        <p:attrNameLst>
-                                          <p:attrName>style.visibility</p:attrName>
-                                        </p:attrNameLst>
-                                      </p:cBhvr>
-                                      <p:to>
-                                        <p:strVal val="visible"/>
-                                      </p:to>
-                                    </p:set>
-                                  </p:childTnLst>
-                                </p:cTn>
-                              </p:par>
-                            </p:childTnLst>
-                          </p:cTn>
-                        </p:par>
-                      </p:childTnLst>
-                    </p:cTn>
-                  </p:par>
-                  <p:par>
-                    <p:cTn id="15" fill="hold">
-                      <p:stCondLst>
-                        <p:cond delay="indefinite"/>
-                      </p:stCondLst>
-                      <p:childTnLst>
-                        <p:par>
-                          <p:cTn id="16" fill="hold">
-                            <p:stCondLst>
-                              <p:cond delay="0"/>
-                            </p:stCondLst>
-                            <p:childTnLst>
-                              <p:par>
-                                <p:cTn id="17" presetID="1" presetClass="entr" presetSubtype="0" fill="hold" grpId="0" nodeType="clickEffect">
-                                  <p:stCondLst>
-                                    <p:cond delay="0"/>
-                                  </p:stCondLst>
-                                  <p:childTnLst>
-                                    <p:set>
-                                      <p:cBhvr>
-                                        <p:cTn id="18" dur="1" fill="hold">
-                                          <p:stCondLst>
-                                            <p:cond delay="0"/>
-                                          </p:stCondLst>
-                                        </p:cTn>
-                                        <p:tgtEl>
-                                          <p:spTgt spid="3">
-                                            <p:txEl>
-                                              <p:pRg st="7" end="7"/>
-                                            </p:txEl>
-                                          </p:spTgt>
-                                        </p:tgtEl>
-                                        <p:attrNameLst>
-                                          <p:attrName>style.visibility</p:attrName>
-                                        </p:attrNameLst>
-                                      </p:cBhvr>
-                                      <p:to>
-                                        <p:strVal val="visible"/>
-                                      </p:to>
-                                    </p:set>
-                                  </p:childTnLst>
-                                </p:cTn>
-                              </p:par>
-                            </p:childTnLst>
-                          </p:cTn>
-                        </p:par>
-                      </p:childTnLst>
-                    </p:cTn>
-                  </p:par>
-                  <p:par>
-                    <p:cTn id="19" fill="hold">
-                      <p:stCondLst>
-                        <p:cond delay="indefinite"/>
-                      </p:stCondLst>
-                      <p:childTnLst>
-                        <p:par>
-                          <p:cTn id="20" fill="hold">
-                            <p:stCondLst>
-                              <p:cond delay="0"/>
-                            </p:stCondLst>
-                            <p:childTnLst>
-                              <p:par>
-                                <p:cTn id="21" presetID="1" presetClass="entr" presetSubtype="0" fill="hold" grpId="0" nodeType="clickEffect">
-                                  <p:stCondLst>
-                                    <p:cond delay="0"/>
-                                  </p:stCondLst>
-                                  <p:childTnLst>
-                                    <p:set>
-                                      <p:cBhvr>
-                                        <p:cTn id="22" dur="1" fill="hold">
-                                          <p:stCondLst>
-                                            <p:cond delay="0"/>
-                                          </p:stCondLst>
-                                        </p:cTn>
-                                        <p:tgtEl>
-                                          <p:spTgt spid="3">
-                                            <p:txEl>
-                                              <p:pRg st="8" end="8"/>
-                                            </p:txEl>
-                                          </p:spTgt>
-                                        </p:tgtEl>
-                                        <p:attrNameLst>
-                                          <p:attrName>style.visibility</p:attrName>
-                                        </p:attrNameLst>
-                                      </p:cBhvr>
-                                      <p:to>
-                                        <p:strVal val="visible"/>
-                                      </p:to>
-                                    </p:set>
-                                  </p:childTnLst>
-                                </p:cTn>
-                              </p:par>
-                            </p:childTnLst>
-                          </p:cTn>
-                        </p:par>
-                      </p:childTnLst>
-                    </p:cTn>
-                  </p:par>
-                  <p:par>
-                    <p:cTn id="23" fill="hold">
-                      <p:stCondLst>
-                        <p:cond delay="indefinite"/>
-                      </p:stCondLst>
-                      <p:childTnLst>
-                        <p:par>
-                          <p:cTn id="24" fill="hold">
-                            <p:stCondLst>
-                              <p:cond delay="0"/>
-                            </p:stCondLst>
-                            <p:childTnLst>
-                              <p:par>
-                                <p:cTn id="25" presetID="1" presetClass="entr" presetSubtype="0" fill="hold" grpId="0" nodeType="clickEffect">
-                                  <p:stCondLst>
-                                    <p:cond delay="0"/>
-                                  </p:stCondLst>
-                                  <p:childTnLst>
-                                    <p:set>
-                                      <p:cBhvr>
-                                        <p:cTn id="26" dur="1" fill="hold">
-                                          <p:stCondLst>
-                                            <p:cond delay="0"/>
-                                          </p:stCondLst>
-                                        </p:cTn>
-                                        <p:tgtEl>
-                                          <p:spTgt spid="3">
-                                            <p:txEl>
-                                              <p:pRg st="12" end="12"/>
-                                            </p:txEl>
-                                          </p:spTgt>
-                                        </p:tgtEl>
-                                        <p:attrNameLst>
-                                          <p:attrName>style.visibility</p:attrName>
-                                        </p:attrNameLst>
-                                      </p:cBhvr>
-                                      <p:to>
-                                        <p:strVal val="visible"/>
-                                      </p:to>
-                                    </p:set>
-                                  </p:childTnLst>
-                                </p:cTn>
-                              </p:par>
-                            </p:childTnLst>
-                          </p:cTn>
-                        </p:par>
-                      </p:childTnLst>
-                    </p:cTn>
-                  </p:par>
-                  <p:par>
-                    <p:cTn id="27" fill="hold">
-                      <p:stCondLst>
-                        <p:cond delay="indefinite"/>
-                      </p:stCondLst>
-                      <p:childTnLst>
-                        <p:par>
-                          <p:cTn id="28" fill="hold">
-                            <p:stCondLst>
-                              <p:cond delay="0"/>
-                            </p:stCondLst>
-                            <p:childTnLst>
-                              <p:par>
-                                <p:cTn id="29" presetID="1" presetClass="entr" presetSubtype="0" fill="hold" grpId="0" nodeType="clickEffect">
-                                  <p:stCondLst>
-                                    <p:cond delay="0"/>
-                                  </p:stCondLst>
-                                  <p:childTnLst>
-                                    <p:set>
-                                      <p:cBhvr>
-                                        <p:cTn id="30" dur="1" fill="hold">
-                                          <p:stCondLst>
-                                            <p:cond delay="0"/>
-                                          </p:stCondLst>
-                                        </p:cTn>
-                                        <p:tgtEl>
-                                          <p:spTgt spid="3">
-                                            <p:txEl>
-                                              <p:pRg st="13" end="13"/>
-                                            </p:txEl>
-                                          </p:spTgt>
-                                        </p:tgtEl>
-                                        <p:attrNameLst>
-                                          <p:attrName>style.visibility</p:attrName>
-                                        </p:attrNameLst>
-                                      </p:cBhvr>
-                                      <p:to>
-                                        <p:strVal val="visible"/>
-                                      </p:to>
-                                    </p:set>
-                                  </p:childTnLst>
-                                </p:cTn>
-                              </p:par>
-                            </p:childTnLst>
-                          </p:cTn>
-                        </p:par>
-                      </p:childTnLst>
-                    </p:cTn>
-                  </p:par>
-                  <p:par>
-                    <p:cTn id="31" fill="hold">
-                      <p:stCondLst>
-                        <p:cond delay="indefinite"/>
-                      </p:stCondLst>
-                      <p:childTnLst>
-                        <p:par>
-                          <p:cTn id="32" fill="hold">
-                            <p:stCondLst>
-                              <p:cond delay="0"/>
-                            </p:stCondLst>
-                            <p:childTnLst>
-                              <p:par>
-                                <p:cTn id="33" presetID="1" presetClass="entr" presetSubtype="0" fill="hold" grpId="0" nodeType="clickEffect">
-                                  <p:stCondLst>
-                                    <p:cond delay="0"/>
-                                  </p:stCondLst>
-                                  <p:childTnLst>
-                                    <p:set>
-                                      <p:cBhvr>
-                                        <p:cTn id="34" dur="1" fill="hold">
-                                          <p:stCondLst>
-                                            <p:cond delay="0"/>
-                                          </p:stCondLst>
-                                        </p:cTn>
-                                        <p:tgtEl>
-                                          <p:spTgt spid="3">
-                                            <p:txEl>
-                                              <p:pRg st="14" end="14"/>
-                                            </p:txEl>
-                                          </p:spTgt>
-                                        </p:tgtEl>
-                                        <p:attrNameLst>
-                                          <p:attrName>style.visibility</p:attrName>
-                                        </p:attrNameLst>
-                                      </p:cBhvr>
-                                      <p:to>
-                                        <p:strVal val="visible"/>
-                                      </p:to>
-                                    </p:set>
-                                  </p:childTnLst>
-                                </p:cTn>
-                              </p:par>
-                            </p:childTnLst>
-                          </p:cTn>
-                        </p:par>
-                      </p:childTnLst>
-                    </p:cTn>
-                  </p:par>
-                  <p:par>
-                    <p:cTn id="35" fill="hold">
-                      <p:stCondLst>
-                        <p:cond delay="indefinite"/>
-                      </p:stCondLst>
-                      <p:childTnLst>
-                        <p:par>
-                          <p:cTn id="36" fill="hold">
-                            <p:stCondLst>
-                              <p:cond delay="0"/>
-                            </p:stCondLst>
-                            <p:childTnLst>
-                              <p:par>
-                                <p:cTn id="37" presetID="1" presetClass="entr" presetSubtype="0" fill="hold" grpId="0" nodeType="clickEffect">
-                                  <p:stCondLst>
-                                    <p:cond delay="0"/>
-                                  </p:stCondLst>
-                                  <p:childTnLst>
-                                    <p:set>
-                                      <p:cBhvr>
-                                        <p:cTn id="38" dur="1" fill="hold">
-                                          <p:stCondLst>
-                                            <p:cond delay="0"/>
-                                          </p:stCondLst>
-                                        </p:cTn>
-                                        <p:tgtEl>
-                                          <p:spTgt spid="3">
-                                            <p:txEl>
-                                              <p:pRg st="19" end="19"/>
-                                            </p:txEl>
-                                          </p:spTgt>
-                                        </p:tgtEl>
-                                        <p:attrNameLst>
-                                          <p:attrName>style.visibility</p:attrName>
-                                        </p:attrNameLst>
-                                      </p:cBhvr>
-                                      <p:to>
-                                        <p:strVal val="visible"/>
-                                      </p:to>
-                                    </p:set>
-                                  </p:childTnLst>
-                                </p:cTn>
-                              </p:par>
-                            </p:childTnLst>
-                          </p:cTn>
-                        </p:par>
-                      </p:childTnLst>
-                    </p:cTn>
-                  </p:par>
-                  <p:par>
-                    <p:cTn id="39" fill="hold">
-                      <p:stCondLst>
-                        <p:cond delay="indefinite"/>
-                      </p:stCondLst>
-                      <p:childTnLst>
-                        <p:par>
-                          <p:cTn id="40" fill="hold">
-                            <p:stCondLst>
-                              <p:cond delay="0"/>
-                            </p:stCondLst>
-                            <p:childTnLst>
-                              <p:par>
-                                <p:cTn id="41" presetID="1" presetClass="entr" presetSubtype="0" fill="hold" grpId="0" nodeType="clickEffect">
-                                  <p:stCondLst>
-                                    <p:cond delay="0"/>
-                                  </p:stCondLst>
-                                  <p:childTnLst>
-                                    <p:set>
-                                      <p:cBhvr>
-                                        <p:cTn id="42" dur="1" fill="hold">
-                                          <p:stCondLst>
-                                            <p:cond delay="0"/>
-                                          </p:stCondLst>
-                                        </p:cTn>
-                                        <p:tgtEl>
-                                          <p:spTgt spid="3">
-                                            <p:txEl>
-                                              <p:pRg st="20" end="20"/>
-                                            </p:txEl>
-                                          </p:spTgt>
-                                        </p:tgtEl>
-                                        <p:attrNameLst>
-                                          <p:attrName>style.visibility</p:attrName>
-                                        </p:attrNameLst>
-                                      </p:cBhvr>
-                                      <p:to>
-                                        <p:strVal val="visible"/>
-                                      </p:to>
-                                    </p:set>
-                                  </p:childTnLst>
-                                </p:cTn>
-                              </p:par>
-                            </p:childTnLst>
-                          </p:cTn>
-                        </p:par>
-                      </p:childTnLst>
-                    </p:cTn>
-                  </p:par>
-                  <p:par>
-                    <p:cTn id="43" fill="hold">
-                      <p:stCondLst>
-                        <p:cond delay="indefinite"/>
-                      </p:stCondLst>
-                      <p:childTnLst>
-                        <p:par>
-                          <p:cTn id="44" fill="hold">
-                            <p:stCondLst>
-                              <p:cond delay="0"/>
-                            </p:stCondLst>
-                            <p:childTnLst>
-                              <p:par>
-                                <p:cTn id="45" presetID="1" presetClass="entr" presetSubtype="0" fill="hold" grpId="0" nodeType="clickEffect">
-                                  <p:stCondLst>
-                                    <p:cond delay="0"/>
-                                  </p:stCondLst>
-                                  <p:childTnLst>
-                                    <p:set>
-                                      <p:cBhvr>
-                                        <p:cTn id="46" dur="1" fill="hold">
-                                          <p:stCondLst>
-                                            <p:cond delay="0"/>
-                                          </p:stCondLst>
-                                        </p:cTn>
-                                        <p:tgtEl>
-                                          <p:spTgt spid="3">
-                                            <p:txEl>
-                                              <p:pRg st="21" end="21"/>
-                                            </p:txEl>
-                                          </p:spTgt>
-                                        </p:tgtEl>
-                                        <p:attrNameLst>
-                                          <p:attrName>style.visibility</p:attrName>
-                                        </p:attrNameLst>
-                                      </p:cBhvr>
-                                      <p:to>
-                                        <p:strVal val="visible"/>
-                                      </p:to>
-                                    </p:set>
-                                  </p:childTnLst>
-                                </p:cTn>
-                              </p:par>
-                            </p:childTnLst>
-                          </p:cTn>
-                        </p:par>
-                      </p:childTnLst>
-                    </p:cTn>
-                  </p:par>
-                </p:childTnLst>
-              </p:cTn>
-              <p:prevCondLst>
-                <p:cond evt="onPrev" delay="0">
-                  <p:tgtEl>
-                    <p:sldTgt/>
-                  </p:tgtEl>
-                </p:cond>
-              </p:prevCondLst>
-              <p:nextCondLst>
-                <p:cond evt="onNext" delay="0">
-                  <p:tgtEl>
-                    <p:sldTgt/>
-                  </p:tgtEl>
-                </p:cond>
-              </p:nextCondLst>
-            </p:seq>
-          </p:childTnLst>
-        </p:cTn>
-      </p:par>
-    </p:tnLst>
-    <p:bldLst>
-      <p:bldP spid="3" grpId="0" uiExpand="1" build="p"/>
-    </p:bldLst>
-  </p:timing>
-</p:sld>
-</file>
-
-<file path=ppt/slides/slide11.xml><?xml version="1.0" encoding="utf-8"?>
 <p:sld xmlns:a="http://schemas.openxmlformats.org/drawingml/2006/main" xmlns:r="http://schemas.openxmlformats.org/officeDocument/2006/relationships" xmlns:p="http://schemas.openxmlformats.org/presentationml/2006/main">
   <p:cSld>
     <p:spTree>
@@ -6151,57 +5237,6 @@
       </p:grpSpPr>
       <p:sp>
         <p:nvSpPr>
-          <p:cNvPr id="3" name="Content Placeholder 2"/>
-          <p:cNvSpPr>
-            <a:spLocks noGrp="1"/>
-          </p:cNvSpPr>
-          <p:nvPr>
-            <p:ph idx="1"/>
-          </p:nvPr>
-        </p:nvSpPr>
-        <p:spPr/>
-        <p:txBody>
-          <a:bodyPr/>
-          <a:lstStyle/>
-          <a:p>
-            <a:pPr lvl="0" indent="0" marL="0">
-              <a:buNone/>
-            </a:pPr>
-            <a:r>
-              <a:rPr b="1"/>
-              <a:t>Draft Material:</a:t>
-            </a:r>
-            <a:r>
-              <a:rPr/>
-              <a:t> This content is under development and subject to change.</a:t>
-            </a:r>
-          </a:p>
-        </p:txBody>
-      </p:sp>
-    </p:spTree>
-  </p:cSld>
-</p:sld>
-</file>
-
-<file path=ppt/slides/slide3.xml><?xml version="1.0" encoding="utf-8"?>
-<p:sld xmlns:a="http://schemas.openxmlformats.org/drawingml/2006/main" xmlns:r="http://schemas.openxmlformats.org/officeDocument/2006/relationships" xmlns:p="http://schemas.openxmlformats.org/presentationml/2006/main">
-  <p:cSld>
-    <p:spTree>
-      <p:nvGrpSpPr>
-        <p:cNvPr id="1" name=""/>
-        <p:cNvGrpSpPr/>
-        <p:nvPr/>
-      </p:nvGrpSpPr>
-      <p:grpSpPr>
-        <a:xfrm>
-          <a:off x="0" y="0"/>
-          <a:ext cx="0" cy="0"/>
-          <a:chOff x="0" y="0"/>
-          <a:chExt cx="0" cy="0"/>
-        </a:xfrm>
-      </p:grpSpPr>
-      <p:sp>
-        <p:nvSpPr>
           <p:cNvPr id="2" name="Title 1"/>
           <p:cNvSpPr>
             <a:spLocks noGrp="1"/>
@@ -6788,7 +5823,7 @@
 </p:sld>
 </file>
 
-<file path=ppt/slides/slide4.xml><?xml version="1.0" encoding="utf-8"?>
+<file path=ppt/slides/slide3.xml><?xml version="1.0" encoding="utf-8"?>
 <p:sld xmlns:a="http://schemas.openxmlformats.org/drawingml/2006/main" xmlns:r="http://schemas.openxmlformats.org/officeDocument/2006/relationships" xmlns:p="http://schemas.openxmlformats.org/presentationml/2006/main">
   <p:cSld>
     <p:spTree>
@@ -7966,29 +7001,13 @@
                   <a:t>end</a:t>
                 </a:r>
               </a:p>
-              <a:p>
-                <a:pPr lvl="0" indent="0">
-                  <a:buNone/>
-                </a:pPr>
-                <a:r>
-                  <a:rPr>
-                    <a:latin typeface="Courier"/>
-                  </a:rPr>
-                  <a:t>Precompiling packages...
-   6365.2 ms  ✓ QuartoNotebookWorkerMakieExt (serial)
-  1 dependency successfully precompiled in 6 seconds
-Precompiling packages...
-   4772.1 ms  ✓ QuartoNotebookWorkerCairoMakieExt (serial)
-  1 dependency successfully precompiled in 5 seconds</a:t>
-                </a:r>
-              </a:p>
             </p:txBody>
           </p:sp>
         </mc:Choice>
       </mc:AlternateContent>
       <p:pic>
         <p:nvPicPr>
-          <p:cNvPr descr="index_files/figure-pptx/cell-2-output-2.png" id="0" name="Picture 1"/>
+          <p:cNvPr descr="index_files/figure-pptx/cell-2-output-1.png" id="0" name="Picture 1"/>
           <p:cNvPicPr>
             <a:picLocks noGrp="1" noChangeAspect="1"/>
           </p:cNvPicPr>
@@ -8805,7 +7824,7 @@
 </p:sld>
 </file>
 
-<file path=ppt/slides/slide5.xml><?xml version="1.0" encoding="utf-8"?>
+<file path=ppt/slides/slide4.xml><?xml version="1.0" encoding="utf-8"?>
 <p:sld xmlns:a="http://schemas.openxmlformats.org/drawingml/2006/main" xmlns:r="http://schemas.openxmlformats.org/officeDocument/2006/relationships" xmlns:p="http://schemas.openxmlformats.org/presentationml/2006/main">
   <p:cSld>
     <p:spTree>
@@ -10487,7 +9506,7 @@
 </p:sld>
 </file>
 
-<file path=ppt/slides/slide6.xml><?xml version="1.0" encoding="utf-8"?>
+<file path=ppt/slides/slide5.xml><?xml version="1.0" encoding="utf-8"?>
 <p:sld xmlns:a="http://schemas.openxmlformats.org/drawingml/2006/main" xmlns:r="http://schemas.openxmlformats.org/officeDocument/2006/relationships" xmlns:p="http://schemas.openxmlformats.org/presentationml/2006/main">
   <p:cSld>
     <p:spTree>
@@ -12447,13 +11466,13 @@
 </p:sld>
 </file>
 
-<file path=ppt/slides/slide7.xml><?xml version="1.0" encoding="UTF-8"?><p:sld xmlns:a="http://schemas.openxmlformats.org/drawingml/2006/main" xmlns:r="http://schemas.openxmlformats.org/officeDocument/2006/relationships" xmlns:p="http://schemas.openxmlformats.org/presentationml/2006/main"><p:cSld><p:spTree><p:nvGrpSpPr><p:cNvPr id="1" name="" /><p:cNvGrpSpPr /><p:nvPr /></p:nvGrpSpPr><p:grpSpPr><a:xfrm><a:off x="0" y="0" /><a:ext cx="0" cy="0" /><a:chOff x="0" y="0" /><a:chExt cx="0" cy="0" /></a:xfrm></p:grpSpPr><p:sp><p:nvSpPr><p:cNvPr id="2" name="Title 1" /><p:cNvSpPr><a:spLocks noGrp="1" /></p:cNvSpPr><p:nvPr><p:ph type="title" /></p:nvPr></p:nvSpPr><p:spPr><a:xfrm><a:off x="457201" y="204787" /><a:ext cx="3008313" cy="871538" /></a:xfrm></p:spPr><p:txBody><a:bodyPr /><a:lstStyle /><a:p><a:pPr lvl="0" indent="0" marL="0"><a:buNone /></a:pPr><a:r><a:rPr /><a:t>Worked Example: House Elevation</a:t></a:r></a:p></p:txBody></p:sp><mc:AlternateContent xmlns:mc="http://schemas.openxmlformats.org/markup-compatibility/2006"><mc:Choice xmlns:a14="http://schemas.microsoft.com/office/drawing/2010/main" Requires="a14"><p:sp><p:nvSpPr><p:cNvPr id="4" name="Text Placeholder 3" /><p:cNvSpPr><a:spLocks noGrp="1" /></p:cNvSpPr><p:nvPr><p:ph idx="2" sz="half" type="body" /></p:nvPr></p:nvSpPr><p:spPr /><p:txBody><a:bodyPr /><a:lstStyle /><a:p><a:pPr lvl="0" indent="0" marL="0"><a:spcBef><a:spcPts val="3000" /></a:spcBef><a:buNone /></a:pPr><a:r><a:rPr b="1" /><a:t>Setting Up the Problem</a:t></a:r></a:p><a:p><a:pPr lvl="0" indent="0" marL="0"><a:buNone /></a:pPr><a:r><a:rPr /><a:t>Return to our Meyerland homeowner. Two actions: </a:t></a:r><a:r><a:rPr b="1" /><a:t>do nothing</a:t></a:r><a:r><a:rPr /><a:t> (</a:t></a:r><a14:m><m:oMath xmlns:m="http://schemas.openxmlformats.org/officeDocument/2006/math"><m:sSub><m:e><m:r><m:t>a</m:t></m:r></m:e><m:sub><m:r><m:t>0</m:t></m:r></m:sub></m:sSub></m:oMath></a14:m><a:r><a:rPr /><a:t>) or </a:t></a:r><a:r><a:rPr b="1" /><a:t>elevate 5 ft</a:t></a:r><a:r><a:rPr /><a:t> (</a:t></a:r><a14:m><m:oMath xmlns:m="http://schemas.openxmlformats.org/officeDocument/2006/math"><m:sSub><m:e><m:r><m:t>a</m:t></m:r></m:e><m:sub><m:r><m:t>1</m:t></m:r></m:sub></m:sSub></m:oMath></a14:m><a:r><a:rPr /><a:t>).</a:t></a:r></a:p></p:txBody></p:sp></mc:Choice></mc:AlternateContent><p:graphicFrame><p:nvGraphicFramePr><p:cNvPr id="6" name="Content Placeholder 5" /><p:cNvGraphicFramePr><a:graphicFrameLocks noGrp="1" /></p:cNvGraphicFramePr><p:nvPr><p:ph idx="1" /></p:nvPr></p:nvGraphicFramePr><p:xfrm><a:off x="3568700" y="203200" /><a:ext cx="5105400" cy="4381500" /></p:xfrm><a:graphic><a:graphicData uri="http://schemas.openxmlformats.org/drawingml/2006/table"><a:tbl><a:tblPr firstRow="1" bandRow="1"><a:tableStyleId>{5C22544A-7EE6-4342-B048-85BDC9FD1C3A}</a:tableStyleId></a:tblPr><a:tblGrid><a:gridCol w="1701800" /><a:gridCol w="1701800" /><a:gridCol w="1701800" /></a:tblGrid><a:tr h="0"><a:tc><a:txBody><a:bodyPr /><a:lstStyle /><a:p><a:endParaRPr /></a:p></a:txBody><a:tcPr /></a:tc><a:tc><a:txBody><a:bodyPr /><a:lstStyle /><a:p><a:pPr lvl="0" indent="0" marL="0" algn="ctr"><a:buNone /></a:pPr><a:r><a:rPr /><a:t>Do Nothing (</a:t></a:r><a14:m><m:oMath xmlns:m="http://schemas.openxmlformats.org/officeDocument/2006/math"><m:sSub><m:e><m:r><m:t>a</m:t></m:r></m:e><m:sub><m:r><m:t>0</m:t></m:r></m:sub></m:sSub></m:oMath></a14:m><a:r><a:rPr /><a:t>)</a:t></a:r></a:p></a:txBody><a:tcPr /></a:tc><a:tc><a:txBody><a:bodyPr /><a:lstStyle /><a:p><a:pPr lvl="0" indent="0" marL="0" algn="ctr"><a:buNone /></a:pPr><a:r><a:rPr /><a:t>Elevate 5 ft (</a:t></a:r><a14:m><m:oMath xmlns:m="http://schemas.openxmlformats.org/officeDocument/2006/math"><m:sSub><m:e><m:r><m:t>a</m:t></m:r></m:e><m:sub><m:r><m:t>1</m:t></m:r></m:sub></m:sSub></m:oMath></a14:m><a:r><a:rPr /><a:t>)</a:t></a:r></a:p></a:txBody><a:tcPr /></a:tc></a:tr><a:tr h="0"><a:tc><a:txBody><a:bodyPr /><a:lstStyle /><a:p><a:pPr lvl="0" indent="0" marL="0" algn="l"><a:buNone /></a:pPr><a:r><a:rPr /><a:t>Up-front cost</a:t></a:r></a:p></a:txBody></a:tc><a:tc><a:txBody><a:bodyPr /><a:lstStyle /><a:p><a:pPr lvl="0" indent="0" marL="0" algn="ctr"><a:buNone /></a:pPr><a:r><a:rPr /><a:t>$0</a:t></a:r></a:p></a:txBody></a:tc><a:tc><a:txBody><a:bodyPr /><a:lstStyle /><a:p><a:pPr lvl="0" indent="0" marL="0" algn="ctr"><a:buNone /></a:pPr><a:r><a:rPr /><a:t>$80,000</a:t></a:r></a:p></a:txBody></a:tc></a:tr><a:tr h="0"><a:tc><a:txBody><a:bodyPr /><a:lstStyle /><a:p><a:pPr lvl="0" indent="0" marL="0" algn="l"><a:buNone /></a:pPr><a:r><a:rPr /><a:t>Annual flood probability</a:t></a:r></a:p></a:txBody></a:tc><a:tc><a:txBody><a:bodyPr /><a:lstStyle /><a:p><a:pPr lvl="0" indent="0" marL="0" algn="ctr"><a:buNone /></a:pPr><a:r><a:rPr /><a:t>5%</a:t></a:r></a:p></a:txBody></a:tc><a:tc><a:txBody><a:bodyPr /><a:lstStyle /><a:p><a:pPr lvl="0" indent="0" marL="0" algn="ctr"><a:buNone /></a:pPr><a:r><a:rPr /><a:t>0.5%</a:t></a:r></a:p></a:txBody></a:tc></a:tr><a:tr h="0"><a:tc><a:txBody><a:bodyPr /><a:lstStyle /><a:p><a:pPr lvl="0" indent="0" marL="0" algn="l"><a:buNone /></a:pPr><a:r><a:rPr /><a:t>Expected damage per flood</a:t></a:r></a:p></a:txBody></a:tc><a:tc><a:txBody><a:bodyPr /><a:lstStyle /><a:p><a:pPr lvl="0" indent="0" marL="0" algn="ctr"><a:buNone /></a:pPr><a:r><a:rPr /><a:t>$50,000</a:t></a:r></a:p></a:txBody></a:tc><a:tc><a:txBody><a:bodyPr /><a:lstStyle /><a:p><a:pPr lvl="0" indent="0" marL="0" algn="ctr"><a:buNone /></a:pPr><a:r><a:rPr /><a:t>$5,000</a:t></a:r></a:p></a:txBody></a:tc></a:tr><a:tr h="0"><a:tc><a:txBody><a:bodyPr /><a:lstStyle /><a:p><a:pPr lvl="0" indent="0" marL="0" algn="l"><a:buNone /></a:pPr><a:r><a:rPr b="1" /><a:t>Expected annual damage</a:t></a:r></a:p></a:txBody></a:tc><a:tc><a:txBody><a:bodyPr /><a:lstStyle /><a:p><a:pPr lvl="0" indent="0" marL="0" algn="ctr"><a:buNone /></a:pPr><a:r><a:rPr b="1" /><a:t>$2,500</a:t></a:r></a:p></a:txBody></a:tc><a:tc><a:txBody><a:bodyPr /><a:lstStyle /><a:p><a:pPr lvl="0" indent="0" marL="0" algn="ctr"><a:buNone /></a:pPr><a:r><a:rPr b="1" /><a:t>$25</a:t></a:r></a:p></a:txBody></a:tc></a:tr></a:tbl></a:graphicData></a:graphic></p:graphicFrame></p:spTree></p:cSld></p:sld>
+<file path=ppt/slides/slide6.xml><?xml version="1.0" encoding="UTF-8"?><p:sld xmlns:a="http://schemas.openxmlformats.org/drawingml/2006/main" xmlns:r="http://schemas.openxmlformats.org/officeDocument/2006/relationships" xmlns:p="http://schemas.openxmlformats.org/presentationml/2006/main"><p:cSld><p:spTree><p:nvGrpSpPr><p:cNvPr id="1" name="" /><p:cNvGrpSpPr /><p:nvPr /></p:nvGrpSpPr><p:grpSpPr><a:xfrm><a:off x="0" y="0" /><a:ext cx="0" cy="0" /><a:chOff x="0" y="0" /><a:chExt cx="0" cy="0" /></a:xfrm></p:grpSpPr><p:sp><p:nvSpPr><p:cNvPr id="2" name="Title 1" /><p:cNvSpPr><a:spLocks noGrp="1" /></p:cNvSpPr><p:nvPr><p:ph type="title" /></p:nvPr></p:nvSpPr><p:spPr><a:xfrm><a:off x="457201" y="204787" /><a:ext cx="3008313" cy="871538" /></a:xfrm></p:spPr><p:txBody><a:bodyPr /><a:lstStyle /><a:p><a:pPr lvl="0" indent="0" marL="0"><a:buNone /></a:pPr><a:r><a:rPr /><a:t>Worked Example: House Elevation</a:t></a:r></a:p></p:txBody></p:sp><mc:AlternateContent xmlns:mc="http://schemas.openxmlformats.org/markup-compatibility/2006"><mc:Choice xmlns:a14="http://schemas.microsoft.com/office/drawing/2010/main" Requires="a14"><p:sp><p:nvSpPr><p:cNvPr id="4" name="Text Placeholder 3" /><p:cNvSpPr><a:spLocks noGrp="1" /></p:cNvSpPr><p:nvPr><p:ph idx="2" sz="half" type="body" /></p:nvPr></p:nvSpPr><p:spPr /><p:txBody><a:bodyPr /><a:lstStyle /><a:p><a:pPr lvl="0" indent="0" marL="0"><a:spcBef><a:spcPts val="3000" /></a:spcBef><a:buNone /></a:pPr><a:r><a:rPr b="1" /><a:t>Setting Up the Problem</a:t></a:r></a:p><a:p><a:pPr lvl="0" indent="0" marL="0"><a:buNone /></a:pPr><a:r><a:rPr /><a:t>Return to our Meyerland homeowner. Two actions: </a:t></a:r><a:r><a:rPr b="1" /><a:t>do nothing</a:t></a:r><a:r><a:rPr /><a:t> (</a:t></a:r><a14:m><m:oMath xmlns:m="http://schemas.openxmlformats.org/officeDocument/2006/math"><m:sSub><m:e><m:r><m:t>a</m:t></m:r></m:e><m:sub><m:r><m:t>0</m:t></m:r></m:sub></m:sSub></m:oMath></a14:m><a:r><a:rPr /><a:t>) or </a:t></a:r><a:r><a:rPr b="1" /><a:t>elevate 5 ft</a:t></a:r><a:r><a:rPr /><a:t> (</a:t></a:r><a14:m><m:oMath xmlns:m="http://schemas.openxmlformats.org/officeDocument/2006/math"><m:sSub><m:e><m:r><m:t>a</m:t></m:r></m:e><m:sub><m:r><m:t>1</m:t></m:r></m:sub></m:sSub></m:oMath></a14:m><a:r><a:rPr /><a:t>).</a:t></a:r></a:p></p:txBody></p:sp></mc:Choice></mc:AlternateContent><p:graphicFrame><p:nvGraphicFramePr><p:cNvPr id="6" name="Content Placeholder 5" /><p:cNvGraphicFramePr><a:graphicFrameLocks noGrp="1" /></p:cNvGraphicFramePr><p:nvPr><p:ph idx="1" /></p:nvPr></p:nvGraphicFramePr><p:xfrm><a:off x="3568700" y="203200" /><a:ext cx="5105400" cy="4381500" /></p:xfrm><a:graphic><a:graphicData uri="http://schemas.openxmlformats.org/drawingml/2006/table"><a:tbl><a:tblPr firstRow="1" bandRow="1"><a:tableStyleId>{5C22544A-7EE6-4342-B048-85BDC9FD1C3A}</a:tableStyleId></a:tblPr><a:tblGrid><a:gridCol w="1701800" /><a:gridCol w="1701800" /><a:gridCol w="1701800" /></a:tblGrid><a:tr h="0"><a:tc><a:txBody><a:bodyPr /><a:lstStyle /><a:p><a:endParaRPr /></a:p></a:txBody><a:tcPr /></a:tc><a:tc><a:txBody><a:bodyPr /><a:lstStyle /><a:p><a:pPr lvl="0" indent="0" marL="0" algn="ctr"><a:buNone /></a:pPr><a:r><a:rPr /><a:t>Do Nothing (</a:t></a:r><a14:m><m:oMath xmlns:m="http://schemas.openxmlformats.org/officeDocument/2006/math"><m:sSub><m:e><m:r><m:t>a</m:t></m:r></m:e><m:sub><m:r><m:t>0</m:t></m:r></m:sub></m:sSub></m:oMath></a14:m><a:r><a:rPr /><a:t>)</a:t></a:r></a:p></a:txBody><a:tcPr /></a:tc><a:tc><a:txBody><a:bodyPr /><a:lstStyle /><a:p><a:pPr lvl="0" indent="0" marL="0" algn="ctr"><a:buNone /></a:pPr><a:r><a:rPr /><a:t>Elevate 5 ft (</a:t></a:r><a14:m><m:oMath xmlns:m="http://schemas.openxmlformats.org/officeDocument/2006/math"><m:sSub><m:e><m:r><m:t>a</m:t></m:r></m:e><m:sub><m:r><m:t>1</m:t></m:r></m:sub></m:sSub></m:oMath></a14:m><a:r><a:rPr /><a:t>)</a:t></a:r></a:p></a:txBody><a:tcPr /></a:tc></a:tr><a:tr h="0"><a:tc><a:txBody><a:bodyPr /><a:lstStyle /><a:p><a:pPr lvl="0" indent="0" marL="0" algn="l"><a:buNone /></a:pPr><a:r><a:rPr /><a:t>Up-front cost</a:t></a:r></a:p></a:txBody></a:tc><a:tc><a:txBody><a:bodyPr /><a:lstStyle /><a:p><a:pPr lvl="0" indent="0" marL="0" algn="ctr"><a:buNone /></a:pPr><a:r><a:rPr /><a:t>$0</a:t></a:r></a:p></a:txBody></a:tc><a:tc><a:txBody><a:bodyPr /><a:lstStyle /><a:p><a:pPr lvl="0" indent="0" marL="0" algn="ctr"><a:buNone /></a:pPr><a:r><a:rPr /><a:t>$80,000</a:t></a:r></a:p></a:txBody></a:tc></a:tr><a:tr h="0"><a:tc><a:txBody><a:bodyPr /><a:lstStyle /><a:p><a:pPr lvl="0" indent="0" marL="0" algn="l"><a:buNone /></a:pPr><a:r><a:rPr /><a:t>Annual flood probability</a:t></a:r></a:p></a:txBody></a:tc><a:tc><a:txBody><a:bodyPr /><a:lstStyle /><a:p><a:pPr lvl="0" indent="0" marL="0" algn="ctr"><a:buNone /></a:pPr><a:r><a:rPr /><a:t>5%</a:t></a:r></a:p></a:txBody></a:tc><a:tc><a:txBody><a:bodyPr /><a:lstStyle /><a:p><a:pPr lvl="0" indent="0" marL="0" algn="ctr"><a:buNone /></a:pPr><a:r><a:rPr /><a:t>0.5%</a:t></a:r></a:p></a:txBody></a:tc></a:tr><a:tr h="0"><a:tc><a:txBody><a:bodyPr /><a:lstStyle /><a:p><a:pPr lvl="0" indent="0" marL="0" algn="l"><a:buNone /></a:pPr><a:r><a:rPr /><a:t>Expected damage per flood</a:t></a:r></a:p></a:txBody></a:tc><a:tc><a:txBody><a:bodyPr /><a:lstStyle /><a:p><a:pPr lvl="0" indent="0" marL="0" algn="ctr"><a:buNone /></a:pPr><a:r><a:rPr /><a:t>$50,000</a:t></a:r></a:p></a:txBody></a:tc><a:tc><a:txBody><a:bodyPr /><a:lstStyle /><a:p><a:pPr lvl="0" indent="0" marL="0" algn="ctr"><a:buNone /></a:pPr><a:r><a:rPr /><a:t>$5,000</a:t></a:r></a:p></a:txBody></a:tc></a:tr><a:tr h="0"><a:tc><a:txBody><a:bodyPr /><a:lstStyle /><a:p><a:pPr lvl="0" indent="0" marL="0" algn="l"><a:buNone /></a:pPr><a:r><a:rPr b="1" /><a:t>Expected annual damage</a:t></a:r></a:p></a:txBody></a:tc><a:tc><a:txBody><a:bodyPr /><a:lstStyle /><a:p><a:pPr lvl="0" indent="0" marL="0" algn="ctr"><a:buNone /></a:pPr><a:r><a:rPr b="1" /><a:t>$2,500</a:t></a:r></a:p></a:txBody></a:tc><a:tc><a:txBody><a:bodyPr /><a:lstStyle /><a:p><a:pPr lvl="0" indent="0" marL="0" algn="ctr"><a:buNone /></a:pPr><a:r><a:rPr b="1" /><a:t>$25</a:t></a:r></a:p></a:txBody></a:tc></a:tr></a:tbl></a:graphicData></a:graphic></p:graphicFrame></p:spTree></p:cSld></p:sld>
 </file>
 
-<file path=ppt/slides/slide8.xml><?xml version="1.0" encoding="UTF-8"?><p:sld xmlns:a="http://schemas.openxmlformats.org/drawingml/2006/main" xmlns:r="http://schemas.openxmlformats.org/officeDocument/2006/relationships" xmlns:p="http://schemas.openxmlformats.org/presentationml/2006/main"><p:cSld><p:spTree><p:nvGrpSpPr><p:cNvPr id="1" name="" /><p:cNvGrpSpPr /><p:nvPr /></p:nvGrpSpPr><p:grpSpPr><a:xfrm><a:off x="0" y="0" /><a:ext cx="0" cy="0" /><a:chOff x="0" y="0" /><a:chExt cx="0" cy="0" /></a:xfrm></p:grpSpPr><mc:AlternateContent xmlns:mc="http://schemas.openxmlformats.org/markup-compatibility/2006"><mc:Choice xmlns:a14="http://schemas.microsoft.com/office/drawing/2010/main" Requires="a14"><p:sp><p:nvSpPr><p:cNvPr id="4" name="Text Placeholder 3" /><p:cNvSpPr><a:spLocks noGrp="1" /></p:cNvSpPr><p:nvPr><p:ph idx="2" sz="half" type="body" /></p:nvPr></p:nvSpPr><p:spPr /><p:txBody><a:bodyPr /><a:lstStyle /><a:p><a:pPr lvl="0" indent="0" marL="0"><a:spcBef><a:spcPts val="3000" /></a:spcBef><a:buNone /></a:pPr><a:r><a:rPr b="1" /><a:t>Computing NPV</a:t></a:r></a:p><a:p><a:pPr lvl="0" indent="0" marL="0"><a:buNone /></a:pPr><a:r><a:rPr /><a:t>Annual benefit of elevation: </a:t></a:r><a14:m><m:oMath xmlns:m="http://schemas.openxmlformats.org/officeDocument/2006/math"><m:r><m:rPr><m:sty m:val="p" /></m:rPr><m:t>$</m:t></m:r><m:r><m:t>2</m:t></m:r><m:r><m:rPr><m:sty m:val="p" /></m:rPr><m:t>,</m:t></m:r><m:r><m:t>500</m:t></m:r><m:r><m:rPr><m:sty m:val="p" /></m:rPr><m:t>−</m:t></m:r><m:r><m:rPr><m:sty m:val="p" /></m:rPr><m:t>$</m:t></m:r><m:r><m:t>25</m:t></m:r><m:r><m:rPr><m:sty m:val="p" /></m:rPr><m:t>=</m:t></m:r><m:r><m:rPr><m:sty m:val="p" /></m:rPr><m:t>$</m:t></m:r><m:r><m:t>2</m:t></m:r><m:r><m:rPr><m:sty m:val="p" /></m:rPr><m:t>,</m:t></m:r><m:r><m:t>475</m:t></m:r></m:oMath></a14:m><a:r><a:rPr /><a:t> per year in avoided damages.</a:t></a:r></a:p><a:p><a:pPr lvl="0" indent="0" marL="0"><a:buNone /></a:pPr><a:r><a:rPr /><a:t>Over </a:t></a:r><a14:m><m:oMath xmlns:m="http://schemas.openxmlformats.org/officeDocument/2006/math"><m:r><m:t>T</m:t></m:r><m:r><m:rPr><m:sty m:val="p" /></m:rPr><m:t>=</m:t></m:r><m:r><m:t>30</m:t></m:r></m:oMath></a14:m><a:r><a:rPr /><a:t> years at discount rate </a:t></a:r><a14:m><m:oMath xmlns:m="http://schemas.openxmlformats.org/officeDocument/2006/math"><m:r><m:t>r</m:t></m:r></m:oMath></a14:m><a:r><a:rPr /><a:t>:</a:t></a:r></a:p><a:p><a:pPr lvl="0" indent="0" marL="0"><a:buNone /></a:pPr><a14:m><m:oMathPara xmlns:m="http://schemas.openxmlformats.org/officeDocument/2006/math"><m:oMathParaPr><m:jc m:val="center" /></m:oMathParaPr><m:oMath><m:r><m:t>N</m:t></m:r><m:r><m:t>P</m:t></m:r><m:r><m:t>V</m:t></m:r><m:r><m:rPr><m:sty m:val="p" /></m:rPr><m:t>=</m:t></m:r><m:r><m:rPr><m:sty m:val="p" /></m:rPr><m:t>−</m:t></m:r><m:r><m:rPr><m:sty m:val="p" /></m:rPr><m:t>$</m:t></m:r><m:r><m:t>80</m:t></m:r><m:r><m:rPr><m:sty m:val="p" /></m:rPr><m:t>,</m:t></m:r><m:r><m:t>000</m:t></m:r><m:r><m:rPr><m:sty m:val="p" /></m:rPr><m:t>+</m:t></m:r><m:nary><m:naryPr><m:chr m:val="∑" /><m:limLoc m:val="undOvr" /><m:subHide m:val="off" /><m:supHide m:val="off" /></m:naryPr><m:sub><m:r><m:t>t</m:t></m:r><m:r><m:rPr><m:sty m:val="p" /></m:rPr><m:t>=</m:t></m:r><m:r><m:t>1</m:t></m:r></m:sub><m:sup><m:r><m:t>30</m:t></m:r></m:sup><m:e><m:f><m:fPr><m:type m:val="bar" /></m:fPr><m:num><m:r><m:rPr><m:sty m:val="p" /></m:rPr><m:t>$</m:t></m:r><m:r><m:t>2</m:t></m:r><m:r><m:rPr><m:sty m:val="p" /></m:rPr><m:t>,</m:t></m:r><m:r><m:t>475</m:t></m:r></m:num><m:den><m:sSup><m:e><m:d><m:dPr><m:begChr m:val="(" /><m:sepChr m:val="" /><m:endChr m:val=")" /><m:grow /></m:dPr><m:e><m:r><m:t>1</m:t></m:r><m:r><m:rPr><m:sty m:val="p" /></m:rPr><m:t>+</m:t></m:r><m:r><m:t>r</m:t></m:r></m:e></m:d></m:e><m:sup><m:r><m:t>t</m:t></m:r></m:sup></m:sSup></m:den></m:f></m:e></m:nary></m:oMath></m:oMathPara></a14:m></a:p><a:p><a:pPr lvl="0" indent="0" marL="0"><a:buNone /></a:pPr><a:r><a:rPr /><a:t>At these numbers, elevation doesn’t pass BCA at </a:t></a:r><a:r><a:rPr i="1" /><a:t>any</a:t></a:r><a:r><a:rPr /><a:t> discount rate. What would need to change?</a:t></a:r></a:p><a:p><a:pPr lvl="0" indent="0" marL="0"><a:spcBef><a:spcPts val="3000" /></a:spcBef><a:buNone /></a:pPr><a:r><a:rPr b="1" /><a:t>Sensitivity: What If Flood Risk Is Higher?</a:t></a:r></a:p><a:p><a:pPr lvl="0" indent="0" marL="0"><a:buNone /></a:pPr><a:r><a:rPr /><a:t>Suppose climate change increases annual flood probability to </a:t></a:r><a:r><a:rPr b="1" /><a:t>10%</a:t></a:r><a:r><a:rPr /><a:t> (EAD: $5,000/yr, benefit: $4,975/yr):</a:t></a:r></a:p></p:txBody></p:sp></mc:Choice></mc:AlternateContent><p:graphicFrame><p:nvGraphicFramePr><p:cNvPr id="6" name="Content Placeholder 5" /><p:cNvGraphicFramePr><a:graphicFrameLocks noGrp="1" /></p:cNvGraphicFramePr><p:nvPr><p:ph idx="1" /></p:nvPr></p:nvGraphicFramePr><p:xfrm><a:off x="3568700" y="203200" /><a:ext cx="5105400" cy="4381500" /></p:xfrm><a:graphic><a:graphicData uri="http://schemas.openxmlformats.org/drawingml/2006/table"><a:tbl><a:tblPr firstRow="1" bandRow="1"><a:tableStyleId>{5C22544A-7EE6-4342-B048-85BDC9FD1C3A}</a:tableStyleId></a:tblPr><a:tblGrid><a:gridCol w="1270000" /><a:gridCol w="1270000" /><a:gridCol w="1270000" /><a:gridCol w="1270000" /></a:tblGrid><a:tr h="0"><a:tc><a:txBody><a:bodyPr /><a:lstStyle /><a:p><a:pPr lvl="0" indent="0" marL="0" algn="ctr"><a:buNone /></a:pPr><a:r><a:rPr /><a:t>Discount rate </a:t></a:r><a14:m><m:oMath xmlns:m="http://schemas.openxmlformats.org/officeDocument/2006/math"><m:r><m:t>r</m:t></m:r></m:oMath></a14:m></a:p></a:txBody><a:tcPr /></a:tc><a:tc><a:txBody><a:bodyPr /><a:lstStyle /><a:p><a:pPr lvl="0" indent="0" marL="0" algn="ctr"><a:buNone /></a:pPr><a:r><a:rPr /><a:t>PV of benefits</a:t></a:r></a:p></a:txBody><a:tcPr /></a:tc><a:tc><a:txBody><a:bodyPr /><a:lstStyle /><a:p><a:pPr lvl="0" indent="0" marL="0" algn="ctr"><a:buNone /></a:pPr><a:r><a:rPr /><a:t>NPV</a:t></a:r></a:p></a:txBody><a:tcPr /></a:tc><a:tc><a:txBody><a:bodyPr /><a:lstStyle /><a:p><a:pPr lvl="0" indent="0" marL="0" algn="ctr"><a:buNone /></a:pPr><a:r><a:rPr /><a:t>Pass?</a:t></a:r></a:p></a:txBody><a:tcPr /></a:tc></a:tr><a:tr h="0"><a:tc><a:txBody><a:bodyPr /><a:lstStyle /><a:p><a:pPr lvl="0" indent="0" marL="0" algn="ctr"><a:buNone /></a:pPr><a:r><a:rPr /><a:t>2%</a:t></a:r></a:p></a:txBody></a:tc><a:tc><a:txBody><a:bodyPr /><a:lstStyle /><a:p><a:pPr lvl="0" indent="0" marL="0" algn="ctr"><a:buNone /></a:pPr><a:r><a:rPr /><a:t>$111,500</a:t></a:r></a:p></a:txBody></a:tc><a:tc><a:txBody><a:bodyPr /><a:lstStyle /><a:p><a:pPr lvl="0" indent="0" marL="0" algn="ctr"><a:buNone /></a:pPr><a:r><a:rPr b="1" /><a:t>+$31,500</a:t></a:r></a:p></a:txBody></a:tc><a:tc><a:txBody><a:bodyPr /><a:lstStyle /><a:p><a:pPr lvl="0" indent="0" marL="0" algn="ctr"><a:buNone /></a:pPr><a:r><a:rPr /><a:t>Yes</a:t></a:r></a:p></a:txBody></a:tc></a:tr><a:tr h="0"><a:tc><a:txBody><a:bodyPr /><a:lstStyle /><a:p><a:pPr lvl="0" indent="0" marL="0" algn="ctr"><a:buNone /></a:pPr><a:r><a:rPr /><a:t>5%</a:t></a:r></a:p></a:txBody></a:tc><a:tc><a:txBody><a:bodyPr /><a:lstStyle /><a:p><a:pPr lvl="0" indent="0" marL="0" algn="ctr"><a:buNone /></a:pPr><a:r><a:rPr /><a:t>$76,500</a:t></a:r></a:p></a:txBody></a:tc><a:tc><a:txBody><a:bodyPr /><a:lstStyle /><a:p><a:pPr lvl="0" indent="0" marL="0" algn="ctr"><a:buNone /></a:pPr><a:r><a:rPr b="1" /><a:t>-$3,500</a:t></a:r></a:p></a:txBody></a:tc><a:tc><a:txBody><a:bodyPr /><a:lstStyle /><a:p><a:pPr lvl="0" indent="0" marL="0" algn="ctr"><a:buNone /></a:pPr><a:r><a:rPr /><a:t>Barely no</a:t></a:r></a:p></a:txBody></a:tc></a:tr><a:tr h="0"><a:tc><a:txBody><a:bodyPr /><a:lstStyle /><a:p><a:pPr lvl="0" indent="0" marL="0" algn="ctr"><a:buNone /></a:pPr><a:r><a:rPr /><a:t>7%</a:t></a:r></a:p></a:txBody></a:tc><a:tc><a:txBody><a:bodyPr /><a:lstStyle /><a:p><a:pPr lvl="0" indent="0" marL="0" algn="ctr"><a:buNone /></a:pPr><a:r><a:rPr /><a:t>$61,700</a:t></a:r></a:p></a:txBody></a:tc><a:tc><a:txBody><a:bodyPr /><a:lstStyle /><a:p><a:pPr lvl="0" indent="0" marL="0" algn="ctr"><a:buNone /></a:pPr><a:r><a:rPr b="1" /><a:t>-$18,300</a:t></a:r></a:p></a:txBody></a:tc><a:tc><a:txBody><a:bodyPr /><a:lstStyle /><a:p><a:pPr lvl="0" indent="0" marL="0" algn="ctr"><a:buNone /></a:pPr><a:r><a:rPr /><a:t>No</a:t></a:r></a:p></a:txBody></a:tc></a:tr></a:tbl></a:graphicData></a:graphic></p:graphicFrame></p:spTree></p:cSld></p:sld>
+<file path=ppt/slides/slide7.xml><?xml version="1.0" encoding="UTF-8"?><p:sld xmlns:a="http://schemas.openxmlformats.org/drawingml/2006/main" xmlns:r="http://schemas.openxmlformats.org/officeDocument/2006/relationships" xmlns:p="http://schemas.openxmlformats.org/presentationml/2006/main"><p:cSld><p:spTree><p:nvGrpSpPr><p:cNvPr id="1" name="" /><p:cNvGrpSpPr /><p:nvPr /></p:nvGrpSpPr><p:grpSpPr><a:xfrm><a:off x="0" y="0" /><a:ext cx="0" cy="0" /><a:chOff x="0" y="0" /><a:chExt cx="0" cy="0" /></a:xfrm></p:grpSpPr><mc:AlternateContent xmlns:mc="http://schemas.openxmlformats.org/markup-compatibility/2006"><mc:Choice xmlns:a14="http://schemas.microsoft.com/office/drawing/2010/main" Requires="a14"><p:sp><p:nvSpPr><p:cNvPr id="4" name="Text Placeholder 3" /><p:cNvSpPr><a:spLocks noGrp="1" /></p:cNvSpPr><p:nvPr><p:ph idx="2" sz="half" type="body" /></p:nvPr></p:nvSpPr><p:spPr /><p:txBody><a:bodyPr /><a:lstStyle /><a:p><a:pPr lvl="0" indent="0" marL="0"><a:spcBef><a:spcPts val="3000" /></a:spcBef><a:buNone /></a:pPr><a:r><a:rPr b="1" /><a:t>Computing NPV</a:t></a:r></a:p><a:p><a:pPr lvl="0" indent="0" marL="0"><a:buNone /></a:pPr><a:r><a:rPr /><a:t>Annual benefit of elevation: </a:t></a:r><a14:m><m:oMath xmlns:m="http://schemas.openxmlformats.org/officeDocument/2006/math"><m:r><m:rPr><m:sty m:val="p" /></m:rPr><m:t>$</m:t></m:r><m:r><m:t>2</m:t></m:r><m:r><m:rPr><m:sty m:val="p" /></m:rPr><m:t>,</m:t></m:r><m:r><m:t>500</m:t></m:r><m:r><m:rPr><m:sty m:val="p" /></m:rPr><m:t>−</m:t></m:r><m:r><m:rPr><m:sty m:val="p" /></m:rPr><m:t>$</m:t></m:r><m:r><m:t>25</m:t></m:r><m:r><m:rPr><m:sty m:val="p" /></m:rPr><m:t>=</m:t></m:r><m:r><m:rPr><m:sty m:val="p" /></m:rPr><m:t>$</m:t></m:r><m:r><m:t>2</m:t></m:r><m:r><m:rPr><m:sty m:val="p" /></m:rPr><m:t>,</m:t></m:r><m:r><m:t>475</m:t></m:r></m:oMath></a14:m><a:r><a:rPr /><a:t> per year in avoided damages.</a:t></a:r></a:p><a:p><a:pPr lvl="0" indent="0" marL="0"><a:buNone /></a:pPr><a:r><a:rPr /><a:t>Over </a:t></a:r><a14:m><m:oMath xmlns:m="http://schemas.openxmlformats.org/officeDocument/2006/math"><m:r><m:t>T</m:t></m:r><m:r><m:rPr><m:sty m:val="p" /></m:rPr><m:t>=</m:t></m:r><m:r><m:t>30</m:t></m:r></m:oMath></a14:m><a:r><a:rPr /><a:t> years at discount rate </a:t></a:r><a14:m><m:oMath xmlns:m="http://schemas.openxmlformats.org/officeDocument/2006/math"><m:r><m:t>r</m:t></m:r></m:oMath></a14:m><a:r><a:rPr /><a:t>:</a:t></a:r></a:p><a:p><a:pPr lvl="0" indent="0" marL="0"><a:buNone /></a:pPr><a14:m><m:oMathPara xmlns:m="http://schemas.openxmlformats.org/officeDocument/2006/math"><m:oMathParaPr><m:jc m:val="center" /></m:oMathParaPr><m:oMath><m:r><m:t>N</m:t></m:r><m:r><m:t>P</m:t></m:r><m:r><m:t>V</m:t></m:r><m:r><m:rPr><m:sty m:val="p" /></m:rPr><m:t>=</m:t></m:r><m:r><m:rPr><m:sty m:val="p" /></m:rPr><m:t>−</m:t></m:r><m:r><m:rPr><m:sty m:val="p" /></m:rPr><m:t>$</m:t></m:r><m:r><m:t>80</m:t></m:r><m:r><m:rPr><m:sty m:val="p" /></m:rPr><m:t>,</m:t></m:r><m:r><m:t>000</m:t></m:r><m:r><m:rPr><m:sty m:val="p" /></m:rPr><m:t>+</m:t></m:r><m:nary><m:naryPr><m:chr m:val="∑" /><m:limLoc m:val="undOvr" /><m:subHide m:val="off" /><m:supHide m:val="off" /></m:naryPr><m:sub><m:r><m:t>t</m:t></m:r><m:r><m:rPr><m:sty m:val="p" /></m:rPr><m:t>=</m:t></m:r><m:r><m:t>1</m:t></m:r></m:sub><m:sup><m:r><m:t>30</m:t></m:r></m:sup><m:e><m:f><m:fPr><m:type m:val="bar" /></m:fPr><m:num><m:r><m:rPr><m:sty m:val="p" /></m:rPr><m:t>$</m:t></m:r><m:r><m:t>2</m:t></m:r><m:r><m:rPr><m:sty m:val="p" /></m:rPr><m:t>,</m:t></m:r><m:r><m:t>475</m:t></m:r></m:num><m:den><m:sSup><m:e><m:d><m:dPr><m:begChr m:val="(" /><m:sepChr m:val="" /><m:endChr m:val=")" /><m:grow /></m:dPr><m:e><m:r><m:t>1</m:t></m:r><m:r><m:rPr><m:sty m:val="p" /></m:rPr><m:t>+</m:t></m:r><m:r><m:t>r</m:t></m:r></m:e></m:d></m:e><m:sup><m:r><m:t>t</m:t></m:r></m:sup></m:sSup></m:den></m:f></m:e></m:nary></m:oMath></m:oMathPara></a14:m></a:p><a:p><a:pPr lvl="0" indent="0" marL="0"><a:buNone /></a:pPr><a:r><a:rPr /><a:t>At these numbers, elevation doesn’t pass BCA at </a:t></a:r><a:r><a:rPr i="1" /><a:t>any</a:t></a:r><a:r><a:rPr /><a:t> discount rate. What would need to change?</a:t></a:r></a:p><a:p><a:pPr lvl="0" indent="0" marL="0"><a:spcBef><a:spcPts val="3000" /></a:spcBef><a:buNone /></a:pPr><a:r><a:rPr b="1" /><a:t>Sensitivity: What If Flood Risk Is Higher?</a:t></a:r></a:p><a:p><a:pPr lvl="0" indent="0" marL="0"><a:buNone /></a:pPr><a:r><a:rPr /><a:t>Suppose climate change increases annual flood probability to </a:t></a:r><a:r><a:rPr b="1" /><a:t>10%</a:t></a:r><a:r><a:rPr /><a:t> (EAD: $5,000/yr, benefit: $4,975/yr):</a:t></a:r></a:p></p:txBody></p:sp></mc:Choice></mc:AlternateContent><p:graphicFrame><p:nvGraphicFramePr><p:cNvPr id="6" name="Content Placeholder 5" /><p:cNvGraphicFramePr><a:graphicFrameLocks noGrp="1" /></p:cNvGraphicFramePr><p:nvPr><p:ph idx="1" /></p:nvPr></p:nvGraphicFramePr><p:xfrm><a:off x="3568700" y="203200" /><a:ext cx="5105400" cy="4381500" /></p:xfrm><a:graphic><a:graphicData uri="http://schemas.openxmlformats.org/drawingml/2006/table"><a:tbl><a:tblPr firstRow="1" bandRow="1"><a:tableStyleId>{5C22544A-7EE6-4342-B048-85BDC9FD1C3A}</a:tableStyleId></a:tblPr><a:tblGrid><a:gridCol w="1270000" /><a:gridCol w="1270000" /><a:gridCol w="1270000" /><a:gridCol w="1270000" /></a:tblGrid><a:tr h="0"><a:tc><a:txBody><a:bodyPr /><a:lstStyle /><a:p><a:pPr lvl="0" indent="0" marL="0" algn="ctr"><a:buNone /></a:pPr><a:r><a:rPr /><a:t>Discount rate </a:t></a:r><a14:m><m:oMath xmlns:m="http://schemas.openxmlformats.org/officeDocument/2006/math"><m:r><m:t>r</m:t></m:r></m:oMath></a14:m></a:p></a:txBody><a:tcPr /></a:tc><a:tc><a:txBody><a:bodyPr /><a:lstStyle /><a:p><a:pPr lvl="0" indent="0" marL="0" algn="ctr"><a:buNone /></a:pPr><a:r><a:rPr /><a:t>PV of benefits</a:t></a:r></a:p></a:txBody><a:tcPr /></a:tc><a:tc><a:txBody><a:bodyPr /><a:lstStyle /><a:p><a:pPr lvl="0" indent="0" marL="0" algn="ctr"><a:buNone /></a:pPr><a:r><a:rPr /><a:t>NPV</a:t></a:r></a:p></a:txBody><a:tcPr /></a:tc><a:tc><a:txBody><a:bodyPr /><a:lstStyle /><a:p><a:pPr lvl="0" indent="0" marL="0" algn="ctr"><a:buNone /></a:pPr><a:r><a:rPr /><a:t>Pass?</a:t></a:r></a:p></a:txBody><a:tcPr /></a:tc></a:tr><a:tr h="0"><a:tc><a:txBody><a:bodyPr /><a:lstStyle /><a:p><a:pPr lvl="0" indent="0" marL="0" algn="ctr"><a:buNone /></a:pPr><a:r><a:rPr /><a:t>2%</a:t></a:r></a:p></a:txBody></a:tc><a:tc><a:txBody><a:bodyPr /><a:lstStyle /><a:p><a:pPr lvl="0" indent="0" marL="0" algn="ctr"><a:buNone /></a:pPr><a:r><a:rPr /><a:t>$111,500</a:t></a:r></a:p></a:txBody></a:tc><a:tc><a:txBody><a:bodyPr /><a:lstStyle /><a:p><a:pPr lvl="0" indent="0" marL="0" algn="ctr"><a:buNone /></a:pPr><a:r><a:rPr b="1" /><a:t>+$31,500</a:t></a:r></a:p></a:txBody></a:tc><a:tc><a:txBody><a:bodyPr /><a:lstStyle /><a:p><a:pPr lvl="0" indent="0" marL="0" algn="ctr"><a:buNone /></a:pPr><a:r><a:rPr /><a:t>Yes</a:t></a:r></a:p></a:txBody></a:tc></a:tr><a:tr h="0"><a:tc><a:txBody><a:bodyPr /><a:lstStyle /><a:p><a:pPr lvl="0" indent="0" marL="0" algn="ctr"><a:buNone /></a:pPr><a:r><a:rPr /><a:t>5%</a:t></a:r></a:p></a:txBody></a:tc><a:tc><a:txBody><a:bodyPr /><a:lstStyle /><a:p><a:pPr lvl="0" indent="0" marL="0" algn="ctr"><a:buNone /></a:pPr><a:r><a:rPr /><a:t>$76,500</a:t></a:r></a:p></a:txBody></a:tc><a:tc><a:txBody><a:bodyPr /><a:lstStyle /><a:p><a:pPr lvl="0" indent="0" marL="0" algn="ctr"><a:buNone /></a:pPr><a:r><a:rPr b="1" /><a:t>-$3,500</a:t></a:r></a:p></a:txBody></a:tc><a:tc><a:txBody><a:bodyPr /><a:lstStyle /><a:p><a:pPr lvl="0" indent="0" marL="0" algn="ctr"><a:buNone /></a:pPr><a:r><a:rPr /><a:t>Barely no</a:t></a:r></a:p></a:txBody></a:tc></a:tr><a:tr h="0"><a:tc><a:txBody><a:bodyPr /><a:lstStyle /><a:p><a:pPr lvl="0" indent="0" marL="0" algn="ctr"><a:buNone /></a:pPr><a:r><a:rPr /><a:t>7%</a:t></a:r></a:p></a:txBody></a:tc><a:tc><a:txBody><a:bodyPr /><a:lstStyle /><a:p><a:pPr lvl="0" indent="0" marL="0" algn="ctr"><a:buNone /></a:pPr><a:r><a:rPr /><a:t>$61,700</a:t></a:r></a:p></a:txBody></a:tc><a:tc><a:txBody><a:bodyPr /><a:lstStyle /><a:p><a:pPr lvl="0" indent="0" marL="0" algn="ctr"><a:buNone /></a:pPr><a:r><a:rPr b="1" /><a:t>-$18,300</a:t></a:r></a:p></a:txBody></a:tc><a:tc><a:txBody><a:bodyPr /><a:lstStyle /><a:p><a:pPr lvl="0" indent="0" marL="0" algn="ctr"><a:buNone /></a:pPr><a:r><a:rPr /><a:t>No</a:t></a:r></a:p></a:txBody></a:tc></a:tr></a:tbl></a:graphicData></a:graphic></p:graphicFrame></p:spTree></p:cSld></p:sld>
 </file>
 
-<file path=ppt/slides/slide9.xml><?xml version="1.0" encoding="utf-8"?>
+<file path=ppt/slides/slide8.xml><?xml version="1.0" encoding="utf-8"?>
 <p:sld xmlns:a="http://schemas.openxmlformats.org/drawingml/2006/main" xmlns:r="http://schemas.openxmlformats.org/officeDocument/2006/relationships" xmlns:p="http://schemas.openxmlformats.org/presentationml/2006/main">
   <p:cSld>
     <p:spTree>
@@ -12505,6 +11524,959 @@
       </p:sp>
     </p:spTree>
   </p:cSld>
+</p:sld>
+</file>
+
+<file path=ppt/slides/slide9.xml><?xml version="1.0" encoding="utf-8"?>
+<p:sld xmlns:a="http://schemas.openxmlformats.org/drawingml/2006/main" xmlns:r="http://schemas.openxmlformats.org/officeDocument/2006/relationships" xmlns:p="http://schemas.openxmlformats.org/presentationml/2006/main">
+  <p:cSld>
+    <p:spTree>
+      <p:nvGrpSpPr>
+        <p:cNvPr id="1" name=""/>
+        <p:cNvGrpSpPr/>
+        <p:nvPr/>
+      </p:nvGrpSpPr>
+      <p:grpSpPr>
+        <a:xfrm>
+          <a:off x="0" y="0"/>
+          <a:ext cx="0" cy="0"/>
+          <a:chOff x="0" y="0"/>
+          <a:chExt cx="0" cy="0"/>
+        </a:xfrm>
+      </p:grpSpPr>
+      <p:sp>
+        <p:nvSpPr>
+          <p:cNvPr id="2" name="Title 1"/>
+          <p:cNvSpPr>
+            <a:spLocks noGrp="1"/>
+          </p:cNvSpPr>
+          <p:nvPr>
+            <p:ph type="title"/>
+          </p:nvPr>
+        </p:nvSpPr>
+        <p:spPr/>
+        <p:txBody>
+          <a:bodyPr/>
+          <a:lstStyle/>
+          <a:p>
+            <a:pPr lvl="0" indent="0" marL="0">
+              <a:buNone/>
+            </a:pPr>
+            <a:r>
+              <a:rPr/>
+              <a:t>Critiques &amp; Defense</a:t>
+            </a:r>
+          </a:p>
+        </p:txBody>
+      </p:sp>
+      <mc:AlternateContent xmlns:mc="http://schemas.openxmlformats.org/markup-compatibility/2006">
+        <mc:Choice xmlns:a14="http://schemas.microsoft.com/office/drawing/2010/main" Requires="a14">
+          <p:sp>
+            <p:nvSpPr>
+              <p:cNvPr id="3" name="Content Placeholder 2"/>
+              <p:cNvSpPr>
+                <a:spLocks noGrp="1"/>
+              </p:cNvSpPr>
+              <p:nvPr>
+                <p:ph idx="1"/>
+              </p:nvPr>
+            </p:nvSpPr>
+            <p:spPr/>
+            <p:txBody>
+              <a:bodyPr/>
+              <a:lstStyle/>
+              <a:p>
+                <a:pPr lvl="0" indent="0" marL="0">
+                  <a:spcBef>
+                    <a:spcPts val="3000"/>
+                  </a:spcBef>
+                  <a:buNone/>
+                </a:pPr>
+                <a:r>
+                  <a:rPr b="1"/>
+                  <a:t>White House Circular A-94</a:t>
+                </a:r>
+              </a:p>
+              <a:p>
+                <a:pPr lvl="0" indent="0" marL="0">
+                  <a:buNone/>
+                </a:pPr>
+                <a:r>
+                  <a:rPr/>
+                  <a:t>The 2023 revision of federal BCA guidance (U.S. Office of Management and Budget 2023):</a:t>
+                </a:r>
+              </a:p>
+              <a:p>
+                <a:pPr lvl="0"/>
+                <a:r>
+                  <a:rPr/>
+                  <a:t>Intended to govern how federal agencies conduct BCA</a:t>
+                </a:r>
+              </a:p>
+              <a:p>
+                <a:pPr lvl="0"/>
+                <a:r>
+                  <a:rPr/>
+                  <a:t>Lowered the default discount rate from 7% to ~2%</a:t>
+                </a:r>
+              </a:p>
+              <a:p>
+                <a:pPr lvl="0"/>
+                <a:r>
+                  <a:rPr/>
+                  <a:t>Expanded guidance on equity and distributional effects</a:t>
+                </a:r>
+              </a:p>
+              <a:p>
+                <a:pPr lvl="0"/>
+                <a:r>
+                  <a:rPr/>
+                  <a:t>Its current status is uncertain under the new administration</a:t>
+                </a:r>
+              </a:p>
+              <a:p>
+                <a:pPr lvl="0" indent="0" marL="0">
+                  <a:spcBef>
+                    <a:spcPts val="3000"/>
+                  </a:spcBef>
+                  <a:buNone/>
+                </a:pPr>
+                <a:r>
+                  <a:rPr b="1"/>
+                  <a:t>The Discount Rate Problem</a:t>
+                </a:r>
+              </a:p>
+              <a:p>
+                <a:pPr lvl="0" indent="0" marL="0">
+                  <a:buNone/>
+                </a:pPr>
+                <a:r>
+                  <a:rPr/>
+                  <a:t>Two rationales for discounting (Arrow et al. 2013):</a:t>
+                </a:r>
+              </a:p>
+              <a:p>
+                <a:pPr lvl="0" indent="-342900" marL="342900">
+                  <a:buAutoNum type="arabicPeriod"/>
+                </a:pPr>
+                <a:r>
+                  <a:rPr b="1"/>
+                  <a:t>Consumption-based</a:t>
+                </a:r>
+                <a:r>
+                  <a:rPr/>
+                  <a:t> (~3%): Future generations will be richer, so an extra dollar matters less to them</a:t>
+                </a:r>
+              </a:p>
+              <a:p>
+                <a:pPr lvl="0" indent="-342900" marL="342900">
+                  <a:buAutoNum type="arabicPeriod"/>
+                </a:pPr>
+                <a:r>
+                  <a:rPr b="1"/>
+                  <a:t>Investment-based</a:t>
+                </a:r>
+                <a:r>
+                  <a:rPr/>
+                  <a:t> (~7%): A dollar invested today yields more than a dollar in the future</a:t>
+                </a:r>
+              </a:p>
+              <a:p>
+                <a:pPr lvl="0" indent="0" marL="0">
+                  <a:buNone/>
+                </a:pPr>
+                <a:r>
+                  <a:rPr/>
+                  <a:t>Both assume future generations are better off — what if climate change makes them </a:t>
+                </a:r>
+                <a:r>
+                  <a:rPr i="1"/>
+                  <a:t>worse</a:t>
+                </a:r>
+                <a:r>
+                  <a:rPr/>
+                  <a:t> off?</a:t>
+                </a:r>
+              </a:p>
+              <a:p>
+                <a:pPr lvl="0" indent="0" marL="0">
+                  <a:spcBef>
+                    <a:spcPts val="3000"/>
+                  </a:spcBef>
+                  <a:buNone/>
+                </a:pPr>
+                <a:r>
+                  <a:rPr b="1"/>
+                  <a:t>High Discount Rates Favor Inaction</a:t>
+                </a:r>
+              </a:p>
+              <a:p>
+                <a:pPr lvl="0" indent="0" marL="0">
+                  <a:buNone/>
+                </a:pPr>
+                <a:r>
+                  <a:rPr/>
+                  <a:t>At </a:t>
+                </a:r>
+                <a14:m>
+                  <m:oMath xmlns:m="http://schemas.openxmlformats.org/officeDocument/2006/math">
+                    <m:r>
+                      <m:t>r</m:t>
+                    </m:r>
+                    <m:r>
+                      <m:rPr>
+                        <m:sty m:val="p"/>
+                      </m:rPr>
+                      <m:t>=</m:t>
+                    </m:r>
+                    <m:r>
+                      <m:t>7</m:t>
+                    </m:r>
+                    <m:r>
+                      <m:rPr>
+                        <m:sty m:val="p"/>
+                      </m:rPr>
+                      <m:t>%</m:t>
+                    </m:r>
+                  </m:oMath>
+                </a14:m>
+                <a:r>
+                  <a:rPr/>
+                  <a:t>, damages 50 years out are worth </a:t>
+                </a:r>
+                <a:r>
+                  <a:rPr b="1"/>
+                  <a:t>$0.03</a:t>
+                </a:r>
+                <a:r>
+                  <a:rPr/>
+                  <a:t> today.</a:t>
+                </a:r>
+              </a:p>
+              <a:p>
+                <a:pPr lvl="0"/>
+                <a:r>
+                  <a:rPr/>
+                  <a:t>Infrastructure with 50-100 year lifetimes</a:t>
+                </a:r>
+              </a:p>
+              <a:p>
+                <a:pPr lvl="0"/>
+                <a:r>
+                  <a:rPr/>
+                  <a:t>Sea-level rise over centuries</a:t>
+                </a:r>
+              </a:p>
+              <a:p>
+                <a:pPr lvl="0"/>
+                <a:r>
+                  <a:rPr/>
+                  <a:t>Species extinction is permanent</a:t>
+                </a:r>
+              </a:p>
+              <a:p>
+                <a:pPr lvl="0" indent="0" marL="0">
+                  <a:buNone/>
+                </a:pPr>
+                <a:r>
+                  <a:rPr/>
+                  <a:t>The discount rate can determine whether a project “passes” BCA — more than any other single parameter.</a:t>
+                </a:r>
+              </a:p>
+              <a:p>
+                <a:pPr lvl="0" indent="0" marL="0">
+                  <a:spcBef>
+                    <a:spcPts val="3000"/>
+                  </a:spcBef>
+                  <a:buNone/>
+                </a:pPr>
+                <a:r>
+                  <a:rPr b="1"/>
+                  <a:t>Decision-Support, Not Decision-Making</a:t>
+                </a:r>
+              </a:p>
+              <a:p>
+                <a:pPr lvl="0" indent="0" marL="1270000">
+                  <a:buNone/>
+                </a:pPr>
+                <a:r>
+                  <a:rPr sz="2000" b="1"/>
+                  <a:t>Important</a:t>
+                </a:r>
+              </a:p>
+              <a:p>
+                <a:pPr lvl="0" indent="0" marL="1270000">
+                  <a:buNone/>
+                </a:pPr>
+                <a:r>
+                  <a:rPr sz="2000"/>
+                  <a:t>BCA is a tool for </a:t>
+                </a:r>
+                <a:r>
+                  <a:rPr sz="2000" b="1"/>
+                  <a:t>informing</a:t>
+                </a:r>
+                <a:r>
+                  <a:rPr sz="2000"/>
+                  <a:t> decisions, not </a:t>
+                </a:r>
+                <a:r>
+                  <a:rPr sz="2000" b="1"/>
+                  <a:t>making</a:t>
+                </a:r>
+                <a:r>
+                  <a:rPr sz="2000"/>
+                  <a:t> them.</a:t>
+                </a:r>
+              </a:p>
+              <a:p>
+                <a:pPr lvl="0"/>
+                <a:r>
+                  <a:rPr/>
+                  <a:t>It forces us to be explicit about our assumptions</a:t>
+                </a:r>
+              </a:p>
+              <a:p>
+                <a:pPr lvl="0"/>
+                <a:r>
+                  <a:rPr/>
+                  <a:t>Applied well, it’s iterative refinement of understanding; applied poorly, it’s a black box that justifies a decision already made</a:t>
+                </a:r>
+              </a:p>
+              <a:p>
+                <a:pPr lvl="0"/>
+                <a:r>
+                  <a:rPr/>
+                  <a:t>The number matters less than what you learn by computing it</a:t>
+                </a:r>
+              </a:p>
+            </p:txBody>
+          </p:sp>
+        </mc:Choice>
+      </mc:AlternateContent>
+    </p:spTree>
+  </p:cSld>
+  <p:timing>
+    <p:tnLst>
+      <p:par>
+        <p:cTn id="1" dur="indefinite" restart="never" nodeType="tmRoot">
+          <p:childTnLst>
+            <p:seq concurrent="1" nextAc="seek">
+              <p:cTn id="2" dur="indefinite" nodeType="mainSeq">
+                <p:childTnLst>
+                  <p:par>
+                    <p:cTn id="3" fill="hold">
+                      <p:stCondLst>
+                        <p:cond delay="indefinite"/>
+                      </p:stCondLst>
+                      <p:childTnLst>
+                        <p:par>
+                          <p:cTn id="4" fill="hold">
+                            <p:stCondLst>
+                              <p:cond delay="0"/>
+                            </p:stCondLst>
+                            <p:childTnLst>
+                              <p:par>
+                                <p:cTn id="5" presetID="1" presetClass="entr" presetSubtype="0" fill="hold" grpId="0" nodeType="clickEffect">
+                                  <p:stCondLst>
+                                    <p:cond delay="0"/>
+                                  </p:stCondLst>
+                                  <p:childTnLst>
+                                    <p:set>
+                                      <p:cBhvr>
+                                        <p:cTn id="6" dur="1" fill="hold">
+                                          <p:stCondLst>
+                                            <p:cond delay="0"/>
+                                          </p:stCondLst>
+                                        </p:cTn>
+                                        <p:tgtEl>
+                                          <p:spTgt spid="3">
+                                            <p:txEl>
+                                              <p:pRg st="2" end="2"/>
+                                            </p:txEl>
+                                          </p:spTgt>
+                                        </p:tgtEl>
+                                        <p:attrNameLst>
+                                          <p:attrName>style.visibility</p:attrName>
+                                        </p:attrNameLst>
+                                      </p:cBhvr>
+                                      <p:to>
+                                        <p:strVal val="visible"/>
+                                      </p:to>
+                                    </p:set>
+                                  </p:childTnLst>
+                                </p:cTn>
+                              </p:par>
+                            </p:childTnLst>
+                          </p:cTn>
+                        </p:par>
+                      </p:childTnLst>
+                    </p:cTn>
+                  </p:par>
+                  <p:par>
+                    <p:cTn id="7" fill="hold">
+                      <p:stCondLst>
+                        <p:cond delay="indefinite"/>
+                      </p:stCondLst>
+                      <p:childTnLst>
+                        <p:par>
+                          <p:cTn id="8" fill="hold">
+                            <p:stCondLst>
+                              <p:cond delay="0"/>
+                            </p:stCondLst>
+                            <p:childTnLst>
+                              <p:par>
+                                <p:cTn id="9" presetID="1" presetClass="entr" presetSubtype="0" fill="hold" grpId="0" nodeType="clickEffect">
+                                  <p:stCondLst>
+                                    <p:cond delay="0"/>
+                                  </p:stCondLst>
+                                  <p:childTnLst>
+                                    <p:set>
+                                      <p:cBhvr>
+                                        <p:cTn id="10" dur="1" fill="hold">
+                                          <p:stCondLst>
+                                            <p:cond delay="0"/>
+                                          </p:stCondLst>
+                                        </p:cTn>
+                                        <p:tgtEl>
+                                          <p:spTgt spid="3">
+                                            <p:txEl>
+                                              <p:pRg st="3" end="3"/>
+                                            </p:txEl>
+                                          </p:spTgt>
+                                        </p:tgtEl>
+                                        <p:attrNameLst>
+                                          <p:attrName>style.visibility</p:attrName>
+                                        </p:attrNameLst>
+                                      </p:cBhvr>
+                                      <p:to>
+                                        <p:strVal val="visible"/>
+                                      </p:to>
+                                    </p:set>
+                                  </p:childTnLst>
+                                </p:cTn>
+                              </p:par>
+                            </p:childTnLst>
+                          </p:cTn>
+                        </p:par>
+                      </p:childTnLst>
+                    </p:cTn>
+                  </p:par>
+                  <p:par>
+                    <p:cTn id="11" fill="hold">
+                      <p:stCondLst>
+                        <p:cond delay="indefinite"/>
+                      </p:stCondLst>
+                      <p:childTnLst>
+                        <p:par>
+                          <p:cTn id="12" fill="hold">
+                            <p:stCondLst>
+                              <p:cond delay="0"/>
+                            </p:stCondLst>
+                            <p:childTnLst>
+                              <p:par>
+                                <p:cTn id="13" presetID="1" presetClass="entr" presetSubtype="0" fill="hold" grpId="0" nodeType="clickEffect">
+                                  <p:stCondLst>
+                                    <p:cond delay="0"/>
+                                  </p:stCondLst>
+                                  <p:childTnLst>
+                                    <p:set>
+                                      <p:cBhvr>
+                                        <p:cTn id="14" dur="1" fill="hold">
+                                          <p:stCondLst>
+                                            <p:cond delay="0"/>
+                                          </p:stCondLst>
+                                        </p:cTn>
+                                        <p:tgtEl>
+                                          <p:spTgt spid="3">
+                                            <p:txEl>
+                                              <p:pRg st="4" end="4"/>
+                                            </p:txEl>
+                                          </p:spTgt>
+                                        </p:tgtEl>
+                                        <p:attrNameLst>
+                                          <p:attrName>style.visibility</p:attrName>
+                                        </p:attrNameLst>
+                                      </p:cBhvr>
+                                      <p:to>
+                                        <p:strVal val="visible"/>
+                                      </p:to>
+                                    </p:set>
+                                  </p:childTnLst>
+                                </p:cTn>
+                              </p:par>
+                            </p:childTnLst>
+                          </p:cTn>
+                        </p:par>
+                      </p:childTnLst>
+                    </p:cTn>
+                  </p:par>
+                  <p:par>
+                    <p:cTn id="15" fill="hold">
+                      <p:stCondLst>
+                        <p:cond delay="indefinite"/>
+                      </p:stCondLst>
+                      <p:childTnLst>
+                        <p:par>
+                          <p:cTn id="16" fill="hold">
+                            <p:stCondLst>
+                              <p:cond delay="0"/>
+                            </p:stCondLst>
+                            <p:childTnLst>
+                              <p:par>
+                                <p:cTn id="17" presetID="1" presetClass="entr" presetSubtype="0" fill="hold" grpId="0" nodeType="clickEffect">
+                                  <p:stCondLst>
+                                    <p:cond delay="0"/>
+                                  </p:stCondLst>
+                                  <p:childTnLst>
+                                    <p:set>
+                                      <p:cBhvr>
+                                        <p:cTn id="18" dur="1" fill="hold">
+                                          <p:stCondLst>
+                                            <p:cond delay="0"/>
+                                          </p:stCondLst>
+                                        </p:cTn>
+                                        <p:tgtEl>
+                                          <p:spTgt spid="3">
+                                            <p:txEl>
+                                              <p:pRg st="5" end="5"/>
+                                            </p:txEl>
+                                          </p:spTgt>
+                                        </p:tgtEl>
+                                        <p:attrNameLst>
+                                          <p:attrName>style.visibility</p:attrName>
+                                        </p:attrNameLst>
+                                      </p:cBhvr>
+                                      <p:to>
+                                        <p:strVal val="visible"/>
+                                      </p:to>
+                                    </p:set>
+                                  </p:childTnLst>
+                                </p:cTn>
+                              </p:par>
+                            </p:childTnLst>
+                          </p:cTn>
+                        </p:par>
+                      </p:childTnLst>
+                    </p:cTn>
+                  </p:par>
+                  <p:par>
+                    <p:cTn id="19" fill="hold">
+                      <p:stCondLst>
+                        <p:cond delay="indefinite"/>
+                      </p:stCondLst>
+                      <p:childTnLst>
+                        <p:par>
+                          <p:cTn id="20" fill="hold">
+                            <p:stCondLst>
+                              <p:cond delay="0"/>
+                            </p:stCondLst>
+                            <p:childTnLst>
+                              <p:par>
+                                <p:cTn id="21" presetID="1" presetClass="entr" presetSubtype="0" fill="hold" grpId="0" nodeType="clickEffect">
+                                  <p:stCondLst>
+                                    <p:cond delay="0"/>
+                                  </p:stCondLst>
+                                  <p:childTnLst>
+                                    <p:set>
+                                      <p:cBhvr>
+                                        <p:cTn id="22" dur="1" fill="hold">
+                                          <p:stCondLst>
+                                            <p:cond delay="0"/>
+                                          </p:stCondLst>
+                                        </p:cTn>
+                                        <p:tgtEl>
+                                          <p:spTgt spid="3">
+                                            <p:txEl>
+                                              <p:pRg st="8" end="8"/>
+                                            </p:txEl>
+                                          </p:spTgt>
+                                        </p:tgtEl>
+                                        <p:attrNameLst>
+                                          <p:attrName>style.visibility</p:attrName>
+                                        </p:attrNameLst>
+                                      </p:cBhvr>
+                                      <p:to>
+                                        <p:strVal val="visible"/>
+                                      </p:to>
+                                    </p:set>
+                                  </p:childTnLst>
+                                </p:cTn>
+                              </p:par>
+                            </p:childTnLst>
+                          </p:cTn>
+                        </p:par>
+                      </p:childTnLst>
+                    </p:cTn>
+                  </p:par>
+                  <p:par>
+                    <p:cTn id="23" fill="hold">
+                      <p:stCondLst>
+                        <p:cond delay="indefinite"/>
+                      </p:stCondLst>
+                      <p:childTnLst>
+                        <p:par>
+                          <p:cTn id="24" fill="hold">
+                            <p:stCondLst>
+                              <p:cond delay="0"/>
+                            </p:stCondLst>
+                            <p:childTnLst>
+                              <p:par>
+                                <p:cTn id="25" presetID="1" presetClass="entr" presetSubtype="0" fill="hold" grpId="0" nodeType="clickEffect">
+                                  <p:stCondLst>
+                                    <p:cond delay="0"/>
+                                  </p:stCondLst>
+                                  <p:childTnLst>
+                                    <p:set>
+                                      <p:cBhvr>
+                                        <p:cTn id="26" dur="1" fill="hold">
+                                          <p:stCondLst>
+                                            <p:cond delay="0"/>
+                                          </p:stCondLst>
+                                        </p:cTn>
+                                        <p:tgtEl>
+                                          <p:spTgt spid="3">
+                                            <p:txEl>
+                                              <p:pRg st="9" end="9"/>
+                                            </p:txEl>
+                                          </p:spTgt>
+                                        </p:tgtEl>
+                                        <p:attrNameLst>
+                                          <p:attrName>style.visibility</p:attrName>
+                                        </p:attrNameLst>
+                                      </p:cBhvr>
+                                      <p:to>
+                                        <p:strVal val="visible"/>
+                                      </p:to>
+                                    </p:set>
+                                  </p:childTnLst>
+                                </p:cTn>
+                              </p:par>
+                            </p:childTnLst>
+                          </p:cTn>
+                        </p:par>
+                      </p:childTnLst>
+                    </p:cTn>
+                  </p:par>
+                  <p:par>
+                    <p:cTn id="27" fill="hold">
+                      <p:stCondLst>
+                        <p:cond delay="indefinite"/>
+                      </p:stCondLst>
+                      <p:childTnLst>
+                        <p:par>
+                          <p:cTn id="28" fill="hold">
+                            <p:stCondLst>
+                              <p:cond delay="0"/>
+                            </p:stCondLst>
+                            <p:childTnLst>
+                              <p:par>
+                                <p:cTn id="29" presetID="1" presetClass="entr" presetSubtype="0" fill="hold" grpId="0" nodeType="clickEffect">
+                                  <p:stCondLst>
+                                    <p:cond delay="0"/>
+                                  </p:stCondLst>
+                                  <p:childTnLst>
+                                    <p:set>
+                                      <p:cBhvr>
+                                        <p:cTn id="30" dur="1" fill="hold">
+                                          <p:stCondLst>
+                                            <p:cond delay="0"/>
+                                          </p:stCondLst>
+                                        </p:cTn>
+                                        <p:tgtEl>
+                                          <p:spTgt spid="3">
+                                            <p:txEl>
+                                              <p:pRg st="13" end="13"/>
+                                            </p:txEl>
+                                          </p:spTgt>
+                                        </p:tgtEl>
+                                        <p:attrNameLst>
+                                          <p:attrName>style.visibility</p:attrName>
+                                        </p:attrNameLst>
+                                      </p:cBhvr>
+                                      <p:to>
+                                        <p:strVal val="visible"/>
+                                      </p:to>
+                                    </p:set>
+                                  </p:childTnLst>
+                                </p:cTn>
+                              </p:par>
+                            </p:childTnLst>
+                          </p:cTn>
+                        </p:par>
+                      </p:childTnLst>
+                    </p:cTn>
+                  </p:par>
+                  <p:par>
+                    <p:cTn id="31" fill="hold">
+                      <p:stCondLst>
+                        <p:cond delay="indefinite"/>
+                      </p:stCondLst>
+                      <p:childTnLst>
+                        <p:par>
+                          <p:cTn id="32" fill="hold">
+                            <p:stCondLst>
+                              <p:cond delay="0"/>
+                            </p:stCondLst>
+                            <p:childTnLst>
+                              <p:par>
+                                <p:cTn id="33" presetID="1" presetClass="entr" presetSubtype="0" fill="hold" grpId="0" nodeType="clickEffect">
+                                  <p:stCondLst>
+                                    <p:cond delay="0"/>
+                                  </p:stCondLst>
+                                  <p:childTnLst>
+                                    <p:set>
+                                      <p:cBhvr>
+                                        <p:cTn id="34" dur="1" fill="hold">
+                                          <p:stCondLst>
+                                            <p:cond delay="0"/>
+                                          </p:stCondLst>
+                                        </p:cTn>
+                                        <p:tgtEl>
+                                          <p:spTgt spid="3">
+                                            <p:txEl>
+                                              <p:pRg st="14" end="14"/>
+                                            </p:txEl>
+                                          </p:spTgt>
+                                        </p:tgtEl>
+                                        <p:attrNameLst>
+                                          <p:attrName>style.visibility</p:attrName>
+                                        </p:attrNameLst>
+                                      </p:cBhvr>
+                                      <p:to>
+                                        <p:strVal val="visible"/>
+                                      </p:to>
+                                    </p:set>
+                                  </p:childTnLst>
+                                </p:cTn>
+                              </p:par>
+                            </p:childTnLst>
+                          </p:cTn>
+                        </p:par>
+                      </p:childTnLst>
+                    </p:cTn>
+                  </p:par>
+                  <p:par>
+                    <p:cTn id="35" fill="hold">
+                      <p:stCondLst>
+                        <p:cond delay="indefinite"/>
+                      </p:stCondLst>
+                      <p:childTnLst>
+                        <p:par>
+                          <p:cTn id="36" fill="hold">
+                            <p:stCondLst>
+                              <p:cond delay="0"/>
+                            </p:stCondLst>
+                            <p:childTnLst>
+                              <p:par>
+                                <p:cTn id="37" presetID="1" presetClass="entr" presetSubtype="0" fill="hold" grpId="0" nodeType="clickEffect">
+                                  <p:stCondLst>
+                                    <p:cond delay="0"/>
+                                  </p:stCondLst>
+                                  <p:childTnLst>
+                                    <p:set>
+                                      <p:cBhvr>
+                                        <p:cTn id="38" dur="1" fill="hold">
+                                          <p:stCondLst>
+                                            <p:cond delay="0"/>
+                                          </p:stCondLst>
+                                        </p:cTn>
+                                        <p:tgtEl>
+                                          <p:spTgt spid="3">
+                                            <p:txEl>
+                                              <p:pRg st="15" end="15"/>
+                                            </p:txEl>
+                                          </p:spTgt>
+                                        </p:tgtEl>
+                                        <p:attrNameLst>
+                                          <p:attrName>style.visibility</p:attrName>
+                                        </p:attrNameLst>
+                                      </p:cBhvr>
+                                      <p:to>
+                                        <p:strVal val="visible"/>
+                                      </p:to>
+                                    </p:set>
+                                  </p:childTnLst>
+                                </p:cTn>
+                              </p:par>
+                            </p:childTnLst>
+                          </p:cTn>
+                        </p:par>
+                      </p:childTnLst>
+                    </p:cTn>
+                  </p:par>
+                  <p:par>
+                    <p:cTn id="39" fill="hold">
+                      <p:stCondLst>
+                        <p:cond delay="indefinite"/>
+                      </p:stCondLst>
+                      <p:childTnLst>
+                        <p:par>
+                          <p:cTn id="40" fill="hold">
+                            <p:stCondLst>
+                              <p:cond delay="0"/>
+                            </p:stCondLst>
+                            <p:childTnLst>
+                              <p:par>
+                                <p:cTn id="41" presetID="1" presetClass="entr" presetSubtype="0" fill="hold" grpId="0" nodeType="clickEffect">
+                                  <p:stCondLst>
+                                    <p:cond delay="0"/>
+                                  </p:stCondLst>
+                                  <p:childTnLst>
+                                    <p:set>
+                                      <p:cBhvr>
+                                        <p:cTn id="42" dur="1" fill="hold">
+                                          <p:stCondLst>
+                                            <p:cond delay="0"/>
+                                          </p:stCondLst>
+                                        </p:cTn>
+                                        <p:tgtEl>
+                                          <p:spTgt spid="3">
+                                            <p:txEl>
+                                              <p:pRg st="20" end="20"/>
+                                            </p:txEl>
+                                          </p:spTgt>
+                                        </p:tgtEl>
+                                        <p:attrNameLst>
+                                          <p:attrName>style.visibility</p:attrName>
+                                        </p:attrNameLst>
+                                      </p:cBhvr>
+                                      <p:to>
+                                        <p:strVal val="visible"/>
+                                      </p:to>
+                                    </p:set>
+                                  </p:childTnLst>
+                                </p:cTn>
+                              </p:par>
+                            </p:childTnLst>
+                          </p:cTn>
+                        </p:par>
+                      </p:childTnLst>
+                    </p:cTn>
+                  </p:par>
+                  <p:par>
+                    <p:cTn id="43" fill="hold">
+                      <p:stCondLst>
+                        <p:cond delay="indefinite"/>
+                      </p:stCondLst>
+                      <p:childTnLst>
+                        <p:par>
+                          <p:cTn id="44" fill="hold">
+                            <p:stCondLst>
+                              <p:cond delay="0"/>
+                            </p:stCondLst>
+                            <p:childTnLst>
+                              <p:par>
+                                <p:cTn id="45" presetID="1" presetClass="entr" presetSubtype="0" fill="hold" grpId="0" nodeType="clickEffect">
+                                  <p:stCondLst>
+                                    <p:cond delay="0"/>
+                                  </p:stCondLst>
+                                  <p:childTnLst>
+                                    <p:set>
+                                      <p:cBhvr>
+                                        <p:cTn id="46" dur="1" fill="hold">
+                                          <p:stCondLst>
+                                            <p:cond delay="0"/>
+                                          </p:stCondLst>
+                                        </p:cTn>
+                                        <p:tgtEl>
+                                          <p:spTgt spid="3">
+                                            <p:txEl>
+                                              <p:pRg st="21" end="21"/>
+                                            </p:txEl>
+                                          </p:spTgt>
+                                        </p:tgtEl>
+                                        <p:attrNameLst>
+                                          <p:attrName>style.visibility</p:attrName>
+                                        </p:attrNameLst>
+                                      </p:cBhvr>
+                                      <p:to>
+                                        <p:strVal val="visible"/>
+                                      </p:to>
+                                    </p:set>
+                                  </p:childTnLst>
+                                </p:cTn>
+                              </p:par>
+                            </p:childTnLst>
+                          </p:cTn>
+                        </p:par>
+                      </p:childTnLst>
+                    </p:cTn>
+                  </p:par>
+                  <p:par>
+                    <p:cTn id="47" fill="hold">
+                      <p:stCondLst>
+                        <p:cond delay="indefinite"/>
+                      </p:stCondLst>
+                      <p:childTnLst>
+                        <p:par>
+                          <p:cTn id="48" fill="hold">
+                            <p:stCondLst>
+                              <p:cond delay="0"/>
+                            </p:stCondLst>
+                            <p:childTnLst>
+                              <p:par>
+                                <p:cTn id="49" presetID="1" presetClass="entr" presetSubtype="0" fill="hold" grpId="0" nodeType="clickEffect">
+                                  <p:stCondLst>
+                                    <p:cond delay="0"/>
+                                  </p:stCondLst>
+                                  <p:childTnLst>
+                                    <p:set>
+                                      <p:cBhvr>
+                                        <p:cTn id="50" dur="1" fill="hold">
+                                          <p:stCondLst>
+                                            <p:cond delay="0"/>
+                                          </p:stCondLst>
+                                        </p:cTn>
+                                        <p:tgtEl>
+                                          <p:spTgt spid="3">
+                                            <p:txEl>
+                                              <p:pRg st="22" end="22"/>
+                                            </p:txEl>
+                                          </p:spTgt>
+                                        </p:tgtEl>
+                                        <p:attrNameLst>
+                                          <p:attrName>style.visibility</p:attrName>
+                                        </p:attrNameLst>
+                                      </p:cBhvr>
+                                      <p:to>
+                                        <p:strVal val="visible"/>
+                                      </p:to>
+                                    </p:set>
+                                  </p:childTnLst>
+                                </p:cTn>
+                              </p:par>
+                            </p:childTnLst>
+                          </p:cTn>
+                        </p:par>
+                      </p:childTnLst>
+                    </p:cTn>
+                  </p:par>
+                </p:childTnLst>
+              </p:cTn>
+              <p:prevCondLst>
+                <p:cond evt="onPrev" delay="0">
+                  <p:tgtEl>
+                    <p:sldTgt/>
+                  </p:tgtEl>
+                </p:cond>
+              </p:prevCondLst>
+              <p:nextCondLst>
+                <p:cond evt="onNext" delay="0">
+                  <p:tgtEl>
+                    <p:sldTgt/>
+                  </p:tgtEl>
+                </p:cond>
+              </p:nextCondLst>
+            </p:seq>
+          </p:childTnLst>
+        </p:cTn>
+      </p:par>
+    </p:tnLst>
+    <p:bldLst>
+      <p:bldP spid="3" grpId="0" uiExpand="1" build="p"/>
+    </p:bldLst>
+  </p:timing>
 </p:sld>
 </file>
 

--- a/lectures/week-05/index.pptx
+++ b/lectures/week-05/index.pptx
@@ -7001,13 +7001,29 @@
                   <a:t>end</a:t>
                 </a:r>
               </a:p>
+              <a:p>
+                <a:pPr lvl="0" indent="0">
+                  <a:buNone/>
+                </a:pPr>
+                <a:r>
+                  <a:rPr>
+                    <a:latin typeface="Courier"/>
+                  </a:rPr>
+                  <a:t>Precompiling packages...
+  10232.9 ms  ✓ QuartoNotebookWorkerMakieExt (serial)
+  1 dependency successfully precompiled in 10 seconds
+Precompiling packages...
+  14396.8 ms  ✓ QuartoNotebookWorkerCairoMakieExt (serial)
+  1 dependency successfully precompiled in 14 seconds</a:t>
+                </a:r>
+              </a:p>
             </p:txBody>
           </p:sp>
         </mc:Choice>
       </mc:AlternateContent>
       <p:pic>
         <p:nvPicPr>
-          <p:cNvPr descr="index_files/figure-pptx/cell-2-output-1.png" id="0" name="Picture 1"/>
+          <p:cNvPr descr="index_files/figure-pptx/cell-2-output-2.png" id="0" name="Picture 1"/>
           <p:cNvPicPr>
             <a:picLocks noGrp="1" noChangeAspect="1"/>
           </p:cNvPicPr>

--- a/lectures/week-05/index.pptx
+++ b/lectures/week-05/index.pptx
@@ -7001,29 +7001,13 @@
                   <a:t>end</a:t>
                 </a:r>
               </a:p>
-              <a:p>
-                <a:pPr lvl="0" indent="0">
-                  <a:buNone/>
-                </a:pPr>
-                <a:r>
-                  <a:rPr>
-                    <a:latin typeface="Courier"/>
-                  </a:rPr>
-                  <a:t>Precompiling packages...
-  10232.9 ms  ✓ QuartoNotebookWorkerMakieExt (serial)
-  1 dependency successfully precompiled in 10 seconds
-Precompiling packages...
-  14396.8 ms  ✓ QuartoNotebookWorkerCairoMakieExt (serial)
-  1 dependency successfully precompiled in 14 seconds</a:t>
-                </a:r>
-              </a:p>
             </p:txBody>
           </p:sp>
         </mc:Choice>
       </mc:AlternateContent>
       <p:pic>
         <p:nvPicPr>
-          <p:cNvPr descr="index_files/figure-pptx/cell-2-output-2.png" id="0" name="Picture 1"/>
+          <p:cNvPr descr="index_files/figure-pptx/cell-2-output-1.png" id="0" name="Picture 1"/>
           <p:cNvPicPr>
             <a:picLocks noGrp="1" noChangeAspect="1"/>
           </p:cNvPicPr>

--- a/lectures/week-05/index.pptx
+++ b/lectures/week-05/index.pptx
@@ -4520,7 +4520,7 @@
             <a:br/>
             <a:r>
               <a:rPr/>
-              <a:t>Dr. James Doss-Gollin</a:t>
+              <a:t>James Doss-Gollin</a:t>
             </a:r>
           </a:p>
         </p:txBody>

--- a/lectures/week-05/index.pptx
+++ b/lectures/week-05/index.pptx
@@ -4746,7 +4746,7 @@
             </a:pPr>
             <a:r>
               <a:rPr/>
-              <a:t>Arrow, K., M. Cropper, C. Gollier, B. Groom, G. Heal, R. Newell, W. Nordhaus, et al. 2013. “Determining Benefits and Costs for Future Generations.” </a:t>
+              <a:t>Arrow, K., M. Cropper, C. Gollier, et al. 2013. “Determining Benefits and Costs for Future Generations.” </a:t>
             </a:r>
             <a:r>
               <a:rPr i="1"/>
@@ -4773,7 +4773,15 @@
             </a:pPr>
             <a:r>
               <a:rPr/>
-              <a:t>U.S. Office of Management and Budget. 2023. “Circular No. A-94: Guidelines and Discount Rates for Benefit-Cost Analysis of Federal Programs.” Circular. Executive Office of the President. </a:t>
+              <a:t>U.S. Office of Management and Budget. 2023. </a:t>
+            </a:r>
+            <a:r>
+              <a:rPr i="1"/>
+              <a:t>Circular No. A-94: Guidelines and Discount Rates for Benefit-Cost Analysis of Federal Programs</a:t>
+            </a:r>
+            <a:r>
+              <a:rPr/>
+              <a:t>. Circular. Executive Office of the President. </a:t>
             </a:r>
             <a:r>
               <a:rPr>
@@ -5928,31 +5936,33 @@
                       <m:r>
                         <m:t>u</m:t>
                       </m:r>
-                      <m:d>
-                        <m:dPr>
-                          <m:begChr m:val="("/>
-                          <m:sepChr m:val=""/>
-                          <m:endChr m:val=")"/>
-                          <m:grow/>
-                        </m:dPr>
-                        <m:e>
-                          <m:r>
-                            <m:t>a</m:t>
-                          </m:r>
-                          <m:r>
-                            <m:rPr>
-                              <m:sty m:val="p"/>
-                            </m:rPr>
-                            <m:t>,</m:t>
-                          </m:r>
-                          <m:r>
-                            <m:rPr>
-                              <m:sty m:val="b"/>
-                            </m:rPr>
-                            <m:t>s</m:t>
-                          </m:r>
-                        </m:e>
-                      </m:d>
+                      <m:r>
+                        <m:rPr>
+                          <m:sty m:val="p"/>
+                        </m:rPr>
+                        <m:t>(</m:t>
+                      </m:r>
+                      <m:r>
+                        <m:t>a</m:t>
+                      </m:r>
+                      <m:r>
+                        <m:rPr>
+                          <m:sty m:val="p"/>
+                        </m:rPr>
+                        <m:t>,</m:t>
+                      </m:r>
+                      <m:r>
+                        <m:rPr>
+                          <m:sty m:val="b"/>
+                        </m:rPr>
+                        <m:t>s</m:t>
+                      </m:r>
+                      <m:r>
+                        <m:rPr>
+                          <m:sty m:val="p"/>
+                        </m:rPr>
+                        <m:t>)</m:t>
+                      </m:r>
                       <m:r>
                         <m:rPr>
                           <m:sty m:val="p"/>
@@ -5961,8 +5971,8 @@
                       </m:r>
                       <m:r>
                         <m:rPr>
+                          <m:scr m:val="script"/>
                           <m:sty m:val="p"/>
-                          <m:scr m:val="script"/>
                         </m:rPr>
                         <m:t>A</m:t>
                       </m:r>
@@ -5974,8 +5984,8 @@
                       </m:r>
                       <m:r>
                         <m:rPr>
+                          <m:scr m:val="script"/>
                           <m:sty m:val="p"/>
-                          <m:scr m:val="script"/>
                         </m:rPr>
                         <m:t>S</m:t>
                       </m:r>
@@ -5987,8 +5997,8 @@
                       </m:r>
                       <m:r>
                         <m:rPr>
+                          <m:scr m:val="double-struck"/>
                           <m:sty m:val="p"/>
-                          <m:scr m:val="double-struck"/>
                         </m:rPr>
                         <m:t>R</m:t>
                       </m:r>
@@ -6011,8 +6021,8 @@
                     </m:r>
                     <m:r>
                       <m:rPr>
+                        <m:scr m:val="script"/>
                         <m:sty m:val="p"/>
-                        <m:scr m:val="script"/>
                       </m:rPr>
                       <m:t>A</m:t>
                     </m:r>
@@ -6049,8 +6059,8 @@
                     </m:r>
                     <m:r>
                       <m:rPr>
+                        <m:scr m:val="script"/>
                         <m:sty m:val="p"/>
-                        <m:scr m:val="script"/>
                       </m:rPr>
                       <m:t>S</m:t>
                     </m:r>
@@ -7039,7 +7049,9 @@
         <p:nvSpPr>
           <p:cNvPr id="1" name="TextBox 3"/>
           <p:cNvSpPr txBox="1"/>
-          <p:nvPr/>
+          <p:nvPr>
+            <p:ph idx="1"/>
+          </p:nvPr>
         </p:nvSpPr>
         <p:spPr>
           <a:xfrm>
@@ -7975,31 +7987,33 @@
                       <m:r>
                         <m:t>V</m:t>
                       </m:r>
-                      <m:d>
-                        <m:dPr>
-                          <m:begChr m:val="("/>
-                          <m:sepChr m:val=""/>
-                          <m:endChr m:val=")"/>
-                          <m:grow/>
-                        </m:dPr>
-                        <m:e>
-                          <m:r>
-                            <m:t>a</m:t>
-                          </m:r>
-                          <m:r>
-                            <m:rPr>
-                              <m:sty m:val="p"/>
-                            </m:rPr>
-                            <m:t>,</m:t>
-                          </m:r>
-                          <m:r>
-                            <m:rPr>
-                              <m:sty m:val="b"/>
-                            </m:rPr>
-                            <m:t>s</m:t>
-                          </m:r>
-                        </m:e>
-                      </m:d>
+                      <m:r>
+                        <m:rPr>
+                          <m:sty m:val="p"/>
+                        </m:rPr>
+                        <m:t>(</m:t>
+                      </m:r>
+                      <m:r>
+                        <m:t>a</m:t>
+                      </m:r>
+                      <m:r>
+                        <m:rPr>
+                          <m:sty m:val="p"/>
+                        </m:rPr>
+                        <m:t>,</m:t>
+                      </m:r>
+                      <m:r>
+                        <m:rPr>
+                          <m:sty m:val="b"/>
+                        </m:rPr>
+                        <m:t>s</m:t>
+                      </m:r>
+                      <m:r>
+                        <m:rPr>
+                          <m:sty m:val="p"/>
+                        </m:rPr>
+                        <m:t>)</m:t>
+                      </m:r>
                       <m:r>
                         <m:rPr>
                           <m:sty m:val="p"/>
@@ -8050,31 +8064,33 @@
                                   </m:r>
                                 </m:sub>
                               </m:sSub>
-                              <m:d>
-                                <m:dPr>
-                                  <m:begChr m:val="("/>
-                                  <m:sepChr m:val=""/>
-                                  <m:endChr m:val=")"/>
-                                  <m:grow/>
-                                </m:dPr>
-                                <m:e>
-                                  <m:r>
-                                    <m:t>a</m:t>
-                                  </m:r>
-                                  <m:r>
-                                    <m:rPr>
-                                      <m:sty m:val="p"/>
-                                    </m:rPr>
-                                    <m:t>,</m:t>
-                                  </m:r>
-                                  <m:r>
-                                    <m:rPr>
-                                      <m:sty m:val="b"/>
-                                    </m:rPr>
-                                    <m:t>s</m:t>
-                                  </m:r>
-                                </m:e>
-                              </m:d>
+                              <m:r>
+                                <m:rPr>
+                                  <m:sty m:val="p"/>
+                                </m:rPr>
+                                <m:t>(</m:t>
+                              </m:r>
+                              <m:r>
+                                <m:t>a</m:t>
+                              </m:r>
+                              <m:r>
+                                <m:rPr>
+                                  <m:sty m:val="p"/>
+                                </m:rPr>
+                                <m:t>,</m:t>
+                              </m:r>
+                              <m:r>
+                                <m:rPr>
+                                  <m:sty m:val="b"/>
+                                </m:rPr>
+                                <m:t>s</m:t>
+                              </m:r>
+                              <m:r>
+                                <m:rPr>
+                                  <m:sty m:val="p"/>
+                                </m:rPr>
+                                <m:t>)</m:t>
+                              </m:r>
                               <m:r>
                                 <m:rPr>
                                   <m:sty m:val="p"/>
@@ -8093,57 +8109,61 @@
                                   </m:r>
                                 </m:sub>
                               </m:sSub>
-                              <m:d>
-                                <m:dPr>
-                                  <m:begChr m:val="("/>
-                                  <m:sepChr m:val=""/>
-                                  <m:endChr m:val=")"/>
-                                  <m:grow/>
-                                </m:dPr>
+                              <m:r>
+                                <m:rPr>
+                                  <m:sty m:val="p"/>
+                                </m:rPr>
+                                <m:t>(</m:t>
+                              </m:r>
+                              <m:r>
+                                <m:t>a</m:t>
+                              </m:r>
+                              <m:r>
+                                <m:rPr>
+                                  <m:sty m:val="p"/>
+                                </m:rPr>
+                                <m:t>,</m:t>
+                              </m:r>
+                              <m:r>
+                                <m:rPr>
+                                  <m:sty m:val="b"/>
+                                </m:rPr>
+                                <m:t>s</m:t>
+                              </m:r>
+                              <m:r>
+                                <m:rPr>
+                                  <m:sty m:val="p"/>
+                                </m:rPr>
+                                <m:t>)</m:t>
+                              </m:r>
+                            </m:num>
+                            <m:den>
+                              <m:r>
+                                <m:rPr>
+                                  <m:sty m:val="p"/>
+                                </m:rPr>
+                                <m:t>(</m:t>
+                              </m:r>
+                              <m:r>
+                                <m:t>1</m:t>
+                              </m:r>
+                              <m:r>
+                                <m:rPr>
+                                  <m:sty m:val="p"/>
+                                </m:rPr>
+                                <m:t>+</m:t>
+                              </m:r>
+                              <m:r>
+                                <m:t>r</m:t>
+                              </m:r>
+                              <m:sSup>
                                 <m:e>
-                                  <m:r>
-                                    <m:t>a</m:t>
-                                  </m:r>
                                   <m:r>
                                     <m:rPr>
                                       <m:sty m:val="p"/>
                                     </m:rPr>
-                                    <m:t>,</m:t>
+                                    <m:t>)</m:t>
                                   </m:r>
-                                  <m:r>
-                                    <m:rPr>
-                                      <m:sty m:val="b"/>
-                                    </m:rPr>
-                                    <m:t>s</m:t>
-                                  </m:r>
-                                </m:e>
-                              </m:d>
-                            </m:num>
-                            <m:den>
-                              <m:sSup>
-                                <m:e>
-                                  <m:d>
-                                    <m:dPr>
-                                      <m:begChr m:val="("/>
-                                      <m:sepChr m:val=""/>
-                                      <m:endChr m:val=")"/>
-                                      <m:grow/>
-                                    </m:dPr>
-                                    <m:e>
-                                      <m:r>
-                                        <m:t>1</m:t>
-                                      </m:r>
-                                      <m:r>
-                                        <m:rPr>
-                                          <m:sty m:val="p"/>
-                                        </m:rPr>
-                                        <m:t>+</m:t>
-                                      </m:r>
-                                      <m:r>
-                                        <m:t>r</m:t>
-                                      </m:r>
-                                    </m:e>
-                                  </m:d>
                                 </m:e>
                                 <m:sup>
                                   <m:r>
@@ -8235,30 +8255,32 @@
                         </m:r>
                       </m:num>
                       <m:den>
+                        <m:r>
+                          <m:rPr>
+                            <m:sty m:val="p"/>
+                          </m:rPr>
+                          <m:t>(</m:t>
+                        </m:r>
+                        <m:r>
+                          <m:t>1</m:t>
+                        </m:r>
+                        <m:r>
+                          <m:rPr>
+                            <m:sty m:val="p"/>
+                          </m:rPr>
+                          <m:t>+</m:t>
+                        </m:r>
+                        <m:r>
+                          <m:t>r</m:t>
+                        </m:r>
                         <m:sSup>
                           <m:e>
-                            <m:d>
-                              <m:dPr>
-                                <m:begChr m:val="("/>
-                                <m:sepChr m:val=""/>
-                                <m:endChr m:val=")"/>
-                                <m:grow/>
-                              </m:dPr>
-                              <m:e>
-                                <m:r>
-                                  <m:t>1</m:t>
-                                </m:r>
-                                <m:r>
-                                  <m:rPr>
-                                    <m:sty m:val="p"/>
-                                  </m:rPr>
-                                  <m:t>+</m:t>
-                                </m:r>
-                                <m:r>
-                                  <m:t>r</m:t>
-                                </m:r>
-                              </m:e>
-                            </m:d>
+                            <m:r>
+                              <m:rPr>
+                                <m:sty m:val="p"/>
+                              </m:rPr>
+                              <m:t>)</m:t>
+                            </m:r>
                           </m:e>
                           <m:sup>
                             <m:r>
@@ -8340,31 +8362,33 @@
                       <m:r>
                         <m:t>V</m:t>
                       </m:r>
-                      <m:d>
-                        <m:dPr>
-                          <m:begChr m:val="("/>
-                          <m:sepChr m:val=""/>
-                          <m:endChr m:val=")"/>
-                          <m:grow/>
-                        </m:dPr>
-                        <m:e>
-                          <m:r>
-                            <m:t>a</m:t>
-                          </m:r>
-                          <m:r>
-                            <m:rPr>
-                              <m:sty m:val="p"/>
-                            </m:rPr>
-                            <m:t>,</m:t>
-                          </m:r>
-                          <m:r>
-                            <m:rPr>
-                              <m:sty m:val="b"/>
-                            </m:rPr>
-                            <m:t>s</m:t>
-                          </m:r>
-                        </m:e>
-                      </m:d>
+                      <m:r>
+                        <m:rPr>
+                          <m:sty m:val="p"/>
+                        </m:rPr>
+                        <m:t>(</m:t>
+                      </m:r>
+                      <m:r>
+                        <m:t>a</m:t>
+                      </m:r>
+                      <m:r>
+                        <m:rPr>
+                          <m:sty m:val="p"/>
+                        </m:rPr>
+                        <m:t>,</m:t>
+                      </m:r>
+                      <m:r>
+                        <m:rPr>
+                          <m:sty m:val="b"/>
+                        </m:rPr>
+                        <m:t>s</m:t>
+                      </m:r>
+                      <m:r>
+                        <m:rPr>
+                          <m:sty m:val="p"/>
+                        </m:rPr>
+                        <m:t>)</m:t>
+                      </m:r>
                       <m:r>
                         <m:rPr>
                           <m:sty m:val="p"/>
@@ -8398,39 +8422,41 @@
                           </m:r>
                         </m:sup>
                         <m:e>
-                          <m:sSup>
-                            <m:e>
-                              <m:d>
-                                <m:dPr>
-                                  <m:begChr m:val="("/>
-                                  <m:sepChr m:val=""/>
-                                  <m:endChr m:val=")"/>
-                                  <m:grow/>
-                                </m:dPr>
-                                <m:e>
-                                  <m:r>
-                                    <m:t>1</m:t>
-                                  </m:r>
-                                  <m:r>
-                                    <m:rPr>
-                                      <m:sty m:val="p"/>
-                                    </m:rPr>
-                                    <m:t>−</m:t>
-                                  </m:r>
-                                  <m:r>
-                                    <m:t>γ</m:t>
-                                  </m:r>
-                                </m:e>
-                              </m:d>
-                            </m:e>
-                            <m:sup>
-                              <m:r>
-                                <m:t>t</m:t>
-                              </m:r>
-                            </m:sup>
-                          </m:sSup>
+                          <m:r>
+                            <m:rPr>
+                              <m:sty m:val="p"/>
+                            </m:rPr>
+                            <m:t>(</m:t>
+                          </m:r>
                         </m:e>
                       </m:nary>
+                      <m:r>
+                        <m:t>1</m:t>
+                      </m:r>
+                      <m:r>
+                        <m:rPr>
+                          <m:sty m:val="p"/>
+                        </m:rPr>
+                        <m:t>−</m:t>
+                      </m:r>
+                      <m:r>
+                        <m:t>γ</m:t>
+                      </m:r>
+                      <m:sSup>
+                        <m:e>
+                          <m:r>
+                            <m:rPr>
+                              <m:sty m:val="p"/>
+                            </m:rPr>
+                            <m:t>)</m:t>
+                          </m:r>
+                        </m:e>
+                        <m:sup>
+                          <m:r>
+                            <m:t>t</m:t>
+                          </m:r>
+                        </m:sup>
+                      </m:sSup>
                       <m:d>
                         <m:dPr>
                           <m:begChr m:val="["/>
@@ -8451,31 +8477,33 @@
                               </m:r>
                             </m:sub>
                           </m:sSub>
-                          <m:d>
-                            <m:dPr>
-                              <m:begChr m:val="("/>
-                              <m:sepChr m:val=""/>
-                              <m:endChr m:val=")"/>
-                              <m:grow/>
-                            </m:dPr>
-                            <m:e>
-                              <m:r>
-                                <m:t>a</m:t>
-                              </m:r>
-                              <m:r>
-                                <m:rPr>
-                                  <m:sty m:val="p"/>
-                                </m:rPr>
-                                <m:t>,</m:t>
-                              </m:r>
-                              <m:r>
-                                <m:rPr>
-                                  <m:sty m:val="b"/>
-                                </m:rPr>
-                                <m:t>s</m:t>
-                              </m:r>
-                            </m:e>
-                          </m:d>
+                          <m:r>
+                            <m:rPr>
+                              <m:sty m:val="p"/>
+                            </m:rPr>
+                            <m:t>(</m:t>
+                          </m:r>
+                          <m:r>
+                            <m:t>a</m:t>
+                          </m:r>
+                          <m:r>
+                            <m:rPr>
+                              <m:sty m:val="p"/>
+                            </m:rPr>
+                            <m:t>,</m:t>
+                          </m:r>
+                          <m:r>
+                            <m:rPr>
+                              <m:sty m:val="b"/>
+                            </m:rPr>
+                            <m:t>s</m:t>
+                          </m:r>
+                          <m:r>
+                            <m:rPr>
+                              <m:sty m:val="p"/>
+                            </m:rPr>
+                            <m:t>)</m:t>
+                          </m:r>
                           <m:r>
                             <m:rPr>
                               <m:sty m:val="p"/>
@@ -8494,31 +8522,33 @@
                               </m:r>
                             </m:sub>
                           </m:sSub>
-                          <m:d>
-                            <m:dPr>
-                              <m:begChr m:val="("/>
-                              <m:sepChr m:val=""/>
-                              <m:endChr m:val=")"/>
-                              <m:grow/>
-                            </m:dPr>
-                            <m:e>
-                              <m:r>
-                                <m:t>a</m:t>
-                              </m:r>
-                              <m:r>
-                                <m:rPr>
-                                  <m:sty m:val="p"/>
-                                </m:rPr>
-                                <m:t>,</m:t>
-                              </m:r>
-                              <m:r>
-                                <m:rPr>
-                                  <m:sty m:val="b"/>
-                                </m:rPr>
-                                <m:t>s</m:t>
-                              </m:r>
-                            </m:e>
-                          </m:d>
+                          <m:r>
+                            <m:rPr>
+                              <m:sty m:val="p"/>
+                            </m:rPr>
+                            <m:t>(</m:t>
+                          </m:r>
+                          <m:r>
+                            <m:t>a</m:t>
+                          </m:r>
+                          <m:r>
+                            <m:rPr>
+                              <m:sty m:val="p"/>
+                            </m:rPr>
+                            <m:t>,</m:t>
+                          </m:r>
+                          <m:r>
+                            <m:rPr>
+                              <m:sty m:val="b"/>
+                            </m:rPr>
+                            <m:t>s</m:t>
+                          </m:r>
+                          <m:r>
+                            <m:rPr>
+                              <m:sty m:val="p"/>
+                            </m:rPr>
+                            <m:t>)</m:t>
+                          </m:r>
                         </m:e>
                       </m:d>
                     </m:oMath>
@@ -8569,30 +8599,32 @@
                         </m:r>
                       </m:num>
                       <m:den>
+                        <m:r>
+                          <m:rPr>
+                            <m:sty m:val="p"/>
+                          </m:rPr>
+                          <m:t>(</m:t>
+                        </m:r>
+                        <m:r>
+                          <m:t>1</m:t>
+                        </m:r>
+                        <m:r>
+                          <m:rPr>
+                            <m:sty m:val="p"/>
+                          </m:rPr>
+                          <m:t>+</m:t>
+                        </m:r>
+                        <m:r>
+                          <m:t>r</m:t>
+                        </m:r>
                         <m:sSup>
                           <m:e>
-                            <m:d>
-                              <m:dPr>
-                                <m:begChr m:val="("/>
-                                <m:sepChr m:val=""/>
-                                <m:endChr m:val=")"/>
-                                <m:grow/>
-                              </m:dPr>
-                              <m:e>
-                                <m:r>
-                                  <m:t>1</m:t>
-                                </m:r>
-                                <m:r>
-                                  <m:rPr>
-                                    <m:sty m:val="p"/>
-                                  </m:rPr>
-                                  <m:t>+</m:t>
-                                </m:r>
-                                <m:r>
-                                  <m:t>r</m:t>
-                                </m:r>
-                              </m:e>
-                            </m:d>
+                            <m:r>
+                              <m:rPr>
+                                <m:sty m:val="p"/>
+                              </m:rPr>
+                              <m:t>)</m:t>
+                            </m:r>
                           </m:e>
                           <m:sup>
                             <m:r>
@@ -8624,30 +8656,32 @@
                 </a:r>
                 <a14:m>
                   <m:oMath xmlns:m="http://schemas.openxmlformats.org/officeDocument/2006/math">
+                    <m:r>
+                      <m:rPr>
+                        <m:sty m:val="p"/>
+                      </m:rPr>
+                      <m:t>(</m:t>
+                    </m:r>
+                    <m:r>
+                      <m:t>1</m:t>
+                    </m:r>
+                    <m:r>
+                      <m:rPr>
+                        <m:sty m:val="p"/>
+                      </m:rPr>
+                      <m:t>−</m:t>
+                    </m:r>
+                    <m:r>
+                      <m:t>γ</m:t>
+                    </m:r>
                     <m:sSup>
                       <m:e>
-                        <m:d>
-                          <m:dPr>
-                            <m:begChr m:val="("/>
-                            <m:sepChr m:val=""/>
-                            <m:endChr m:val=")"/>
-                            <m:grow/>
-                          </m:dPr>
-                          <m:e>
-                            <m:r>
-                              <m:t>1</m:t>
-                            </m:r>
-                            <m:r>
-                              <m:rPr>
-                                <m:sty m:val="p"/>
-                              </m:rPr>
-                              <m:t>−</m:t>
-                            </m:r>
-                            <m:r>
-                              <m:t>γ</m:t>
-                            </m:r>
-                          </m:e>
-                        </m:d>
+                        <m:r>
+                          <m:rPr>
+                            <m:sty m:val="p"/>
+                          </m:rPr>
+                          <m:t>)</m:t>
+                        </m:r>
                       </m:e>
                       <m:sup>
                         <m:r>
@@ -8666,28 +8700,30 @@
                 </a:r>
                 <a14:m>
                   <m:oMath xmlns:m="http://schemas.openxmlformats.org/officeDocument/2006/math">
-                    <m:d>
-                      <m:dPr>
-                        <m:begChr m:val="("/>
-                        <m:sepChr m:val=""/>
-                        <m:endChr m:val=")"/>
-                        <m:grow/>
-                      </m:dPr>
-                      <m:e>
-                        <m:r>
-                          <m:t>1</m:t>
-                        </m:r>
-                        <m:r>
-                          <m:rPr>
-                            <m:sty m:val="p"/>
-                          </m:rPr>
-                          <m:t>−</m:t>
-                        </m:r>
-                        <m:r>
-                          <m:t>γ</m:t>
-                        </m:r>
-                      </m:e>
-                    </m:d>
+                    <m:r>
+                      <m:rPr>
+                        <m:sty m:val="p"/>
+                      </m:rPr>
+                      <m:t>(</m:t>
+                    </m:r>
+                    <m:r>
+                      <m:t>1</m:t>
+                    </m:r>
+                    <m:r>
+                      <m:rPr>
+                        <m:sty m:val="p"/>
+                      </m:rPr>
+                      <m:t>−</m:t>
+                    </m:r>
+                    <m:r>
+                      <m:t>γ</m:t>
+                    </m:r>
+                    <m:r>
+                      <m:rPr>
+                        <m:sty m:val="p"/>
+                      </m:rPr>
+                      <m:t>)</m:t>
+                    </m:r>
                     <m:r>
                       <m:rPr>
                         <m:sty m:val="p"/>
@@ -8855,21 +8891,23 @@
                           </m:r>
                         </m:num>
                         <m:den>
+                          <m:r>
+                            <m:rPr>
+                              <m:sty m:val="p"/>
+                            </m:rPr>
+                            <m:t>(</m:t>
+                          </m:r>
+                          <m:r>
+                            <m:t>1.02</m:t>
+                          </m:r>
                           <m:sSup>
                             <m:e>
-                              <m:d>
-                                <m:dPr>
-                                  <m:begChr m:val="("/>
-                                  <m:sepChr m:val=""/>
-                                  <m:endChr m:val=")"/>
-                                  <m:grow/>
-                                </m:dPr>
-                                <m:e>
-                                  <m:r>
-                                    <m:t>1.02</m:t>
-                                  </m:r>
-                                </m:e>
-                              </m:d>
+                              <m:r>
+                                <m:rPr>
+                                  <m:sty m:val="p"/>
+                                </m:rPr>
+                                <m:t>)</m:t>
+                              </m:r>
                             </m:e>
                             <m:sup>
                               <m:r>
@@ -8935,21 +8973,23 @@
                           </m:r>
                         </m:num>
                         <m:den>
+                          <m:r>
+                            <m:rPr>
+                              <m:sty m:val="p"/>
+                            </m:rPr>
+                            <m:t>(</m:t>
+                          </m:r>
+                          <m:r>
+                            <m:t>1.02</m:t>
+                          </m:r>
                           <m:sSup>
                             <m:e>
-                              <m:d>
-                                <m:dPr>
-                                  <m:begChr m:val="("/>
-                                  <m:sepChr m:val=""/>
-                                  <m:endChr m:val=")"/>
-                                  <m:grow/>
-                                </m:dPr>
-                                <m:e>
-                                  <m:r>
-                                    <m:t>1.02</m:t>
-                                  </m:r>
-                                </m:e>
-                              </m:d>
+                              <m:r>
+                                <m:rPr>
+                                  <m:sty m:val="p"/>
+                                </m:rPr>
+                                <m:t>)</m:t>
+                              </m:r>
                             </m:e>
                             <m:sup>
                               <m:r>
@@ -9030,21 +9070,23 @@
                         </m:r>
                       </m:num>
                       <m:den>
+                        <m:r>
+                          <m:rPr>
+                            <m:sty m:val="p"/>
+                          </m:rPr>
+                          <m:t>(</m:t>
+                        </m:r>
+                        <m:r>
+                          <m:t>1.07</m:t>
+                        </m:r>
                         <m:sSup>
                           <m:e>
-                            <m:d>
-                              <m:dPr>
-                                <m:begChr m:val="("/>
-                                <m:sepChr m:val=""/>
-                                <m:endChr m:val=")"/>
-                                <m:grow/>
-                              </m:dPr>
-                              <m:e>
-                                <m:r>
-                                  <m:t>1.07</m:t>
-                                </m:r>
-                              </m:e>
-                            </m:d>
+                            <m:r>
+                              <m:rPr>
+                                <m:sty m:val="p"/>
+                              </m:rPr>
+                              <m:t>)</m:t>
+                            </m:r>
                           </m:e>
                           <m:sup>
                             <m:r>
@@ -9768,8 +9810,8 @@
                         <m:e>
                           <m:r>
                             <m:rPr>
+                              <m:scr m:val="double-struck"/>
                               <m:sty m:val="p"/>
-                              <m:scr m:val="double-struck"/>
                             </m:rPr>
                             <m:t>E</m:t>
                           </m:r>
@@ -9800,31 +9842,33 @@
                           <m:r>
                             <m:t>V</m:t>
                           </m:r>
-                          <m:d>
-                            <m:dPr>
-                              <m:begChr m:val="("/>
-                              <m:sepChr m:val=""/>
-                              <m:endChr m:val=")"/>
-                              <m:grow/>
-                            </m:dPr>
-                            <m:e>
-                              <m:r>
-                                <m:t>a</m:t>
-                              </m:r>
-                              <m:r>
-                                <m:rPr>
-                                  <m:sty m:val="p"/>
-                                </m:rPr>
-                                <m:t>,</m:t>
-                              </m:r>
-                              <m:r>
-                                <m:rPr>
-                                  <m:sty m:val="b"/>
-                                </m:rPr>
-                                <m:t>s</m:t>
-                              </m:r>
-                            </m:e>
-                          </m:d>
+                          <m:r>
+                            <m:rPr>
+                              <m:sty m:val="p"/>
+                            </m:rPr>
+                            <m:t>(</m:t>
+                          </m:r>
+                          <m:r>
+                            <m:t>a</m:t>
+                          </m:r>
+                          <m:r>
+                            <m:rPr>
+                              <m:sty m:val="p"/>
+                            </m:rPr>
+                            <m:t>,</m:t>
+                          </m:r>
+                          <m:r>
+                            <m:rPr>
+                              <m:sty m:val="b"/>
+                            </m:rPr>
+                            <m:t>s</m:t>
+                          </m:r>
+                          <m:r>
+                            <m:rPr>
+                              <m:sty m:val="p"/>
+                            </m:rPr>
+                            <m:t>)</m:t>
+                          </m:r>
                         </m:e>
                       </m:d>
                     </m:oMath>
@@ -9854,8 +9898,8 @@
                         <m:e>
                           <m:r>
                             <m:rPr>
+                              <m:scr m:val="double-struck"/>
                               <m:sty m:val="p"/>
-                              <m:scr m:val="double-struck"/>
                             </m:rPr>
                             <m:t>E</m:t>
                           </m:r>
@@ -9886,31 +9930,33 @@
                           <m:r>
                             <m:t>V</m:t>
                           </m:r>
-                          <m:d>
-                            <m:dPr>
-                              <m:begChr m:val="("/>
-                              <m:sepChr m:val=""/>
-                              <m:endChr m:val=")"/>
-                              <m:grow/>
-                            </m:dPr>
-                            <m:e>
-                              <m:r>
-                                <m:t>a</m:t>
-                              </m:r>
-                              <m:r>
-                                <m:rPr>
-                                  <m:sty m:val="p"/>
-                                </m:rPr>
-                                <m:t>,</m:t>
-                              </m:r>
-                              <m:r>
-                                <m:rPr>
-                                  <m:sty m:val="b"/>
-                                </m:rPr>
-                                <m:t>s</m:t>
-                              </m:r>
-                            </m:e>
-                          </m:d>
+                          <m:r>
+                            <m:rPr>
+                              <m:sty m:val="p"/>
+                            </m:rPr>
+                            <m:t>(</m:t>
+                          </m:r>
+                          <m:r>
+                            <m:t>a</m:t>
+                          </m:r>
+                          <m:r>
+                            <m:rPr>
+                              <m:sty m:val="p"/>
+                            </m:rPr>
+                            <m:t>,</m:t>
+                          </m:r>
+                          <m:r>
+                            <m:rPr>
+                              <m:sty m:val="b"/>
+                            </m:rPr>
+                            <m:t>s</m:t>
+                          </m:r>
+                          <m:r>
+                            <m:rPr>
+                              <m:sty m:val="p"/>
+                            </m:rPr>
+                            <m:t>)</m:t>
+                          </m:r>
                         </m:e>
                       </m:d>
                       <m:r>
@@ -9928,22 +9974,24 @@
                       <m:r>
                         <m:t>p</m:t>
                       </m:r>
-                      <m:d>
-                        <m:dPr>
-                          <m:begChr m:val="("/>
-                          <m:sepChr m:val=""/>
-                          <m:endChr m:val=")"/>
-                          <m:grow/>
-                        </m:dPr>
-                        <m:e>
-                          <m:r>
-                            <m:rPr>
-                              <m:sty m:val="b"/>
-                            </m:rPr>
-                            <m:t>s</m:t>
-                          </m:r>
-                        </m:e>
-                      </m:d>
+                      <m:r>
+                        <m:rPr>
+                          <m:sty m:val="p"/>
+                        </m:rPr>
+                        <m:t>(</m:t>
+                      </m:r>
+                      <m:r>
+                        <m:rPr>
+                          <m:sty m:val="b"/>
+                        </m:rPr>
+                        <m:t>s</m:t>
+                      </m:r>
+                      <m:r>
+                        <m:rPr>
+                          <m:sty m:val="p"/>
+                        </m:rPr>
+                        <m:t>)</m:t>
+                      </m:r>
                       <m:r>
                         <m:t> </m:t>
                       </m:r>
@@ -9956,31 +10004,33 @@
                       <m:r>
                         <m:t>V</m:t>
                       </m:r>
-                      <m:d>
-                        <m:dPr>
-                          <m:begChr m:val="("/>
-                          <m:sepChr m:val=""/>
-                          <m:endChr m:val=")"/>
-                          <m:grow/>
-                        </m:dPr>
-                        <m:e>
-                          <m:r>
-                            <m:t>a</m:t>
-                          </m:r>
-                          <m:r>
-                            <m:rPr>
-                              <m:sty m:val="p"/>
-                            </m:rPr>
-                            <m:t>,</m:t>
-                          </m:r>
-                          <m:r>
-                            <m:rPr>
-                              <m:sty m:val="b"/>
-                            </m:rPr>
-                            <m:t>s</m:t>
-                          </m:r>
-                        </m:e>
-                      </m:d>
+                      <m:r>
+                        <m:rPr>
+                          <m:sty m:val="p"/>
+                        </m:rPr>
+                        <m:t>(</m:t>
+                      </m:r>
+                      <m:r>
+                        <m:t>a</m:t>
+                      </m:r>
+                      <m:r>
+                        <m:rPr>
+                          <m:sty m:val="p"/>
+                        </m:rPr>
+                        <m:t>,</m:t>
+                      </m:r>
+                      <m:r>
+                        <m:rPr>
+                          <m:sty m:val="b"/>
+                        </m:rPr>
+                        <m:t>s</m:t>
+                      </m:r>
+                      <m:r>
+                        <m:rPr>
+                          <m:sty m:val="p"/>
+                        </m:rPr>
+                        <m:t>)</m:t>
+                      </m:r>
                       <m:r>
                         <m:t> </m:t>
                       </m:r>
@@ -10125,22 +10175,24 @@
                     <m:r>
                       <m:t>p</m:t>
                     </m:r>
-                    <m:d>
-                      <m:dPr>
-                        <m:begChr m:val="("/>
-                        <m:sepChr m:val=""/>
-                        <m:endChr m:val=")"/>
-                        <m:grow/>
-                      </m:dPr>
-                      <m:e>
-                        <m:r>
-                          <m:rPr>
-                            <m:sty m:val="b"/>
-                          </m:rPr>
-                          <m:t>s</m:t>
-                        </m:r>
-                      </m:e>
-                    </m:d>
+                    <m:r>
+                      <m:rPr>
+                        <m:sty m:val="p"/>
+                      </m:rPr>
+                      <m:t>(</m:t>
+                    </m:r>
+                    <m:r>
+                      <m:rPr>
+                        <m:sty m:val="b"/>
+                      </m:rPr>
+                      <m:t>s</m:t>
+                    </m:r>
+                    <m:r>
+                      <m:rPr>
+                        <m:sty m:val="p"/>
+                      </m:rPr>
+                      <m:t>)</m:t>
+                    </m:r>
                   </m:oMath>
                 </a14:m>
               </a:p>
@@ -10163,40 +10215,42 @@
                     <m:r>
                       <m:t>V</m:t>
                     </m:r>
-                    <m:d>
-                      <m:dPr>
-                        <m:begChr m:val="("/>
-                        <m:sepChr m:val=""/>
-                        <m:endChr m:val=")"/>
-                        <m:grow/>
-                      </m:dPr>
+                    <m:r>
+                      <m:rPr>
+                        <m:sty m:val="p"/>
+                      </m:rPr>
+                      <m:t>(</m:t>
+                    </m:r>
+                    <m:r>
+                      <m:t>a</m:t>
+                    </m:r>
+                    <m:r>
+                      <m:rPr>
+                        <m:sty m:val="p"/>
+                      </m:rPr>
+                      <m:t>,</m:t>
+                    </m:r>
+                    <m:sSub>
                       <m:e>
                         <m:r>
-                          <m:t>a</m:t>
+                          <m:rPr>
+                            <m:sty m:val="b"/>
+                          </m:rPr>
+                          <m:t>s</m:t>
                         </m:r>
+                      </m:e>
+                      <m:sub>
                         <m:r>
-                          <m:rPr>
-                            <m:sty m:val="p"/>
-                          </m:rPr>
-                          <m:t>,</m:t>
+                          <m:t>i</m:t>
                         </m:r>
-                        <m:sSub>
-                          <m:e>
-                            <m:r>
-                              <m:rPr>
-                                <m:sty m:val="b"/>
-                              </m:rPr>
-                              <m:t>s</m:t>
-                            </m:r>
-                          </m:e>
-                          <m:sub>
-                            <m:r>
-                              <m:t>i</m:t>
-                            </m:r>
-                          </m:sub>
-                        </m:sSub>
-                      </m:e>
-                    </m:d>
+                      </m:sub>
+                    </m:sSub>
+                    <m:r>
+                      <m:rPr>
+                        <m:sty m:val="p"/>
+                      </m:rPr>
+                      <m:t>)</m:t>
+                    </m:r>
                   </m:oMath>
                 </a14:m>
                 <a:r>
@@ -10221,57 +10275,61 @@
                       <m:e>
                         <m:r>
                           <m:rPr>
+                            <m:scr m:val="double-struck"/>
                             <m:sty m:val="p"/>
-                            <m:scr m:val="double-struck"/>
                           </m:rPr>
                           <m:t>E</m:t>
                         </m:r>
                       </m:e>
                     </m:acc>
-                    <m:d>
-                      <m:dPr>
-                        <m:begChr m:val="["/>
-                        <m:sepChr m:val=""/>
-                        <m:endChr m:val="]"/>
-                        <m:grow/>
-                      </m:dPr>
-                      <m:e>
-                        <m:r>
-                          <m:t>N</m:t>
-                        </m:r>
-                        <m:r>
-                          <m:t>P</m:t>
-                        </m:r>
-                        <m:r>
-                          <m:t>V</m:t>
-                        </m:r>
-                        <m:d>
-                          <m:dPr>
-                            <m:begChr m:val="("/>
-                            <m:sepChr m:val=""/>
-                            <m:endChr m:val=")"/>
-                            <m:grow/>
-                          </m:dPr>
-                          <m:e>
-                            <m:r>
-                              <m:t>a</m:t>
-                            </m:r>
-                            <m:r>
-                              <m:rPr>
-                                <m:sty m:val="p"/>
-                              </m:rPr>
-                              <m:t>,</m:t>
-                            </m:r>
-                            <m:r>
-                              <m:rPr>
-                                <m:sty m:val="b"/>
-                              </m:rPr>
-                              <m:t>s</m:t>
-                            </m:r>
-                          </m:e>
-                        </m:d>
-                      </m:e>
-                    </m:d>
+                    <m:r>
+                      <m:rPr>
+                        <m:sty m:val="p"/>
+                      </m:rPr>
+                      <m:t>[</m:t>
+                    </m:r>
+                    <m:r>
+                      <m:t>N</m:t>
+                    </m:r>
+                    <m:r>
+                      <m:t>P</m:t>
+                    </m:r>
+                    <m:r>
+                      <m:t>V</m:t>
+                    </m:r>
+                    <m:r>
+                      <m:rPr>
+                        <m:sty m:val="p"/>
+                      </m:rPr>
+                      <m:t>(</m:t>
+                    </m:r>
+                    <m:r>
+                      <m:t>a</m:t>
+                    </m:r>
+                    <m:r>
+                      <m:rPr>
+                        <m:sty m:val="p"/>
+                      </m:rPr>
+                      <m:t>,</m:t>
+                    </m:r>
+                    <m:r>
+                      <m:rPr>
+                        <m:sty m:val="b"/>
+                      </m:rPr>
+                      <m:t>s</m:t>
+                    </m:r>
+                    <m:r>
+                      <m:rPr>
+                        <m:sty m:val="p"/>
+                      </m:rPr>
+                      <m:t>)</m:t>
+                    </m:r>
+                    <m:r>
+                      <m:rPr>
+                        <m:sty m:val="p"/>
+                      </m:rPr>
+                      <m:t>]</m:t>
+                    </m:r>
                     <m:r>
                       <m:rPr>
                         <m:sty m:val="p"/>
@@ -10331,40 +10389,42 @@
                     <m:r>
                       <m:t>V</m:t>
                     </m:r>
-                    <m:d>
-                      <m:dPr>
-                        <m:begChr m:val="("/>
-                        <m:sepChr m:val=""/>
-                        <m:endChr m:val=")"/>
-                        <m:grow/>
-                      </m:dPr>
+                    <m:r>
+                      <m:rPr>
+                        <m:sty m:val="p"/>
+                      </m:rPr>
+                      <m:t>(</m:t>
+                    </m:r>
+                    <m:r>
+                      <m:t>a</m:t>
+                    </m:r>
+                    <m:r>
+                      <m:rPr>
+                        <m:sty m:val="p"/>
+                      </m:rPr>
+                      <m:t>,</m:t>
+                    </m:r>
+                    <m:sSub>
                       <m:e>
                         <m:r>
-                          <m:t>a</m:t>
+                          <m:rPr>
+                            <m:sty m:val="b"/>
+                          </m:rPr>
+                          <m:t>s</m:t>
                         </m:r>
+                      </m:e>
+                      <m:sub>
                         <m:r>
-                          <m:rPr>
-                            <m:sty m:val="p"/>
-                          </m:rPr>
-                          <m:t>,</m:t>
+                          <m:t>i</m:t>
                         </m:r>
-                        <m:sSub>
-                          <m:e>
-                            <m:r>
-                              <m:rPr>
-                                <m:sty m:val="b"/>
-                              </m:rPr>
-                              <m:t>s</m:t>
-                            </m:r>
-                          </m:e>
-                          <m:sub>
-                            <m:r>
-                              <m:t>i</m:t>
-                            </m:r>
-                          </m:sub>
-                        </m:sSub>
-                      </m:e>
-                    </m:d>
+                      </m:sub>
+                    </m:sSub>
+                    <m:r>
+                      <m:rPr>
+                        <m:sty m:val="p"/>
+                      </m:rPr>
+                      <m:t>)</m:t>
+                    </m:r>
                   </m:oMath>
                 </a14:m>
               </a:p>
@@ -10389,8 +10449,8 @@
                     </m:r>
                     <m:r>
                       <m:rPr>
+                        <m:scr m:val="script"/>
                         <m:sty m:val="p"/>
-                        <m:scr m:val="script"/>
                       </m:rPr>
                       <m:t>A</m:t>
                     </m:r>
@@ -10421,8 +10481,8 @@
                   <m:oMath xmlns:m="http://schemas.openxmlformats.org/officeDocument/2006/math">
                     <m:r>
                       <m:rPr>
+                        <m:scr m:val="script"/>
                         <m:sty m:val="p"/>
-                        <m:scr m:val="script"/>
                       </m:rPr>
                       <m:t>A</m:t>
                     </m:r>
@@ -10455,31 +10515,33 @@
                         </m:r>
                       </m:sub>
                     </m:sSub>
-                    <m:d>
-                      <m:dPr>
-                        <m:begChr m:val="("/>
-                        <m:sepChr m:val=""/>
-                        <m:endChr m:val=")"/>
-                        <m:grow/>
-                      </m:dPr>
-                      <m:e>
-                        <m:r>
-                          <m:t>a</m:t>
-                        </m:r>
-                        <m:r>
-                          <m:rPr>
-                            <m:sty m:val="p"/>
-                          </m:rPr>
-                          <m:t>,</m:t>
-                        </m:r>
-                        <m:r>
-                          <m:rPr>
-                            <m:sty m:val="b"/>
-                          </m:rPr>
-                          <m:t>s</m:t>
-                        </m:r>
-                      </m:e>
-                    </m:d>
+                    <m:r>
+                      <m:rPr>
+                        <m:sty m:val="p"/>
+                      </m:rPr>
+                      <m:t>(</m:t>
+                    </m:r>
+                    <m:r>
+                      <m:t>a</m:t>
+                    </m:r>
+                    <m:r>
+                      <m:rPr>
+                        <m:sty m:val="p"/>
+                      </m:rPr>
+                      <m:t>,</m:t>
+                    </m:r>
+                    <m:r>
+                      <m:rPr>
+                        <m:sty m:val="b"/>
+                      </m:rPr>
+                      <m:t>s</m:t>
+                    </m:r>
+                    <m:r>
+                      <m:rPr>
+                        <m:sty m:val="p"/>
+                      </m:rPr>
+                      <m:t>)</m:t>
+                    </m:r>
                   </m:oMath>
                 </a14:m>
                 <a:r>
@@ -10500,31 +10562,33 @@
                         </m:r>
                       </m:sub>
                     </m:sSub>
-                    <m:d>
-                      <m:dPr>
-                        <m:begChr m:val="("/>
-                        <m:sepChr m:val=""/>
-                        <m:endChr m:val=")"/>
-                        <m:grow/>
-                      </m:dPr>
-                      <m:e>
-                        <m:r>
-                          <m:t>a</m:t>
-                        </m:r>
-                        <m:r>
-                          <m:rPr>
-                            <m:sty m:val="p"/>
-                          </m:rPr>
-                          <m:t>,</m:t>
-                        </m:r>
-                        <m:r>
-                          <m:rPr>
-                            <m:sty m:val="b"/>
-                          </m:rPr>
-                          <m:t>s</m:t>
-                        </m:r>
-                      </m:e>
-                    </m:d>
+                    <m:r>
+                      <m:rPr>
+                        <m:sty m:val="p"/>
+                      </m:rPr>
+                      <m:t>(</m:t>
+                    </m:r>
+                    <m:r>
+                      <m:t>a</m:t>
+                    </m:r>
+                    <m:r>
+                      <m:rPr>
+                        <m:sty m:val="p"/>
+                      </m:rPr>
+                      <m:t>,</m:t>
+                    </m:r>
+                    <m:r>
+                      <m:rPr>
+                        <m:sty m:val="b"/>
+                      </m:rPr>
+                      <m:t>s</m:t>
+                    </m:r>
+                    <m:r>
+                      <m:rPr>
+                        <m:sty m:val="p"/>
+                      </m:rPr>
+                      <m:t>)</m:t>
+                    </m:r>
                   </m:oMath>
                 </a14:m>
               </a:p>
@@ -10557,22 +10621,24 @@
                     <m:r>
                       <m:t>p</m:t>
                     </m:r>
-                    <m:d>
-                      <m:dPr>
-                        <m:begChr m:val="("/>
-                        <m:sepChr m:val=""/>
-                        <m:endChr m:val=")"/>
-                        <m:grow/>
-                      </m:dPr>
-                      <m:e>
-                        <m:r>
-                          <m:rPr>
-                            <m:sty m:val="b"/>
-                          </m:rPr>
-                          <m:t>s</m:t>
-                        </m:r>
-                      </m:e>
-                    </m:d>
+                    <m:r>
+                      <m:rPr>
+                        <m:sty m:val="p"/>
+                      </m:rPr>
+                      <m:t>(</m:t>
+                    </m:r>
+                    <m:r>
+                      <m:rPr>
+                        <m:sty m:val="b"/>
+                      </m:rPr>
+                      <m:t>s</m:t>
+                    </m:r>
+                    <m:r>
+                      <m:rPr>
+                        <m:sty m:val="p"/>
+                      </m:rPr>
+                      <m:t>)</m:t>
+                    </m:r>
                   </m:oMath>
                 </a14:m>
                 <a:r>
@@ -10637,55 +10703,59 @@
                     </m:r>
                     <m:r>
                       <m:rPr>
+                        <m:scr m:val="double-struck"/>
                         <m:sty m:val="p"/>
-                        <m:scr m:val="double-struck"/>
                       </m:rPr>
                       <m:t>E</m:t>
                     </m:r>
-                    <m:d>
-                      <m:dPr>
-                        <m:begChr m:val="["/>
-                        <m:sepChr m:val=""/>
-                        <m:endChr m:val="]"/>
-                        <m:grow/>
-                      </m:dPr>
-                      <m:e>
-                        <m:r>
-                          <m:t>N</m:t>
-                        </m:r>
-                        <m:r>
-                          <m:t>P</m:t>
-                        </m:r>
-                        <m:r>
-                          <m:t>V</m:t>
-                        </m:r>
-                        <m:d>
-                          <m:dPr>
-                            <m:begChr m:val="("/>
-                            <m:sepChr m:val=""/>
-                            <m:endChr m:val=")"/>
-                            <m:grow/>
-                          </m:dPr>
-                          <m:e>
-                            <m:r>
-                              <m:t>a</m:t>
-                            </m:r>
-                            <m:r>
-                              <m:rPr>
-                                <m:sty m:val="p"/>
-                              </m:rPr>
-                              <m:t>,</m:t>
-                            </m:r>
-                            <m:r>
-                              <m:rPr>
-                                <m:sty m:val="b"/>
-                              </m:rPr>
-                              <m:t>s</m:t>
-                            </m:r>
-                          </m:e>
-                        </m:d>
-                      </m:e>
-                    </m:d>
+                    <m:r>
+                      <m:rPr>
+                        <m:sty m:val="p"/>
+                      </m:rPr>
+                      <m:t>[</m:t>
+                    </m:r>
+                    <m:r>
+                      <m:t>N</m:t>
+                    </m:r>
+                    <m:r>
+                      <m:t>P</m:t>
+                    </m:r>
+                    <m:r>
+                      <m:t>V</m:t>
+                    </m:r>
+                    <m:r>
+                      <m:rPr>
+                        <m:sty m:val="p"/>
+                      </m:rPr>
+                      <m:t>(</m:t>
+                    </m:r>
+                    <m:r>
+                      <m:t>a</m:t>
+                    </m:r>
+                    <m:r>
+                      <m:rPr>
+                        <m:sty m:val="p"/>
+                      </m:rPr>
+                      <m:t>,</m:t>
+                    </m:r>
+                    <m:r>
+                      <m:rPr>
+                        <m:sty m:val="b"/>
+                      </m:rPr>
+                      <m:t>s</m:t>
+                    </m:r>
+                    <m:r>
+                      <m:rPr>
+                        <m:sty m:val="p"/>
+                      </m:rPr>
+                      <m:t>)</m:t>
+                    </m:r>
+                    <m:r>
+                      <m:rPr>
+                        <m:sty m:val="p"/>
+                      </m:rPr>
+                      <m:t>]</m:t>
+                    </m:r>
                   </m:oMath>
                 </a14:m>
               </a:p>
@@ -11469,7 +11539,7 @@
 <file path=ppt/slides/slide6.xml><?xml version="1.0" encoding="UTF-8"?><p:sld xmlns:a="http://schemas.openxmlformats.org/drawingml/2006/main" xmlns:r="http://schemas.openxmlformats.org/officeDocument/2006/relationships" xmlns:p="http://schemas.openxmlformats.org/presentationml/2006/main"><p:cSld><p:spTree><p:nvGrpSpPr><p:cNvPr id="1" name="" /><p:cNvGrpSpPr /><p:nvPr /></p:nvGrpSpPr><p:grpSpPr><a:xfrm><a:off x="0" y="0" /><a:ext cx="0" cy="0" /><a:chOff x="0" y="0" /><a:chExt cx="0" cy="0" /></a:xfrm></p:grpSpPr><p:sp><p:nvSpPr><p:cNvPr id="2" name="Title 1" /><p:cNvSpPr><a:spLocks noGrp="1" /></p:cNvSpPr><p:nvPr><p:ph type="title" /></p:nvPr></p:nvSpPr><p:spPr><a:xfrm><a:off x="457201" y="204787" /><a:ext cx="3008313" cy="871538" /></a:xfrm></p:spPr><p:txBody><a:bodyPr /><a:lstStyle /><a:p><a:pPr lvl="0" indent="0" marL="0"><a:buNone /></a:pPr><a:r><a:rPr /><a:t>Worked Example: House Elevation</a:t></a:r></a:p></p:txBody></p:sp><mc:AlternateContent xmlns:mc="http://schemas.openxmlformats.org/markup-compatibility/2006"><mc:Choice xmlns:a14="http://schemas.microsoft.com/office/drawing/2010/main" Requires="a14"><p:sp><p:nvSpPr><p:cNvPr id="4" name="Text Placeholder 3" /><p:cNvSpPr><a:spLocks noGrp="1" /></p:cNvSpPr><p:nvPr><p:ph idx="2" sz="half" type="body" /></p:nvPr></p:nvSpPr><p:spPr /><p:txBody><a:bodyPr /><a:lstStyle /><a:p><a:pPr lvl="0" indent="0" marL="0"><a:spcBef><a:spcPts val="3000" /></a:spcBef><a:buNone /></a:pPr><a:r><a:rPr b="1" /><a:t>Setting Up the Problem</a:t></a:r></a:p><a:p><a:pPr lvl="0" indent="0" marL="0"><a:buNone /></a:pPr><a:r><a:rPr /><a:t>Return to our Meyerland homeowner. Two actions: </a:t></a:r><a:r><a:rPr b="1" /><a:t>do nothing</a:t></a:r><a:r><a:rPr /><a:t> (</a:t></a:r><a14:m><m:oMath xmlns:m="http://schemas.openxmlformats.org/officeDocument/2006/math"><m:sSub><m:e><m:r><m:t>a</m:t></m:r></m:e><m:sub><m:r><m:t>0</m:t></m:r></m:sub></m:sSub></m:oMath></a14:m><a:r><a:rPr /><a:t>) or </a:t></a:r><a:r><a:rPr b="1" /><a:t>elevate 5 ft</a:t></a:r><a:r><a:rPr /><a:t> (</a:t></a:r><a14:m><m:oMath xmlns:m="http://schemas.openxmlformats.org/officeDocument/2006/math"><m:sSub><m:e><m:r><m:t>a</m:t></m:r></m:e><m:sub><m:r><m:t>1</m:t></m:r></m:sub></m:sSub></m:oMath></a14:m><a:r><a:rPr /><a:t>).</a:t></a:r></a:p></p:txBody></p:sp></mc:Choice></mc:AlternateContent><p:graphicFrame><p:nvGraphicFramePr><p:cNvPr id="6" name="Content Placeholder 5" /><p:cNvGraphicFramePr><a:graphicFrameLocks noGrp="1" /></p:cNvGraphicFramePr><p:nvPr><p:ph idx="1" /></p:nvPr></p:nvGraphicFramePr><p:xfrm><a:off x="3568700" y="203200" /><a:ext cx="5105400" cy="4381500" /></p:xfrm><a:graphic><a:graphicData uri="http://schemas.openxmlformats.org/drawingml/2006/table"><a:tbl><a:tblPr firstRow="1" bandRow="1"><a:tableStyleId>{5C22544A-7EE6-4342-B048-85BDC9FD1C3A}</a:tableStyleId></a:tblPr><a:tblGrid><a:gridCol w="1701800" /><a:gridCol w="1701800" /><a:gridCol w="1701800" /></a:tblGrid><a:tr h="0"><a:tc><a:txBody><a:bodyPr /><a:lstStyle /><a:p><a:endParaRPr /></a:p></a:txBody><a:tcPr /></a:tc><a:tc><a:txBody><a:bodyPr /><a:lstStyle /><a:p><a:pPr lvl="0" indent="0" marL="0" algn="ctr"><a:buNone /></a:pPr><a:r><a:rPr /><a:t>Do Nothing (</a:t></a:r><a14:m><m:oMath xmlns:m="http://schemas.openxmlformats.org/officeDocument/2006/math"><m:sSub><m:e><m:r><m:t>a</m:t></m:r></m:e><m:sub><m:r><m:t>0</m:t></m:r></m:sub></m:sSub></m:oMath></a14:m><a:r><a:rPr /><a:t>)</a:t></a:r></a:p></a:txBody><a:tcPr /></a:tc><a:tc><a:txBody><a:bodyPr /><a:lstStyle /><a:p><a:pPr lvl="0" indent="0" marL="0" algn="ctr"><a:buNone /></a:pPr><a:r><a:rPr /><a:t>Elevate 5 ft (</a:t></a:r><a14:m><m:oMath xmlns:m="http://schemas.openxmlformats.org/officeDocument/2006/math"><m:sSub><m:e><m:r><m:t>a</m:t></m:r></m:e><m:sub><m:r><m:t>1</m:t></m:r></m:sub></m:sSub></m:oMath></a14:m><a:r><a:rPr /><a:t>)</a:t></a:r></a:p></a:txBody><a:tcPr /></a:tc></a:tr><a:tr h="0"><a:tc><a:txBody><a:bodyPr /><a:lstStyle /><a:p><a:pPr lvl="0" indent="0" marL="0" algn="l"><a:buNone /></a:pPr><a:r><a:rPr /><a:t>Up-front cost</a:t></a:r></a:p></a:txBody></a:tc><a:tc><a:txBody><a:bodyPr /><a:lstStyle /><a:p><a:pPr lvl="0" indent="0" marL="0" algn="ctr"><a:buNone /></a:pPr><a:r><a:rPr /><a:t>$0</a:t></a:r></a:p></a:txBody></a:tc><a:tc><a:txBody><a:bodyPr /><a:lstStyle /><a:p><a:pPr lvl="0" indent="0" marL="0" algn="ctr"><a:buNone /></a:pPr><a:r><a:rPr /><a:t>$80,000</a:t></a:r></a:p></a:txBody></a:tc></a:tr><a:tr h="0"><a:tc><a:txBody><a:bodyPr /><a:lstStyle /><a:p><a:pPr lvl="0" indent="0" marL="0" algn="l"><a:buNone /></a:pPr><a:r><a:rPr /><a:t>Annual flood probability</a:t></a:r></a:p></a:txBody></a:tc><a:tc><a:txBody><a:bodyPr /><a:lstStyle /><a:p><a:pPr lvl="0" indent="0" marL="0" algn="ctr"><a:buNone /></a:pPr><a:r><a:rPr /><a:t>5%</a:t></a:r></a:p></a:txBody></a:tc><a:tc><a:txBody><a:bodyPr /><a:lstStyle /><a:p><a:pPr lvl="0" indent="0" marL="0" algn="ctr"><a:buNone /></a:pPr><a:r><a:rPr /><a:t>0.5%</a:t></a:r></a:p></a:txBody></a:tc></a:tr><a:tr h="0"><a:tc><a:txBody><a:bodyPr /><a:lstStyle /><a:p><a:pPr lvl="0" indent="0" marL="0" algn="l"><a:buNone /></a:pPr><a:r><a:rPr /><a:t>Expected damage per flood</a:t></a:r></a:p></a:txBody></a:tc><a:tc><a:txBody><a:bodyPr /><a:lstStyle /><a:p><a:pPr lvl="0" indent="0" marL="0" algn="ctr"><a:buNone /></a:pPr><a:r><a:rPr /><a:t>$50,000</a:t></a:r></a:p></a:txBody></a:tc><a:tc><a:txBody><a:bodyPr /><a:lstStyle /><a:p><a:pPr lvl="0" indent="0" marL="0" algn="ctr"><a:buNone /></a:pPr><a:r><a:rPr /><a:t>$5,000</a:t></a:r></a:p></a:txBody></a:tc></a:tr><a:tr h="0"><a:tc><a:txBody><a:bodyPr /><a:lstStyle /><a:p><a:pPr lvl="0" indent="0" marL="0" algn="l"><a:buNone /></a:pPr><a:r><a:rPr b="1" /><a:t>Expected annual damage</a:t></a:r></a:p></a:txBody></a:tc><a:tc><a:txBody><a:bodyPr /><a:lstStyle /><a:p><a:pPr lvl="0" indent="0" marL="0" algn="ctr"><a:buNone /></a:pPr><a:r><a:rPr b="1" /><a:t>$2,500</a:t></a:r></a:p></a:txBody></a:tc><a:tc><a:txBody><a:bodyPr /><a:lstStyle /><a:p><a:pPr lvl="0" indent="0" marL="0" algn="ctr"><a:buNone /></a:pPr><a:r><a:rPr b="1" /><a:t>$25</a:t></a:r></a:p></a:txBody></a:tc></a:tr></a:tbl></a:graphicData></a:graphic></p:graphicFrame></p:spTree></p:cSld></p:sld>
 </file>
 
-<file path=ppt/slides/slide7.xml><?xml version="1.0" encoding="UTF-8"?><p:sld xmlns:a="http://schemas.openxmlformats.org/drawingml/2006/main" xmlns:r="http://schemas.openxmlformats.org/officeDocument/2006/relationships" xmlns:p="http://schemas.openxmlformats.org/presentationml/2006/main"><p:cSld><p:spTree><p:nvGrpSpPr><p:cNvPr id="1" name="" /><p:cNvGrpSpPr /><p:nvPr /></p:nvGrpSpPr><p:grpSpPr><a:xfrm><a:off x="0" y="0" /><a:ext cx="0" cy="0" /><a:chOff x="0" y="0" /><a:chExt cx="0" cy="0" /></a:xfrm></p:grpSpPr><mc:AlternateContent xmlns:mc="http://schemas.openxmlformats.org/markup-compatibility/2006"><mc:Choice xmlns:a14="http://schemas.microsoft.com/office/drawing/2010/main" Requires="a14"><p:sp><p:nvSpPr><p:cNvPr id="4" name="Text Placeholder 3" /><p:cNvSpPr><a:spLocks noGrp="1" /></p:cNvSpPr><p:nvPr><p:ph idx="2" sz="half" type="body" /></p:nvPr></p:nvSpPr><p:spPr /><p:txBody><a:bodyPr /><a:lstStyle /><a:p><a:pPr lvl="0" indent="0" marL="0"><a:spcBef><a:spcPts val="3000" /></a:spcBef><a:buNone /></a:pPr><a:r><a:rPr b="1" /><a:t>Computing NPV</a:t></a:r></a:p><a:p><a:pPr lvl="0" indent="0" marL="0"><a:buNone /></a:pPr><a:r><a:rPr /><a:t>Annual benefit of elevation: </a:t></a:r><a14:m><m:oMath xmlns:m="http://schemas.openxmlformats.org/officeDocument/2006/math"><m:r><m:rPr><m:sty m:val="p" /></m:rPr><m:t>$</m:t></m:r><m:r><m:t>2</m:t></m:r><m:r><m:rPr><m:sty m:val="p" /></m:rPr><m:t>,</m:t></m:r><m:r><m:t>500</m:t></m:r><m:r><m:rPr><m:sty m:val="p" /></m:rPr><m:t>−</m:t></m:r><m:r><m:rPr><m:sty m:val="p" /></m:rPr><m:t>$</m:t></m:r><m:r><m:t>25</m:t></m:r><m:r><m:rPr><m:sty m:val="p" /></m:rPr><m:t>=</m:t></m:r><m:r><m:rPr><m:sty m:val="p" /></m:rPr><m:t>$</m:t></m:r><m:r><m:t>2</m:t></m:r><m:r><m:rPr><m:sty m:val="p" /></m:rPr><m:t>,</m:t></m:r><m:r><m:t>475</m:t></m:r></m:oMath></a14:m><a:r><a:rPr /><a:t> per year in avoided damages.</a:t></a:r></a:p><a:p><a:pPr lvl="0" indent="0" marL="0"><a:buNone /></a:pPr><a:r><a:rPr /><a:t>Over </a:t></a:r><a14:m><m:oMath xmlns:m="http://schemas.openxmlformats.org/officeDocument/2006/math"><m:r><m:t>T</m:t></m:r><m:r><m:rPr><m:sty m:val="p" /></m:rPr><m:t>=</m:t></m:r><m:r><m:t>30</m:t></m:r></m:oMath></a14:m><a:r><a:rPr /><a:t> years at discount rate </a:t></a:r><a14:m><m:oMath xmlns:m="http://schemas.openxmlformats.org/officeDocument/2006/math"><m:r><m:t>r</m:t></m:r></m:oMath></a14:m><a:r><a:rPr /><a:t>:</a:t></a:r></a:p><a:p><a:pPr lvl="0" indent="0" marL="0"><a:buNone /></a:pPr><a14:m><m:oMathPara xmlns:m="http://schemas.openxmlformats.org/officeDocument/2006/math"><m:oMathParaPr><m:jc m:val="center" /></m:oMathParaPr><m:oMath><m:r><m:t>N</m:t></m:r><m:r><m:t>P</m:t></m:r><m:r><m:t>V</m:t></m:r><m:r><m:rPr><m:sty m:val="p" /></m:rPr><m:t>=</m:t></m:r><m:r><m:rPr><m:sty m:val="p" /></m:rPr><m:t>−</m:t></m:r><m:r><m:rPr><m:sty m:val="p" /></m:rPr><m:t>$</m:t></m:r><m:r><m:t>80</m:t></m:r><m:r><m:rPr><m:sty m:val="p" /></m:rPr><m:t>,</m:t></m:r><m:r><m:t>000</m:t></m:r><m:r><m:rPr><m:sty m:val="p" /></m:rPr><m:t>+</m:t></m:r><m:nary><m:naryPr><m:chr m:val="∑" /><m:limLoc m:val="undOvr" /><m:subHide m:val="off" /><m:supHide m:val="off" /></m:naryPr><m:sub><m:r><m:t>t</m:t></m:r><m:r><m:rPr><m:sty m:val="p" /></m:rPr><m:t>=</m:t></m:r><m:r><m:t>1</m:t></m:r></m:sub><m:sup><m:r><m:t>30</m:t></m:r></m:sup><m:e><m:f><m:fPr><m:type m:val="bar" /></m:fPr><m:num><m:r><m:rPr><m:sty m:val="p" /></m:rPr><m:t>$</m:t></m:r><m:r><m:t>2</m:t></m:r><m:r><m:rPr><m:sty m:val="p" /></m:rPr><m:t>,</m:t></m:r><m:r><m:t>475</m:t></m:r></m:num><m:den><m:sSup><m:e><m:d><m:dPr><m:begChr m:val="(" /><m:sepChr m:val="" /><m:endChr m:val=")" /><m:grow /></m:dPr><m:e><m:r><m:t>1</m:t></m:r><m:r><m:rPr><m:sty m:val="p" /></m:rPr><m:t>+</m:t></m:r><m:r><m:t>r</m:t></m:r></m:e></m:d></m:e><m:sup><m:r><m:t>t</m:t></m:r></m:sup></m:sSup></m:den></m:f></m:e></m:nary></m:oMath></m:oMathPara></a14:m></a:p><a:p><a:pPr lvl="0" indent="0" marL="0"><a:buNone /></a:pPr><a:r><a:rPr /><a:t>At these numbers, elevation doesn’t pass BCA at </a:t></a:r><a:r><a:rPr i="1" /><a:t>any</a:t></a:r><a:r><a:rPr /><a:t> discount rate. What would need to change?</a:t></a:r></a:p><a:p><a:pPr lvl="0" indent="0" marL="0"><a:spcBef><a:spcPts val="3000" /></a:spcBef><a:buNone /></a:pPr><a:r><a:rPr b="1" /><a:t>Sensitivity: What If Flood Risk Is Higher?</a:t></a:r></a:p><a:p><a:pPr lvl="0" indent="0" marL="0"><a:buNone /></a:pPr><a:r><a:rPr /><a:t>Suppose climate change increases annual flood probability to </a:t></a:r><a:r><a:rPr b="1" /><a:t>10%</a:t></a:r><a:r><a:rPr /><a:t> (EAD: $5,000/yr, benefit: $4,975/yr):</a:t></a:r></a:p></p:txBody></p:sp></mc:Choice></mc:AlternateContent><p:graphicFrame><p:nvGraphicFramePr><p:cNvPr id="6" name="Content Placeholder 5" /><p:cNvGraphicFramePr><a:graphicFrameLocks noGrp="1" /></p:cNvGraphicFramePr><p:nvPr><p:ph idx="1" /></p:nvPr></p:nvGraphicFramePr><p:xfrm><a:off x="3568700" y="203200" /><a:ext cx="5105400" cy="4381500" /></p:xfrm><a:graphic><a:graphicData uri="http://schemas.openxmlformats.org/drawingml/2006/table"><a:tbl><a:tblPr firstRow="1" bandRow="1"><a:tableStyleId>{5C22544A-7EE6-4342-B048-85BDC9FD1C3A}</a:tableStyleId></a:tblPr><a:tblGrid><a:gridCol w="1270000" /><a:gridCol w="1270000" /><a:gridCol w="1270000" /><a:gridCol w="1270000" /></a:tblGrid><a:tr h="0"><a:tc><a:txBody><a:bodyPr /><a:lstStyle /><a:p><a:pPr lvl="0" indent="0" marL="0" algn="ctr"><a:buNone /></a:pPr><a:r><a:rPr /><a:t>Discount rate </a:t></a:r><a14:m><m:oMath xmlns:m="http://schemas.openxmlformats.org/officeDocument/2006/math"><m:r><m:t>r</m:t></m:r></m:oMath></a14:m></a:p></a:txBody><a:tcPr /></a:tc><a:tc><a:txBody><a:bodyPr /><a:lstStyle /><a:p><a:pPr lvl="0" indent="0" marL="0" algn="ctr"><a:buNone /></a:pPr><a:r><a:rPr /><a:t>PV of benefits</a:t></a:r></a:p></a:txBody><a:tcPr /></a:tc><a:tc><a:txBody><a:bodyPr /><a:lstStyle /><a:p><a:pPr lvl="0" indent="0" marL="0" algn="ctr"><a:buNone /></a:pPr><a:r><a:rPr /><a:t>NPV</a:t></a:r></a:p></a:txBody><a:tcPr /></a:tc><a:tc><a:txBody><a:bodyPr /><a:lstStyle /><a:p><a:pPr lvl="0" indent="0" marL="0" algn="ctr"><a:buNone /></a:pPr><a:r><a:rPr /><a:t>Pass?</a:t></a:r></a:p></a:txBody><a:tcPr /></a:tc></a:tr><a:tr h="0"><a:tc><a:txBody><a:bodyPr /><a:lstStyle /><a:p><a:pPr lvl="0" indent="0" marL="0" algn="ctr"><a:buNone /></a:pPr><a:r><a:rPr /><a:t>2%</a:t></a:r></a:p></a:txBody></a:tc><a:tc><a:txBody><a:bodyPr /><a:lstStyle /><a:p><a:pPr lvl="0" indent="0" marL="0" algn="ctr"><a:buNone /></a:pPr><a:r><a:rPr /><a:t>$111,500</a:t></a:r></a:p></a:txBody></a:tc><a:tc><a:txBody><a:bodyPr /><a:lstStyle /><a:p><a:pPr lvl="0" indent="0" marL="0" algn="ctr"><a:buNone /></a:pPr><a:r><a:rPr b="1" /><a:t>+$31,500</a:t></a:r></a:p></a:txBody></a:tc><a:tc><a:txBody><a:bodyPr /><a:lstStyle /><a:p><a:pPr lvl="0" indent="0" marL="0" algn="ctr"><a:buNone /></a:pPr><a:r><a:rPr /><a:t>Yes</a:t></a:r></a:p></a:txBody></a:tc></a:tr><a:tr h="0"><a:tc><a:txBody><a:bodyPr /><a:lstStyle /><a:p><a:pPr lvl="0" indent="0" marL="0" algn="ctr"><a:buNone /></a:pPr><a:r><a:rPr /><a:t>5%</a:t></a:r></a:p></a:txBody></a:tc><a:tc><a:txBody><a:bodyPr /><a:lstStyle /><a:p><a:pPr lvl="0" indent="0" marL="0" algn="ctr"><a:buNone /></a:pPr><a:r><a:rPr /><a:t>$76,500</a:t></a:r></a:p></a:txBody></a:tc><a:tc><a:txBody><a:bodyPr /><a:lstStyle /><a:p><a:pPr lvl="0" indent="0" marL="0" algn="ctr"><a:buNone /></a:pPr><a:r><a:rPr b="1" /><a:t>-$3,500</a:t></a:r></a:p></a:txBody></a:tc><a:tc><a:txBody><a:bodyPr /><a:lstStyle /><a:p><a:pPr lvl="0" indent="0" marL="0" algn="ctr"><a:buNone /></a:pPr><a:r><a:rPr /><a:t>Barely no</a:t></a:r></a:p></a:txBody></a:tc></a:tr><a:tr h="0"><a:tc><a:txBody><a:bodyPr /><a:lstStyle /><a:p><a:pPr lvl="0" indent="0" marL="0" algn="ctr"><a:buNone /></a:pPr><a:r><a:rPr /><a:t>7%</a:t></a:r></a:p></a:txBody></a:tc><a:tc><a:txBody><a:bodyPr /><a:lstStyle /><a:p><a:pPr lvl="0" indent="0" marL="0" algn="ctr"><a:buNone /></a:pPr><a:r><a:rPr /><a:t>$61,700</a:t></a:r></a:p></a:txBody></a:tc><a:tc><a:txBody><a:bodyPr /><a:lstStyle /><a:p><a:pPr lvl="0" indent="0" marL="0" algn="ctr"><a:buNone /></a:pPr><a:r><a:rPr b="1" /><a:t>-$18,300</a:t></a:r></a:p></a:txBody></a:tc><a:tc><a:txBody><a:bodyPr /><a:lstStyle /><a:p><a:pPr lvl="0" indent="0" marL="0" algn="ctr"><a:buNone /></a:pPr><a:r><a:rPr /><a:t>No</a:t></a:r></a:p></a:txBody></a:tc></a:tr></a:tbl></a:graphicData></a:graphic></p:graphicFrame></p:spTree></p:cSld></p:sld>
+<file path=ppt/slides/slide7.xml><?xml version="1.0" encoding="UTF-8"?><p:sld xmlns:a="http://schemas.openxmlformats.org/drawingml/2006/main" xmlns:r="http://schemas.openxmlformats.org/officeDocument/2006/relationships" xmlns:p="http://schemas.openxmlformats.org/presentationml/2006/main"><p:cSld><p:spTree><p:nvGrpSpPr><p:cNvPr id="1" name="" /><p:cNvGrpSpPr /><p:nvPr /></p:nvGrpSpPr><p:grpSpPr><a:xfrm><a:off x="0" y="0" /><a:ext cx="0" cy="0" /><a:chOff x="0" y="0" /><a:chExt cx="0" cy="0" /></a:xfrm></p:grpSpPr><mc:AlternateContent xmlns:mc="http://schemas.openxmlformats.org/markup-compatibility/2006"><mc:Choice xmlns:a14="http://schemas.microsoft.com/office/drawing/2010/main" Requires="a14"><p:sp><p:nvSpPr><p:cNvPr id="4" name="Text Placeholder 3" /><p:cNvSpPr><a:spLocks noGrp="1" /></p:cNvSpPr><p:nvPr><p:ph idx="2" sz="half" type="body" /></p:nvPr></p:nvSpPr><p:spPr /><p:txBody><a:bodyPr /><a:lstStyle /><a:p><a:pPr lvl="0" indent="0" marL="0"><a:spcBef><a:spcPts val="3000" /></a:spcBef><a:buNone /></a:pPr><a:r><a:rPr b="1" /><a:t>Computing NPV</a:t></a:r></a:p><a:p><a:pPr lvl="0" indent="0" marL="0"><a:buNone /></a:pPr><a:r><a:rPr /><a:t>Annual benefit of elevation: </a:t></a:r><a14:m><m:oMath xmlns:m="http://schemas.openxmlformats.org/officeDocument/2006/math"><m:r><m:rPr><m:sty m:val="p" /></m:rPr><m:t>$</m:t></m:r><m:r><m:t>2</m:t></m:r><m:r><m:rPr><m:sty m:val="p" /></m:rPr><m:t>,</m:t></m:r><m:r><m:t>500</m:t></m:r><m:r><m:rPr><m:sty m:val="p" /></m:rPr><m:t>−</m:t></m:r><m:r><m:rPr><m:sty m:val="p" /></m:rPr><m:t>$</m:t></m:r><m:r><m:t>25</m:t></m:r><m:r><m:rPr><m:sty m:val="p" /></m:rPr><m:t>=</m:t></m:r><m:r><m:rPr><m:sty m:val="p" /></m:rPr><m:t>$</m:t></m:r><m:r><m:t>2</m:t></m:r><m:r><m:rPr><m:sty m:val="p" /></m:rPr><m:t>,</m:t></m:r><m:r><m:t>475</m:t></m:r></m:oMath></a14:m><a:r><a:rPr /><a:t> per year in avoided damages.</a:t></a:r></a:p><a:p><a:pPr lvl="0" indent="0" marL="0"><a:buNone /></a:pPr><a:r><a:rPr /><a:t>Over </a:t></a:r><a14:m><m:oMath xmlns:m="http://schemas.openxmlformats.org/officeDocument/2006/math"><m:r><m:t>T</m:t></m:r><m:r><m:rPr><m:sty m:val="p" /></m:rPr><m:t>=</m:t></m:r><m:r><m:t>30</m:t></m:r></m:oMath></a14:m><a:r><a:rPr /><a:t> years at discount rate </a:t></a:r><a14:m><m:oMath xmlns:m="http://schemas.openxmlformats.org/officeDocument/2006/math"><m:r><m:t>r</m:t></m:r></m:oMath></a14:m><a:r><a:rPr /><a:t>:</a:t></a:r></a:p><a:p><a:pPr lvl="0" indent="0" marL="0"><a:buNone /></a:pPr><a14:m><m:oMathPara xmlns:m="http://schemas.openxmlformats.org/officeDocument/2006/math"><m:oMathParaPr><m:jc m:val="center" /></m:oMathParaPr><m:oMath><m:r><m:t>N</m:t></m:r><m:r><m:t>P</m:t></m:r><m:r><m:t>V</m:t></m:r><m:r><m:rPr><m:sty m:val="p" /></m:rPr><m:t>=</m:t></m:r><m:r><m:rPr><m:sty m:val="p" /></m:rPr><m:t>−</m:t></m:r><m:r><m:rPr><m:sty m:val="p" /></m:rPr><m:t>$</m:t></m:r><m:r><m:t>80</m:t></m:r><m:r><m:rPr><m:sty m:val="p" /></m:rPr><m:t>,</m:t></m:r><m:r><m:t>000</m:t></m:r><m:r><m:rPr><m:sty m:val="p" /></m:rPr><m:t>+</m:t></m:r><m:nary><m:naryPr><m:chr m:val="∑" /><m:limLoc m:val="undOvr" /><m:subHide m:val="off" /><m:supHide m:val="off" /></m:naryPr><m:sub><m:r><m:t>t</m:t></m:r><m:r><m:rPr><m:sty m:val="p" /></m:rPr><m:t>=</m:t></m:r><m:r><m:t>1</m:t></m:r></m:sub><m:sup><m:r><m:t>30</m:t></m:r></m:sup><m:e><m:f><m:fPr><m:type m:val="bar" /></m:fPr><m:num><m:r><m:rPr><m:sty m:val="p" /></m:rPr><m:t>$</m:t></m:r><m:r><m:t>2</m:t></m:r><m:r><m:rPr><m:sty m:val="p" /></m:rPr><m:t>,</m:t></m:r><m:r><m:t>475</m:t></m:r></m:num><m:den><m:r><m:rPr><m:sty m:val="p" /></m:rPr><m:t>(</m:t></m:r><m:r><m:t>1</m:t></m:r><m:r><m:rPr><m:sty m:val="p" /></m:rPr><m:t>+</m:t></m:r><m:r><m:t>r</m:t></m:r><m:sSup><m:e><m:r><m:rPr><m:sty m:val="p" /></m:rPr><m:t>)</m:t></m:r></m:e><m:sup><m:r><m:t>t</m:t></m:r></m:sup></m:sSup></m:den></m:f></m:e></m:nary></m:oMath></m:oMathPara></a14:m></a:p><a:p><a:pPr lvl="0" indent="0" marL="0"><a:buNone /></a:pPr><a:r><a:rPr /><a:t>At these numbers, elevation doesn’t pass BCA at </a:t></a:r><a:r><a:rPr i="1" /><a:t>any</a:t></a:r><a:r><a:rPr /><a:t> discount rate. What would need to change?</a:t></a:r></a:p><a:p><a:pPr lvl="0" indent="0" marL="0"><a:spcBef><a:spcPts val="3000" /></a:spcBef><a:buNone /></a:pPr><a:r><a:rPr b="1" /><a:t>Sensitivity: What If Flood Risk Is Higher?</a:t></a:r></a:p><a:p><a:pPr lvl="0" indent="0" marL="0"><a:buNone /></a:pPr><a:r><a:rPr /><a:t>Suppose climate change increases annual flood probability to </a:t></a:r><a:r><a:rPr b="1" /><a:t>10%</a:t></a:r><a:r><a:rPr /><a:t> (EAD: $5,000/yr, benefit: $4,975/yr):</a:t></a:r></a:p></p:txBody></p:sp></mc:Choice></mc:AlternateContent><p:graphicFrame><p:nvGraphicFramePr><p:cNvPr id="6" name="Content Placeholder 5" /><p:cNvGraphicFramePr><a:graphicFrameLocks noGrp="1" /></p:cNvGraphicFramePr><p:nvPr><p:ph idx="1" /></p:nvPr></p:nvGraphicFramePr><p:xfrm><a:off x="3568700" y="203200" /><a:ext cx="5105400" cy="4381500" /></p:xfrm><a:graphic><a:graphicData uri="http://schemas.openxmlformats.org/drawingml/2006/table"><a:tbl><a:tblPr firstRow="1" bandRow="1"><a:tableStyleId>{5C22544A-7EE6-4342-B048-85BDC9FD1C3A}</a:tableStyleId></a:tblPr><a:tblGrid><a:gridCol w="1270000" /><a:gridCol w="1270000" /><a:gridCol w="1270000" /><a:gridCol w="1270000" /></a:tblGrid><a:tr h="0"><a:tc><a:txBody><a:bodyPr /><a:lstStyle /><a:p><a:pPr lvl="0" indent="0" marL="0" algn="ctr"><a:buNone /></a:pPr><a:r><a:rPr /><a:t>Discount rate </a:t></a:r><a14:m><m:oMath xmlns:m="http://schemas.openxmlformats.org/officeDocument/2006/math"><m:r><m:t>r</m:t></m:r></m:oMath></a14:m></a:p></a:txBody><a:tcPr /></a:tc><a:tc><a:txBody><a:bodyPr /><a:lstStyle /><a:p><a:pPr lvl="0" indent="0" marL="0" algn="ctr"><a:buNone /></a:pPr><a:r><a:rPr /><a:t>PV of benefits</a:t></a:r></a:p></a:txBody><a:tcPr /></a:tc><a:tc><a:txBody><a:bodyPr /><a:lstStyle /><a:p><a:pPr lvl="0" indent="0" marL="0" algn="ctr"><a:buNone /></a:pPr><a:r><a:rPr /><a:t>NPV</a:t></a:r></a:p></a:txBody><a:tcPr /></a:tc><a:tc><a:txBody><a:bodyPr /><a:lstStyle /><a:p><a:pPr lvl="0" indent="0" marL="0" algn="ctr"><a:buNone /></a:pPr><a:r><a:rPr /><a:t>Pass?</a:t></a:r></a:p></a:txBody><a:tcPr /></a:tc></a:tr><a:tr h="0"><a:tc><a:txBody><a:bodyPr /><a:lstStyle /><a:p><a:pPr lvl="0" indent="0" marL="0" algn="ctr"><a:buNone /></a:pPr><a:r><a:rPr /><a:t>2%</a:t></a:r></a:p></a:txBody></a:tc><a:tc><a:txBody><a:bodyPr /><a:lstStyle /><a:p><a:pPr lvl="0" indent="0" marL="0" algn="ctr"><a:buNone /></a:pPr><a:r><a:rPr /><a:t>$111,500</a:t></a:r></a:p></a:txBody></a:tc><a:tc><a:txBody><a:bodyPr /><a:lstStyle /><a:p><a:pPr lvl="0" indent="0" marL="0" algn="ctr"><a:buNone /></a:pPr><a:r><a:rPr b="1" /><a:t>+$31,500</a:t></a:r></a:p></a:txBody></a:tc><a:tc><a:txBody><a:bodyPr /><a:lstStyle /><a:p><a:pPr lvl="0" indent="0" marL="0" algn="ctr"><a:buNone /></a:pPr><a:r><a:rPr /><a:t>Yes</a:t></a:r></a:p></a:txBody></a:tc></a:tr><a:tr h="0"><a:tc><a:txBody><a:bodyPr /><a:lstStyle /><a:p><a:pPr lvl="0" indent="0" marL="0" algn="ctr"><a:buNone /></a:pPr><a:r><a:rPr /><a:t>5%</a:t></a:r></a:p></a:txBody></a:tc><a:tc><a:txBody><a:bodyPr /><a:lstStyle /><a:p><a:pPr lvl="0" indent="0" marL="0" algn="ctr"><a:buNone /></a:pPr><a:r><a:rPr /><a:t>$76,500</a:t></a:r></a:p></a:txBody></a:tc><a:tc><a:txBody><a:bodyPr /><a:lstStyle /><a:p><a:pPr lvl="0" indent="0" marL="0" algn="ctr"><a:buNone /></a:pPr><a:r><a:rPr b="1" /><a:t>-$3,500</a:t></a:r></a:p></a:txBody></a:tc><a:tc><a:txBody><a:bodyPr /><a:lstStyle /><a:p><a:pPr lvl="0" indent="0" marL="0" algn="ctr"><a:buNone /></a:pPr><a:r><a:rPr /><a:t>Barely no</a:t></a:r></a:p></a:txBody></a:tc></a:tr><a:tr h="0"><a:tc><a:txBody><a:bodyPr /><a:lstStyle /><a:p><a:pPr lvl="0" indent="0" marL="0" algn="ctr"><a:buNone /></a:pPr><a:r><a:rPr /><a:t>7%</a:t></a:r></a:p></a:txBody></a:tc><a:tc><a:txBody><a:bodyPr /><a:lstStyle /><a:p><a:pPr lvl="0" indent="0" marL="0" algn="ctr"><a:buNone /></a:pPr><a:r><a:rPr /><a:t>$61,700</a:t></a:r></a:p></a:txBody></a:tc><a:tc><a:txBody><a:bodyPr /><a:lstStyle /><a:p><a:pPr lvl="0" indent="0" marL="0" algn="ctr"><a:buNone /></a:pPr><a:r><a:rPr b="1" /><a:t>-$18,300</a:t></a:r></a:p></a:txBody></a:tc><a:tc><a:txBody><a:bodyPr /><a:lstStyle /><a:p><a:pPr lvl="0" indent="0" marL="0" algn="ctr"><a:buNone /></a:pPr><a:r><a:rPr /><a:t>No</a:t></a:r></a:p></a:txBody></a:tc></a:tr></a:tbl></a:graphicData></a:graphic></p:graphicFrame></p:spTree></p:cSld></p:sld>
 </file>
 
 <file path=ppt/slides/slide8.xml><?xml version="1.0" encoding="utf-8"?>

--- a/lectures/week-05/index.pptx
+++ b/lectures/week-05/index.pptx
@@ -7011,13 +7011,29 @@
                   <a:t>end</a:t>
                 </a:r>
               </a:p>
+              <a:p>
+                <a:pPr lvl="0" indent="0">
+                  <a:buNone/>
+                </a:pPr>
+                <a:r>
+                  <a:rPr>
+                    <a:latin typeface="Courier"/>
+                  </a:rPr>
+                  <a:t>Precompiling packages...
+  10232.9 ms  ✓ QuartoNotebookWorkerMakieExt (serial)
+  1 dependency successfully precompiled in 10 seconds
+Precompiling packages...
+  14396.8 ms  ✓ QuartoNotebookWorkerCairoMakieExt (serial)
+  1 dependency successfully precompiled in 14 seconds</a:t>
+                </a:r>
+              </a:p>
             </p:txBody>
           </p:sp>
         </mc:Choice>
       </mc:AlternateContent>
       <p:pic>
         <p:nvPicPr>
-          <p:cNvPr descr="index_files/figure-pptx/cell-2-output-1.png" id="0" name="Picture 1"/>
+          <p:cNvPr descr="index_files/figure-pptx/cell-2-output-2.png" id="0" name="Picture 1"/>
           <p:cNvPicPr>
             <a:picLocks noGrp="1" noChangeAspect="1"/>
           </p:cNvPicPr>

--- a/lectures/week-05/index.pptx
+++ b/lectures/week-05/index.pptx
@@ -7011,29 +7011,13 @@
                   <a:t>end</a:t>
                 </a:r>
               </a:p>
-              <a:p>
-                <a:pPr lvl="0" indent="0">
-                  <a:buNone/>
-                </a:pPr>
-                <a:r>
-                  <a:rPr>
-                    <a:latin typeface="Courier"/>
-                  </a:rPr>
-                  <a:t>Precompiling packages...
-  10232.9 ms  ✓ QuartoNotebookWorkerMakieExt (serial)
-  1 dependency successfully precompiled in 10 seconds
-Precompiling packages...
-  14396.8 ms  ✓ QuartoNotebookWorkerCairoMakieExt (serial)
-  1 dependency successfully precompiled in 14 seconds</a:t>
-                </a:r>
-              </a:p>
             </p:txBody>
           </p:sp>
         </mc:Choice>
       </mc:AlternateContent>
       <p:pic>
         <p:nvPicPr>
-          <p:cNvPr descr="index_files/figure-pptx/cell-2-output-2.png" id="0" name="Picture 1"/>
+          <p:cNvPr descr="index_files/figure-pptx/cell-2-output-1.png" id="0" name="Picture 1"/>
           <p:cNvPicPr>
             <a:picLocks noGrp="1" noChangeAspect="1"/>
           </p:cNvPicPr>
